--- a/docs/admin/医師別KPI解析_理事会プレゼン_2026-05-04.pptx
+++ b/docs/admin/医師別KPI解析_理事会プレゼン_2026-05-04.pptx
@@ -21,6 +21,9 @@
     <p:sldId id="269" r:id="rId20"/>
     <p:sldId id="270" r:id="rId21"/>
     <p:sldId id="271" r:id="rId22"/>
+    <p:sldId id="272" r:id="rId23"/>
+    <p:sldId id="273" r:id="rId24"/>
+    <p:sldId id="274" r:id="rId25"/>
   </p:sldIdLst>
   <p:sldSz cx="12191695" cy="6858000" type="screen4x3"/>
   <p:notesSz cx="6858000" cy="9144000"/>
@@ -3154,7 +3157,7 @@
         </p:nvSpPr>
         <p:spPr>
           <a:xfrm>
-            <a:off x="914400" y="1828800"/>
+            <a:off x="914400" y="1554480"/>
             <a:ext cx="10515600" cy="1097280"/>
           </a:xfrm>
           <a:prstGeom prst="rect">
@@ -3170,7 +3173,7 @@
           <a:p>
             <a:pPr algn="ctr"/>
             <a:r>
-              <a:rPr sz="4400" b="1">
+              <a:rPr sz="4200" b="1">
                 <a:solidFill>
                   <a:srgbClr val="1F2937"/>
                 </a:solidFill>
@@ -3189,8 +3192,8 @@
         </p:nvSpPr>
         <p:spPr>
           <a:xfrm>
-            <a:off x="914400" y="2926080"/>
-            <a:ext cx="10515600" cy="731520"/>
+            <a:off x="914400" y="2651760"/>
+            <a:ext cx="10515600" cy="640080"/>
           </a:xfrm>
           <a:prstGeom prst="rect">
             <a:avLst/>
@@ -3205,7 +3208,7 @@
           <a:p>
             <a:pPr algn="ctr"/>
             <a:r>
-              <a:rPr sz="2800" b="1">
+              <a:rPr sz="2600" b="1">
                 <a:solidFill>
                   <a:srgbClr val="2563EB"/>
                 </a:solidFill>
@@ -3224,8 +3227,8 @@
         </p:nvSpPr>
         <p:spPr>
           <a:xfrm>
-            <a:off x="914400" y="3840480"/>
-            <a:ext cx="10515600" cy="548640"/>
+            <a:off x="457200" y="3566160"/>
+            <a:ext cx="11247120" cy="640080"/>
           </a:xfrm>
           <a:prstGeom prst="rect">
             <a:avLst/>
@@ -3240,13 +3243,13 @@
           <a:p>
             <a:pPr algn="ctr"/>
             <a:r>
-              <a:rPr sz="1600" b="0">
-                <a:solidFill>
-                  <a:srgbClr val="6B7280"/>
-                </a:solidFill>
-                <a:latin typeface="Hiragino Mincho ProN"/>
-              </a:rPr>
-              <a:t>〜 過去 1 年の入院データから医師別の病棟運営貢献を見える化 〜</a:t>
+              <a:rPr sz="1800" b="1">
+                <a:solidFill>
+                  <a:srgbClr val="DC2626"/>
+                </a:solidFill>
+                <a:latin typeface="Hiragino Mincho ProN"/>
+              </a:rPr>
+              <a:t>「短期回転 ＝ 経営最適」は誤り：B 群（回復期）の中心管理が</a:t>
             </a:r>
           </a:p>
         </p:txBody>
@@ -3259,8 +3262,8 @@
         </p:nvSpPr>
         <p:spPr>
           <a:xfrm>
-            <a:off x="914400" y="5029200"/>
-            <a:ext cx="10515600" cy="548640"/>
+            <a:off x="457200" y="4023360"/>
+            <a:ext cx="11247120" cy="640080"/>
           </a:xfrm>
           <a:prstGeom prst="rect">
             <a:avLst/>
@@ -3275,13 +3278,13 @@
           <a:p>
             <a:pPr algn="ctr"/>
             <a:r>
-              <a:rPr sz="1800" b="0">
-                <a:solidFill>
-                  <a:srgbClr val="1F2937"/>
-                </a:solidFill>
-                <a:latin typeface="Hiragino Mincho ProN"/>
-              </a:rPr>
-              <a:t>おもろまちメディカルセンター</a:t>
+              <a:rPr sz="1800" b="1">
+                <a:solidFill>
+                  <a:srgbClr val="DC2626"/>
+                </a:solidFill>
+                <a:latin typeface="Hiragino Mincho ProN"/>
+              </a:rPr>
+              <a:t>運営貢献を最大化する</a:t>
             </a:r>
           </a:p>
         </p:txBody>
@@ -3294,8 +3297,8 @@
         </p:nvSpPr>
         <p:spPr>
           <a:xfrm>
-            <a:off x="914400" y="5486400"/>
-            <a:ext cx="10515600" cy="457200"/>
+            <a:off x="914400" y="5029200"/>
+            <a:ext cx="10515600" cy="548640"/>
           </a:xfrm>
           <a:prstGeom prst="rect">
             <a:avLst/>
@@ -3310,13 +3313,13 @@
           <a:p>
             <a:pPr algn="ctr"/>
             <a:r>
-              <a:rPr sz="1400" b="0">
-                <a:solidFill>
-                  <a:srgbClr val="1F2937"/>
-                </a:solidFill>
-                <a:latin typeface="Hiragino Mincho ProN"/>
-              </a:rPr>
-              <a:t>副院長 久保田 透</a:t>
+              <a:rPr sz="1800" b="0">
+                <a:solidFill>
+                  <a:srgbClr val="1F2937"/>
+                </a:solidFill>
+                <a:latin typeface="Hiragino Mincho ProN"/>
+              </a:rPr>
+              <a:t>おもろまちメディカルセンター</a:t>
             </a:r>
           </a:p>
         </p:txBody>
@@ -3329,7 +3332,7 @@
         </p:nvSpPr>
         <p:spPr>
           <a:xfrm>
-            <a:off x="914400" y="5943600"/>
+            <a:off x="914400" y="5486400"/>
             <a:ext cx="10515600" cy="457200"/>
           </a:xfrm>
           <a:prstGeom prst="rect">
@@ -3345,13 +3348,48 @@
           <a:p>
             <a:pPr algn="ctr"/>
             <a:r>
+              <a:rPr sz="1400" b="0">
+                <a:solidFill>
+                  <a:srgbClr val="1F2937"/>
+                </a:solidFill>
+                <a:latin typeface="Hiragino Mincho ProN"/>
+              </a:rPr>
+              <a:t>副院長 久保田 透</a:t>
+            </a:r>
+          </a:p>
+        </p:txBody>
+      </p:sp>
+      <p:sp>
+        <p:nvSpPr>
+          <p:cNvPr id="9" name="TextBox 8"/>
+          <p:cNvSpPr txBox="1"/>
+          <p:nvPr/>
+        </p:nvSpPr>
+        <p:spPr>
+          <a:xfrm>
+            <a:off x="914400" y="5943600"/>
+            <a:ext cx="10515600" cy="457200"/>
+          </a:xfrm>
+          <a:prstGeom prst="rect">
+            <a:avLst/>
+          </a:prstGeom>
+          <a:noFill/>
+        </p:spPr>
+        <p:txBody>
+          <a:bodyPr wrap="square" anchor="t" lIns="25400" rIns="25400" tIns="25400" bIns="25400">
+            <a:spAutoFit/>
+          </a:bodyPr>
+          <a:lstStyle/>
+          <a:p>
+            <a:pPr algn="ctr"/>
+            <a:r>
               <a:rPr sz="1200" b="0">
                 <a:solidFill>
                   <a:srgbClr val="9CA3AF"/>
                 </a:solidFill>
                 <a:latin typeface="Hiragino Mincho ProN"/>
               </a:rPr>
-              <a:t>2026 年 5 月 4 日</a:t>
+              <a:t>2026 年 5 月 4 日 / Rev. 2（粗利ベース 抜本改訂版）</a:t>
             </a:r>
           </a:p>
         </p:txBody>
@@ -3441,20 +3479,20 @@
           <a:p>
             <a:pPr algn="l"/>
             <a:r>
-              <a:rPr sz="2800" b="1">
-                <a:solidFill>
-                  <a:srgbClr val="1F2937"/>
-                </a:solidFill>
-                <a:latin typeface="Hiragino Mincho ProN"/>
-              </a:rPr>
-              <a:t>結果④ 稼働率寄与率 と 病院収益 の相関検証</a:t>
+              <a:rPr sz="2400" b="1">
+                <a:solidFill>
+                  <a:srgbClr val="1F2937"/>
+                </a:solidFill>
+                <a:latin typeface="Hiragino Mincho ProN"/>
+              </a:rPr>
+              <a:t>結果③ 粗利シェア — 全体年間粗利 8.96 億円 の内訳</a:t>
             </a:r>
           </a:p>
         </p:txBody>
       </p:sp>
       <p:pic>
         <p:nvPicPr>
-          <p:cNvPr id="4" name="Picture 3" descr="05_correlation_named.png"/>
+          <p:cNvPr id="4" name="Picture 3" descr="04_treemap_named.png"/>
           <p:cNvPicPr>
             <a:picLocks noChangeAspect="1"/>
           </p:cNvPicPr>
@@ -3468,92 +3506,14 @@
         </p:blipFill>
         <p:spPr>
           <a:xfrm>
-            <a:off x="640080" y="1005840"/>
-            <a:ext cx="10881360" cy="6318996"/>
+            <a:off x="640080" y="1097280"/>
+            <a:ext cx="10881360" cy="5834575"/>
           </a:xfrm>
           <a:prstGeom prst="rect">
             <a:avLst/>
           </a:prstGeom>
         </p:spPr>
       </p:pic>
-      <p:sp>
-        <p:nvSpPr>
-          <p:cNvPr id="5" name="Rectangle 4"/>
-          <p:cNvSpPr/>
-          <p:nvPr/>
-        </p:nvSpPr>
-        <p:spPr>
-          <a:xfrm>
-            <a:off x="640080" y="6035040"/>
-            <a:ext cx="10881360" cy="731520"/>
-          </a:xfrm>
-          <a:prstGeom prst="rect">
-            <a:avLst/>
-          </a:prstGeom>
-          <a:solidFill>
-            <a:srgbClr val="ECFDF5"/>
-          </a:solidFill>
-          <a:ln>
-            <a:noFill/>
-          </a:ln>
-        </p:spPr>
-        <p:style>
-          <a:lnRef idx="1">
-            <a:schemeClr val="accent1"/>
-          </a:lnRef>
-          <a:fillRef idx="3">
-            <a:schemeClr val="accent1"/>
-          </a:fillRef>
-          <a:effectRef idx="2">
-            <a:schemeClr val="accent1"/>
-          </a:effectRef>
-          <a:fontRef idx="minor">
-            <a:schemeClr val="lt1"/>
-          </a:fontRef>
-        </p:style>
-        <p:txBody>
-          <a:bodyPr rtlCol="0" anchor="ctr"/>
-          <a:lstStyle/>
-          <a:p>
-            <a:pPr algn="ctr"/>
-          </a:p>
-        </p:txBody>
-      </p:sp>
-      <p:sp>
-        <p:nvSpPr>
-          <p:cNvPr id="6" name="TextBox 5"/>
-          <p:cNvSpPr txBox="1"/>
-          <p:nvPr/>
-        </p:nvSpPr>
-        <p:spPr>
-          <a:xfrm>
-            <a:off x="822960" y="6172200"/>
-            <a:ext cx="10515600" cy="457200"/>
-          </a:xfrm>
-          <a:prstGeom prst="rect">
-            <a:avLst/>
-          </a:prstGeom>
-          <a:noFill/>
-        </p:spPr>
-        <p:txBody>
-          <a:bodyPr wrap="square" anchor="t" lIns="25400" rIns="25400" tIns="25400" bIns="25400">
-            <a:spAutoFit/>
-          </a:bodyPr>
-          <a:lstStyle/>
-          <a:p>
-            <a:pPr algn="l"/>
-            <a:r>
-              <a:rPr sz="1800" b="1">
-                <a:solidFill>
-                  <a:srgbClr val="10B981"/>
-                </a:solidFill>
-                <a:latin typeface="Hiragino Mincho ProN"/>
-              </a:rPr>
-              <a:t>💡 結論: 稼働率寄与率を主指標にすれば、収益の 92% を説明できる</a:t>
-            </a:r>
-          </a:p>
-        </p:txBody>
-      </p:sp>
     </p:spTree>
   </p:cSld>
   <p:clrMapOvr>
@@ -3587,7 +3547,7 @@
             <a:avLst/>
           </a:prstGeom>
           <a:solidFill>
-            <a:srgbClr val="FEF2F2"/>
+            <a:srgbClr val="EFF6FF"/>
           </a:solidFill>
           <a:ln>
             <a:noFill/>
@@ -3639,27 +3599,94 @@
           <a:p>
             <a:pPr algn="l"/>
             <a:r>
-              <a:rPr sz="2400" b="1">
-                <a:solidFill>
-                  <a:srgbClr val="DC2626"/>
-                </a:solidFill>
-                <a:latin typeface="Hiragino Mincho ProN"/>
-              </a:rPr>
-              <a:t>主な発見① 5F 病棟は OKUK 1 名に依存（構造的リスク）</a:t>
-            </a:r>
-          </a:p>
-        </p:txBody>
-      </p:sp>
-      <p:sp>
-        <p:nvSpPr>
-          <p:cNvPr id="4" name="TextBox 3"/>
+              <a:rPr sz="2800" b="1">
+                <a:solidFill>
+                  <a:srgbClr val="1F2937"/>
+                </a:solidFill>
+                <a:latin typeface="Hiragino Mincho ProN"/>
+              </a:rPr>
+              <a:t>結果④ 稼働率寄与率 と 粗利 の相関検証</a:t>
+            </a:r>
+          </a:p>
+        </p:txBody>
+      </p:sp>
+      <p:pic>
+        <p:nvPicPr>
+          <p:cNvPr id="4" name="Picture 3" descr="05_correlation_named.png"/>
+          <p:cNvPicPr>
+            <a:picLocks noChangeAspect="1"/>
+          </p:cNvPicPr>
+          <p:nvPr/>
+        </p:nvPicPr>
+        <p:blipFill>
+          <a:blip r:embed="rId2"/>
+          <a:stretch>
+            <a:fillRect/>
+          </a:stretch>
+        </p:blipFill>
+        <p:spPr>
+          <a:xfrm>
+            <a:off x="640080" y="1005840"/>
+            <a:ext cx="10881360" cy="6318996"/>
+          </a:xfrm>
+          <a:prstGeom prst="rect">
+            <a:avLst/>
+          </a:prstGeom>
+        </p:spPr>
+      </p:pic>
+      <p:sp>
+        <p:nvSpPr>
+          <p:cNvPr id="5" name="Rectangle 4"/>
+          <p:cNvSpPr/>
+          <p:nvPr/>
+        </p:nvSpPr>
+        <p:spPr>
+          <a:xfrm>
+            <a:off x="640080" y="6035040"/>
+            <a:ext cx="10881360" cy="731520"/>
+          </a:xfrm>
+          <a:prstGeom prst="rect">
+            <a:avLst/>
+          </a:prstGeom>
+          <a:solidFill>
+            <a:srgbClr val="ECFDF5"/>
+          </a:solidFill>
+          <a:ln>
+            <a:noFill/>
+          </a:ln>
+        </p:spPr>
+        <p:style>
+          <a:lnRef idx="1">
+            <a:schemeClr val="accent1"/>
+          </a:lnRef>
+          <a:fillRef idx="3">
+            <a:schemeClr val="accent1"/>
+          </a:fillRef>
+          <a:effectRef idx="2">
+            <a:schemeClr val="accent1"/>
+          </a:effectRef>
+          <a:fontRef idx="minor">
+            <a:schemeClr val="lt1"/>
+          </a:fontRef>
+        </p:style>
+        <p:txBody>
+          <a:bodyPr rtlCol="0" anchor="ctr"/>
+          <a:lstStyle/>
+          <a:p>
+            <a:pPr algn="ctr"/>
+          </a:p>
+        </p:txBody>
+      </p:sp>
+      <p:sp>
+        <p:nvSpPr>
+          <p:cNvPr id="6" name="TextBox 5"/>
           <p:cNvSpPr txBox="1"/>
           <p:nvPr/>
         </p:nvSpPr>
         <p:spPr>
           <a:xfrm>
-            <a:off x="640080" y="1371600"/>
-            <a:ext cx="10972800" cy="5029200"/>
+            <a:off x="822960" y="6172200"/>
+            <a:ext cx="10515600" cy="457200"/>
           </a:xfrm>
           <a:prstGeom prst="rect">
             <a:avLst/>
@@ -3667,140 +3694,20 @@
           <a:noFill/>
         </p:spPr>
         <p:txBody>
-          <a:bodyPr wrap="square">
+          <a:bodyPr wrap="square" anchor="t" lIns="25400" rIns="25400" tIns="25400" bIns="25400">
             <a:spAutoFit/>
           </a:bodyPr>
           <a:lstStyle/>
           <a:p>
             <a:pPr algn="l"/>
             <a:r>
-              <a:rPr sz="1800" b="0">
-                <a:solidFill>
-                  <a:srgbClr val="1F2937"/>
-                </a:solidFill>
-                <a:latin typeface="Hiragino Mincho ProN"/>
-              </a:rPr>
-              <a:t>● 5F 病棟の年間延べ床日数 14,557 床日 のうち</a:t>
-            </a:r>
-          </a:p>
-          <a:p>
-            <a:pPr algn="l"/>
-            <a:r>
-              <a:rPr sz="2200" b="1">
-                <a:solidFill>
-                  <a:srgbClr val="1F2937"/>
-                </a:solidFill>
-                <a:latin typeface="Hiragino Mincho ProN"/>
-              </a:rPr>
-              <a:t>    OKUK 単独で 3,394 床日（23.3%）を占有</a:t>
-            </a:r>
-          </a:p>
-          <a:p>
-            <a:pPr algn="l"/>
-            <a:r>
-              <a:rPr sz="1000" b="0">
-                <a:solidFill>
-                  <a:srgbClr val="1F2937"/>
-                </a:solidFill>
-                <a:latin typeface="Hiragino Mincho ProN"/>
-              </a:rPr>
-              <a:t/>
-            </a:r>
-          </a:p>
-          <a:p>
-            <a:pPr algn="l"/>
-            <a:r>
-              <a:rPr sz="1800" b="0">
-                <a:solidFill>
-                  <a:srgbClr val="1F2937"/>
-                </a:solidFill>
-                <a:latin typeface="Hiragino Mincho ProN"/>
-              </a:rPr>
-              <a:t>● 次点の 5F 主治医は 13.1% で 10pt 以上の差</a:t>
-            </a:r>
-          </a:p>
-          <a:p>
-            <a:pPr algn="l"/>
-            <a:r>
-              <a:rPr sz="1000" b="0">
-                <a:solidFill>
-                  <a:srgbClr val="1F2937"/>
-                </a:solidFill>
-                <a:latin typeface="Hiragino Mincho ProN"/>
-              </a:rPr>
-              <a:t/>
-            </a:r>
-          </a:p>
-          <a:p>
-            <a:pPr algn="l"/>
-            <a:r>
-              <a:rPr sz="1800" b="0">
-                <a:solidFill>
-                  <a:srgbClr val="1F2937"/>
-                </a:solidFill>
-                <a:latin typeface="Hiragino Mincho ProN"/>
-              </a:rPr>
-              <a:t>● OKUK の長期不在で 5F 年間稼働率が</a:t>
-            </a:r>
-          </a:p>
-          <a:p>
-            <a:pPr algn="l"/>
-            <a:r>
-              <a:rPr sz="2200" b="1">
-                <a:solidFill>
-                  <a:srgbClr val="1F2937"/>
-                </a:solidFill>
-                <a:latin typeface="Hiragino Mincho ProN"/>
-              </a:rPr>
-              <a:t>    84.9% → 約 78.5% まで低下するリスク</a:t>
-            </a:r>
-          </a:p>
-          <a:p>
-            <a:pPr algn="l"/>
-            <a:r>
-              <a:rPr sz="1600" b="0">
-                <a:solidFill>
-                  <a:srgbClr val="1F2937"/>
-                </a:solidFill>
-                <a:latin typeface="Hiragino Mincho ProN"/>
-              </a:rPr>
-              <a:t/>
-            </a:r>
-          </a:p>
-          <a:p>
-            <a:pPr algn="l"/>
-            <a:r>
-              <a:rPr sz="2000" b="1">
-                <a:solidFill>
-                  <a:srgbClr val="1F2937"/>
-                </a:solidFill>
-                <a:latin typeface="Hiragino Mincho ProN"/>
-              </a:rPr>
-              <a:t>⚠️ バックアップ体制の脆弱性</a:t>
-            </a:r>
-          </a:p>
-          <a:p>
-            <a:pPr algn="l"/>
-            <a:r>
-              <a:rPr sz="1600" b="0">
-                <a:solidFill>
-                  <a:srgbClr val="1F2937"/>
-                </a:solidFill>
-                <a:latin typeface="Hiragino Mincho ProN"/>
-              </a:rPr>
-              <a:t>   病気・退職・休暇等で OKUK が不在となった場合の</a:t>
-            </a:r>
-          </a:p>
-          <a:p>
-            <a:pPr algn="l"/>
-            <a:r>
-              <a:rPr sz="1600" b="0">
-                <a:solidFill>
-                  <a:srgbClr val="1F2937"/>
-                </a:solidFill>
-                <a:latin typeface="Hiragino Mincho ProN"/>
-              </a:rPr>
-              <a:t>   代替体制が不十分です。</a:t>
+              <a:rPr sz="1800" b="1">
+                <a:solidFill>
+                  <a:srgbClr val="10B981"/>
+                </a:solidFill>
+                <a:latin typeface="Hiragino Mincho ProN"/>
+              </a:rPr>
+              <a:t>💡 結論: 稼働率寄与率を主指標にすれば粗利の 9 割以上を説明できる</a:t>
             </a:r>
           </a:p>
         </p:txBody>
@@ -3890,13 +3797,13 @@
           <a:p>
             <a:pPr algn="l"/>
             <a:r>
-              <a:rPr sz="2400" b="1">
+              <a:rPr sz="2600" b="1">
                 <a:solidFill>
                   <a:srgbClr val="10B981"/>
                 </a:solidFill>
                 <a:latin typeface="Hiragino Mincho ProN"/>
               </a:rPr>
-              <a:t>主な発見② 6F 病棟は 3 名でバランスよく支えられている</a:t>
+              <a:t>主な発見① 粗利単価 トップ 3 はすべて長期入院型</a:t>
             </a:r>
           </a:p>
         </p:txBody>
@@ -3909,8 +3816,8 @@
         </p:nvSpPr>
         <p:spPr>
           <a:xfrm>
-            <a:off x="640080" y="1371600"/>
-            <a:ext cx="10972800" cy="5029200"/>
+            <a:off x="640080" y="1188720"/>
+            <a:ext cx="10972800" cy="5303520"/>
           </a:xfrm>
           <a:prstGeom prst="rect">
             <a:avLst/>
@@ -3925,133 +3832,169 @@
           <a:p>
             <a:pPr algn="l"/>
             <a:r>
+              <a:rPr sz="2200" b="1">
+                <a:solidFill>
+                  <a:srgbClr val="1F2937"/>
+                </a:solidFill>
+                <a:latin typeface="Hiragino Mincho ProN"/>
+              </a:rPr>
+              <a:t>ベッド粗利単価 上位 3 名:</a:t>
+            </a:r>
+          </a:p>
+          <a:p>
+            <a:pPr algn="l"/>
+            <a:r>
+              <a:rPr sz="1200" b="0">
+                <a:solidFill>
+                  <a:srgbClr val="1F2937"/>
+                </a:solidFill>
+                <a:latin typeface="Hiragino Mincho ProN"/>
+              </a:rPr>
+              <a:t/>
+            </a:r>
+          </a:p>
+          <a:p>
+            <a:pPr algn="l"/>
+            <a:r>
+              <a:rPr sz="1800" b="1">
+                <a:solidFill>
+                  <a:srgbClr val="1F2937"/>
+                </a:solidFill>
+                <a:latin typeface="Hiragino Mincho ProN"/>
+              </a:rPr>
+              <a:t>  1. OKUK    30,712 円/床日    平均在院 35.7 日</a:t>
+            </a:r>
+          </a:p>
+          <a:p>
+            <a:pPr algn="l"/>
+            <a:r>
+              <a:rPr sz="1400" b="0">
+                <a:solidFill>
+                  <a:srgbClr val="1F2937"/>
+                </a:solidFill>
+                <a:latin typeface="Hiragino Mincho ProN"/>
+              </a:rPr>
+              <a:t>      B 群 21% / C 群 65% / A 群 14%</a:t>
+            </a:r>
+          </a:p>
+          <a:p>
+            <a:pPr algn="l"/>
+            <a:r>
+              <a:rPr sz="600" b="0">
+                <a:solidFill>
+                  <a:srgbClr val="1F2937"/>
+                </a:solidFill>
+                <a:latin typeface="Hiragino Mincho ProN"/>
+              </a:rPr>
+              <a:t/>
+            </a:r>
+          </a:p>
+          <a:p>
+            <a:pPr algn="l"/>
+            <a:r>
+              <a:rPr sz="1800" b="1">
+                <a:solidFill>
+                  <a:srgbClr val="1F2937"/>
+                </a:solidFill>
+                <a:latin typeface="Hiragino Mincho ProN"/>
+              </a:rPr>
+              <a:t>  2. KJJ    30,695 円/床日    平均在院 33.2 日</a:t>
+            </a:r>
+          </a:p>
+          <a:p>
+            <a:pPr algn="l"/>
+            <a:r>
+              <a:rPr sz="1400" b="0">
+                <a:solidFill>
+                  <a:srgbClr val="1F2937"/>
+                </a:solidFill>
+                <a:latin typeface="Hiragino Mincho ProN"/>
+              </a:rPr>
+              <a:t>      B 群 24% / C 群 61% / A 群 15%</a:t>
+            </a:r>
+          </a:p>
+          <a:p>
+            <a:pPr algn="l"/>
+            <a:r>
+              <a:rPr sz="600" b="0">
+                <a:solidFill>
+                  <a:srgbClr val="1F2937"/>
+                </a:solidFill>
+                <a:latin typeface="Hiragino Mincho ProN"/>
+              </a:rPr>
+              <a:t/>
+            </a:r>
+          </a:p>
+          <a:p>
+            <a:pPr algn="l"/>
+            <a:r>
+              <a:rPr sz="1800" b="1">
+                <a:solidFill>
+                  <a:srgbClr val="1F2937"/>
+                </a:solidFill>
+                <a:latin typeface="Hiragino Mincho ProN"/>
+              </a:rPr>
+              <a:t>  3. KUBT    30,476 円/床日    平均在院 22.2 日</a:t>
+            </a:r>
+          </a:p>
+          <a:p>
+            <a:pPr algn="l"/>
+            <a:r>
+              <a:rPr sz="1400" b="0">
+                <a:solidFill>
+                  <a:srgbClr val="1F2937"/>
+                </a:solidFill>
+                <a:latin typeface="Hiragino Mincho ProN"/>
+              </a:rPr>
+              <a:t>      B 群 25% / C 群 54% / A 群 20%</a:t>
+            </a:r>
+          </a:p>
+          <a:p>
+            <a:pPr algn="l"/>
+            <a:r>
+              <a:rPr sz="600" b="0">
+                <a:solidFill>
+                  <a:srgbClr val="1F2937"/>
+                </a:solidFill>
+                <a:latin typeface="Hiragino Mincho ProN"/>
+              </a:rPr>
+              <a:t/>
+            </a:r>
+          </a:p>
+          <a:p>
+            <a:pPr algn="l"/>
+            <a:r>
+              <a:rPr sz="1200" b="0">
+                <a:solidFill>
+                  <a:srgbClr val="1F2937"/>
+                </a:solidFill>
+                <a:latin typeface="Hiragino Mincho ProN"/>
+              </a:rPr>
+              <a:t/>
+            </a:r>
+          </a:p>
+          <a:p>
+            <a:pPr algn="l"/>
+            <a:r>
               <a:rPr sz="2000" b="1">
                 <a:solidFill>
                   <a:srgbClr val="1F2937"/>
                 </a:solidFill>
                 <a:latin typeface="Hiragino Mincho ProN"/>
               </a:rPr>
-              <a:t>● 6F 病棟 上位 3 名:</a:t>
-            </a:r>
-          </a:p>
-          <a:p>
-            <a:pPr algn="l"/>
-            <a:r>
-              <a:rPr sz="2200" b="1">
-                <a:solidFill>
-                  <a:srgbClr val="1F2937"/>
-                </a:solidFill>
-                <a:latin typeface="Hiragino Mincho ProN"/>
-              </a:rPr>
-              <a:t>    KUBT・KJJ・TERUH</a:t>
-            </a:r>
-          </a:p>
-          <a:p>
-            <a:pPr algn="l"/>
-            <a:r>
-              <a:rPr sz="1800" b="0">
-                <a:solidFill>
-                  <a:srgbClr val="1F2937"/>
-                </a:solidFill>
-                <a:latin typeface="Hiragino Mincho ProN"/>
-              </a:rPr>
-              <a:t>    合計 6F 寄与率 54.6%</a:t>
-            </a:r>
-          </a:p>
-          <a:p>
-            <a:pPr algn="l"/>
-            <a:r>
-              <a:rPr sz="1400" b="0">
-                <a:solidFill>
-                  <a:srgbClr val="1F2937"/>
-                </a:solidFill>
-                <a:latin typeface="Hiragino Mincho ProN"/>
-              </a:rPr>
-              <a:t/>
-            </a:r>
-          </a:p>
-          <a:p>
-            <a:pPr algn="l"/>
-            <a:r>
-              <a:rPr sz="1800" b="0">
-                <a:solidFill>
-                  <a:srgbClr val="1F2937"/>
-                </a:solidFill>
-                <a:latin typeface="Hiragino Mincho ProN"/>
-              </a:rPr>
-              <a:t>● 5F の中央集中（49%）と比べ、6F は分散度が高い</a:t>
-            </a:r>
-          </a:p>
-          <a:p>
-            <a:pPr algn="l"/>
-            <a:r>
-              <a:rPr sz="1000" b="0">
-                <a:solidFill>
-                  <a:srgbClr val="1F2937"/>
-                </a:solidFill>
-                <a:latin typeface="Hiragino Mincho ProN"/>
-              </a:rPr>
-              <a:t/>
-            </a:r>
-          </a:p>
-          <a:p>
-            <a:pPr algn="l"/>
-            <a:r>
-              <a:rPr sz="2200" b="1">
-                <a:solidFill>
-                  <a:srgbClr val="1F2937"/>
-                </a:solidFill>
-                <a:latin typeface="Hiragino Mincho ProN"/>
-              </a:rPr>
-              <a:t>● 特定医師不在時のリスクが相対的に小さい</a:t>
-            </a:r>
-          </a:p>
-          <a:p>
-            <a:pPr algn="l"/>
-            <a:r>
-              <a:rPr sz="1000" b="0">
-                <a:solidFill>
-                  <a:srgbClr val="1F2937"/>
-                </a:solidFill>
-                <a:latin typeface="Hiragino Mincho ProN"/>
-              </a:rPr>
-              <a:t/>
-            </a:r>
-          </a:p>
-          <a:p>
-            <a:pPr algn="l"/>
-            <a:r>
-              <a:rPr sz="1800" b="0">
-                <a:solidFill>
-                  <a:srgbClr val="1F2937"/>
-                </a:solidFill>
-                <a:latin typeface="Hiragino Mincho ProN"/>
-              </a:rPr>
-              <a:t>● 6F 年間稼働率 88.8%（目標 90% にあと 1.2pt）</a:t>
-            </a:r>
-          </a:p>
-          <a:p>
-            <a:pPr algn="l"/>
-            <a:r>
-              <a:rPr sz="1600" b="0">
-                <a:solidFill>
-                  <a:srgbClr val="1F2937"/>
-                </a:solidFill>
-                <a:latin typeface="Hiragino Mincho ProN"/>
-              </a:rPr>
-              <a:t/>
-            </a:r>
-          </a:p>
-          <a:p>
-            <a:pPr algn="l"/>
-            <a:r>
-              <a:rPr sz="2000" b="1">
-                <a:solidFill>
-                  <a:srgbClr val="1F2937"/>
-                </a:solidFill>
-                <a:latin typeface="Hiragino Mincho ProN"/>
-              </a:rPr>
-              <a:t>✅ 健全な分散型運営</a:t>
+              <a:t>💡 重要発見: 単価が高い医師は B + C 群が多い → 長期入院型</a:t>
+            </a:r>
+          </a:p>
+          <a:p>
+            <a:pPr algn="l"/>
+            <a:r>
+              <a:rPr sz="1800" b="1">
+                <a:solidFill>
+                  <a:srgbClr val="1F2937"/>
+                </a:solidFill>
+                <a:latin typeface="Hiragino Mincho ProN"/>
+              </a:rPr>
+              <a:t>       「短期回転＝高単価」という思い込みは誤り</a:t>
             </a:r>
           </a:p>
         </p:txBody>
@@ -4089,7 +4032,7 @@
             <a:avLst/>
           </a:prstGeom>
           <a:solidFill>
-            <a:srgbClr val="EFF6FF"/>
+            <a:srgbClr val="FEF2F2"/>
           </a:solidFill>
           <a:ln>
             <a:noFill/>
@@ -4141,13 +4084,13 @@
           <a:p>
             <a:pPr algn="l"/>
             <a:r>
-              <a:rPr sz="2600" b="1">
-                <a:solidFill>
-                  <a:srgbClr val="1F2937"/>
-                </a:solidFill>
-                <a:latin typeface="Hiragino Mincho ProN"/>
-              </a:rPr>
-              <a:t>提言 1:  5F 病棟の主治医不足リスクを解消する</a:t>
+              <a:rPr sz="2400" b="1">
+                <a:solidFill>
+                  <a:srgbClr val="DC2626"/>
+                </a:solidFill>
+                <a:latin typeface="Hiragino Mincho ProN"/>
+              </a:rPr>
+              <a:t>主な発見② 5F 病棟は OKUK 1 名に依存（構造的リスク）</a:t>
             </a:r>
           </a:p>
         </p:txBody>
@@ -4160,7 +4103,7 @@
         </p:nvSpPr>
         <p:spPr>
           <a:xfrm>
-            <a:off x="640080" y="1463040"/>
+            <a:off x="640080" y="1371600"/>
             <a:ext cx="10972800" cy="5029200"/>
           </a:xfrm>
           <a:prstGeom prst="rect">
@@ -4176,133 +4119,109 @@
           <a:p>
             <a:pPr algn="l"/>
             <a:r>
+              <a:rPr sz="1800" b="0">
+                <a:solidFill>
+                  <a:srgbClr val="1F2937"/>
+                </a:solidFill>
+                <a:latin typeface="Hiragino Mincho ProN"/>
+              </a:rPr>
+              <a:t>● 5F 病棟の年間延べ床日数 14,557 床日 のうち</a:t>
+            </a:r>
+          </a:p>
+          <a:p>
+            <a:pPr algn="l"/>
+            <a:r>
+              <a:rPr sz="2200" b="1">
+                <a:solidFill>
+                  <a:srgbClr val="1F2937"/>
+                </a:solidFill>
+                <a:latin typeface="Hiragino Mincho ProN"/>
+              </a:rPr>
+              <a:t>    OKUK 単独で 3,394 床日（23.3%）を占有</a:t>
+            </a:r>
+          </a:p>
+          <a:p>
+            <a:pPr algn="l"/>
+            <a:r>
+              <a:rPr sz="1000" b="0">
+                <a:solidFill>
+                  <a:srgbClr val="1F2937"/>
+                </a:solidFill>
+                <a:latin typeface="Hiragino Mincho ProN"/>
+              </a:rPr>
+              <a:t/>
+            </a:r>
+          </a:p>
+          <a:p>
+            <a:pPr algn="l"/>
+            <a:r>
+              <a:rPr sz="1800" b="0">
+                <a:solidFill>
+                  <a:srgbClr val="1F2937"/>
+                </a:solidFill>
+                <a:latin typeface="Hiragino Mincho ProN"/>
+              </a:rPr>
+              <a:t>● 次点の 5F 主治医は 13.1% で 10pt 以上の差</a:t>
+            </a:r>
+          </a:p>
+          <a:p>
+            <a:pPr algn="l"/>
+            <a:r>
+              <a:rPr sz="1000" b="0">
+                <a:solidFill>
+                  <a:srgbClr val="1F2937"/>
+                </a:solidFill>
+                <a:latin typeface="Hiragino Mincho ProN"/>
+              </a:rPr>
+              <a:t/>
+            </a:r>
+          </a:p>
+          <a:p>
+            <a:pPr algn="l"/>
+            <a:r>
+              <a:rPr sz="1800" b="0">
+                <a:solidFill>
+                  <a:srgbClr val="1F2937"/>
+                </a:solidFill>
+                <a:latin typeface="Hiragino Mincho ProN"/>
+              </a:rPr>
+              <a:t>● OKUK の長期不在で 5F 年間稼働率が</a:t>
+            </a:r>
+          </a:p>
+          <a:p>
+            <a:pPr algn="l"/>
+            <a:r>
+              <a:rPr sz="2200" b="1">
+                <a:solidFill>
+                  <a:srgbClr val="1F2937"/>
+                </a:solidFill>
+                <a:latin typeface="Hiragino Mincho ProN"/>
+              </a:rPr>
+              <a:t>    84.9% → 約 78.5% まで低下するリスク</a:t>
+            </a:r>
+          </a:p>
+          <a:p>
+            <a:pPr algn="l"/>
+            <a:r>
+              <a:rPr sz="1600" b="0">
+                <a:solidFill>
+                  <a:srgbClr val="1F2937"/>
+                </a:solidFill>
+                <a:latin typeface="Hiragino Mincho ProN"/>
+              </a:rPr>
+              <a:t/>
+            </a:r>
+          </a:p>
+          <a:p>
+            <a:pPr algn="l"/>
+            <a:r>
               <a:rPr sz="2000" b="1">
                 <a:solidFill>
                   <a:srgbClr val="1F2937"/>
                 </a:solidFill>
                 <a:latin typeface="Hiragino Mincho ProN"/>
               </a:rPr>
-              <a:t>課題: 5F の OKUK 依存（23.3%）は経営継続性のリスク</a:t>
-            </a:r>
-          </a:p>
-          <a:p>
-            <a:pPr algn="l"/>
-            <a:r>
-              <a:rPr sz="1400" b="0">
-                <a:solidFill>
-                  <a:srgbClr val="1F2937"/>
-                </a:solidFill>
-                <a:latin typeface="Hiragino Mincho ProN"/>
-              </a:rPr>
-              <a:t/>
-            </a:r>
-          </a:p>
-          <a:p>
-            <a:pPr algn="l"/>
-            <a:r>
-              <a:rPr sz="2000" b="1">
-                <a:solidFill>
-                  <a:srgbClr val="1F2937"/>
-                </a:solidFill>
-                <a:latin typeface="Hiragino Mincho ProN"/>
-              </a:rPr>
-              <a:t>対応:</a:t>
-            </a:r>
-          </a:p>
-          <a:p>
-            <a:pPr algn="l"/>
-            <a:r>
-              <a:rPr sz="1800" b="0">
-                <a:solidFill>
-                  <a:srgbClr val="1F2937"/>
-                </a:solidFill>
-                <a:latin typeface="Hiragino Mincho ProN"/>
-              </a:rPr>
-              <a:t>    ● 5F に主たる病棟を持つ医師を 1〜2 名増員</a:t>
-            </a:r>
-          </a:p>
-          <a:p>
-            <a:pPr algn="l"/>
-            <a:r>
-              <a:rPr sz="1800" b="0">
-                <a:solidFill>
-                  <a:srgbClr val="1F2937"/>
-                </a:solidFill>
-                <a:latin typeface="Hiragino Mincho ProN"/>
-              </a:rPr>
-              <a:t>    ● OKUK の患者バックアップ体制を整備</a:t>
-            </a:r>
-          </a:p>
-          <a:p>
-            <a:pPr algn="l"/>
-            <a:r>
-              <a:rPr sz="1400" b="0">
-                <a:solidFill>
-                  <a:srgbClr val="1F2937"/>
-                </a:solidFill>
-                <a:latin typeface="Hiragino Mincho ProN"/>
-              </a:rPr>
-              <a:t>        （指示・指導の引継ぎフロー、サブ主治医の指定）</a:t>
-            </a:r>
-          </a:p>
-          <a:p>
-            <a:pPr algn="l"/>
-            <a:r>
-              <a:rPr sz="1800" b="0">
-                <a:solidFill>
-                  <a:srgbClr val="1F2937"/>
-                </a:solidFill>
-                <a:latin typeface="Hiragino Mincho ProN"/>
-              </a:rPr>
-              <a:t>    ● 5F 主治医の月次寄与率を可視化し、依存度を継続モニタリング</a:t>
-            </a:r>
-          </a:p>
-          <a:p>
-            <a:pPr algn="l"/>
-            <a:r>
-              <a:rPr sz="1200" b="0">
-                <a:solidFill>
-                  <a:srgbClr val="1F2937"/>
-                </a:solidFill>
-                <a:latin typeface="Hiragino Mincho ProN"/>
-              </a:rPr>
-              <a:t/>
-            </a:r>
-          </a:p>
-          <a:p>
-            <a:pPr algn="l"/>
-            <a:r>
-              <a:rPr sz="2000" b="1">
-                <a:solidFill>
-                  <a:srgbClr val="1F2937"/>
-                </a:solidFill>
-                <a:latin typeface="Hiragino Mincho ProN"/>
-              </a:rPr>
-              <a:t>期待効果:</a:t>
-            </a:r>
-          </a:p>
-          <a:p>
-            <a:pPr algn="l"/>
-            <a:r>
-              <a:rPr sz="1800" b="0">
-                <a:solidFill>
-                  <a:srgbClr val="1F2937"/>
-                </a:solidFill>
-                <a:latin typeface="Hiragino Mincho ProN"/>
-              </a:rPr>
-              <a:t>    ● 5F 年間稼働率 84.9% → 90% へ</a:t>
-            </a:r>
-          </a:p>
-          <a:p>
-            <a:pPr algn="l"/>
-            <a:r>
-              <a:rPr sz="1800" b="0">
-                <a:solidFill>
-                  <a:srgbClr val="1F2937"/>
-                </a:solidFill>
-                <a:latin typeface="Hiragino Mincho ProN"/>
-              </a:rPr>
-              <a:t>    ● 不在リスクで稼働率 6pt 下落を防止</a:t>
+              <a:t>⚠️ バックアップ体制の脆弱性 — 緊急対応が必要</a:t>
             </a:r>
           </a:p>
         </p:txBody>
@@ -4340,7 +4259,7 @@
             <a:avLst/>
           </a:prstGeom>
           <a:solidFill>
-            <a:srgbClr val="EFF6FF"/>
+            <a:srgbClr val="ECFDF5"/>
           </a:solidFill>
           <a:ln>
             <a:noFill/>
@@ -4392,13 +4311,13 @@
           <a:p>
             <a:pPr algn="l"/>
             <a:r>
-              <a:rPr sz="2600" b="1">
-                <a:solidFill>
-                  <a:srgbClr val="1F2937"/>
-                </a:solidFill>
-                <a:latin typeface="Hiragino Mincho ProN"/>
-              </a:rPr>
-              <a:t>提言 2:  KPI 月次モニタリング体制を確立する</a:t>
+              <a:rPr sz="2400" b="1">
+                <a:solidFill>
+                  <a:srgbClr val="10B981"/>
+                </a:solidFill>
+                <a:latin typeface="Hiragino Mincho ProN"/>
+              </a:rPr>
+              <a:t>主な発見③ 6F 病棟は 3 名でバランスよく支えられている</a:t>
             </a:r>
           </a:p>
         </p:txBody>
@@ -4411,7 +4330,7 @@
         </p:nvSpPr>
         <p:spPr>
           <a:xfrm>
-            <a:off x="640080" y="1463040"/>
+            <a:off x="640080" y="1371600"/>
             <a:ext cx="10972800" cy="5029200"/>
           </a:xfrm>
           <a:prstGeom prst="rect">
@@ -4433,7 +4352,19 @@
                 </a:solidFill>
                 <a:latin typeface="Hiragino Mincho ProN"/>
               </a:rPr>
-              <a:t>KPI 設計:</a:t>
+              <a:t>● 6F 病棟 上位 3 名:</a:t>
+            </a:r>
+          </a:p>
+          <a:p>
+            <a:pPr algn="l"/>
+            <a:r>
+              <a:rPr sz="2200" b="1">
+                <a:solidFill>
+                  <a:srgbClr val="1F2937"/>
+                </a:solidFill>
+                <a:latin typeface="Hiragino Mincho ProN"/>
+              </a:rPr>
+              <a:t>    KUBT・KJJ・TERUH</a:t>
             </a:r>
           </a:p>
           <a:p>
@@ -4445,7 +4376,19 @@
                 </a:solidFill>
                 <a:latin typeface="Hiragino Mincho ProN"/>
               </a:rPr>
-              <a:t>    主指標: 稼働率寄与率（%） — ベッドを埋める量の貢献</a:t>
+              <a:t>    合計 6F 寄与率 54.6%</a:t>
+            </a:r>
+          </a:p>
+          <a:p>
+            <a:pPr algn="l"/>
+            <a:r>
+              <a:rPr sz="1400" b="0">
+                <a:solidFill>
+                  <a:srgbClr val="1F2937"/>
+                </a:solidFill>
+                <a:latin typeface="Hiragino Mincho ProN"/>
+              </a:rPr>
+              <a:t/>
             </a:r>
           </a:p>
           <a:p>
@@ -4457,7 +4400,43 @@
                 </a:solidFill>
                 <a:latin typeface="Hiragino Mincho ProN"/>
               </a:rPr>
-              <a:t>    副指標: ベッド単価（円/床日） — 1 床 1 日あたりの収益</a:t>
+              <a:t>● 5F の中央集中（49%）と比べ、6F は分散度が高い</a:t>
+            </a:r>
+          </a:p>
+          <a:p>
+            <a:pPr algn="l"/>
+            <a:r>
+              <a:rPr sz="1000" b="0">
+                <a:solidFill>
+                  <a:srgbClr val="1F2937"/>
+                </a:solidFill>
+                <a:latin typeface="Hiragino Mincho ProN"/>
+              </a:rPr>
+              <a:t/>
+            </a:r>
+          </a:p>
+          <a:p>
+            <a:pPr algn="l"/>
+            <a:r>
+              <a:rPr sz="2200" b="1">
+                <a:solidFill>
+                  <a:srgbClr val="1F2937"/>
+                </a:solidFill>
+                <a:latin typeface="Hiragino Mincho ProN"/>
+              </a:rPr>
+              <a:t>● 特定医師不在時のリスクが相対的に小さい</a:t>
+            </a:r>
+          </a:p>
+          <a:p>
+            <a:pPr algn="l"/>
+            <a:r>
+              <a:rPr sz="1000" b="0">
+                <a:solidFill>
+                  <a:srgbClr val="1F2937"/>
+                </a:solidFill>
+                <a:latin typeface="Hiragino Mincho ProN"/>
+              </a:rPr>
+              <a:t/>
             </a:r>
           </a:p>
           <a:p>
@@ -4469,13 +4448,13 @@
                 </a:solidFill>
                 <a:latin typeface="Hiragino Mincho ProN"/>
               </a:rPr>
-              <a:t>    合成 : 年間収益 = 主 × 副 × 期間（参考値）</a:t>
-            </a:r>
-          </a:p>
-          <a:p>
-            <a:pPr algn="l"/>
-            <a:r>
-              <a:rPr sz="1400" b="0">
+              <a:t>● 6F 年間稼働率 88.8%（目標 90% にあと 1.2pt）</a:t>
+            </a:r>
+          </a:p>
+          <a:p>
+            <a:pPr algn="l"/>
+            <a:r>
+              <a:rPr sz="1600" b="0">
                 <a:solidFill>
                   <a:srgbClr val="1F2937"/>
                 </a:solidFill>
@@ -4493,145 +4472,7 @@
                 </a:solidFill>
                 <a:latin typeface="Hiragino Mincho ProN"/>
               </a:rPr>
-              <a:t>運用方法:</a:t>
-            </a:r>
-          </a:p>
-          <a:p>
-            <a:pPr algn="l"/>
-            <a:r>
-              <a:rPr sz="1800" b="0">
-                <a:solidFill>
-                  <a:srgbClr val="1F2937"/>
-                </a:solidFill>
-                <a:latin typeface="Hiragino Mincho ProN"/>
-              </a:rPr>
-              <a:t>    ● 月次会議で全医師の寄与率・単価を併記表示</a:t>
-            </a:r>
-          </a:p>
-          <a:p>
-            <a:pPr algn="l"/>
-            <a:r>
-              <a:rPr sz="1800" b="0">
-                <a:solidFill>
-                  <a:srgbClr val="1F2937"/>
-                </a:solidFill>
-                <a:latin typeface="Hiragino Mincho ProN"/>
-              </a:rPr>
-              <a:t>    ● 順位ではなく散布図で「タイプ分類」として議論</a:t>
-            </a:r>
-          </a:p>
-          <a:p>
-            <a:pPr algn="l"/>
-            <a:r>
-              <a:rPr sz="1800" b="0">
-                <a:solidFill>
-                  <a:srgbClr val="1F2937"/>
-                </a:solidFill>
-                <a:latin typeface="Hiragino Mincho ProN"/>
-              </a:rPr>
-              <a:t>    ● ベッドコントロールシミュレーターに月次自動更新機能を組込み</a:t>
-            </a:r>
-          </a:p>
-          <a:p>
-            <a:pPr algn="l"/>
-            <a:r>
-              <a:rPr sz="1400" b="0">
-                <a:solidFill>
-                  <a:srgbClr val="1F2937"/>
-                </a:solidFill>
-                <a:latin typeface="Hiragino Mincho ProN"/>
-              </a:rPr>
-              <a:t/>
-            </a:r>
-          </a:p>
-          <a:p>
-            <a:pPr algn="l"/>
-            <a:r>
-              <a:rPr sz="1600" b="1">
-                <a:solidFill>
-                  <a:srgbClr val="1F2937"/>
-                </a:solidFill>
-                <a:latin typeface="Hiragino Mincho ProN"/>
-              </a:rPr>
-              <a:t>⚠️ 倫理的配慮: 患者選別・適応外入院・在院延長を誘発しない設計</a:t>
-            </a:r>
-          </a:p>
-        </p:txBody>
-      </p:sp>
-      <p:sp>
-        <p:nvSpPr>
-          <p:cNvPr id="5" name="Rectangle 4"/>
-          <p:cNvSpPr/>
-          <p:nvPr/>
-        </p:nvSpPr>
-        <p:spPr>
-          <a:xfrm>
-            <a:off x="640080" y="6400800"/>
-            <a:ext cx="10972800" cy="365760"/>
-          </a:xfrm>
-          <a:prstGeom prst="rect">
-            <a:avLst/>
-          </a:prstGeom>
-          <a:solidFill>
-            <a:srgbClr val="FEF2F2"/>
-          </a:solidFill>
-          <a:ln>
-            <a:noFill/>
-          </a:ln>
-        </p:spPr>
-        <p:style>
-          <a:lnRef idx="1">
-            <a:schemeClr val="accent1"/>
-          </a:lnRef>
-          <a:fillRef idx="3">
-            <a:schemeClr val="accent1"/>
-          </a:fillRef>
-          <a:effectRef idx="2">
-            <a:schemeClr val="accent1"/>
-          </a:effectRef>
-          <a:fontRef idx="minor">
-            <a:schemeClr val="lt1"/>
-          </a:fontRef>
-        </p:style>
-        <p:txBody>
-          <a:bodyPr rtlCol="0" anchor="ctr"/>
-          <a:lstStyle/>
-          <a:p>
-            <a:pPr algn="ctr"/>
-          </a:p>
-        </p:txBody>
-      </p:sp>
-      <p:sp>
-        <p:nvSpPr>
-          <p:cNvPr id="6" name="TextBox 5"/>
-          <p:cNvSpPr txBox="1"/>
-          <p:nvPr/>
-        </p:nvSpPr>
-        <p:spPr>
-          <a:xfrm>
-            <a:off x="822960" y="6446520"/>
-            <a:ext cx="10515600" cy="274320"/>
-          </a:xfrm>
-          <a:prstGeom prst="rect">
-            <a:avLst/>
-          </a:prstGeom>
-          <a:noFill/>
-        </p:spPr>
-        <p:txBody>
-          <a:bodyPr wrap="square" anchor="t" lIns="25400" rIns="25400" tIns="25400" bIns="25400">
-            <a:spAutoFit/>
-          </a:bodyPr>
-          <a:lstStyle/>
-          <a:p>
-            <a:pPr algn="l"/>
-            <a:r>
-              <a:rPr sz="1200" b="1">
-                <a:solidFill>
-                  <a:srgbClr val="DC2626"/>
-                </a:solidFill>
-                <a:latin typeface="Hiragino Mincho ProN"/>
-              </a:rPr>
-              <a:t>「適応のある患者を、適切な期間で治療し、自宅復帰を支援する」が大前提</a:t>
+              <a:t>✅ 健全な分散型運営</a:t>
             </a:r>
           </a:p>
         </p:txBody>
@@ -4727,7 +4568,7 @@
                 </a:solidFill>
                 <a:latin typeface="Hiragino Mincho ProN"/>
               </a:rPr>
-              <a:t>提言 3:  Stage 2 — リハ加算・処置加算で精緻化</a:t>
+              <a:t>提言 1:  5F 病棟の主治医不足リスクを解消する</a:t>
             </a:r>
           </a:p>
         </p:txBody>
@@ -4762,7 +4603,31 @@
                 </a:solidFill>
                 <a:latin typeface="Hiragino Mincho ProN"/>
               </a:rPr>
-              <a:t>現状（Stage 1）の限界:</a:t>
+              <a:t>課題: 5F の OKUK 依存（23.3%）は経営継続性のリスク</a:t>
+            </a:r>
+          </a:p>
+          <a:p>
+            <a:pPr algn="l"/>
+            <a:r>
+              <a:rPr sz="1400" b="0">
+                <a:solidFill>
+                  <a:srgbClr val="1F2937"/>
+                </a:solidFill>
+                <a:latin typeface="Hiragino Mincho ProN"/>
+              </a:rPr>
+              <a:t/>
+            </a:r>
+          </a:p>
+          <a:p>
+            <a:pPr algn="l"/>
+            <a:r>
+              <a:rPr sz="2000" b="1">
+                <a:solidFill>
+                  <a:srgbClr val="1F2937"/>
+                </a:solidFill>
+                <a:latin typeface="Hiragino Mincho ProN"/>
+              </a:rPr>
+              <a:t>対応:</a:t>
             </a:r>
           </a:p>
           <a:p>
@@ -4774,7 +4639,31 @@
                 </a:solidFill>
                 <a:latin typeface="Hiragino Mincho ProN"/>
               </a:rPr>
-              <a:t>    フェーズ別単価のみで概算 → 単価の差は ±5,000〜10,000 円</a:t>
+              <a:t>    ● 5F に主たる病棟を持つ医師を 1〜2 名増員</a:t>
+            </a:r>
+          </a:p>
+          <a:p>
+            <a:pPr algn="l"/>
+            <a:r>
+              <a:rPr sz="1800" b="0">
+                <a:solidFill>
+                  <a:srgbClr val="1F2937"/>
+                </a:solidFill>
+                <a:latin typeface="Hiragino Mincho ProN"/>
+              </a:rPr>
+              <a:t>    ● OKUK の患者バックアップ体制を整備</a:t>
+            </a:r>
+          </a:p>
+          <a:p>
+            <a:pPr algn="l"/>
+            <a:r>
+              <a:rPr sz="1800" b="0">
+                <a:solidFill>
+                  <a:srgbClr val="1F2937"/>
+                </a:solidFill>
+                <a:latin typeface="Hiragino Mincho ProN"/>
+              </a:rPr>
+              <a:t>    ● 5F 主治医の月次寄与率を可視化し、依存度を継続モニタリング</a:t>
             </a:r>
           </a:p>
           <a:p>
@@ -4798,7 +4687,7 @@
                 </a:solidFill>
                 <a:latin typeface="Hiragino Mincho ProN"/>
               </a:rPr>
-              <a:t>Stage 2 追加データ要求（事務へ）:</a:t>
+              <a:t>期待効果:</a:t>
             </a:r>
           </a:p>
           <a:p>
@@ -4810,7 +4699,7 @@
                 </a:solidFill>
                 <a:latin typeface="Hiragino Mincho ProN"/>
               </a:rPr>
-              <a:t>    ● 患者別 月次リハビリ単位数（PT / OT / ST）</a:t>
+              <a:t>    ● 5F 年間稼働率 84.9% → 90% へ</a:t>
             </a:r>
           </a:p>
           <a:p>
@@ -4822,67 +4711,7 @@
                 </a:solidFill>
                 <a:latin typeface="Hiragino Mincho ProN"/>
               </a:rPr>
-              <a:t>    ● 処置加算（中心静脈、人工呼吸器、ドレーン等）</a:t>
-            </a:r>
-          </a:p>
-          <a:p>
-            <a:pPr algn="l"/>
-            <a:r>
-              <a:rPr sz="1800" b="0">
-                <a:solidFill>
-                  <a:srgbClr val="1F2937"/>
-                </a:solidFill>
-                <a:latin typeface="Hiragino Mincho ProN"/>
-              </a:rPr>
-              <a:t>    ● 検査加算・手術料の患者別月次集計</a:t>
-            </a:r>
-          </a:p>
-          <a:p>
-            <a:pPr algn="l"/>
-            <a:r>
-              <a:rPr sz="1400" b="0">
-                <a:solidFill>
-                  <a:srgbClr val="1F2937"/>
-                </a:solidFill>
-                <a:latin typeface="Hiragino Mincho ProN"/>
-              </a:rPr>
-              <a:t/>
-            </a:r>
-          </a:p>
-          <a:p>
-            <a:pPr algn="l"/>
-            <a:r>
-              <a:rPr sz="2000" b="1">
-                <a:solidFill>
-                  <a:srgbClr val="1F2937"/>
-                </a:solidFill>
-                <a:latin typeface="Hiragino Mincho ProN"/>
-              </a:rPr>
-              <a:t>Stage 2 完成後の効果:</a:t>
-            </a:r>
-          </a:p>
-          <a:p>
-            <a:pPr algn="l"/>
-            <a:r>
-              <a:rPr sz="1800" b="0">
-                <a:solidFill>
-                  <a:srgbClr val="1F2937"/>
-                </a:solidFill>
-                <a:latin typeface="Hiragino Mincho ProN"/>
-              </a:rPr>
-              <a:t>    ● 「実際にどの加算で単価を上げられるか」が見える</a:t>
-            </a:r>
-          </a:p>
-          <a:p>
-            <a:pPr algn="l"/>
-            <a:r>
-              <a:rPr sz="1800" b="0">
-                <a:solidFill>
-                  <a:srgbClr val="1F2937"/>
-                </a:solidFill>
-                <a:latin typeface="Hiragino Mincho ProN"/>
-              </a:rPr>
-              <a:t>    ● 診療科横断のベストプラクティス共有が可能に</a:t>
+              <a:t>    ● 不在リスクで稼働率 6pt 下落を防止</a:t>
             </a:r>
           </a:p>
         </p:txBody>
@@ -4914,6 +4743,735 @@
         <p:spPr>
           <a:xfrm>
             <a:off x="0" y="0"/>
+            <a:ext cx="12191695" cy="914400"/>
+          </a:xfrm>
+          <a:prstGeom prst="rect">
+            <a:avLst/>
+          </a:prstGeom>
+          <a:solidFill>
+            <a:srgbClr val="FEF3C7"/>
+          </a:solidFill>
+          <a:ln>
+            <a:noFill/>
+          </a:ln>
+        </p:spPr>
+        <p:style>
+          <a:lnRef idx="1">
+            <a:schemeClr val="accent1"/>
+          </a:lnRef>
+          <a:fillRef idx="3">
+            <a:schemeClr val="accent1"/>
+          </a:fillRef>
+          <a:effectRef idx="2">
+            <a:schemeClr val="accent1"/>
+          </a:effectRef>
+          <a:fontRef idx="minor">
+            <a:schemeClr val="lt1"/>
+          </a:fontRef>
+        </p:style>
+        <p:txBody>
+          <a:bodyPr rtlCol="0" anchor="ctr"/>
+          <a:lstStyle/>
+          <a:p>
+            <a:pPr algn="ctr"/>
+          </a:p>
+        </p:txBody>
+      </p:sp>
+      <p:sp>
+        <p:nvSpPr>
+          <p:cNvPr id="3" name="TextBox 2"/>
+          <p:cNvSpPr txBox="1"/>
+          <p:nvPr/>
+        </p:nvSpPr>
+        <p:spPr>
+          <a:xfrm>
+            <a:off x="457200" y="182880"/>
+            <a:ext cx="11247120" cy="640080"/>
+          </a:xfrm>
+          <a:prstGeom prst="rect">
+            <a:avLst/>
+          </a:prstGeom>
+          <a:noFill/>
+        </p:spPr>
+        <p:txBody>
+          <a:bodyPr wrap="square" anchor="t" lIns="25400" rIns="25400" tIns="25400" bIns="25400">
+            <a:spAutoFit/>
+          </a:bodyPr>
+          <a:lstStyle/>
+          <a:p>
+            <a:pPr algn="l"/>
+            <a:r>
+              <a:rPr sz="2400" b="1">
+                <a:solidFill>
+                  <a:srgbClr val="D97706"/>
+                </a:solidFill>
+                <a:latin typeface="Hiragino Mincho ProN"/>
+              </a:rPr>
+              <a:t>提言 2:  「短期回転推進」ではなく「適切な在院期間管理」</a:t>
+            </a:r>
+          </a:p>
+        </p:txBody>
+      </p:sp>
+      <p:sp>
+        <p:nvSpPr>
+          <p:cNvPr id="4" name="TextBox 3"/>
+          <p:cNvSpPr txBox="1"/>
+          <p:nvPr/>
+        </p:nvSpPr>
+        <p:spPr>
+          <a:xfrm>
+            <a:off x="640080" y="1463040"/>
+            <a:ext cx="10972800" cy="5029200"/>
+          </a:xfrm>
+          <a:prstGeom prst="rect">
+            <a:avLst/>
+          </a:prstGeom>
+          <a:noFill/>
+        </p:spPr>
+        <p:txBody>
+          <a:bodyPr wrap="square">
+            <a:spAutoFit/>
+          </a:bodyPr>
+          <a:lstStyle/>
+          <a:p>
+            <a:pPr algn="l"/>
+            <a:r>
+              <a:rPr sz="1800" b="0">
+                <a:solidFill>
+                  <a:srgbClr val="1F2937"/>
+                </a:solidFill>
+                <a:latin typeface="Hiragino Mincho ProN"/>
+              </a:rPr>
+              <a:t>本解析で「B 群（回復期 6〜14 日）の中心管理が最も粗利貢献が高い」</a:t>
+            </a:r>
+          </a:p>
+          <a:p>
+            <a:pPr algn="l"/>
+            <a:r>
+              <a:rPr sz="1800" b="0">
+                <a:solidFill>
+                  <a:srgbClr val="1F2937"/>
+                </a:solidFill>
+                <a:latin typeface="Hiragino Mincho ProN"/>
+              </a:rPr>
+              <a:t>ことが明確になりました。</a:t>
+            </a:r>
+          </a:p>
+          <a:p>
+            <a:pPr algn="l"/>
+            <a:r>
+              <a:rPr sz="1400" b="0">
+                <a:solidFill>
+                  <a:srgbClr val="1F2937"/>
+                </a:solidFill>
+                <a:latin typeface="Hiragino Mincho ProN"/>
+              </a:rPr>
+              <a:t/>
+            </a:r>
+          </a:p>
+          <a:p>
+            <a:pPr algn="l"/>
+            <a:r>
+              <a:rPr sz="2000" b="1">
+                <a:solidFill>
+                  <a:srgbClr val="1F2937"/>
+                </a:solidFill>
+                <a:latin typeface="Hiragino Mincho ProN"/>
+              </a:rPr>
+              <a:t>運営方針:</a:t>
+            </a:r>
+          </a:p>
+          <a:p>
+            <a:pPr algn="l"/>
+            <a:r>
+              <a:rPr sz="1800" b="0">
+                <a:solidFill>
+                  <a:srgbClr val="1F2937"/>
+                </a:solidFill>
+                <a:latin typeface="Hiragino Mincho ProN"/>
+              </a:rPr>
+              <a:t>    ● 適応のある患者を 6〜14 日の B 群中心で安定管理する文化を強化</a:t>
+            </a:r>
+          </a:p>
+          <a:p>
+            <a:pPr algn="l"/>
+            <a:r>
+              <a:rPr sz="1800" b="0">
+                <a:solidFill>
+                  <a:srgbClr val="1F2937"/>
+                </a:solidFill>
+                <a:latin typeface="Hiragino Mincho ProN"/>
+              </a:rPr>
+              <a:t>    ● C 群（15 日以降）への滞留を抑え、退院支援に注力</a:t>
+            </a:r>
+          </a:p>
+          <a:p>
+            <a:pPr algn="l"/>
+            <a:r>
+              <a:rPr sz="1800" b="0">
+                <a:solidFill>
+                  <a:srgbClr val="1F2937"/>
+                </a:solidFill>
+                <a:latin typeface="Hiragino Mincho ProN"/>
+              </a:rPr>
+              <a:t>    ● A 群（急性期）は本来必要な医療を提供（コスト理由で減らさない）</a:t>
+            </a:r>
+          </a:p>
+          <a:p>
+            <a:pPr algn="l"/>
+            <a:r>
+              <a:rPr sz="1400" b="0">
+                <a:solidFill>
+                  <a:srgbClr val="1F2937"/>
+                </a:solidFill>
+                <a:latin typeface="Hiragino Mincho ProN"/>
+              </a:rPr>
+              <a:t/>
+            </a:r>
+          </a:p>
+          <a:p>
+            <a:pPr algn="l"/>
+            <a:r>
+              <a:rPr sz="1600" b="1">
+                <a:solidFill>
+                  <a:srgbClr val="1F2937"/>
+                </a:solidFill>
+                <a:latin typeface="Hiragino Mincho ProN"/>
+              </a:rPr>
+              <a:t>⚠️ 倫理的配慮:</a:t>
+            </a:r>
+          </a:p>
+          <a:p>
+            <a:pPr algn="l"/>
+            <a:r>
+              <a:rPr sz="1400" b="0">
+                <a:solidFill>
+                  <a:srgbClr val="1F2937"/>
+                </a:solidFill>
+                <a:latin typeface="Hiragino Mincho ProN"/>
+              </a:rPr>
+              <a:t>    患者選別・適応外入院・在院延長を誘発しない設計とする</a:t>
+            </a:r>
+          </a:p>
+          <a:p>
+            <a:pPr algn="l"/>
+            <a:r>
+              <a:rPr sz="1400" b="0">
+                <a:solidFill>
+                  <a:srgbClr val="1F2937"/>
+                </a:solidFill>
+                <a:latin typeface="Hiragino Mincho ProN"/>
+              </a:rPr>
+              <a:t>    「適応のある患者を、適切な期間で治療し、自宅復帰を支援する」が大前提</a:t>
+            </a:r>
+          </a:p>
+        </p:txBody>
+      </p:sp>
+    </p:spTree>
+  </p:cSld>
+  <p:clrMapOvr>
+    <a:masterClrMapping/>
+  </p:clrMapOvr>
+</p:sld>
+</file>
+
+<file path=ppt/slides/slide17.xml><?xml version="1.0" encoding="utf-8"?>
+<p:sld xmlns:a="http://schemas.openxmlformats.org/drawingml/2006/main" xmlns:p="http://schemas.openxmlformats.org/presentationml/2006/main" xmlns:r="http://schemas.openxmlformats.org/officeDocument/2006/relationships">
+  <p:cSld>
+    <p:spTree>
+      <p:nvGrpSpPr>
+        <p:cNvPr id="1" name=""/>
+        <p:cNvGrpSpPr/>
+        <p:nvPr/>
+      </p:nvGrpSpPr>
+      <p:grpSpPr/>
+      <p:sp>
+        <p:nvSpPr>
+          <p:cNvPr id="2" name="Rectangle 1"/>
+          <p:cNvSpPr/>
+          <p:nvPr/>
+        </p:nvSpPr>
+        <p:spPr>
+          <a:xfrm>
+            <a:off x="0" y="0"/>
+            <a:ext cx="12191695" cy="914400"/>
+          </a:xfrm>
+          <a:prstGeom prst="rect">
+            <a:avLst/>
+          </a:prstGeom>
+          <a:solidFill>
+            <a:srgbClr val="EFF6FF"/>
+          </a:solidFill>
+          <a:ln>
+            <a:noFill/>
+          </a:ln>
+        </p:spPr>
+        <p:style>
+          <a:lnRef idx="1">
+            <a:schemeClr val="accent1"/>
+          </a:lnRef>
+          <a:fillRef idx="3">
+            <a:schemeClr val="accent1"/>
+          </a:fillRef>
+          <a:effectRef idx="2">
+            <a:schemeClr val="accent1"/>
+          </a:effectRef>
+          <a:fontRef idx="minor">
+            <a:schemeClr val="lt1"/>
+          </a:fontRef>
+        </p:style>
+        <p:txBody>
+          <a:bodyPr rtlCol="0" anchor="ctr"/>
+          <a:lstStyle/>
+          <a:p>
+            <a:pPr algn="ctr"/>
+          </a:p>
+        </p:txBody>
+      </p:sp>
+      <p:sp>
+        <p:nvSpPr>
+          <p:cNvPr id="3" name="TextBox 2"/>
+          <p:cNvSpPr txBox="1"/>
+          <p:nvPr/>
+        </p:nvSpPr>
+        <p:spPr>
+          <a:xfrm>
+            <a:off x="457200" y="182880"/>
+            <a:ext cx="11247120" cy="640080"/>
+          </a:xfrm>
+          <a:prstGeom prst="rect">
+            <a:avLst/>
+          </a:prstGeom>
+          <a:noFill/>
+        </p:spPr>
+        <p:txBody>
+          <a:bodyPr wrap="square" anchor="t" lIns="25400" rIns="25400" tIns="25400" bIns="25400">
+            <a:spAutoFit/>
+          </a:bodyPr>
+          <a:lstStyle/>
+          <a:p>
+            <a:pPr algn="l"/>
+            <a:r>
+              <a:rPr sz="2600" b="1">
+                <a:solidFill>
+                  <a:srgbClr val="1F2937"/>
+                </a:solidFill>
+                <a:latin typeface="Hiragino Mincho ProN"/>
+              </a:rPr>
+              <a:t>提言 3:  KPI 月次モニタリング体制を確立する</a:t>
+            </a:r>
+          </a:p>
+        </p:txBody>
+      </p:sp>
+      <p:sp>
+        <p:nvSpPr>
+          <p:cNvPr id="4" name="TextBox 3"/>
+          <p:cNvSpPr txBox="1"/>
+          <p:nvPr/>
+        </p:nvSpPr>
+        <p:spPr>
+          <a:xfrm>
+            <a:off x="640080" y="1463040"/>
+            <a:ext cx="10972800" cy="5029200"/>
+          </a:xfrm>
+          <a:prstGeom prst="rect">
+            <a:avLst/>
+          </a:prstGeom>
+          <a:noFill/>
+        </p:spPr>
+        <p:txBody>
+          <a:bodyPr wrap="square">
+            <a:spAutoFit/>
+          </a:bodyPr>
+          <a:lstStyle/>
+          <a:p>
+            <a:pPr algn="l"/>
+            <a:r>
+              <a:rPr sz="2000" b="1">
+                <a:solidFill>
+                  <a:srgbClr val="1F2937"/>
+                </a:solidFill>
+                <a:latin typeface="Hiragino Mincho ProN"/>
+              </a:rPr>
+              <a:t>KPI 設計:</a:t>
+            </a:r>
+          </a:p>
+          <a:p>
+            <a:pPr algn="l"/>
+            <a:r>
+              <a:rPr sz="1800" b="0">
+                <a:solidFill>
+                  <a:srgbClr val="1F2937"/>
+                </a:solidFill>
+                <a:latin typeface="Hiragino Mincho ProN"/>
+              </a:rPr>
+              <a:t>    主指標: 稼働率寄与率（%） — ベッドを埋める量の貢献</a:t>
+            </a:r>
+          </a:p>
+          <a:p>
+            <a:pPr algn="l"/>
+            <a:r>
+              <a:rPr sz="1800" b="0">
+                <a:solidFill>
+                  <a:srgbClr val="1F2937"/>
+                </a:solidFill>
+                <a:latin typeface="Hiragino Mincho ProN"/>
+              </a:rPr>
+              <a:t>    副指標: ベッド粗利単価（円/床日） — 1 床 1 日あたりの運営貢献額</a:t>
+            </a:r>
+          </a:p>
+          <a:p>
+            <a:pPr algn="l"/>
+            <a:r>
+              <a:rPr sz="1800" b="0">
+                <a:solidFill>
+                  <a:srgbClr val="1F2937"/>
+                </a:solidFill>
+                <a:latin typeface="Hiragino Mincho ProN"/>
+              </a:rPr>
+              <a:t>    合成 : 年間粗利 = 主 × 副 × 期間（参考値）</a:t>
+            </a:r>
+          </a:p>
+          <a:p>
+            <a:pPr algn="l"/>
+            <a:r>
+              <a:rPr sz="1400" b="0">
+                <a:solidFill>
+                  <a:srgbClr val="1F2937"/>
+                </a:solidFill>
+                <a:latin typeface="Hiragino Mincho ProN"/>
+              </a:rPr>
+              <a:t/>
+            </a:r>
+          </a:p>
+          <a:p>
+            <a:pPr algn="l"/>
+            <a:r>
+              <a:rPr sz="2000" b="1">
+                <a:solidFill>
+                  <a:srgbClr val="1F2937"/>
+                </a:solidFill>
+                <a:latin typeface="Hiragino Mincho ProN"/>
+              </a:rPr>
+              <a:t>運用方法:</a:t>
+            </a:r>
+          </a:p>
+          <a:p>
+            <a:pPr algn="l"/>
+            <a:r>
+              <a:rPr sz="1800" b="0">
+                <a:solidFill>
+                  <a:srgbClr val="1F2937"/>
+                </a:solidFill>
+                <a:latin typeface="Hiragino Mincho ProN"/>
+              </a:rPr>
+              <a:t>    ● 月次会議で全医師の寄与率・粗利単価を併記表示</a:t>
+            </a:r>
+          </a:p>
+          <a:p>
+            <a:pPr algn="l"/>
+            <a:r>
+              <a:rPr sz="1800" b="0">
+                <a:solidFill>
+                  <a:srgbClr val="1F2937"/>
+                </a:solidFill>
+                <a:latin typeface="Hiragino Mincho ProN"/>
+              </a:rPr>
+              <a:t>    ● 順位ではなく散布図で「タイプ分類」として議論</a:t>
+            </a:r>
+          </a:p>
+          <a:p>
+            <a:pPr algn="l"/>
+            <a:r>
+              <a:rPr sz="1800" b="0">
+                <a:solidFill>
+                  <a:srgbClr val="1F2937"/>
+                </a:solidFill>
+                <a:latin typeface="Hiragino Mincho ProN"/>
+              </a:rPr>
+              <a:t>    ● ベッドコントロールシミュレーターに月次自動更新機能を組込み</a:t>
+            </a:r>
+          </a:p>
+        </p:txBody>
+      </p:sp>
+    </p:spTree>
+  </p:cSld>
+  <p:clrMapOvr>
+    <a:masterClrMapping/>
+  </p:clrMapOvr>
+</p:sld>
+</file>
+
+<file path=ppt/slides/slide18.xml><?xml version="1.0" encoding="utf-8"?>
+<p:sld xmlns:a="http://schemas.openxmlformats.org/drawingml/2006/main" xmlns:p="http://schemas.openxmlformats.org/presentationml/2006/main" xmlns:r="http://schemas.openxmlformats.org/officeDocument/2006/relationships">
+  <p:cSld>
+    <p:spTree>
+      <p:nvGrpSpPr>
+        <p:cNvPr id="1" name=""/>
+        <p:cNvGrpSpPr/>
+        <p:nvPr/>
+      </p:nvGrpSpPr>
+      <p:grpSpPr/>
+      <p:sp>
+        <p:nvSpPr>
+          <p:cNvPr id="2" name="Rectangle 1"/>
+          <p:cNvSpPr/>
+          <p:nvPr/>
+        </p:nvSpPr>
+        <p:spPr>
+          <a:xfrm>
+            <a:off x="0" y="0"/>
+            <a:ext cx="12191695" cy="914400"/>
+          </a:xfrm>
+          <a:prstGeom prst="rect">
+            <a:avLst/>
+          </a:prstGeom>
+          <a:solidFill>
+            <a:srgbClr val="EFF6FF"/>
+          </a:solidFill>
+          <a:ln>
+            <a:noFill/>
+          </a:ln>
+        </p:spPr>
+        <p:style>
+          <a:lnRef idx="1">
+            <a:schemeClr val="accent1"/>
+          </a:lnRef>
+          <a:fillRef idx="3">
+            <a:schemeClr val="accent1"/>
+          </a:fillRef>
+          <a:effectRef idx="2">
+            <a:schemeClr val="accent1"/>
+          </a:effectRef>
+          <a:fontRef idx="minor">
+            <a:schemeClr val="lt1"/>
+          </a:fontRef>
+        </p:style>
+        <p:txBody>
+          <a:bodyPr rtlCol="0" anchor="ctr"/>
+          <a:lstStyle/>
+          <a:p>
+            <a:pPr algn="ctr"/>
+          </a:p>
+        </p:txBody>
+      </p:sp>
+      <p:sp>
+        <p:nvSpPr>
+          <p:cNvPr id="3" name="TextBox 2"/>
+          <p:cNvSpPr txBox="1"/>
+          <p:nvPr/>
+        </p:nvSpPr>
+        <p:spPr>
+          <a:xfrm>
+            <a:off x="457200" y="182880"/>
+            <a:ext cx="11247120" cy="640080"/>
+          </a:xfrm>
+          <a:prstGeom prst="rect">
+            <a:avLst/>
+          </a:prstGeom>
+          <a:noFill/>
+        </p:spPr>
+        <p:txBody>
+          <a:bodyPr wrap="square" anchor="t" lIns="25400" rIns="25400" tIns="25400" bIns="25400">
+            <a:spAutoFit/>
+          </a:bodyPr>
+          <a:lstStyle/>
+          <a:p>
+            <a:pPr algn="l"/>
+            <a:r>
+              <a:rPr sz="2600" b="1">
+                <a:solidFill>
+                  <a:srgbClr val="1F2937"/>
+                </a:solidFill>
+                <a:latin typeface="Hiragino Mincho ProN"/>
+              </a:rPr>
+              <a:t>提言 4:  Stage 2 — リハ加算・処置加算で精緻化</a:t>
+            </a:r>
+          </a:p>
+        </p:txBody>
+      </p:sp>
+      <p:sp>
+        <p:nvSpPr>
+          <p:cNvPr id="4" name="TextBox 3"/>
+          <p:cNvSpPr txBox="1"/>
+          <p:nvPr/>
+        </p:nvSpPr>
+        <p:spPr>
+          <a:xfrm>
+            <a:off x="640080" y="1463040"/>
+            <a:ext cx="10972800" cy="5029200"/>
+          </a:xfrm>
+          <a:prstGeom prst="rect">
+            <a:avLst/>
+          </a:prstGeom>
+          <a:noFill/>
+        </p:spPr>
+        <p:txBody>
+          <a:bodyPr wrap="square">
+            <a:spAutoFit/>
+          </a:bodyPr>
+          <a:lstStyle/>
+          <a:p>
+            <a:pPr algn="l"/>
+            <a:r>
+              <a:rPr sz="2000" b="1">
+                <a:solidFill>
+                  <a:srgbClr val="1F2937"/>
+                </a:solidFill>
+                <a:latin typeface="Hiragino Mincho ProN"/>
+              </a:rPr>
+              <a:t>現状（Stage 1）の限界:</a:t>
+            </a:r>
+          </a:p>
+          <a:p>
+            <a:pPr algn="l"/>
+            <a:r>
+              <a:rPr sz="1800" b="0">
+                <a:solidFill>
+                  <a:srgbClr val="1F2937"/>
+                </a:solidFill>
+                <a:latin typeface="Hiragino Mincho ProN"/>
+              </a:rPr>
+              <a:t>    フェーズ別粗利のみで概算</a:t>
+            </a:r>
+          </a:p>
+          <a:p>
+            <a:pPr algn="l"/>
+            <a:r>
+              <a:rPr sz="1200" b="0">
+                <a:solidFill>
+                  <a:srgbClr val="1F2937"/>
+                </a:solidFill>
+                <a:latin typeface="Hiragino Mincho ProN"/>
+              </a:rPr>
+              <a:t/>
+            </a:r>
+          </a:p>
+          <a:p>
+            <a:pPr algn="l"/>
+            <a:r>
+              <a:rPr sz="2000" b="1">
+                <a:solidFill>
+                  <a:srgbClr val="1F2937"/>
+                </a:solidFill>
+                <a:latin typeface="Hiragino Mincho ProN"/>
+              </a:rPr>
+              <a:t>Stage 2 追加データ要求（事務へ）:</a:t>
+            </a:r>
+          </a:p>
+          <a:p>
+            <a:pPr algn="l"/>
+            <a:r>
+              <a:rPr sz="1800" b="0">
+                <a:solidFill>
+                  <a:srgbClr val="1F2937"/>
+                </a:solidFill>
+                <a:latin typeface="Hiragino Mincho ProN"/>
+              </a:rPr>
+              <a:t>    ● 患者別 月次リハビリ単位数（PT / OT / ST）</a:t>
+            </a:r>
+          </a:p>
+          <a:p>
+            <a:pPr algn="l"/>
+            <a:r>
+              <a:rPr sz="1800" b="0">
+                <a:solidFill>
+                  <a:srgbClr val="1F2937"/>
+                </a:solidFill>
+                <a:latin typeface="Hiragino Mincho ProN"/>
+              </a:rPr>
+              <a:t>    ● 処置加算（中心静脈、人工呼吸器、ドレーン等）</a:t>
+            </a:r>
+          </a:p>
+          <a:p>
+            <a:pPr algn="l"/>
+            <a:r>
+              <a:rPr sz="1800" b="0">
+                <a:solidFill>
+                  <a:srgbClr val="1F2937"/>
+                </a:solidFill>
+                <a:latin typeface="Hiragino Mincho ProN"/>
+              </a:rPr>
+              <a:t>    ● 検査加算・手術料の患者別月次集計</a:t>
+            </a:r>
+          </a:p>
+          <a:p>
+            <a:pPr algn="l"/>
+            <a:r>
+              <a:rPr sz="1400" b="0">
+                <a:solidFill>
+                  <a:srgbClr val="1F2937"/>
+                </a:solidFill>
+                <a:latin typeface="Hiragino Mincho ProN"/>
+              </a:rPr>
+              <a:t/>
+            </a:r>
+          </a:p>
+          <a:p>
+            <a:pPr algn="l"/>
+            <a:r>
+              <a:rPr sz="2000" b="1">
+                <a:solidFill>
+                  <a:srgbClr val="1F2937"/>
+                </a:solidFill>
+                <a:latin typeface="Hiragino Mincho ProN"/>
+              </a:rPr>
+              <a:t>Stage 2 完成後の効果:</a:t>
+            </a:r>
+          </a:p>
+          <a:p>
+            <a:pPr algn="l"/>
+            <a:r>
+              <a:rPr sz="1800" b="0">
+                <a:solidFill>
+                  <a:srgbClr val="1F2937"/>
+                </a:solidFill>
+                <a:latin typeface="Hiragino Mincho ProN"/>
+              </a:rPr>
+              <a:t>    ● 「実際にどの加算で単価を上げられるか」が見える</a:t>
+            </a:r>
+          </a:p>
+          <a:p>
+            <a:pPr algn="l"/>
+            <a:r>
+              <a:rPr sz="1800" b="0">
+                <a:solidFill>
+                  <a:srgbClr val="1F2937"/>
+                </a:solidFill>
+                <a:latin typeface="Hiragino Mincho ProN"/>
+              </a:rPr>
+              <a:t>    ● 診療科横断のベストプラクティス共有が可能に</a:t>
+            </a:r>
+          </a:p>
+        </p:txBody>
+      </p:sp>
+    </p:spTree>
+  </p:cSld>
+  <p:clrMapOvr>
+    <a:masterClrMapping/>
+  </p:clrMapOvr>
+</p:sld>
+</file>
+
+<file path=ppt/slides/slide19.xml><?xml version="1.0" encoding="utf-8"?>
+<p:sld xmlns:a="http://schemas.openxmlformats.org/drawingml/2006/main" xmlns:p="http://schemas.openxmlformats.org/presentationml/2006/main" xmlns:r="http://schemas.openxmlformats.org/officeDocument/2006/relationships">
+  <p:cSld>
+    <p:spTree>
+      <p:nvGrpSpPr>
+        <p:cNvPr id="1" name=""/>
+        <p:cNvGrpSpPr/>
+        <p:nvPr/>
+      </p:nvGrpSpPr>
+      <p:grpSpPr/>
+      <p:sp>
+        <p:nvSpPr>
+          <p:cNvPr id="2" name="Rectangle 1"/>
+          <p:cNvSpPr/>
+          <p:nvPr/>
+        </p:nvSpPr>
+        <p:spPr>
+          <a:xfrm>
+            <a:off x="0" y="0"/>
             <a:ext cx="12191695" cy="6858000"/>
           </a:xfrm>
           <a:prstGeom prst="rect">
@@ -5086,7 +5644,7 @@
             <a:avLst/>
           </a:prstGeom>
           <a:solidFill>
-            <a:srgbClr val="EFF6FF"/>
+            <a:srgbClr val="FEF3C7"/>
           </a:solidFill>
           <a:ln>
             <a:noFill/>
@@ -5157,8 +5715,8 @@
         </p:nvSpPr>
         <p:spPr>
           <a:xfrm>
-            <a:off x="640080" y="1280160"/>
-            <a:ext cx="10972800" cy="5303520"/>
+            <a:off x="640080" y="1188720"/>
+            <a:ext cx="10972800" cy="5486400"/>
           </a:xfrm>
           <a:prstGeom prst="rect">
             <a:avLst/>
@@ -5179,25 +5737,25 @@
                 </a:solidFill>
                 <a:latin typeface="Hiragino Mincho ProN"/>
               </a:rPr>
-              <a:t>①  稼働率寄与率は病院収益と極めて強く相関（r = 0.96）</a:t>
-            </a:r>
-          </a:p>
-          <a:p>
-            <a:pPr algn="l"/>
-            <a:r>
-              <a:rPr sz="1600" b="0">
-                <a:solidFill>
-                  <a:srgbClr val="1F2937"/>
-                </a:solidFill>
-                <a:latin typeface="Hiragino Mincho ProN"/>
-              </a:rPr>
-              <a:t>    → 稼働率寄与率を主指標にすれば収益の 92% を説明できる</a:t>
-            </a:r>
-          </a:p>
-          <a:p>
-            <a:pPr algn="l"/>
-            <a:r>
-              <a:rPr sz="1000" b="0">
+              <a:t>①  ベッド粗利単価の正しい順位は B（32,500）＞ C（31,000）＞ A（26,500）</a:t>
+            </a:r>
+          </a:p>
+          <a:p>
+            <a:pPr algn="l"/>
+            <a:r>
+              <a:rPr sz="1500" b="0">
+                <a:solidFill>
+                  <a:srgbClr val="1F2937"/>
+                </a:solidFill>
+                <a:latin typeface="Hiragino Mincho ProN"/>
+              </a:rPr>
+              <a:t>    → 「短期回転＝経営貢献大」は誤り。コストを差し引いた粗利では B 群最高</a:t>
+            </a:r>
+          </a:p>
+          <a:p>
+            <a:pPr algn="l"/>
+            <a:r>
+              <a:rPr sz="800" b="0">
                 <a:solidFill>
                   <a:srgbClr val="1F2937"/>
                 </a:solidFill>
@@ -5215,25 +5773,25 @@
                 </a:solidFill>
                 <a:latin typeface="Hiragino Mincho ProN"/>
               </a:rPr>
-              <a:t>②  6F 病棟は上位 3 名で 55% を担う健全な分散構造</a:t>
-            </a:r>
-          </a:p>
-          <a:p>
-            <a:pPr algn="l"/>
-            <a:r>
-              <a:rPr sz="1600" b="0">
-                <a:solidFill>
-                  <a:srgbClr val="1F2937"/>
-                </a:solidFill>
-                <a:latin typeface="Hiragino Mincho ProN"/>
-              </a:rPr>
-              <a:t>    → 特定医師の不在リスクは相対的に小さい</a:t>
-            </a:r>
-          </a:p>
-          <a:p>
-            <a:pPr algn="l"/>
-            <a:r>
-              <a:rPr sz="1000" b="0">
+              <a:t>②  長期入院型（B + C 群偏重）の医師ほど粗利単価が高い</a:t>
+            </a:r>
+          </a:p>
+          <a:p>
+            <a:pPr algn="l"/>
+            <a:r>
+              <a:rPr sz="1500" b="0">
+                <a:solidFill>
+                  <a:srgbClr val="1F2937"/>
+                </a:solidFill>
+                <a:latin typeface="Hiragino Mincho ProN"/>
+              </a:rPr>
+              <a:t>    → 上位 3 医師はいずれも B + C 群比率 80% 超の長期管理型</a:t>
+            </a:r>
+          </a:p>
+          <a:p>
+            <a:pPr algn="l"/>
+            <a:r>
+              <a:rPr sz="800" b="0">
                 <a:solidFill>
                   <a:srgbClr val="1F2937"/>
                 </a:solidFill>
@@ -5251,25 +5809,25 @@
                 </a:solidFill>
                 <a:latin typeface="Hiragino Mincho ProN"/>
               </a:rPr>
-              <a:t>③  5F 病棟は OKUK 1 名で 23.3% を占有 — 構造的リスク</a:t>
-            </a:r>
-          </a:p>
-          <a:p>
-            <a:pPr algn="l"/>
-            <a:r>
-              <a:rPr sz="1600" b="0">
-                <a:solidFill>
-                  <a:srgbClr val="1F2937"/>
-                </a:solidFill>
-                <a:latin typeface="Hiragino Mincho ProN"/>
-              </a:rPr>
-              <a:t>    → OKUK 不在で 5F 稼働率が約 6pt 下がる脆弱性</a:t>
-            </a:r>
-          </a:p>
-          <a:p>
-            <a:pPr algn="l"/>
-            <a:r>
-              <a:rPr sz="1000" b="0">
+              <a:t>③  稼働率寄与率と年間粗利は相関 r = 0.96 で極めて強く連動</a:t>
+            </a:r>
+          </a:p>
+          <a:p>
+            <a:pPr algn="l"/>
+            <a:r>
+              <a:rPr sz="1500" b="0">
+                <a:solidFill>
+                  <a:srgbClr val="1F2937"/>
+                </a:solidFill>
+                <a:latin typeface="Hiragino Mincho ProN"/>
+              </a:rPr>
+              <a:t>    → 主指標を「稼働率寄与率（量）」+「ベッド粗利単価（質）」の 2 軸に</a:t>
+            </a:r>
+          </a:p>
+          <a:p>
+            <a:pPr algn="l"/>
+            <a:r>
+              <a:rPr sz="800" b="0">
                 <a:solidFill>
                   <a:srgbClr val="1F2937"/>
                 </a:solidFill>
@@ -5287,19 +5845,55 @@
                 </a:solidFill>
                 <a:latin typeface="Hiragino Mincho ProN"/>
               </a:rPr>
-              <a:t>④  KPI 月次モニタリング体制の確立を提言</a:t>
-            </a:r>
-          </a:p>
-          <a:p>
-            <a:pPr algn="l"/>
-            <a:r>
-              <a:rPr sz="1600" b="0">
-                <a:solidFill>
-                  <a:srgbClr val="1F2937"/>
-                </a:solidFill>
-                <a:latin typeface="Hiragino Mincho ProN"/>
-              </a:rPr>
-              <a:t>    → 「稼働率寄与率（量）」+「ベッド単価（質）」の 2 軸併記</a:t>
+              <a:t>④  5F 病棟は OKUK 1 名で 23.3% を占有 — 構造的リスク</a:t>
+            </a:r>
+          </a:p>
+          <a:p>
+            <a:pPr algn="l"/>
+            <a:r>
+              <a:rPr sz="1500" b="0">
+                <a:solidFill>
+                  <a:srgbClr val="1F2937"/>
+                </a:solidFill>
+                <a:latin typeface="Hiragino Mincho ProN"/>
+              </a:rPr>
+              <a:t>    → 5F 主治医増員 + バックアップ体制整備を提言</a:t>
+            </a:r>
+          </a:p>
+          <a:p>
+            <a:pPr algn="l"/>
+            <a:r>
+              <a:rPr sz="800" b="0">
+                <a:solidFill>
+                  <a:srgbClr val="1F2937"/>
+                </a:solidFill>
+                <a:latin typeface="Hiragino Mincho ProN"/>
+              </a:rPr>
+              <a:t/>
+            </a:r>
+          </a:p>
+          <a:p>
+            <a:pPr algn="l"/>
+            <a:r>
+              <a:rPr sz="2200" b="1">
+                <a:solidFill>
+                  <a:srgbClr val="1F2937"/>
+                </a:solidFill>
+                <a:latin typeface="Hiragino Mincho ProN"/>
+              </a:rPr>
+              <a:t>⑤  運営方針: 「短期回転推進」ではなく「適切な在院期間管理」</a:t>
+            </a:r>
+          </a:p>
+          <a:p>
+            <a:pPr algn="l"/>
+            <a:r>
+              <a:rPr sz="1500" b="0">
+                <a:solidFill>
+                  <a:srgbClr val="1F2937"/>
+                </a:solidFill>
+                <a:latin typeface="Hiragino Mincho ProN"/>
+              </a:rPr>
+              <a:t>    → 適応のある患者を 6〜14 日（B 群）で安定管理する文化を強化</a:t>
             </a:r>
           </a:p>
         </p:txBody>
@@ -5337,7 +5931,7 @@
             <a:avLst/>
           </a:prstGeom>
           <a:solidFill>
-            <a:srgbClr val="EFF6FF"/>
+            <a:srgbClr val="FEF2F2"/>
           </a:solidFill>
           <a:ln>
             <a:noFill/>
@@ -5391,158 +5985,39 @@
             <a:r>
               <a:rPr sz="2800" b="1">
                 <a:solidFill>
-                  <a:srgbClr val="1F2937"/>
-                </a:solidFill>
-                <a:latin typeface="Hiragino Mincho ProN"/>
-              </a:rPr>
-              <a:t>なぜ「医師別 病棟貢献度」を見える化するのか</a:t>
-            </a:r>
-          </a:p>
-        </p:txBody>
-      </p:sp>
-      <p:sp>
-        <p:nvSpPr>
-          <p:cNvPr id="4" name="TextBox 3"/>
-          <p:cNvSpPr txBox="1"/>
-          <p:nvPr/>
-        </p:nvSpPr>
-        <p:spPr>
-          <a:xfrm>
-            <a:off x="640080" y="1280160"/>
-            <a:ext cx="10972800" cy="4572000"/>
-          </a:xfrm>
-          <a:prstGeom prst="rect">
-            <a:avLst/>
-          </a:prstGeom>
-          <a:noFill/>
-        </p:spPr>
-        <p:txBody>
-          <a:bodyPr wrap="square">
-            <a:spAutoFit/>
-          </a:bodyPr>
-          <a:lstStyle/>
-          <a:p>
-            <a:pPr algn="l"/>
-            <a:r>
-              <a:rPr sz="1800" b="1">
-                <a:solidFill>
-                  <a:srgbClr val="1F2937"/>
-                </a:solidFill>
-                <a:latin typeface="Hiragino Mincho ProN"/>
-              </a:rPr>
-              <a:t>● 病棟稼働率は施設基準（地域包括医療病棟は 90%）達成のための最重要指標</a:t>
-            </a:r>
-          </a:p>
-          <a:p>
-            <a:pPr algn="l"/>
-            <a:r>
-              <a:rPr sz="800" b="0">
-                <a:solidFill>
-                  <a:srgbClr val="1F2937"/>
-                </a:solidFill>
-                <a:latin typeface="Hiragino Mincho ProN"/>
-              </a:rPr>
-              <a:t/>
-            </a:r>
-          </a:p>
-          <a:p>
-            <a:pPr algn="l"/>
-            <a:r>
-              <a:rPr sz="1800" b="0">
-                <a:solidFill>
-                  <a:srgbClr val="1F2937"/>
-                </a:solidFill>
-                <a:latin typeface="Hiragino Mincho ProN"/>
-              </a:rPr>
-              <a:t>● しかし「稼働率は副院長の責任」と属人化されがち</a:t>
-            </a:r>
-          </a:p>
-          <a:p>
-            <a:pPr algn="l"/>
-            <a:r>
-              <a:rPr sz="800" b="0">
-                <a:solidFill>
-                  <a:srgbClr val="1F2937"/>
-                </a:solidFill>
-                <a:latin typeface="Hiragino Mincho ProN"/>
-              </a:rPr>
-              <a:t/>
-            </a:r>
-          </a:p>
-          <a:p>
-            <a:pPr algn="l"/>
-            <a:r>
-              <a:rPr sz="1800" b="1">
-                <a:solidFill>
-                  <a:srgbClr val="1F2937"/>
-                </a:solidFill>
-                <a:latin typeface="Hiragino Mincho ProN"/>
-              </a:rPr>
-              <a:t>● 実態は各主治医の入院・在院・退院判断の総和が病棟稼働率を作る</a:t>
-            </a:r>
-          </a:p>
-          <a:p>
-            <a:pPr algn="l"/>
-            <a:r>
-              <a:rPr sz="1600" b="0">
-                <a:solidFill>
-                  <a:srgbClr val="1F2937"/>
-                </a:solidFill>
-                <a:latin typeface="Hiragino Mincho ProN"/>
-              </a:rPr>
-              <a:t/>
-            </a:r>
-          </a:p>
-          <a:p>
-            <a:pPr algn="l"/>
-            <a:r>
-              <a:rPr sz="2000" b="1">
-                <a:solidFill>
-                  <a:srgbClr val="1F2937"/>
-                </a:solidFill>
-                <a:latin typeface="Hiragino Mincho ProN"/>
-              </a:rPr>
-              <a:t>本資料の 3 つの問い:</a:t>
-            </a:r>
-          </a:p>
-          <a:p>
-            <a:pPr algn="l"/>
-            <a:r>
-              <a:rPr sz="1700" b="0">
-                <a:solidFill>
-                  <a:srgbClr val="1F2937"/>
-                </a:solidFill>
-                <a:latin typeface="Hiragino Mincho ProN"/>
-              </a:rPr>
-              <a:t>    1. 各医師が病棟稼働率をどれだけ支えているか？</a:t>
-            </a:r>
-          </a:p>
-          <a:p>
-            <a:pPr algn="l"/>
-            <a:r>
-              <a:rPr sz="1700" b="0">
-                <a:solidFill>
-                  <a:srgbClr val="1F2937"/>
-                </a:solidFill>
-                <a:latin typeface="Hiragino Mincho ProN"/>
-              </a:rPr>
-              <a:t>    2. それは病院収益にどう結びついているか？</a:t>
-            </a:r>
-          </a:p>
-          <a:p>
-            <a:pPr algn="l"/>
-            <a:r>
-              <a:rPr sz="1700" b="0">
-                <a:solidFill>
-                  <a:srgbClr val="1F2937"/>
-                </a:solidFill>
-                <a:latin typeface="Hiragino Mincho ProN"/>
-              </a:rPr>
-              <a:t>    3. 構造的なリスク（特定医師への依存など）はないか？</a:t>
-            </a:r>
-          </a:p>
-        </p:txBody>
-      </p:sp>
+                  <a:srgbClr val="DC2626"/>
+                </a:solidFill>
+                <a:latin typeface="Hiragino Mincho ProN"/>
+              </a:rPr>
+              <a:t>重要: 「報酬」ではなく「粗利」で評価する</a:t>
+            </a:r>
+          </a:p>
+        </p:txBody>
+      </p:sp>
+      <p:pic>
+        <p:nvPicPr>
+          <p:cNvPr id="4" name="Picture 3" descr="06_misconception_named.png"/>
+          <p:cNvPicPr>
+            <a:picLocks noChangeAspect="1"/>
+          </p:cNvPicPr>
+          <p:nvPr/>
+        </p:nvPicPr>
+        <p:blipFill>
+          <a:blip r:embed="rId2"/>
+          <a:stretch>
+            <a:fillRect/>
+          </a:stretch>
+        </p:blipFill>
+        <p:spPr>
+          <a:xfrm>
+            <a:off x="457200" y="1097280"/>
+            <a:ext cx="11247120" cy="5437283"/>
+          </a:xfrm>
+          <a:prstGeom prst="rect">
+            <a:avLst/>
+          </a:prstGeom>
+        </p:spPr>
+      </p:pic>
       <p:sp>
         <p:nvSpPr>
           <p:cNvPr id="5" name="Rectangle 4"/>
@@ -5551,14 +6026,14 @@
         </p:nvSpPr>
         <p:spPr>
           <a:xfrm>
-            <a:off x="640080" y="5852160"/>
+            <a:off x="640080" y="5943600"/>
             <a:ext cx="10972800" cy="731520"/>
           </a:xfrm>
           <a:prstGeom prst="rect">
             <a:avLst/>
           </a:prstGeom>
           <a:solidFill>
-            <a:srgbClr val="FEF2F2"/>
+            <a:srgbClr val="ECFDF5"/>
           </a:solidFill>
           <a:ln>
             <a:noFill/>
@@ -5594,8 +6069,8 @@
         </p:nvSpPr>
         <p:spPr>
           <a:xfrm>
-            <a:off x="822960" y="5943600"/>
-            <a:ext cx="10607040" cy="548640"/>
+            <a:off x="822960" y="6080760"/>
+            <a:ext cx="10607040" cy="457200"/>
           </a:xfrm>
           <a:prstGeom prst="rect">
             <a:avLst/>
@@ -5610,13 +6085,13 @@
           <a:p>
             <a:pPr algn="l"/>
             <a:r>
-              <a:rPr sz="1400" b="1">
-                <a:solidFill>
-                  <a:srgbClr val="DC2626"/>
-                </a:solidFill>
-                <a:latin typeface="Hiragino Mincho ProN"/>
-              </a:rPr>
-              <a:t>📌 大前提: 個別医師の評価ではなく、病棟運営の構造把握を目的とします</a:t>
+              <a:rPr sz="1600" b="1">
+                <a:solidFill>
+                  <a:srgbClr val="10B981"/>
+                </a:solidFill>
+                <a:latin typeface="Hiragino Mincho ProN"/>
+              </a:rPr>
+              <a:t>✅ 正しい認識: コストを差し引くと B 群（回復期）が最高、A 群（急性期）が最低</a:t>
             </a:r>
           </a:p>
         </p:txBody>
@@ -5706,70 +6181,27 @@
           <a:p>
             <a:pPr algn="l"/>
             <a:r>
-              <a:rPr sz="3200" b="1">
-                <a:solidFill>
-                  <a:srgbClr val="1F2937"/>
-                </a:solidFill>
-                <a:latin typeface="Hiragino Mincho ProN"/>
-              </a:rPr>
-              <a:t>データ概要</a:t>
-            </a:r>
-          </a:p>
-        </p:txBody>
-      </p:sp>
-      <p:sp>
-        <p:nvSpPr>
-          <p:cNvPr id="4" name="Rectangle 3"/>
-          <p:cNvSpPr/>
-          <p:nvPr/>
-        </p:nvSpPr>
-        <p:spPr>
-          <a:xfrm>
-            <a:off x="457200" y="1371600"/>
-            <a:ext cx="2651760" cy="2286000"/>
-          </a:xfrm>
-          <a:prstGeom prst="rect">
-            <a:avLst/>
-          </a:prstGeom>
-          <a:solidFill>
-            <a:srgbClr val="EFF6FF"/>
-          </a:solidFill>
-          <a:ln>
-            <a:noFill/>
-          </a:ln>
-        </p:spPr>
-        <p:style>
-          <a:lnRef idx="1">
-            <a:schemeClr val="accent1"/>
-          </a:lnRef>
-          <a:fillRef idx="3">
-            <a:schemeClr val="accent1"/>
-          </a:fillRef>
-          <a:effectRef idx="2">
-            <a:schemeClr val="accent1"/>
-          </a:effectRef>
-          <a:fontRef idx="minor">
-            <a:schemeClr val="lt1"/>
-          </a:fontRef>
-        </p:style>
-        <p:txBody>
-          <a:bodyPr rtlCol="0" anchor="ctr"/>
-          <a:lstStyle/>
-          <a:p>
-            <a:pPr algn="ctr"/>
-          </a:p>
-        </p:txBody>
-      </p:sp>
-      <p:sp>
-        <p:nvSpPr>
-          <p:cNvPr id="5" name="TextBox 4"/>
+              <a:rPr sz="2800" b="1">
+                <a:solidFill>
+                  <a:srgbClr val="1F2937"/>
+                </a:solidFill>
+                <a:latin typeface="Hiragino Mincho ProN"/>
+              </a:rPr>
+              <a:t>なぜ「医師別 病棟貢献度」を見える化するのか</a:t>
+            </a:r>
+          </a:p>
+        </p:txBody>
+      </p:sp>
+      <p:sp>
+        <p:nvSpPr>
+          <p:cNvPr id="4" name="TextBox 3"/>
           <p:cNvSpPr txBox="1"/>
           <p:nvPr/>
         </p:nvSpPr>
         <p:spPr>
           <a:xfrm>
-            <a:off x="457200" y="1554480"/>
-            <a:ext cx="2651760" cy="457200"/>
+            <a:off x="640080" y="1280160"/>
+            <a:ext cx="10972800" cy="4572000"/>
           </a:xfrm>
           <a:prstGeom prst="rect">
             <a:avLst/>
@@ -5777,618 +6209,118 @@
           <a:noFill/>
         </p:spPr>
         <p:txBody>
-          <a:bodyPr wrap="square" anchor="t" lIns="25400" rIns="25400" tIns="25400" bIns="25400">
+          <a:bodyPr wrap="square">
             <a:spAutoFit/>
           </a:bodyPr>
           <a:lstStyle/>
           <a:p>
-            <a:pPr algn="ctr"/>
-            <a:r>
-              <a:rPr sz="1400" b="0">
-                <a:solidFill>
-                  <a:srgbClr val="6B7280"/>
-                </a:solidFill>
-                <a:latin typeface="Hiragino Mincho ProN"/>
-              </a:rPr>
-              <a:t>対象期間</a:t>
-            </a:r>
-          </a:p>
-        </p:txBody>
-      </p:sp>
-      <p:sp>
-        <p:nvSpPr>
-          <p:cNvPr id="6" name="TextBox 5"/>
-          <p:cNvSpPr txBox="1"/>
-          <p:nvPr/>
-        </p:nvSpPr>
-        <p:spPr>
-          <a:xfrm>
-            <a:off x="457200" y="2011680"/>
-            <a:ext cx="2651760" cy="1097280"/>
-          </a:xfrm>
-          <a:prstGeom prst="rect">
-            <a:avLst/>
-          </a:prstGeom>
-          <a:noFill/>
-        </p:spPr>
-        <p:txBody>
-          <a:bodyPr wrap="square" anchor="t" lIns="25400" rIns="25400" tIns="25400" bIns="25400">
-            <a:spAutoFit/>
-          </a:bodyPr>
-          <a:lstStyle/>
-          <a:p>
-            <a:pPr algn="ctr"/>
-            <a:r>
-              <a:rPr sz="3600" b="1">
-                <a:solidFill>
-                  <a:srgbClr val="2563EB"/>
-                </a:solidFill>
-                <a:latin typeface="Hiragino Mincho ProN"/>
-              </a:rPr>
-              <a:t>13 ヶ月</a:t>
-            </a:r>
-          </a:p>
-        </p:txBody>
-      </p:sp>
-      <p:sp>
-        <p:nvSpPr>
-          <p:cNvPr id="7" name="TextBox 6"/>
-          <p:cNvSpPr txBox="1"/>
-          <p:nvPr/>
-        </p:nvSpPr>
-        <p:spPr>
-          <a:xfrm>
-            <a:off x="457200" y="3154680"/>
-            <a:ext cx="2651760" cy="457200"/>
-          </a:xfrm>
-          <a:prstGeom prst="rect">
-            <a:avLst/>
-          </a:prstGeom>
-          <a:noFill/>
-        </p:spPr>
-        <p:txBody>
-          <a:bodyPr wrap="square" anchor="t" lIns="25400" rIns="25400" tIns="25400" bIns="25400">
-            <a:spAutoFit/>
-          </a:bodyPr>
-          <a:lstStyle/>
-          <a:p>
-            <a:pPr algn="ctr"/>
-            <a:r>
-              <a:rPr sz="1200" b="0">
-                <a:solidFill>
-                  <a:srgbClr val="6B7280"/>
-                </a:solidFill>
-                <a:latin typeface="Hiragino Mincho ProN"/>
-              </a:rPr>
-              <a:t>2025-04 〜 2026-04</a:t>
-            </a:r>
-          </a:p>
-        </p:txBody>
-      </p:sp>
-      <p:sp>
-        <p:nvSpPr>
-          <p:cNvPr id="8" name="Rectangle 7"/>
+            <a:pPr algn="l"/>
+            <a:r>
+              <a:rPr sz="1800" b="1">
+                <a:solidFill>
+                  <a:srgbClr val="1F2937"/>
+                </a:solidFill>
+                <a:latin typeface="Hiragino Mincho ProN"/>
+              </a:rPr>
+              <a:t>● 病棟稼働率は施設基準（地域包括医療病棟は 90%）達成のための最重要指標</a:t>
+            </a:r>
+          </a:p>
+          <a:p>
+            <a:pPr algn="l"/>
+            <a:r>
+              <a:rPr sz="800" b="0">
+                <a:solidFill>
+                  <a:srgbClr val="1F2937"/>
+                </a:solidFill>
+                <a:latin typeface="Hiragino Mincho ProN"/>
+              </a:rPr>
+              <a:t/>
+            </a:r>
+          </a:p>
+          <a:p>
+            <a:pPr algn="l"/>
+            <a:r>
+              <a:rPr sz="1800" b="0">
+                <a:solidFill>
+                  <a:srgbClr val="1F2937"/>
+                </a:solidFill>
+                <a:latin typeface="Hiragino Mincho ProN"/>
+              </a:rPr>
+              <a:t>● 実態は各主治医の入院・在院・退院判断の総和が病棟稼働率を作る</a:t>
+            </a:r>
+          </a:p>
+          <a:p>
+            <a:pPr algn="l"/>
+            <a:r>
+              <a:rPr sz="1600" b="0">
+                <a:solidFill>
+                  <a:srgbClr val="1F2937"/>
+                </a:solidFill>
+                <a:latin typeface="Hiragino Mincho ProN"/>
+              </a:rPr>
+              <a:t/>
+            </a:r>
+          </a:p>
+          <a:p>
+            <a:pPr algn="l"/>
+            <a:r>
+              <a:rPr sz="2000" b="1">
+                <a:solidFill>
+                  <a:srgbClr val="1F2937"/>
+                </a:solidFill>
+                <a:latin typeface="Hiragino Mincho ProN"/>
+              </a:rPr>
+              <a:t>本資料の 3 つの問い:</a:t>
+            </a:r>
+          </a:p>
+          <a:p>
+            <a:pPr algn="l"/>
+            <a:r>
+              <a:rPr sz="1700" b="0">
+                <a:solidFill>
+                  <a:srgbClr val="1F2937"/>
+                </a:solidFill>
+                <a:latin typeface="Hiragino Mincho ProN"/>
+              </a:rPr>
+              <a:t>    1. 各医師が病棟稼働率をどれだけ支えているか？</a:t>
+            </a:r>
+          </a:p>
+          <a:p>
+            <a:pPr algn="l"/>
+            <a:r>
+              <a:rPr sz="1700" b="0">
+                <a:solidFill>
+                  <a:srgbClr val="1F2937"/>
+                </a:solidFill>
+                <a:latin typeface="Hiragino Mincho ProN"/>
+              </a:rPr>
+              <a:t>    2. それは病院収益（粗利＝運営貢献額）にどう結びついているか？</a:t>
+            </a:r>
+          </a:p>
+          <a:p>
+            <a:pPr algn="l"/>
+            <a:r>
+              <a:rPr sz="1700" b="0">
+                <a:solidFill>
+                  <a:srgbClr val="1F2937"/>
+                </a:solidFill>
+                <a:latin typeface="Hiragino Mincho ProN"/>
+              </a:rPr>
+              <a:t>    3. 構造的なリスク（特定医師への依存など）はないか？</a:t>
+            </a:r>
+          </a:p>
+        </p:txBody>
+      </p:sp>
+      <p:sp>
+        <p:nvSpPr>
+          <p:cNvPr id="5" name="Rectangle 4"/>
           <p:cNvSpPr/>
           <p:nvPr/>
         </p:nvSpPr>
         <p:spPr>
           <a:xfrm>
-            <a:off x="3291840" y="1371600"/>
-            <a:ext cx="2651760" cy="2286000"/>
-          </a:xfrm>
-          <a:prstGeom prst="rect">
-            <a:avLst/>
-          </a:prstGeom>
-          <a:solidFill>
-            <a:srgbClr val="EFF6FF"/>
-          </a:solidFill>
-          <a:ln>
-            <a:noFill/>
-          </a:ln>
-        </p:spPr>
-        <p:style>
-          <a:lnRef idx="1">
-            <a:schemeClr val="accent1"/>
-          </a:lnRef>
-          <a:fillRef idx="3">
-            <a:schemeClr val="accent1"/>
-          </a:fillRef>
-          <a:effectRef idx="2">
-            <a:schemeClr val="accent1"/>
-          </a:effectRef>
-          <a:fontRef idx="minor">
-            <a:schemeClr val="lt1"/>
-          </a:fontRef>
-        </p:style>
-        <p:txBody>
-          <a:bodyPr rtlCol="0" anchor="ctr"/>
-          <a:lstStyle/>
-          <a:p>
-            <a:pPr algn="ctr"/>
-          </a:p>
-        </p:txBody>
-      </p:sp>
-      <p:sp>
-        <p:nvSpPr>
-          <p:cNvPr id="9" name="TextBox 8"/>
-          <p:cNvSpPr txBox="1"/>
-          <p:nvPr/>
-        </p:nvSpPr>
-        <p:spPr>
-          <a:xfrm>
-            <a:off x="3291840" y="1554480"/>
-            <a:ext cx="2651760" cy="457200"/>
-          </a:xfrm>
-          <a:prstGeom prst="rect">
-            <a:avLst/>
-          </a:prstGeom>
-          <a:noFill/>
-        </p:spPr>
-        <p:txBody>
-          <a:bodyPr wrap="square" anchor="t" lIns="25400" rIns="25400" tIns="25400" bIns="25400">
-            <a:spAutoFit/>
-          </a:bodyPr>
-          <a:lstStyle/>
-          <a:p>
-            <a:pPr algn="ctr"/>
-            <a:r>
-              <a:rPr sz="1400" b="0">
-                <a:solidFill>
-                  <a:srgbClr val="6B7280"/>
-                </a:solidFill>
-                <a:latin typeface="Hiragino Mincho ProN"/>
-              </a:rPr>
-              <a:t>入院件数</a:t>
-            </a:r>
-          </a:p>
-        </p:txBody>
-      </p:sp>
-      <p:sp>
-        <p:nvSpPr>
-          <p:cNvPr id="10" name="TextBox 9"/>
-          <p:cNvSpPr txBox="1"/>
-          <p:nvPr/>
-        </p:nvSpPr>
-        <p:spPr>
-          <a:xfrm>
-            <a:off x="3291840" y="2011680"/>
-            <a:ext cx="2651760" cy="1097280"/>
-          </a:xfrm>
-          <a:prstGeom prst="rect">
-            <a:avLst/>
-          </a:prstGeom>
-          <a:noFill/>
-        </p:spPr>
-        <p:txBody>
-          <a:bodyPr wrap="square" anchor="t" lIns="25400" rIns="25400" tIns="25400" bIns="25400">
-            <a:spAutoFit/>
-          </a:bodyPr>
-          <a:lstStyle/>
-          <a:p>
-            <a:pPr algn="ctr"/>
-            <a:r>
-              <a:rPr sz="3600" b="1">
-                <a:solidFill>
-                  <a:srgbClr val="2563EB"/>
-                </a:solidFill>
-                <a:latin typeface="Hiragino Mincho ProN"/>
-              </a:rPr>
-              <a:t>1,960 件</a:t>
-            </a:r>
-          </a:p>
-        </p:txBody>
-      </p:sp>
-      <p:sp>
-        <p:nvSpPr>
-          <p:cNvPr id="11" name="TextBox 10"/>
-          <p:cNvSpPr txBox="1"/>
-          <p:nvPr/>
-        </p:nvSpPr>
-        <p:spPr>
-          <a:xfrm>
-            <a:off x="3291840" y="3154680"/>
-            <a:ext cx="2651760" cy="457200"/>
-          </a:xfrm>
-          <a:prstGeom prst="rect">
-            <a:avLst/>
-          </a:prstGeom>
-          <a:noFill/>
-        </p:spPr>
-        <p:txBody>
-          <a:bodyPr wrap="square" anchor="t" lIns="25400" rIns="25400" tIns="25400" bIns="25400">
-            <a:spAutoFit/>
-          </a:bodyPr>
-          <a:lstStyle/>
-          <a:p>
-            <a:pPr algn="ctr"/>
-            <a:r>
-              <a:rPr sz="1200" b="0">
-                <a:solidFill>
-                  <a:srgbClr val="6B7280"/>
-                </a:solidFill>
-                <a:latin typeface="Hiragino Mincho ProN"/>
-              </a:rPr>
-              <a:t>事務提供 CSV</a:t>
-            </a:r>
-          </a:p>
-        </p:txBody>
-      </p:sp>
-      <p:sp>
-        <p:nvSpPr>
-          <p:cNvPr id="12" name="Rectangle 11"/>
-          <p:cNvSpPr/>
-          <p:nvPr/>
-        </p:nvSpPr>
-        <p:spPr>
-          <a:xfrm>
-            <a:off x="6126480" y="1371600"/>
-            <a:ext cx="2651760" cy="2286000"/>
-          </a:xfrm>
-          <a:prstGeom prst="rect">
-            <a:avLst/>
-          </a:prstGeom>
-          <a:solidFill>
-            <a:srgbClr val="EFF6FF"/>
-          </a:solidFill>
-          <a:ln>
-            <a:noFill/>
-          </a:ln>
-        </p:spPr>
-        <p:style>
-          <a:lnRef idx="1">
-            <a:schemeClr val="accent1"/>
-          </a:lnRef>
-          <a:fillRef idx="3">
-            <a:schemeClr val="accent1"/>
-          </a:fillRef>
-          <a:effectRef idx="2">
-            <a:schemeClr val="accent1"/>
-          </a:effectRef>
-          <a:fontRef idx="minor">
-            <a:schemeClr val="lt1"/>
-          </a:fontRef>
-        </p:style>
-        <p:txBody>
-          <a:bodyPr rtlCol="0" anchor="ctr"/>
-          <a:lstStyle/>
-          <a:p>
-            <a:pPr algn="ctr"/>
-          </a:p>
-        </p:txBody>
-      </p:sp>
-      <p:sp>
-        <p:nvSpPr>
-          <p:cNvPr id="13" name="TextBox 12"/>
-          <p:cNvSpPr txBox="1"/>
-          <p:nvPr/>
-        </p:nvSpPr>
-        <p:spPr>
-          <a:xfrm>
-            <a:off x="6126480" y="1554480"/>
-            <a:ext cx="2651760" cy="457200"/>
-          </a:xfrm>
-          <a:prstGeom prst="rect">
-            <a:avLst/>
-          </a:prstGeom>
-          <a:noFill/>
-        </p:spPr>
-        <p:txBody>
-          <a:bodyPr wrap="square" anchor="t" lIns="25400" rIns="25400" tIns="25400" bIns="25400">
-            <a:spAutoFit/>
-          </a:bodyPr>
-          <a:lstStyle/>
-          <a:p>
-            <a:pPr algn="ctr"/>
-            <a:r>
-              <a:rPr sz="1400" b="0">
-                <a:solidFill>
-                  <a:srgbClr val="6B7280"/>
-                </a:solidFill>
-                <a:latin typeface="Hiragino Mincho ProN"/>
-              </a:rPr>
-              <a:t>対象医師</a:t>
-            </a:r>
-          </a:p>
-        </p:txBody>
-      </p:sp>
-      <p:sp>
-        <p:nvSpPr>
-          <p:cNvPr id="14" name="TextBox 13"/>
-          <p:cNvSpPr txBox="1"/>
-          <p:nvPr/>
-        </p:nvSpPr>
-        <p:spPr>
-          <a:xfrm>
-            <a:off x="6126480" y="2011680"/>
-            <a:ext cx="2651760" cy="1097280"/>
-          </a:xfrm>
-          <a:prstGeom prst="rect">
-            <a:avLst/>
-          </a:prstGeom>
-          <a:noFill/>
-        </p:spPr>
-        <p:txBody>
-          <a:bodyPr wrap="square" anchor="t" lIns="25400" rIns="25400" tIns="25400" bIns="25400">
-            <a:spAutoFit/>
-          </a:bodyPr>
-          <a:lstStyle/>
-          <a:p>
-            <a:pPr algn="ctr"/>
-            <a:r>
-              <a:rPr sz="3600" b="1">
-                <a:solidFill>
-                  <a:srgbClr val="2563EB"/>
-                </a:solidFill>
-                <a:latin typeface="Hiragino Mincho ProN"/>
-              </a:rPr>
-              <a:t>14 名</a:t>
-            </a:r>
-          </a:p>
-        </p:txBody>
-      </p:sp>
-      <p:sp>
-        <p:nvSpPr>
-          <p:cNvPr id="15" name="TextBox 14"/>
-          <p:cNvSpPr txBox="1"/>
-          <p:nvPr/>
-        </p:nvSpPr>
-        <p:spPr>
-          <a:xfrm>
-            <a:off x="6126480" y="3154680"/>
-            <a:ext cx="2651760" cy="457200"/>
-          </a:xfrm>
-          <a:prstGeom prst="rect">
-            <a:avLst/>
-          </a:prstGeom>
-          <a:noFill/>
-        </p:spPr>
-        <p:txBody>
-          <a:bodyPr wrap="square" anchor="t" lIns="25400" rIns="25400" tIns="25400" bIns="25400">
-            <a:spAutoFit/>
-          </a:bodyPr>
-          <a:lstStyle/>
-          <a:p>
-            <a:pPr algn="ctr"/>
-            <a:r>
-              <a:rPr sz="1200" b="0">
-                <a:solidFill>
-                  <a:srgbClr val="6B7280"/>
-                </a:solidFill>
-                <a:latin typeface="Hiragino Mincho ProN"/>
-              </a:rPr>
-              <a:t>件数 10 以上</a:t>
-            </a:r>
-          </a:p>
-        </p:txBody>
-      </p:sp>
-      <p:sp>
-        <p:nvSpPr>
-          <p:cNvPr id="16" name="Rectangle 15"/>
-          <p:cNvSpPr/>
-          <p:nvPr/>
-        </p:nvSpPr>
-        <p:spPr>
-          <a:xfrm>
-            <a:off x="8961120" y="1371600"/>
-            <a:ext cx="2651760" cy="2286000"/>
-          </a:xfrm>
-          <a:prstGeom prst="rect">
-            <a:avLst/>
-          </a:prstGeom>
-          <a:solidFill>
-            <a:srgbClr val="EFF6FF"/>
-          </a:solidFill>
-          <a:ln>
-            <a:noFill/>
-          </a:ln>
-        </p:spPr>
-        <p:style>
-          <a:lnRef idx="1">
-            <a:schemeClr val="accent1"/>
-          </a:lnRef>
-          <a:fillRef idx="3">
-            <a:schemeClr val="accent1"/>
-          </a:fillRef>
-          <a:effectRef idx="2">
-            <a:schemeClr val="accent1"/>
-          </a:effectRef>
-          <a:fontRef idx="minor">
-            <a:schemeClr val="lt1"/>
-          </a:fontRef>
-        </p:style>
-        <p:txBody>
-          <a:bodyPr rtlCol="0" anchor="ctr"/>
-          <a:lstStyle/>
-          <a:p>
-            <a:pPr algn="ctr"/>
-          </a:p>
-        </p:txBody>
-      </p:sp>
-      <p:sp>
-        <p:nvSpPr>
-          <p:cNvPr id="17" name="TextBox 16"/>
-          <p:cNvSpPr txBox="1"/>
-          <p:nvPr/>
-        </p:nvSpPr>
-        <p:spPr>
-          <a:xfrm>
-            <a:off x="8961120" y="1554480"/>
-            <a:ext cx="2651760" cy="457200"/>
-          </a:xfrm>
-          <a:prstGeom prst="rect">
-            <a:avLst/>
-          </a:prstGeom>
-          <a:noFill/>
-        </p:spPr>
-        <p:txBody>
-          <a:bodyPr wrap="square" anchor="t" lIns="25400" rIns="25400" tIns="25400" bIns="25400">
-            <a:spAutoFit/>
-          </a:bodyPr>
-          <a:lstStyle/>
-          <a:p>
-            <a:pPr algn="ctr"/>
-            <a:r>
-              <a:rPr sz="1400" b="0">
-                <a:solidFill>
-                  <a:srgbClr val="6B7280"/>
-                </a:solidFill>
-                <a:latin typeface="Hiragino Mincho ProN"/>
-              </a:rPr>
-              <a:t>総延日数</a:t>
-            </a:r>
-          </a:p>
-        </p:txBody>
-      </p:sp>
-      <p:sp>
-        <p:nvSpPr>
-          <p:cNvPr id="18" name="TextBox 17"/>
-          <p:cNvSpPr txBox="1"/>
-          <p:nvPr/>
-        </p:nvSpPr>
-        <p:spPr>
-          <a:xfrm>
-            <a:off x="8961120" y="2011680"/>
-            <a:ext cx="2651760" cy="1097280"/>
-          </a:xfrm>
-          <a:prstGeom prst="rect">
-            <a:avLst/>
-          </a:prstGeom>
-          <a:noFill/>
-        </p:spPr>
-        <p:txBody>
-          <a:bodyPr wrap="square" anchor="t" lIns="25400" rIns="25400" tIns="25400" bIns="25400">
-            <a:spAutoFit/>
-          </a:bodyPr>
-          <a:lstStyle/>
-          <a:p>
-            <a:pPr algn="ctr"/>
-            <a:r>
-              <a:rPr sz="3600" b="1">
-                <a:solidFill>
-                  <a:srgbClr val="2563EB"/>
-                </a:solidFill>
-                <a:latin typeface="Hiragino Mincho ProN"/>
-              </a:rPr>
-              <a:t>29,690 床日</a:t>
-            </a:r>
-          </a:p>
-        </p:txBody>
-      </p:sp>
-      <p:sp>
-        <p:nvSpPr>
-          <p:cNvPr id="19" name="TextBox 18"/>
-          <p:cNvSpPr txBox="1"/>
-          <p:nvPr/>
-        </p:nvSpPr>
-        <p:spPr>
-          <a:xfrm>
-            <a:off x="8961120" y="3154680"/>
-            <a:ext cx="2651760" cy="457200"/>
-          </a:xfrm>
-          <a:prstGeom prst="rect">
-            <a:avLst/>
-          </a:prstGeom>
-          <a:noFill/>
-        </p:spPr>
-        <p:txBody>
-          <a:bodyPr wrap="square" anchor="t" lIns="25400" rIns="25400" tIns="25400" bIns="25400">
-            <a:spAutoFit/>
-          </a:bodyPr>
-          <a:lstStyle/>
-          <a:p>
-            <a:pPr algn="ctr"/>
-            <a:r>
-              <a:rPr sz="1200" b="0">
-                <a:solidFill>
-                  <a:srgbClr val="6B7280"/>
-                </a:solidFill>
-                <a:latin typeface="Hiragino Mincho ProN"/>
-              </a:rPr>
-              <a:t>5F + 6F 合計</a:t>
-            </a:r>
-          </a:p>
-        </p:txBody>
-      </p:sp>
-      <p:sp>
-        <p:nvSpPr>
-          <p:cNvPr id="20" name="TextBox 19"/>
-          <p:cNvSpPr txBox="1"/>
-          <p:nvPr/>
-        </p:nvSpPr>
-        <p:spPr>
-          <a:xfrm>
-            <a:off x="457200" y="4114800"/>
-            <a:ext cx="11247120" cy="457200"/>
-          </a:xfrm>
-          <a:prstGeom prst="rect">
-            <a:avLst/>
-          </a:prstGeom>
-          <a:noFill/>
-        </p:spPr>
-        <p:txBody>
-          <a:bodyPr wrap="square" anchor="t" lIns="25400" rIns="25400" tIns="25400" bIns="25400">
-            <a:spAutoFit/>
-          </a:bodyPr>
-          <a:lstStyle/>
-          <a:p>
-            <a:pPr algn="l"/>
-            <a:r>
-              <a:rPr sz="1800" b="1">
-                <a:solidFill>
-                  <a:srgbClr val="1F2937"/>
-                </a:solidFill>
-                <a:latin typeface="Hiragino Mincho ProN"/>
-              </a:rPr>
-              <a:t>病棟構成</a:t>
-            </a:r>
-          </a:p>
-        </p:txBody>
-      </p:sp>
-      <p:sp>
-        <p:nvSpPr>
-          <p:cNvPr id="21" name="TextBox 20"/>
-          <p:cNvSpPr txBox="1"/>
-          <p:nvPr/>
-        </p:nvSpPr>
-        <p:spPr>
-          <a:xfrm>
-            <a:off x="640080" y="4572000"/>
-            <a:ext cx="10972800" cy="548640"/>
-          </a:xfrm>
-          <a:prstGeom prst="rect">
-            <a:avLst/>
-          </a:prstGeom>
-          <a:noFill/>
-        </p:spPr>
-        <p:txBody>
-          <a:bodyPr wrap="square" anchor="t" lIns="25400" rIns="25400" tIns="25400" bIns="25400">
-            <a:spAutoFit/>
-          </a:bodyPr>
-          <a:lstStyle/>
-          <a:p>
-            <a:pPr algn="l"/>
-            <a:r>
-              <a:rPr sz="1600" b="0">
-                <a:solidFill>
-                  <a:srgbClr val="1F2937"/>
-                </a:solidFill>
-                <a:latin typeface="Hiragino Mincho ProN"/>
-              </a:rPr>
-              <a:t>5F 病棟 47 床（年間稼働率 84.9%）  /  6F 病棟 47 床（年間稼働率 88.8%）</a:t>
-            </a:r>
-          </a:p>
-        </p:txBody>
-      </p:sp>
-      <p:sp>
-        <p:nvSpPr>
-          <p:cNvPr id="22" name="Rectangle 21"/>
-          <p:cNvSpPr/>
-          <p:nvPr/>
-        </p:nvSpPr>
-        <p:spPr>
-          <a:xfrm>
-            <a:off x="640080" y="5394960"/>
-            <a:ext cx="10972800" cy="1280160"/>
+            <a:off x="640080" y="5852160"/>
+            <a:ext cx="10972800" cy="731520"/>
           </a:xfrm>
           <a:prstGeom prst="rect">
             <a:avLst/>
@@ -6424,14 +6356,14 @@
       </p:sp>
       <p:sp>
         <p:nvSpPr>
-          <p:cNvPr id="23" name="TextBox 22"/>
+          <p:cNvPr id="6" name="TextBox 5"/>
           <p:cNvSpPr txBox="1"/>
           <p:nvPr/>
         </p:nvSpPr>
         <p:spPr>
           <a:xfrm>
-            <a:off x="822960" y="5486400"/>
-            <a:ext cx="10607040" cy="1097280"/>
+            <a:off x="822960" y="5943600"/>
+            <a:ext cx="10607040" cy="548640"/>
           </a:xfrm>
           <a:prstGeom prst="rect">
             <a:avLst/>
@@ -6439,7 +6371,7 @@
           <a:noFill/>
         </p:spPr>
         <p:txBody>
-          <a:bodyPr wrap="square">
+          <a:bodyPr wrap="square" anchor="t" lIns="25400" rIns="25400" tIns="25400" bIns="25400">
             <a:spAutoFit/>
           </a:bodyPr>
           <a:lstStyle/>
@@ -6452,31 +6384,7 @@
                 </a:solidFill>
                 <a:latin typeface="Hiragino Mincho ProN"/>
               </a:rPr>
-              <a:t>⚠️ 本解析の限界（Stage 1）</a:t>
-            </a:r>
-          </a:p>
-          <a:p>
-            <a:pPr algn="l"/>
-            <a:r>
-              <a:rPr sz="1200" b="0">
-                <a:solidFill>
-                  <a:srgbClr val="DC2626"/>
-                </a:solidFill>
-                <a:latin typeface="Hiragino Mincho ProN"/>
-              </a:rPr>
-              <a:t>フェーズ別単価のみで概算しています。リハ加算・処置加算・手術料・救急加算は未反映。</a:t>
-            </a:r>
-          </a:p>
-          <a:p>
-            <a:pPr algn="l"/>
-            <a:r>
-              <a:rPr sz="1200" b="0">
-                <a:solidFill>
-                  <a:srgbClr val="DC2626"/>
-                </a:solidFill>
-                <a:latin typeface="Hiragino Mincho ProN"/>
-              </a:rPr>
-              <a:t>次フェーズで事務から追加データを取得し精緻化します。</a:t>
+              <a:t>📌 大前提: 個別医師の評価ではなく、病棟運営の構造把握を目的とします</a:t>
             </a:r>
           </a:p>
         </p:txBody>
@@ -6566,41 +6474,60 @@
           <a:p>
             <a:pPr algn="l"/>
             <a:r>
-              <a:rPr sz="2800" b="1">
-                <a:solidFill>
-                  <a:srgbClr val="1F2937"/>
-                </a:solidFill>
-                <a:latin typeface="Hiragino Mincho ProN"/>
-              </a:rPr>
-              <a:t>計算の考え方 — 数式の前に「面積」で理解する</a:t>
-            </a:r>
-          </a:p>
-        </p:txBody>
-      </p:sp>
-      <p:pic>
-        <p:nvPicPr>
-          <p:cNvPr id="4" name="Picture 3" descr="01_concept_named.png"/>
-          <p:cNvPicPr>
-            <a:picLocks noChangeAspect="1"/>
-          </p:cNvPicPr>
-          <p:nvPr/>
-        </p:nvPicPr>
-        <p:blipFill>
-          <a:blip r:embed="rId2"/>
-          <a:stretch>
-            <a:fillRect/>
-          </a:stretch>
-        </p:blipFill>
-        <p:spPr>
-          <a:xfrm>
-            <a:off x="2286000" y="1097280"/>
-            <a:ext cx="8686800" cy="4655729"/>
-          </a:xfrm>
-          <a:prstGeom prst="rect">
-            <a:avLst/>
-          </a:prstGeom>
-        </p:spPr>
-      </p:pic>
+              <a:rPr sz="3200" b="1">
+                <a:solidFill>
+                  <a:srgbClr val="1F2937"/>
+                </a:solidFill>
+                <a:latin typeface="Hiragino Mincho ProN"/>
+              </a:rPr>
+              <a:t>データ概要</a:t>
+            </a:r>
+          </a:p>
+        </p:txBody>
+      </p:sp>
+      <p:sp>
+        <p:nvSpPr>
+          <p:cNvPr id="4" name="Rectangle 3"/>
+          <p:cNvSpPr/>
+          <p:nvPr/>
+        </p:nvSpPr>
+        <p:spPr>
+          <a:xfrm>
+            <a:off x="457200" y="1371600"/>
+            <a:ext cx="2651760" cy="2286000"/>
+          </a:xfrm>
+          <a:prstGeom prst="rect">
+            <a:avLst/>
+          </a:prstGeom>
+          <a:solidFill>
+            <a:srgbClr val="EFF6FF"/>
+          </a:solidFill>
+          <a:ln>
+            <a:noFill/>
+          </a:ln>
+        </p:spPr>
+        <p:style>
+          <a:lnRef idx="1">
+            <a:schemeClr val="accent1"/>
+          </a:lnRef>
+          <a:fillRef idx="3">
+            <a:schemeClr val="accent1"/>
+          </a:fillRef>
+          <a:effectRef idx="2">
+            <a:schemeClr val="accent1"/>
+          </a:effectRef>
+          <a:fontRef idx="minor">
+            <a:schemeClr val="lt1"/>
+          </a:fontRef>
+        </p:style>
+        <p:txBody>
+          <a:bodyPr rtlCol="0" anchor="ctr"/>
+          <a:lstStyle/>
+          <a:p>
+            <a:pPr algn="ctr"/>
+          </a:p>
+        </p:txBody>
+      </p:sp>
       <p:sp>
         <p:nvSpPr>
           <p:cNvPr id="5" name="TextBox 4"/>
@@ -6609,8 +6536,8 @@
         </p:nvSpPr>
         <p:spPr>
           <a:xfrm>
-            <a:off x="457200" y="6035040"/>
-            <a:ext cx="11247120" cy="640080"/>
+            <a:off x="457200" y="1554480"/>
+            <a:ext cx="2651760" cy="457200"/>
           </a:xfrm>
           <a:prstGeom prst="rect">
             <a:avLst/>
@@ -6625,13 +6552,699 @@
           <a:p>
             <a:pPr algn="ctr"/>
             <a:r>
+              <a:rPr sz="1400" b="0">
+                <a:solidFill>
+                  <a:srgbClr val="6B7280"/>
+                </a:solidFill>
+                <a:latin typeface="Hiragino Mincho ProN"/>
+              </a:rPr>
+              <a:t>対象期間</a:t>
+            </a:r>
+          </a:p>
+        </p:txBody>
+      </p:sp>
+      <p:sp>
+        <p:nvSpPr>
+          <p:cNvPr id="6" name="TextBox 5"/>
+          <p:cNvSpPr txBox="1"/>
+          <p:nvPr/>
+        </p:nvSpPr>
+        <p:spPr>
+          <a:xfrm>
+            <a:off x="457200" y="2011680"/>
+            <a:ext cx="2651760" cy="1097280"/>
+          </a:xfrm>
+          <a:prstGeom prst="rect">
+            <a:avLst/>
+          </a:prstGeom>
+          <a:noFill/>
+        </p:spPr>
+        <p:txBody>
+          <a:bodyPr wrap="square" anchor="t" lIns="25400" rIns="25400" tIns="25400" bIns="25400">
+            <a:spAutoFit/>
+          </a:bodyPr>
+          <a:lstStyle/>
+          <a:p>
+            <a:pPr algn="ctr"/>
+            <a:r>
+              <a:rPr sz="3200" b="1">
+                <a:solidFill>
+                  <a:srgbClr val="2563EB"/>
+                </a:solidFill>
+                <a:latin typeface="Hiragino Mincho ProN"/>
+              </a:rPr>
+              <a:t>13 ヶ月</a:t>
+            </a:r>
+          </a:p>
+        </p:txBody>
+      </p:sp>
+      <p:sp>
+        <p:nvSpPr>
+          <p:cNvPr id="7" name="TextBox 6"/>
+          <p:cNvSpPr txBox="1"/>
+          <p:nvPr/>
+        </p:nvSpPr>
+        <p:spPr>
+          <a:xfrm>
+            <a:off x="457200" y="3154680"/>
+            <a:ext cx="2651760" cy="457200"/>
+          </a:xfrm>
+          <a:prstGeom prst="rect">
+            <a:avLst/>
+          </a:prstGeom>
+          <a:noFill/>
+        </p:spPr>
+        <p:txBody>
+          <a:bodyPr wrap="square" anchor="t" lIns="25400" rIns="25400" tIns="25400" bIns="25400">
+            <a:spAutoFit/>
+          </a:bodyPr>
+          <a:lstStyle/>
+          <a:p>
+            <a:pPr algn="ctr"/>
+            <a:r>
+              <a:rPr sz="1200" b="0">
+                <a:solidFill>
+                  <a:srgbClr val="6B7280"/>
+                </a:solidFill>
+                <a:latin typeface="Hiragino Mincho ProN"/>
+              </a:rPr>
+              <a:t>2025-04 〜 2026-04</a:t>
+            </a:r>
+          </a:p>
+        </p:txBody>
+      </p:sp>
+      <p:sp>
+        <p:nvSpPr>
+          <p:cNvPr id="8" name="Rectangle 7"/>
+          <p:cNvSpPr/>
+          <p:nvPr/>
+        </p:nvSpPr>
+        <p:spPr>
+          <a:xfrm>
+            <a:off x="3291840" y="1371600"/>
+            <a:ext cx="2651760" cy="2286000"/>
+          </a:xfrm>
+          <a:prstGeom prst="rect">
+            <a:avLst/>
+          </a:prstGeom>
+          <a:solidFill>
+            <a:srgbClr val="EFF6FF"/>
+          </a:solidFill>
+          <a:ln>
+            <a:noFill/>
+          </a:ln>
+        </p:spPr>
+        <p:style>
+          <a:lnRef idx="1">
+            <a:schemeClr val="accent1"/>
+          </a:lnRef>
+          <a:fillRef idx="3">
+            <a:schemeClr val="accent1"/>
+          </a:fillRef>
+          <a:effectRef idx="2">
+            <a:schemeClr val="accent1"/>
+          </a:effectRef>
+          <a:fontRef idx="minor">
+            <a:schemeClr val="lt1"/>
+          </a:fontRef>
+        </p:style>
+        <p:txBody>
+          <a:bodyPr rtlCol="0" anchor="ctr"/>
+          <a:lstStyle/>
+          <a:p>
+            <a:pPr algn="ctr"/>
+          </a:p>
+        </p:txBody>
+      </p:sp>
+      <p:sp>
+        <p:nvSpPr>
+          <p:cNvPr id="9" name="TextBox 8"/>
+          <p:cNvSpPr txBox="1"/>
+          <p:nvPr/>
+        </p:nvSpPr>
+        <p:spPr>
+          <a:xfrm>
+            <a:off x="3291840" y="1554480"/>
+            <a:ext cx="2651760" cy="457200"/>
+          </a:xfrm>
+          <a:prstGeom prst="rect">
+            <a:avLst/>
+          </a:prstGeom>
+          <a:noFill/>
+        </p:spPr>
+        <p:txBody>
+          <a:bodyPr wrap="square" anchor="t" lIns="25400" rIns="25400" tIns="25400" bIns="25400">
+            <a:spAutoFit/>
+          </a:bodyPr>
+          <a:lstStyle/>
+          <a:p>
+            <a:pPr algn="ctr"/>
+            <a:r>
+              <a:rPr sz="1400" b="0">
+                <a:solidFill>
+                  <a:srgbClr val="6B7280"/>
+                </a:solidFill>
+                <a:latin typeface="Hiragino Mincho ProN"/>
+              </a:rPr>
+              <a:t>入院件数</a:t>
+            </a:r>
+          </a:p>
+        </p:txBody>
+      </p:sp>
+      <p:sp>
+        <p:nvSpPr>
+          <p:cNvPr id="10" name="TextBox 9"/>
+          <p:cNvSpPr txBox="1"/>
+          <p:nvPr/>
+        </p:nvSpPr>
+        <p:spPr>
+          <a:xfrm>
+            <a:off x="3291840" y="2011680"/>
+            <a:ext cx="2651760" cy="1097280"/>
+          </a:xfrm>
+          <a:prstGeom prst="rect">
+            <a:avLst/>
+          </a:prstGeom>
+          <a:noFill/>
+        </p:spPr>
+        <p:txBody>
+          <a:bodyPr wrap="square" anchor="t" lIns="25400" rIns="25400" tIns="25400" bIns="25400">
+            <a:spAutoFit/>
+          </a:bodyPr>
+          <a:lstStyle/>
+          <a:p>
+            <a:pPr algn="ctr"/>
+            <a:r>
+              <a:rPr sz="3200" b="1">
+                <a:solidFill>
+                  <a:srgbClr val="2563EB"/>
+                </a:solidFill>
+                <a:latin typeface="Hiragino Mincho ProN"/>
+              </a:rPr>
+              <a:t>1,960 件</a:t>
+            </a:r>
+          </a:p>
+        </p:txBody>
+      </p:sp>
+      <p:sp>
+        <p:nvSpPr>
+          <p:cNvPr id="11" name="TextBox 10"/>
+          <p:cNvSpPr txBox="1"/>
+          <p:nvPr/>
+        </p:nvSpPr>
+        <p:spPr>
+          <a:xfrm>
+            <a:off x="3291840" y="3154680"/>
+            <a:ext cx="2651760" cy="457200"/>
+          </a:xfrm>
+          <a:prstGeom prst="rect">
+            <a:avLst/>
+          </a:prstGeom>
+          <a:noFill/>
+        </p:spPr>
+        <p:txBody>
+          <a:bodyPr wrap="square" anchor="t" lIns="25400" rIns="25400" tIns="25400" bIns="25400">
+            <a:spAutoFit/>
+          </a:bodyPr>
+          <a:lstStyle/>
+          <a:p>
+            <a:pPr algn="ctr"/>
+            <a:r>
+              <a:rPr sz="1200" b="0">
+                <a:solidFill>
+                  <a:srgbClr val="6B7280"/>
+                </a:solidFill>
+                <a:latin typeface="Hiragino Mincho ProN"/>
+              </a:rPr>
+              <a:t>事務提供 CSV</a:t>
+            </a:r>
+          </a:p>
+        </p:txBody>
+      </p:sp>
+      <p:sp>
+        <p:nvSpPr>
+          <p:cNvPr id="12" name="Rectangle 11"/>
+          <p:cNvSpPr/>
+          <p:nvPr/>
+        </p:nvSpPr>
+        <p:spPr>
+          <a:xfrm>
+            <a:off x="6126480" y="1371600"/>
+            <a:ext cx="2651760" cy="2286000"/>
+          </a:xfrm>
+          <a:prstGeom prst="rect">
+            <a:avLst/>
+          </a:prstGeom>
+          <a:solidFill>
+            <a:srgbClr val="EFF6FF"/>
+          </a:solidFill>
+          <a:ln>
+            <a:noFill/>
+          </a:ln>
+        </p:spPr>
+        <p:style>
+          <a:lnRef idx="1">
+            <a:schemeClr val="accent1"/>
+          </a:lnRef>
+          <a:fillRef idx="3">
+            <a:schemeClr val="accent1"/>
+          </a:fillRef>
+          <a:effectRef idx="2">
+            <a:schemeClr val="accent1"/>
+          </a:effectRef>
+          <a:fontRef idx="minor">
+            <a:schemeClr val="lt1"/>
+          </a:fontRef>
+        </p:style>
+        <p:txBody>
+          <a:bodyPr rtlCol="0" anchor="ctr"/>
+          <a:lstStyle/>
+          <a:p>
+            <a:pPr algn="ctr"/>
+          </a:p>
+        </p:txBody>
+      </p:sp>
+      <p:sp>
+        <p:nvSpPr>
+          <p:cNvPr id="13" name="TextBox 12"/>
+          <p:cNvSpPr txBox="1"/>
+          <p:nvPr/>
+        </p:nvSpPr>
+        <p:spPr>
+          <a:xfrm>
+            <a:off x="6126480" y="1554480"/>
+            <a:ext cx="2651760" cy="457200"/>
+          </a:xfrm>
+          <a:prstGeom prst="rect">
+            <a:avLst/>
+          </a:prstGeom>
+          <a:noFill/>
+        </p:spPr>
+        <p:txBody>
+          <a:bodyPr wrap="square" anchor="t" lIns="25400" rIns="25400" tIns="25400" bIns="25400">
+            <a:spAutoFit/>
+          </a:bodyPr>
+          <a:lstStyle/>
+          <a:p>
+            <a:pPr algn="ctr"/>
+            <a:r>
+              <a:rPr sz="1400" b="0">
+                <a:solidFill>
+                  <a:srgbClr val="6B7280"/>
+                </a:solidFill>
+                <a:latin typeface="Hiragino Mincho ProN"/>
+              </a:rPr>
+              <a:t>対象医師</a:t>
+            </a:r>
+          </a:p>
+        </p:txBody>
+      </p:sp>
+      <p:sp>
+        <p:nvSpPr>
+          <p:cNvPr id="14" name="TextBox 13"/>
+          <p:cNvSpPr txBox="1"/>
+          <p:nvPr/>
+        </p:nvSpPr>
+        <p:spPr>
+          <a:xfrm>
+            <a:off x="6126480" y="2011680"/>
+            <a:ext cx="2651760" cy="1097280"/>
+          </a:xfrm>
+          <a:prstGeom prst="rect">
+            <a:avLst/>
+          </a:prstGeom>
+          <a:noFill/>
+        </p:spPr>
+        <p:txBody>
+          <a:bodyPr wrap="square" anchor="t" lIns="25400" rIns="25400" tIns="25400" bIns="25400">
+            <a:spAutoFit/>
+          </a:bodyPr>
+          <a:lstStyle/>
+          <a:p>
+            <a:pPr algn="ctr"/>
+            <a:r>
+              <a:rPr sz="3200" b="1">
+                <a:solidFill>
+                  <a:srgbClr val="2563EB"/>
+                </a:solidFill>
+                <a:latin typeface="Hiragino Mincho ProN"/>
+              </a:rPr>
+              <a:t>14 名</a:t>
+            </a:r>
+          </a:p>
+        </p:txBody>
+      </p:sp>
+      <p:sp>
+        <p:nvSpPr>
+          <p:cNvPr id="15" name="TextBox 14"/>
+          <p:cNvSpPr txBox="1"/>
+          <p:nvPr/>
+        </p:nvSpPr>
+        <p:spPr>
+          <a:xfrm>
+            <a:off x="6126480" y="3154680"/>
+            <a:ext cx="2651760" cy="457200"/>
+          </a:xfrm>
+          <a:prstGeom prst="rect">
+            <a:avLst/>
+          </a:prstGeom>
+          <a:noFill/>
+        </p:spPr>
+        <p:txBody>
+          <a:bodyPr wrap="square" anchor="t" lIns="25400" rIns="25400" tIns="25400" bIns="25400">
+            <a:spAutoFit/>
+          </a:bodyPr>
+          <a:lstStyle/>
+          <a:p>
+            <a:pPr algn="ctr"/>
+            <a:r>
+              <a:rPr sz="1200" b="0">
+                <a:solidFill>
+                  <a:srgbClr val="6B7280"/>
+                </a:solidFill>
+                <a:latin typeface="Hiragino Mincho ProN"/>
+              </a:rPr>
+              <a:t>件数 10 以上</a:t>
+            </a:r>
+          </a:p>
+        </p:txBody>
+      </p:sp>
+      <p:sp>
+        <p:nvSpPr>
+          <p:cNvPr id="16" name="Rectangle 15"/>
+          <p:cNvSpPr/>
+          <p:nvPr/>
+        </p:nvSpPr>
+        <p:spPr>
+          <a:xfrm>
+            <a:off x="8961120" y="1371600"/>
+            <a:ext cx="2651760" cy="2286000"/>
+          </a:xfrm>
+          <a:prstGeom prst="rect">
+            <a:avLst/>
+          </a:prstGeom>
+          <a:solidFill>
+            <a:srgbClr val="EFF6FF"/>
+          </a:solidFill>
+          <a:ln>
+            <a:noFill/>
+          </a:ln>
+        </p:spPr>
+        <p:style>
+          <a:lnRef idx="1">
+            <a:schemeClr val="accent1"/>
+          </a:lnRef>
+          <a:fillRef idx="3">
+            <a:schemeClr val="accent1"/>
+          </a:fillRef>
+          <a:effectRef idx="2">
+            <a:schemeClr val="accent1"/>
+          </a:effectRef>
+          <a:fontRef idx="minor">
+            <a:schemeClr val="lt1"/>
+          </a:fontRef>
+        </p:style>
+        <p:txBody>
+          <a:bodyPr rtlCol="0" anchor="ctr"/>
+          <a:lstStyle/>
+          <a:p>
+            <a:pPr algn="ctr"/>
+          </a:p>
+        </p:txBody>
+      </p:sp>
+      <p:sp>
+        <p:nvSpPr>
+          <p:cNvPr id="17" name="TextBox 16"/>
+          <p:cNvSpPr txBox="1"/>
+          <p:nvPr/>
+        </p:nvSpPr>
+        <p:spPr>
+          <a:xfrm>
+            <a:off x="8961120" y="1554480"/>
+            <a:ext cx="2651760" cy="457200"/>
+          </a:xfrm>
+          <a:prstGeom prst="rect">
+            <a:avLst/>
+          </a:prstGeom>
+          <a:noFill/>
+        </p:spPr>
+        <p:txBody>
+          <a:bodyPr wrap="square" anchor="t" lIns="25400" rIns="25400" tIns="25400" bIns="25400">
+            <a:spAutoFit/>
+          </a:bodyPr>
+          <a:lstStyle/>
+          <a:p>
+            <a:pPr algn="ctr"/>
+            <a:r>
+              <a:rPr sz="1400" b="0">
+                <a:solidFill>
+                  <a:srgbClr val="6B7280"/>
+                </a:solidFill>
+                <a:latin typeface="Hiragino Mincho ProN"/>
+              </a:rPr>
+              <a:t>総延日数</a:t>
+            </a:r>
+          </a:p>
+        </p:txBody>
+      </p:sp>
+      <p:sp>
+        <p:nvSpPr>
+          <p:cNvPr id="18" name="TextBox 17"/>
+          <p:cNvSpPr txBox="1"/>
+          <p:nvPr/>
+        </p:nvSpPr>
+        <p:spPr>
+          <a:xfrm>
+            <a:off x="8961120" y="2011680"/>
+            <a:ext cx="2651760" cy="1097280"/>
+          </a:xfrm>
+          <a:prstGeom prst="rect">
+            <a:avLst/>
+          </a:prstGeom>
+          <a:noFill/>
+        </p:spPr>
+        <p:txBody>
+          <a:bodyPr wrap="square" anchor="t" lIns="25400" rIns="25400" tIns="25400" bIns="25400">
+            <a:spAutoFit/>
+          </a:bodyPr>
+          <a:lstStyle/>
+          <a:p>
+            <a:pPr algn="ctr"/>
+            <a:r>
+              <a:rPr sz="3200" b="1">
+                <a:solidFill>
+                  <a:srgbClr val="2563EB"/>
+                </a:solidFill>
+                <a:latin typeface="Hiragino Mincho ProN"/>
+              </a:rPr>
+              <a:t>29,690</a:t>
+            </a:r>
+          </a:p>
+        </p:txBody>
+      </p:sp>
+      <p:sp>
+        <p:nvSpPr>
+          <p:cNvPr id="19" name="TextBox 18"/>
+          <p:cNvSpPr txBox="1"/>
+          <p:nvPr/>
+        </p:nvSpPr>
+        <p:spPr>
+          <a:xfrm>
+            <a:off x="8961120" y="3154680"/>
+            <a:ext cx="2651760" cy="457200"/>
+          </a:xfrm>
+          <a:prstGeom prst="rect">
+            <a:avLst/>
+          </a:prstGeom>
+          <a:noFill/>
+        </p:spPr>
+        <p:txBody>
+          <a:bodyPr wrap="square" anchor="t" lIns="25400" rIns="25400" tIns="25400" bIns="25400">
+            <a:spAutoFit/>
+          </a:bodyPr>
+          <a:lstStyle/>
+          <a:p>
+            <a:pPr algn="ctr"/>
+            <a:r>
+              <a:rPr sz="1200" b="0">
+                <a:solidFill>
+                  <a:srgbClr val="6B7280"/>
+                </a:solidFill>
+                <a:latin typeface="Hiragino Mincho ProN"/>
+              </a:rPr>
+              <a:t>床日（5F + 6F）</a:t>
+            </a:r>
+          </a:p>
+        </p:txBody>
+      </p:sp>
+      <p:sp>
+        <p:nvSpPr>
+          <p:cNvPr id="20" name="TextBox 19"/>
+          <p:cNvSpPr txBox="1"/>
+          <p:nvPr/>
+        </p:nvSpPr>
+        <p:spPr>
+          <a:xfrm>
+            <a:off x="457200" y="4114800"/>
+            <a:ext cx="11247120" cy="457200"/>
+          </a:xfrm>
+          <a:prstGeom prst="rect">
+            <a:avLst/>
+          </a:prstGeom>
+          <a:noFill/>
+        </p:spPr>
+        <p:txBody>
+          <a:bodyPr wrap="square" anchor="t" lIns="25400" rIns="25400" tIns="25400" bIns="25400">
+            <a:spAutoFit/>
+          </a:bodyPr>
+          <a:lstStyle/>
+          <a:p>
+            <a:pPr algn="l"/>
+            <a:r>
               <a:rPr sz="1800" b="1">
                 <a:solidFill>
-                  <a:srgbClr val="2563EB"/>
-                </a:solidFill>
-                <a:latin typeface="Hiragino Mincho ProN"/>
-              </a:rPr>
-              <a:t>💡 年間収益 = 受持数（横）× ベッド単価（縦）× 365 日　= 長方形の面積</a:t>
+                  <a:srgbClr val="1F2937"/>
+                </a:solidFill>
+                <a:latin typeface="Hiragino Mincho ProN"/>
+              </a:rPr>
+              <a:t>病棟構成</a:t>
+            </a:r>
+          </a:p>
+        </p:txBody>
+      </p:sp>
+      <p:sp>
+        <p:nvSpPr>
+          <p:cNvPr id="21" name="TextBox 20"/>
+          <p:cNvSpPr txBox="1"/>
+          <p:nvPr/>
+        </p:nvSpPr>
+        <p:spPr>
+          <a:xfrm>
+            <a:off x="640080" y="4572000"/>
+            <a:ext cx="10972800" cy="548640"/>
+          </a:xfrm>
+          <a:prstGeom prst="rect">
+            <a:avLst/>
+          </a:prstGeom>
+          <a:noFill/>
+        </p:spPr>
+        <p:txBody>
+          <a:bodyPr wrap="square" anchor="t" lIns="25400" rIns="25400" tIns="25400" bIns="25400">
+            <a:spAutoFit/>
+          </a:bodyPr>
+          <a:lstStyle/>
+          <a:p>
+            <a:pPr algn="l"/>
+            <a:r>
+              <a:rPr sz="1600" b="0">
+                <a:solidFill>
+                  <a:srgbClr val="1F2937"/>
+                </a:solidFill>
+                <a:latin typeface="Hiragino Mincho ProN"/>
+              </a:rPr>
+              <a:t>5F 病棟 47 床（年間稼働率 84.9%）  /  6F 病棟 47 床（年間稼働率 88.8%）</a:t>
+            </a:r>
+          </a:p>
+        </p:txBody>
+      </p:sp>
+      <p:sp>
+        <p:nvSpPr>
+          <p:cNvPr id="22" name="Rectangle 21"/>
+          <p:cNvSpPr/>
+          <p:nvPr/>
+        </p:nvSpPr>
+        <p:spPr>
+          <a:xfrm>
+            <a:off x="640080" y="5394960"/>
+            <a:ext cx="10972800" cy="1280160"/>
+          </a:xfrm>
+          <a:prstGeom prst="rect">
+            <a:avLst/>
+          </a:prstGeom>
+          <a:solidFill>
+            <a:srgbClr val="FEF2F2"/>
+          </a:solidFill>
+          <a:ln>
+            <a:noFill/>
+          </a:ln>
+        </p:spPr>
+        <p:style>
+          <a:lnRef idx="1">
+            <a:schemeClr val="accent1"/>
+          </a:lnRef>
+          <a:fillRef idx="3">
+            <a:schemeClr val="accent1"/>
+          </a:fillRef>
+          <a:effectRef idx="2">
+            <a:schemeClr val="accent1"/>
+          </a:effectRef>
+          <a:fontRef idx="minor">
+            <a:schemeClr val="lt1"/>
+          </a:fontRef>
+        </p:style>
+        <p:txBody>
+          <a:bodyPr rtlCol="0" anchor="ctr"/>
+          <a:lstStyle/>
+          <a:p>
+            <a:pPr algn="ctr"/>
+          </a:p>
+        </p:txBody>
+      </p:sp>
+      <p:sp>
+        <p:nvSpPr>
+          <p:cNvPr id="23" name="TextBox 22"/>
+          <p:cNvSpPr txBox="1"/>
+          <p:nvPr/>
+        </p:nvSpPr>
+        <p:spPr>
+          <a:xfrm>
+            <a:off x="822960" y="5486400"/>
+            <a:ext cx="10607040" cy="1097280"/>
+          </a:xfrm>
+          <a:prstGeom prst="rect">
+            <a:avLst/>
+          </a:prstGeom>
+          <a:noFill/>
+        </p:spPr>
+        <p:txBody>
+          <a:bodyPr wrap="square">
+            <a:spAutoFit/>
+          </a:bodyPr>
+          <a:lstStyle/>
+          <a:p>
+            <a:pPr algn="l"/>
+            <a:r>
+              <a:rPr sz="1400" b="1">
+                <a:solidFill>
+                  <a:srgbClr val="DC2626"/>
+                </a:solidFill>
+                <a:latin typeface="Hiragino Mincho ProN"/>
+              </a:rPr>
+              <a:t>⚠️ 本解析の限界（Stage 1）</a:t>
+            </a:r>
+          </a:p>
+          <a:p>
+            <a:pPr algn="l"/>
+            <a:r>
+              <a:rPr sz="1200" b="0">
+                <a:solidFill>
+                  <a:srgbClr val="DC2626"/>
+                </a:solidFill>
+                <a:latin typeface="Hiragino Mincho ProN"/>
+              </a:rPr>
+              <a:t>フェーズ別粗利のみで概算しています。リハ加算・処置加算・手術料は概算に含まず。</a:t>
+            </a:r>
+          </a:p>
+          <a:p>
+            <a:pPr algn="l"/>
+            <a:r>
+              <a:rPr sz="1200" b="0">
+                <a:solidFill>
+                  <a:srgbClr val="DC2626"/>
+                </a:solidFill>
+                <a:latin typeface="Hiragino Mincho ProN"/>
+              </a:rPr>
+              <a:t>次フェーズで事務から追加データを取得し精緻化します。</a:t>
             </a:r>
           </a:p>
         </p:txBody>
@@ -6727,7 +7340,7 @@
                 </a:solidFill>
                 <a:latin typeface="Hiragino Mincho ProN"/>
               </a:rPr>
-              <a:t>ベッド単価とは — 地域包括医療病棟の特徴</a:t>
+              <a:t>フェーズ別 単価構造 — 報酬・変動費・粗利</a:t>
             </a:r>
           </a:p>
         </p:txBody>
@@ -6740,7 +7353,7 @@
         </p:nvSpPr>
         <p:spPr>
           <a:xfrm>
-            <a:off x="640080" y="1188720"/>
+            <a:off x="640080" y="1097280"/>
             <a:ext cx="10972800" cy="457200"/>
           </a:xfrm>
           <a:prstGeom prst="rect">
@@ -6756,13 +7369,13 @@
           <a:p>
             <a:pPr algn="l"/>
             <a:r>
-              <a:rPr sz="1600" b="0">
-                <a:solidFill>
-                  <a:srgbClr val="1F2937"/>
-                </a:solidFill>
-                <a:latin typeface="Hiragino Mincho ProN"/>
-              </a:rPr>
-              <a:t>地域包括医療病棟入院料は、入院日数で 1 日あたりの報酬が変わる仕組みです。</a:t>
+              <a:rPr sz="1400" b="0">
+                <a:solidFill>
+                  <a:srgbClr val="6B7280"/>
+                </a:solidFill>
+                <a:latin typeface="Hiragino Mincho ProN"/>
+              </a:rPr>
+              <a:t>アプリ実装の 2026 年度プリセット（入院料 1・イ/ロ/ハ加重平均）に基づく数値:</a:t>
             </a:r>
           </a:p>
         </p:txBody>
@@ -6775,8 +7388,8 @@
         </p:nvSpPr>
         <p:spPr>
           <a:xfrm>
-            <a:off x="457200" y="1828800"/>
-            <a:ext cx="3566160" cy="2926080"/>
+            <a:off x="457200" y="1737360"/>
+            <a:ext cx="3566160" cy="3291840"/>
           </a:xfrm>
           <a:prstGeom prst="rect">
             <a:avLst/>
@@ -6818,8 +7431,8 @@
         </p:nvSpPr>
         <p:spPr>
           <a:xfrm>
-            <a:off x="457200" y="2103120"/>
-            <a:ext cx="3566160" cy="548640"/>
+            <a:off x="457200" y="1874520"/>
+            <a:ext cx="3566160" cy="457200"/>
           </a:xfrm>
           <a:prstGeom prst="rect">
             <a:avLst/>
@@ -6834,7 +7447,7 @@
           <a:p>
             <a:pPr algn="ctr"/>
             <a:r>
-              <a:rPr sz="2200" b="1">
+              <a:rPr sz="2000" b="1">
                 <a:solidFill>
                   <a:srgbClr val="1F2937"/>
                 </a:solidFill>
@@ -6853,8 +7466,8 @@
         </p:nvSpPr>
         <p:spPr>
           <a:xfrm>
-            <a:off x="457200" y="2743200"/>
-            <a:ext cx="3566160" cy="457200"/>
+            <a:off x="457200" y="2377440"/>
+            <a:ext cx="3566160" cy="365760"/>
           </a:xfrm>
           <a:prstGeom prst="rect">
             <a:avLst/>
@@ -6869,7 +7482,7 @@
           <a:p>
             <a:pPr algn="ctr"/>
             <a:r>
-              <a:rPr sz="1600" b="0">
+              <a:rPr sz="1400" b="0">
                 <a:solidFill>
                   <a:srgbClr val="6B7280"/>
                 </a:solidFill>
@@ -6888,8 +7501,8 @@
         </p:nvSpPr>
         <p:spPr>
           <a:xfrm>
-            <a:off x="457200" y="3200400"/>
-            <a:ext cx="3566160" cy="914400"/>
+            <a:off x="457200" y="2834640"/>
+            <a:ext cx="3566160" cy="457200"/>
           </a:xfrm>
           <a:prstGeom prst="rect">
             <a:avLst/>
@@ -6904,13 +7517,13 @@
           <a:p>
             <a:pPr algn="ctr"/>
             <a:r>
-              <a:rPr sz="2600" b="1">
-                <a:solidFill>
-                  <a:srgbClr val="2563EB"/>
-                </a:solidFill>
-                <a:latin typeface="Hiragino Mincho ProN"/>
-              </a:rPr>
-              <a:t>約 24,000 円/日</a:t>
+              <a:rPr sz="1600" b="0">
+                <a:solidFill>
+                  <a:srgbClr val="1F2937"/>
+                </a:solidFill>
+                <a:latin typeface="Hiragino Mincho ProN"/>
+              </a:rPr>
+              <a:t>報酬 38,500</a:t>
             </a:r>
           </a:p>
         </p:txBody>
@@ -6923,7 +7536,7 @@
         </p:nvSpPr>
         <p:spPr>
           <a:xfrm>
-            <a:off x="457200" y="4206240"/>
+            <a:off x="457200" y="3291840"/>
             <a:ext cx="3566160" cy="457200"/>
           </a:xfrm>
           <a:prstGeom prst="rect">
@@ -6939,27 +7552,97 @@
           <a:p>
             <a:pPr algn="ctr"/>
             <a:r>
-              <a:rPr sz="1300" b="0">
-                <a:solidFill>
-                  <a:srgbClr val="6B7280"/>
-                </a:solidFill>
-                <a:latin typeface="Hiragino Mincho ProN"/>
-              </a:rPr>
-              <a:t>急性期初期加算あり</a:t>
-            </a:r>
-          </a:p>
-        </p:txBody>
-      </p:sp>
-      <p:sp>
-        <p:nvSpPr>
-          <p:cNvPr id="10" name="Rectangle 9"/>
+              <a:rPr sz="1600" b="0">
+                <a:solidFill>
+                  <a:srgbClr val="DC2626"/>
+                </a:solidFill>
+                <a:latin typeface="Hiragino Mincho ProN"/>
+              </a:rPr>
+              <a:t>− 変動費 12,000</a:t>
+            </a:r>
+          </a:p>
+        </p:txBody>
+      </p:sp>
+      <p:sp>
+        <p:nvSpPr>
+          <p:cNvPr id="10" name="TextBox 9"/>
+          <p:cNvSpPr txBox="1"/>
+          <p:nvPr/>
+        </p:nvSpPr>
+        <p:spPr>
+          <a:xfrm>
+            <a:off x="457200" y="3794760"/>
+            <a:ext cx="3566160" cy="548640"/>
+          </a:xfrm>
+          <a:prstGeom prst="rect">
+            <a:avLst/>
+          </a:prstGeom>
+          <a:noFill/>
+        </p:spPr>
+        <p:txBody>
+          <a:bodyPr wrap="square" anchor="t" lIns="25400" rIns="25400" tIns="25400" bIns="25400">
+            <a:spAutoFit/>
+          </a:bodyPr>
+          <a:lstStyle/>
+          <a:p>
+            <a:pPr algn="ctr"/>
+            <a:r>
+              <a:rPr sz="2200" b="1">
+                <a:solidFill>
+                  <a:srgbClr val="2563EB"/>
+                </a:solidFill>
+                <a:latin typeface="Hiragino Mincho ProN"/>
+              </a:rPr>
+              <a:t>= 粗利 26,500</a:t>
+            </a:r>
+          </a:p>
+        </p:txBody>
+      </p:sp>
+      <p:sp>
+        <p:nvSpPr>
+          <p:cNvPr id="11" name="TextBox 10"/>
+          <p:cNvSpPr txBox="1"/>
+          <p:nvPr/>
+        </p:nvSpPr>
+        <p:spPr>
+          <a:xfrm>
+            <a:off x="457200" y="4434840"/>
+            <a:ext cx="3566160" cy="548640"/>
+          </a:xfrm>
+          <a:prstGeom prst="rect">
+            <a:avLst/>
+          </a:prstGeom>
+          <a:noFill/>
+        </p:spPr>
+        <p:txBody>
+          <a:bodyPr wrap="square" anchor="t" lIns="25400" rIns="25400" tIns="25400" bIns="25400">
+            <a:spAutoFit/>
+          </a:bodyPr>
+          <a:lstStyle/>
+          <a:p>
+            <a:pPr algn="ctr"/>
+            <a:r>
+              <a:rPr sz="2200" b="1">
+                <a:solidFill>
+                  <a:srgbClr val="DC2626"/>
+                </a:solidFill>
+                <a:latin typeface="Hiragino Mincho ProN"/>
+              </a:rPr>
+              <a:t>3 位</a:t>
+            </a:r>
+          </a:p>
+        </p:txBody>
+      </p:sp>
+      <p:sp>
+        <p:nvSpPr>
+          <p:cNvPr id="12" name="Rectangle 11"/>
           <p:cNvSpPr/>
           <p:nvPr/>
         </p:nvSpPr>
         <p:spPr>
           <a:xfrm>
-            <a:off x="4297680" y="1828800"/>
-            <a:ext cx="3566160" cy="2926080"/>
+            <a:off x="4297680" y="1737360"/>
+            <a:ext cx="3566160" cy="3291840"/>
           </a:xfrm>
           <a:prstGeom prst="rect">
             <a:avLst/>
@@ -6995,14 +7678,14 @@
       </p:sp>
       <p:sp>
         <p:nvSpPr>
-          <p:cNvPr id="11" name="TextBox 10"/>
+          <p:cNvPr id="13" name="TextBox 12"/>
           <p:cNvSpPr txBox="1"/>
           <p:nvPr/>
         </p:nvSpPr>
         <p:spPr>
           <a:xfrm>
-            <a:off x="4297680" y="2103120"/>
-            <a:ext cx="3566160" cy="548640"/>
+            <a:off x="4297680" y="1874520"/>
+            <a:ext cx="3566160" cy="457200"/>
           </a:xfrm>
           <a:prstGeom prst="rect">
             <a:avLst/>
@@ -7017,7 +7700,7 @@
           <a:p>
             <a:pPr algn="ctr"/>
             <a:r>
-              <a:rPr sz="2200" b="1">
+              <a:rPr sz="2000" b="1">
                 <a:solidFill>
                   <a:srgbClr val="1F2937"/>
                 </a:solidFill>
@@ -7030,14 +7713,14 @@
       </p:sp>
       <p:sp>
         <p:nvSpPr>
-          <p:cNvPr id="12" name="TextBox 11"/>
+          <p:cNvPr id="14" name="TextBox 13"/>
           <p:cNvSpPr txBox="1"/>
           <p:nvPr/>
         </p:nvSpPr>
         <p:spPr>
           <a:xfrm>
-            <a:off x="4297680" y="2743200"/>
-            <a:ext cx="3566160" cy="457200"/>
+            <a:off x="4297680" y="2377440"/>
+            <a:ext cx="3566160" cy="365760"/>
           </a:xfrm>
           <a:prstGeom prst="rect">
             <a:avLst/>
@@ -7052,7 +7735,7 @@
           <a:p>
             <a:pPr algn="ctr"/>
             <a:r>
-              <a:rPr sz="1600" b="0">
+              <a:rPr sz="1400" b="0">
                 <a:solidFill>
                   <a:srgbClr val="6B7280"/>
                 </a:solidFill>
@@ -7065,14 +7748,14 @@
       </p:sp>
       <p:sp>
         <p:nvSpPr>
-          <p:cNvPr id="13" name="TextBox 12"/>
+          <p:cNvPr id="15" name="TextBox 14"/>
           <p:cNvSpPr txBox="1"/>
           <p:nvPr/>
         </p:nvSpPr>
         <p:spPr>
           <a:xfrm>
-            <a:off x="4297680" y="3200400"/>
-            <a:ext cx="3566160" cy="914400"/>
+            <a:off x="4297680" y="2834640"/>
+            <a:ext cx="3566160" cy="457200"/>
           </a:xfrm>
           <a:prstGeom prst="rect">
             <a:avLst/>
@@ -7087,26 +7770,26 @@
           <a:p>
             <a:pPr algn="ctr"/>
             <a:r>
-              <a:rPr sz="2600" b="1">
-                <a:solidFill>
-                  <a:srgbClr val="2563EB"/>
-                </a:solidFill>
-                <a:latin typeface="Hiragino Mincho ProN"/>
-              </a:rPr>
-              <a:t>約 13,200 円/日</a:t>
-            </a:r>
-          </a:p>
-        </p:txBody>
-      </p:sp>
-      <p:sp>
-        <p:nvSpPr>
-          <p:cNvPr id="14" name="TextBox 13"/>
+              <a:rPr sz="1600" b="0">
+                <a:solidFill>
+                  <a:srgbClr val="1F2937"/>
+                </a:solidFill>
+                <a:latin typeface="Hiragino Mincho ProN"/>
+              </a:rPr>
+              <a:t>報酬 38,500</a:t>
+            </a:r>
+          </a:p>
+        </p:txBody>
+      </p:sp>
+      <p:sp>
+        <p:nvSpPr>
+          <p:cNvPr id="16" name="TextBox 15"/>
           <p:cNvSpPr txBox="1"/>
           <p:nvPr/>
         </p:nvSpPr>
         <p:spPr>
           <a:xfrm>
-            <a:off x="4297680" y="4206240"/>
+            <a:off x="4297680" y="3291840"/>
             <a:ext cx="3566160" cy="457200"/>
           </a:xfrm>
           <a:prstGeom prst="rect">
@@ -7122,27 +7805,97 @@
           <a:p>
             <a:pPr algn="ctr"/>
             <a:r>
-              <a:rPr sz="1300" b="0">
-                <a:solidFill>
-                  <a:srgbClr val="6B7280"/>
-                </a:solidFill>
-                <a:latin typeface="Hiragino Mincho ProN"/>
-              </a:rPr>
-              <a:t>★ 安定貢献層</a:t>
-            </a:r>
-          </a:p>
-        </p:txBody>
-      </p:sp>
-      <p:sp>
-        <p:nvSpPr>
-          <p:cNvPr id="15" name="Rectangle 14"/>
+              <a:rPr sz="1600" b="0">
+                <a:solidFill>
+                  <a:srgbClr val="DC2626"/>
+                </a:solidFill>
+                <a:latin typeface="Hiragino Mincho ProN"/>
+              </a:rPr>
+              <a:t>− 変動費 6,000</a:t>
+            </a:r>
+          </a:p>
+        </p:txBody>
+      </p:sp>
+      <p:sp>
+        <p:nvSpPr>
+          <p:cNvPr id="17" name="TextBox 16"/>
+          <p:cNvSpPr txBox="1"/>
+          <p:nvPr/>
+        </p:nvSpPr>
+        <p:spPr>
+          <a:xfrm>
+            <a:off x="4297680" y="3794760"/>
+            <a:ext cx="3566160" cy="548640"/>
+          </a:xfrm>
+          <a:prstGeom prst="rect">
+            <a:avLst/>
+          </a:prstGeom>
+          <a:noFill/>
+        </p:spPr>
+        <p:txBody>
+          <a:bodyPr wrap="square" anchor="t" lIns="25400" rIns="25400" tIns="25400" bIns="25400">
+            <a:spAutoFit/>
+          </a:bodyPr>
+          <a:lstStyle/>
+          <a:p>
+            <a:pPr algn="ctr"/>
+            <a:r>
+              <a:rPr sz="2200" b="1">
+                <a:solidFill>
+                  <a:srgbClr val="2563EB"/>
+                </a:solidFill>
+                <a:latin typeface="Hiragino Mincho ProN"/>
+              </a:rPr>
+              <a:t>= 粗利 32,500</a:t>
+            </a:r>
+          </a:p>
+        </p:txBody>
+      </p:sp>
+      <p:sp>
+        <p:nvSpPr>
+          <p:cNvPr id="18" name="TextBox 17"/>
+          <p:cNvSpPr txBox="1"/>
+          <p:nvPr/>
+        </p:nvSpPr>
+        <p:spPr>
+          <a:xfrm>
+            <a:off x="4297680" y="4434840"/>
+            <a:ext cx="3566160" cy="548640"/>
+          </a:xfrm>
+          <a:prstGeom prst="rect">
+            <a:avLst/>
+          </a:prstGeom>
+          <a:noFill/>
+        </p:spPr>
+        <p:txBody>
+          <a:bodyPr wrap="square" anchor="t" lIns="25400" rIns="25400" tIns="25400" bIns="25400">
+            <a:spAutoFit/>
+          </a:bodyPr>
+          <a:lstStyle/>
+          <a:p>
+            <a:pPr algn="ctr"/>
+            <a:r>
+              <a:rPr sz="2200" b="1">
+                <a:solidFill>
+                  <a:srgbClr val="10B981"/>
+                </a:solidFill>
+                <a:latin typeface="Hiragino Mincho ProN"/>
+              </a:rPr>
+              <a:t>★ 1 位</a:t>
+            </a:r>
+          </a:p>
+        </p:txBody>
+      </p:sp>
+      <p:sp>
+        <p:nvSpPr>
+          <p:cNvPr id="19" name="Rectangle 18"/>
           <p:cNvSpPr/>
           <p:nvPr/>
         </p:nvSpPr>
         <p:spPr>
           <a:xfrm>
-            <a:off x="8138160" y="1828800"/>
-            <a:ext cx="3566160" cy="2926080"/>
+            <a:off x="8138160" y="1737360"/>
+            <a:ext cx="3566160" cy="3291840"/>
           </a:xfrm>
           <a:prstGeom prst="rect">
             <a:avLst/>
@@ -7178,14 +7931,14 @@
       </p:sp>
       <p:sp>
         <p:nvSpPr>
-          <p:cNvPr id="16" name="TextBox 15"/>
+          <p:cNvPr id="20" name="TextBox 19"/>
           <p:cNvSpPr txBox="1"/>
           <p:nvPr/>
         </p:nvSpPr>
         <p:spPr>
           <a:xfrm>
-            <a:off x="8138160" y="2103120"/>
-            <a:ext cx="3566160" cy="548640"/>
+            <a:off x="8138160" y="1874520"/>
+            <a:ext cx="3566160" cy="457200"/>
           </a:xfrm>
           <a:prstGeom prst="rect">
             <a:avLst/>
@@ -7200,7 +7953,7 @@
           <a:p>
             <a:pPr algn="ctr"/>
             <a:r>
-              <a:rPr sz="2200" b="1">
+              <a:rPr sz="2000" b="1">
                 <a:solidFill>
                   <a:srgbClr val="1F2937"/>
                 </a:solidFill>
@@ -7213,14 +7966,14 @@
       </p:sp>
       <p:sp>
         <p:nvSpPr>
-          <p:cNvPr id="17" name="TextBox 16"/>
+          <p:cNvPr id="21" name="TextBox 20"/>
           <p:cNvSpPr txBox="1"/>
           <p:nvPr/>
         </p:nvSpPr>
         <p:spPr>
           <a:xfrm>
-            <a:off x="8138160" y="2743200"/>
-            <a:ext cx="3566160" cy="457200"/>
+            <a:off x="8138160" y="2377440"/>
+            <a:ext cx="3566160" cy="365760"/>
           </a:xfrm>
           <a:prstGeom prst="rect">
             <a:avLst/>
@@ -7235,7 +7988,7 @@
           <a:p>
             <a:pPr algn="ctr"/>
             <a:r>
-              <a:rPr sz="1600" b="0">
+              <a:rPr sz="1400" b="0">
                 <a:solidFill>
                   <a:srgbClr val="6B7280"/>
                 </a:solidFill>
@@ -7248,14 +8001,14 @@
       </p:sp>
       <p:sp>
         <p:nvSpPr>
-          <p:cNvPr id="18" name="TextBox 17"/>
+          <p:cNvPr id="22" name="TextBox 21"/>
           <p:cNvSpPr txBox="1"/>
           <p:nvPr/>
         </p:nvSpPr>
         <p:spPr>
           <a:xfrm>
-            <a:off x="8138160" y="3200400"/>
-            <a:ext cx="3566160" cy="914400"/>
+            <a:off x="8138160" y="2834640"/>
+            <a:ext cx="3566160" cy="457200"/>
           </a:xfrm>
           <a:prstGeom prst="rect">
             <a:avLst/>
@@ -7270,26 +8023,26 @@
           <a:p>
             <a:pPr algn="ctr"/>
             <a:r>
-              <a:rPr sz="2600" b="1">
-                <a:solidFill>
-                  <a:srgbClr val="2563EB"/>
-                </a:solidFill>
-                <a:latin typeface="Hiragino Mincho ProN"/>
-              </a:rPr>
-              <a:t>約 6,400 円/日</a:t>
-            </a:r>
-          </a:p>
-        </p:txBody>
-      </p:sp>
-      <p:sp>
-        <p:nvSpPr>
-          <p:cNvPr id="19" name="TextBox 18"/>
+              <a:rPr sz="1600" b="0">
+                <a:solidFill>
+                  <a:srgbClr val="1F2937"/>
+                </a:solidFill>
+                <a:latin typeface="Hiragino Mincho ProN"/>
+              </a:rPr>
+              <a:t>報酬 35,500</a:t>
+            </a:r>
+          </a:p>
+        </p:txBody>
+      </p:sp>
+      <p:sp>
+        <p:nvSpPr>
+          <p:cNvPr id="23" name="TextBox 22"/>
           <p:cNvSpPr txBox="1"/>
           <p:nvPr/>
         </p:nvSpPr>
         <p:spPr>
           <a:xfrm>
-            <a:off x="8138160" y="4206240"/>
+            <a:off x="8138160" y="3291840"/>
             <a:ext cx="3566160" cy="457200"/>
           </a:xfrm>
           <a:prstGeom prst="rect">
@@ -7305,26 +8058,96 @@
           <a:p>
             <a:pPr algn="ctr"/>
             <a:r>
-              <a:rPr sz="1300" b="0">
-                <a:solidFill>
-                  <a:srgbClr val="6B7280"/>
-                </a:solidFill>
-                <a:latin typeface="Hiragino Mincho ProN"/>
-              </a:rPr>
-              <a:t>退院支援・在宅復帰指導</a:t>
-            </a:r>
-          </a:p>
-        </p:txBody>
-      </p:sp>
-      <p:sp>
-        <p:nvSpPr>
-          <p:cNvPr id="20" name="Rectangle 19"/>
+              <a:rPr sz="1600" b="0">
+                <a:solidFill>
+                  <a:srgbClr val="DC2626"/>
+                </a:solidFill>
+                <a:latin typeface="Hiragino Mincho ProN"/>
+              </a:rPr>
+              <a:t>− 変動費 4,500</a:t>
+            </a:r>
+          </a:p>
+        </p:txBody>
+      </p:sp>
+      <p:sp>
+        <p:nvSpPr>
+          <p:cNvPr id="24" name="TextBox 23"/>
+          <p:cNvSpPr txBox="1"/>
+          <p:nvPr/>
+        </p:nvSpPr>
+        <p:spPr>
+          <a:xfrm>
+            <a:off x="8138160" y="3794760"/>
+            <a:ext cx="3566160" cy="548640"/>
+          </a:xfrm>
+          <a:prstGeom prst="rect">
+            <a:avLst/>
+          </a:prstGeom>
+          <a:noFill/>
+        </p:spPr>
+        <p:txBody>
+          <a:bodyPr wrap="square" anchor="t" lIns="25400" rIns="25400" tIns="25400" bIns="25400">
+            <a:spAutoFit/>
+          </a:bodyPr>
+          <a:lstStyle/>
+          <a:p>
+            <a:pPr algn="ctr"/>
+            <a:r>
+              <a:rPr sz="2200" b="1">
+                <a:solidFill>
+                  <a:srgbClr val="2563EB"/>
+                </a:solidFill>
+                <a:latin typeface="Hiragino Mincho ProN"/>
+              </a:rPr>
+              <a:t>= 粗利 31,000</a:t>
+            </a:r>
+          </a:p>
+        </p:txBody>
+      </p:sp>
+      <p:sp>
+        <p:nvSpPr>
+          <p:cNvPr id="25" name="TextBox 24"/>
+          <p:cNvSpPr txBox="1"/>
+          <p:nvPr/>
+        </p:nvSpPr>
+        <p:spPr>
+          <a:xfrm>
+            <a:off x="8138160" y="4434840"/>
+            <a:ext cx="3566160" cy="548640"/>
+          </a:xfrm>
+          <a:prstGeom prst="rect">
+            <a:avLst/>
+          </a:prstGeom>
+          <a:noFill/>
+        </p:spPr>
+        <p:txBody>
+          <a:bodyPr wrap="square" anchor="t" lIns="25400" rIns="25400" tIns="25400" bIns="25400">
+            <a:spAutoFit/>
+          </a:bodyPr>
+          <a:lstStyle/>
+          <a:p>
+            <a:pPr algn="ctr"/>
+            <a:r>
+              <a:rPr sz="2200" b="1">
+                <a:solidFill>
+                  <a:srgbClr val="D97706"/>
+                </a:solidFill>
+                <a:latin typeface="Hiragino Mincho ProN"/>
+              </a:rPr>
+              <a:t>2 位</a:t>
+            </a:r>
+          </a:p>
+        </p:txBody>
+      </p:sp>
+      <p:sp>
+        <p:nvSpPr>
+          <p:cNvPr id="26" name="Rectangle 25"/>
           <p:cNvSpPr/>
           <p:nvPr/>
         </p:nvSpPr>
         <p:spPr>
           <a:xfrm>
-            <a:off x="640080" y="5029200"/>
+            <a:off x="640080" y="5212080"/>
             <a:ext cx="10972800" cy="1371600"/>
           </a:xfrm>
           <a:prstGeom prst="rect">
@@ -7361,13 +8184,13 @@
       </p:sp>
       <p:sp>
         <p:nvSpPr>
-          <p:cNvPr id="21" name="TextBox 20"/>
+          <p:cNvPr id="27" name="TextBox 26"/>
           <p:cNvSpPr txBox="1"/>
           <p:nvPr/>
         </p:nvSpPr>
         <p:spPr>
           <a:xfrm>
-            <a:off x="822960" y="5120640"/>
+            <a:off x="822960" y="5349240"/>
             <a:ext cx="10607040" cy="1188720"/>
           </a:xfrm>
           <a:prstGeom prst="rect">
@@ -7383,37 +8206,37 @@
           <a:p>
             <a:pPr algn="l"/>
             <a:r>
-              <a:rPr sz="1600" b="1">
-                <a:solidFill>
-                  <a:srgbClr val="1F2937"/>
-                </a:solidFill>
-                <a:latin typeface="Hiragino Mincho ProN"/>
-              </a:rPr>
-              <a:t>💡 「ベッド単価」 = その医師の患者の各フェーズ日数 × 単価 ÷ 総延日数</a:t>
-            </a:r>
-          </a:p>
-          <a:p>
-            <a:pPr algn="l"/>
-            <a:r>
-              <a:rPr sz="1400" b="0">
-                <a:solidFill>
-                  <a:srgbClr val="1F2937"/>
-                </a:solidFill>
-                <a:latin typeface="Hiragino Mincho ProN"/>
-              </a:rPr>
-              <a:t>    短期入院（A 群）中心の医師 → ベッド単価 高い</a:t>
-            </a:r>
-          </a:p>
-          <a:p>
-            <a:pPr algn="l"/>
-            <a:r>
-              <a:rPr sz="1400" b="0">
-                <a:solidFill>
-                  <a:srgbClr val="1F2937"/>
-                </a:solidFill>
-                <a:latin typeface="Hiragino Mincho ProN"/>
-              </a:rPr>
-              <a:t>    長期入院（C 群）中心の医師 → ベッド単価 低い</a:t>
+              <a:rPr sz="1400" b="1">
+                <a:solidFill>
+                  <a:srgbClr val="1F2937"/>
+                </a:solidFill>
+                <a:latin typeface="Hiragino Mincho ProN"/>
+              </a:rPr>
+              <a:t>💡 ベッド粗利単価 = (A 日数×26,500 + B 日数×32,500 + C 日数×31,000) / 総延日数</a:t>
+            </a:r>
+          </a:p>
+          <a:p>
+            <a:pPr algn="l"/>
+            <a:r>
+              <a:rPr sz="1300" b="0">
+                <a:solidFill>
+                  <a:srgbClr val="1F2937"/>
+                </a:solidFill>
+                <a:latin typeface="Hiragino Mincho ProN"/>
+              </a:rPr>
+              <a:t>    → 短期入院（A 群）中心 → 単価 低い</a:t>
+            </a:r>
+          </a:p>
+          <a:p>
+            <a:pPr algn="l"/>
+            <a:r>
+              <a:rPr sz="1300" b="0">
+                <a:solidFill>
+                  <a:srgbClr val="1F2937"/>
+                </a:solidFill>
+                <a:latin typeface="Hiragino Mincho ProN"/>
+              </a:rPr>
+              <a:t>    → 長期入院（B + C 群）中心 → 単価 高い</a:t>
             </a:r>
           </a:p>
         </p:txBody>
@@ -7503,20 +8326,20 @@
           <a:p>
             <a:pPr algn="l"/>
             <a:r>
-              <a:rPr sz="2800" b="1">
-                <a:solidFill>
-                  <a:srgbClr val="1F2937"/>
-                </a:solidFill>
-                <a:latin typeface="Hiragino Mincho ProN"/>
-              </a:rPr>
-              <a:t>結果① 医師別 ポジショニング（散布図）</a:t>
+              <a:rPr sz="2600" b="1">
+                <a:solidFill>
+                  <a:srgbClr val="1F2937"/>
+                </a:solidFill>
+                <a:latin typeface="Hiragino Mincho ProN"/>
+              </a:rPr>
+              <a:t>計算の考え方 — 年間粗利 ＝ 量 × 単価 × 期間</a:t>
             </a:r>
           </a:p>
         </p:txBody>
       </p:sp>
       <p:pic>
         <p:nvPicPr>
-          <p:cNvPr id="4" name="Picture 3" descr="02_scatter_named.png"/>
+          <p:cNvPr id="4" name="Picture 3" descr="01_concept_named.png"/>
           <p:cNvPicPr>
             <a:picLocks noChangeAspect="1"/>
           </p:cNvPicPr>
@@ -7530,8 +8353,8 @@
         </p:blipFill>
         <p:spPr>
           <a:xfrm>
-            <a:off x="640080" y="1097280"/>
-            <a:ext cx="10881360" cy="6672851"/>
+            <a:off x="457200" y="1005840"/>
+            <a:ext cx="11247120" cy="6536687"/>
           </a:xfrm>
           <a:prstGeom prst="rect">
             <a:avLst/>
@@ -7629,14 +8452,14 @@
                 </a:solidFill>
                 <a:latin typeface="Hiragino Mincho ProN"/>
               </a:rPr>
-              <a:t>結果② 病棟別 稼働率寄与率ランキング</a:t>
+              <a:t>結果① 医師別 ポジショニング（散布図）</a:t>
             </a:r>
           </a:p>
         </p:txBody>
       </p:sp>
       <p:pic>
         <p:nvPicPr>
-          <p:cNvPr id="4" name="Picture 3" descr="03_ward_ranking_named.png"/>
+          <p:cNvPr id="4" name="Picture 3" descr="02_scatter_named.png"/>
           <p:cNvPicPr>
             <a:picLocks noChangeAspect="1"/>
           </p:cNvPicPr>
@@ -7650,8 +8473,8 @@
         </p:blipFill>
         <p:spPr>
           <a:xfrm>
-            <a:off x="457200" y="1097280"/>
-            <a:ext cx="11247120" cy="6114206"/>
+            <a:off x="640080" y="1097280"/>
+            <a:ext cx="10881360" cy="7225801"/>
           </a:xfrm>
           <a:prstGeom prst="rect">
             <a:avLst/>
@@ -7743,20 +8566,20 @@
           <a:p>
             <a:pPr algn="l"/>
             <a:r>
-              <a:rPr sz="2600" b="1">
-                <a:solidFill>
-                  <a:srgbClr val="1F2937"/>
-                </a:solidFill>
-                <a:latin typeface="Hiragino Mincho ProN"/>
-              </a:rPr>
-              <a:t>結果③ 経営シェア — 全体年間収益 3.90 億円 の内訳</a:t>
+              <a:rPr sz="2800" b="1">
+                <a:solidFill>
+                  <a:srgbClr val="1F2937"/>
+                </a:solidFill>
+                <a:latin typeface="Hiragino Mincho ProN"/>
+              </a:rPr>
+              <a:t>結果② 病棟別 稼働率寄与率ランキング</a:t>
             </a:r>
           </a:p>
         </p:txBody>
       </p:sp>
       <p:pic>
         <p:nvPicPr>
-          <p:cNvPr id="4" name="Picture 3" descr="04_treemap_named.png"/>
+          <p:cNvPr id="4" name="Picture 3" descr="03_ward_ranking_named.png"/>
           <p:cNvPicPr>
             <a:picLocks noChangeAspect="1"/>
           </p:cNvPicPr>
@@ -7770,8 +8593,8 @@
         </p:blipFill>
         <p:spPr>
           <a:xfrm>
-            <a:off x="640080" y="1097280"/>
-            <a:ext cx="10881360" cy="5821749"/>
+            <a:off x="457200" y="1097280"/>
+            <a:ext cx="11247120" cy="6114206"/>
           </a:xfrm>
           <a:prstGeom prst="rect">
             <a:avLst/>

--- a/docs/admin/医師別KPI解析_理事会プレゼン_2026-05-04.pptx
+++ b/docs/admin/医師別KPI解析_理事会プレゼン_2026-05-04.pptx
@@ -24,6 +24,7 @@
     <p:sldId id="272" r:id="rId23"/>
     <p:sldId id="273" r:id="rId24"/>
     <p:sldId id="274" r:id="rId25"/>
+    <p:sldId id="275" r:id="rId26"/>
   </p:sldIdLst>
   <p:sldSz cx="12191695" cy="6858000" type="screen4x3"/>
   <p:notesSz cx="6858000" cy="9144000"/>
@@ -3479,20 +3480,20 @@
           <a:p>
             <a:pPr algn="l"/>
             <a:r>
-              <a:rPr sz="2400" b="1">
-                <a:solidFill>
-                  <a:srgbClr val="1F2937"/>
-                </a:solidFill>
-                <a:latin typeface="Hiragino Mincho ProN"/>
-              </a:rPr>
-              <a:t>結果③ 粗利シェア — 全体年間粗利 8.96 億円 の内訳</a:t>
+              <a:rPr sz="2800" b="1">
+                <a:solidFill>
+                  <a:srgbClr val="1F2937"/>
+                </a:solidFill>
+                <a:latin typeface="Hiragino Mincho ProN"/>
+              </a:rPr>
+              <a:t>結果② 病棟別 稼働率寄与率ランキング</a:t>
             </a:r>
           </a:p>
         </p:txBody>
       </p:sp>
       <p:pic>
         <p:nvPicPr>
-          <p:cNvPr id="4" name="Picture 3" descr="04_treemap_named.png"/>
+          <p:cNvPr id="4" name="Picture 3" descr="03_ward_ranking_named.png"/>
           <p:cNvPicPr>
             <a:picLocks noChangeAspect="1"/>
           </p:cNvPicPr>
@@ -3506,8 +3507,8 @@
         </p:blipFill>
         <p:spPr>
           <a:xfrm>
-            <a:off x="640080" y="1097280"/>
-            <a:ext cx="10881360" cy="5834575"/>
+            <a:off x="457200" y="1097280"/>
+            <a:ext cx="11247120" cy="6114206"/>
           </a:xfrm>
           <a:prstGeom prst="rect">
             <a:avLst/>
@@ -3599,20 +3600,20 @@
           <a:p>
             <a:pPr algn="l"/>
             <a:r>
-              <a:rPr sz="2800" b="1">
-                <a:solidFill>
-                  <a:srgbClr val="1F2937"/>
-                </a:solidFill>
-                <a:latin typeface="Hiragino Mincho ProN"/>
-              </a:rPr>
-              <a:t>結果④ 稼働率寄与率 と 粗利 の相関検証</a:t>
+              <a:rPr sz="2400" b="1">
+                <a:solidFill>
+                  <a:srgbClr val="1F2937"/>
+                </a:solidFill>
+                <a:latin typeface="Hiragino Mincho ProN"/>
+              </a:rPr>
+              <a:t>結果③ 粗利シェア — 全体年間粗利 8.96 億円 の内訳</a:t>
             </a:r>
           </a:p>
         </p:txBody>
       </p:sp>
       <p:pic>
         <p:nvPicPr>
-          <p:cNvPr id="4" name="Picture 3" descr="05_correlation_named.png"/>
+          <p:cNvPr id="4" name="Picture 3" descr="04_treemap_named.png"/>
           <p:cNvPicPr>
             <a:picLocks noChangeAspect="1"/>
           </p:cNvPicPr>
@@ -3626,92 +3627,14 @@
         </p:blipFill>
         <p:spPr>
           <a:xfrm>
-            <a:off x="640080" y="1005840"/>
-            <a:ext cx="10881360" cy="6318996"/>
+            <a:off x="640080" y="1097280"/>
+            <a:ext cx="10881360" cy="5834575"/>
           </a:xfrm>
           <a:prstGeom prst="rect">
             <a:avLst/>
           </a:prstGeom>
         </p:spPr>
       </p:pic>
-      <p:sp>
-        <p:nvSpPr>
-          <p:cNvPr id="5" name="Rectangle 4"/>
-          <p:cNvSpPr/>
-          <p:nvPr/>
-        </p:nvSpPr>
-        <p:spPr>
-          <a:xfrm>
-            <a:off x="640080" y="6035040"/>
-            <a:ext cx="10881360" cy="731520"/>
-          </a:xfrm>
-          <a:prstGeom prst="rect">
-            <a:avLst/>
-          </a:prstGeom>
-          <a:solidFill>
-            <a:srgbClr val="ECFDF5"/>
-          </a:solidFill>
-          <a:ln>
-            <a:noFill/>
-          </a:ln>
-        </p:spPr>
-        <p:style>
-          <a:lnRef idx="1">
-            <a:schemeClr val="accent1"/>
-          </a:lnRef>
-          <a:fillRef idx="3">
-            <a:schemeClr val="accent1"/>
-          </a:fillRef>
-          <a:effectRef idx="2">
-            <a:schemeClr val="accent1"/>
-          </a:effectRef>
-          <a:fontRef idx="minor">
-            <a:schemeClr val="lt1"/>
-          </a:fontRef>
-        </p:style>
-        <p:txBody>
-          <a:bodyPr rtlCol="0" anchor="ctr"/>
-          <a:lstStyle/>
-          <a:p>
-            <a:pPr algn="ctr"/>
-          </a:p>
-        </p:txBody>
-      </p:sp>
-      <p:sp>
-        <p:nvSpPr>
-          <p:cNvPr id="6" name="TextBox 5"/>
-          <p:cNvSpPr txBox="1"/>
-          <p:nvPr/>
-        </p:nvSpPr>
-        <p:spPr>
-          <a:xfrm>
-            <a:off x="822960" y="6172200"/>
-            <a:ext cx="10515600" cy="457200"/>
-          </a:xfrm>
-          <a:prstGeom prst="rect">
-            <a:avLst/>
-          </a:prstGeom>
-          <a:noFill/>
-        </p:spPr>
-        <p:txBody>
-          <a:bodyPr wrap="square" anchor="t" lIns="25400" rIns="25400" tIns="25400" bIns="25400">
-            <a:spAutoFit/>
-          </a:bodyPr>
-          <a:lstStyle/>
-          <a:p>
-            <a:pPr algn="l"/>
-            <a:r>
-              <a:rPr sz="1800" b="1">
-                <a:solidFill>
-                  <a:srgbClr val="10B981"/>
-                </a:solidFill>
-                <a:latin typeface="Hiragino Mincho ProN"/>
-              </a:rPr>
-              <a:t>💡 結論: 稼働率寄与率を主指標にすれば粗利の 9 割以上を説明できる</a:t>
-            </a:r>
-          </a:p>
-        </p:txBody>
-      </p:sp>
     </p:spTree>
   </p:cSld>
   <p:clrMapOvr>
@@ -3745,6 +3668,108 @@
             <a:avLst/>
           </a:prstGeom>
           <a:solidFill>
+            <a:srgbClr val="EFF6FF"/>
+          </a:solidFill>
+          <a:ln>
+            <a:noFill/>
+          </a:ln>
+        </p:spPr>
+        <p:style>
+          <a:lnRef idx="1">
+            <a:schemeClr val="accent1"/>
+          </a:lnRef>
+          <a:fillRef idx="3">
+            <a:schemeClr val="accent1"/>
+          </a:fillRef>
+          <a:effectRef idx="2">
+            <a:schemeClr val="accent1"/>
+          </a:effectRef>
+          <a:fontRef idx="minor">
+            <a:schemeClr val="lt1"/>
+          </a:fontRef>
+        </p:style>
+        <p:txBody>
+          <a:bodyPr rtlCol="0" anchor="ctr"/>
+          <a:lstStyle/>
+          <a:p>
+            <a:pPr algn="ctr"/>
+          </a:p>
+        </p:txBody>
+      </p:sp>
+      <p:sp>
+        <p:nvSpPr>
+          <p:cNvPr id="3" name="TextBox 2"/>
+          <p:cNvSpPr txBox="1"/>
+          <p:nvPr/>
+        </p:nvSpPr>
+        <p:spPr>
+          <a:xfrm>
+            <a:off x="457200" y="182880"/>
+            <a:ext cx="11247120" cy="640080"/>
+          </a:xfrm>
+          <a:prstGeom prst="rect">
+            <a:avLst/>
+          </a:prstGeom>
+          <a:noFill/>
+        </p:spPr>
+        <p:txBody>
+          <a:bodyPr wrap="square" anchor="t" lIns="25400" rIns="25400" tIns="25400" bIns="25400">
+            <a:spAutoFit/>
+          </a:bodyPr>
+          <a:lstStyle/>
+          <a:p>
+            <a:pPr algn="l"/>
+            <a:r>
+              <a:rPr sz="2800" b="1">
+                <a:solidFill>
+                  <a:srgbClr val="1F2937"/>
+                </a:solidFill>
+                <a:latin typeface="Hiragino Mincho ProN"/>
+              </a:rPr>
+              <a:t>結果④ 稼働率寄与率 と 粗利 の相関検証</a:t>
+            </a:r>
+          </a:p>
+        </p:txBody>
+      </p:sp>
+      <p:pic>
+        <p:nvPicPr>
+          <p:cNvPr id="4" name="Picture 3" descr="05_correlation_named.png"/>
+          <p:cNvPicPr>
+            <a:picLocks noChangeAspect="1"/>
+          </p:cNvPicPr>
+          <p:nvPr/>
+        </p:nvPicPr>
+        <p:blipFill>
+          <a:blip r:embed="rId2"/>
+          <a:stretch>
+            <a:fillRect/>
+          </a:stretch>
+        </p:blipFill>
+        <p:spPr>
+          <a:xfrm>
+            <a:off x="640080" y="1005840"/>
+            <a:ext cx="10881360" cy="6318996"/>
+          </a:xfrm>
+          <a:prstGeom prst="rect">
+            <a:avLst/>
+          </a:prstGeom>
+        </p:spPr>
+      </p:pic>
+      <p:sp>
+        <p:nvSpPr>
+          <p:cNvPr id="5" name="Rectangle 4"/>
+          <p:cNvSpPr/>
+          <p:nvPr/>
+        </p:nvSpPr>
+        <p:spPr>
+          <a:xfrm>
+            <a:off x="640080" y="6035040"/>
+            <a:ext cx="10881360" cy="731520"/>
+          </a:xfrm>
+          <a:prstGeom prst="rect">
+            <a:avLst/>
+          </a:prstGeom>
+          <a:solidFill>
             <a:srgbClr val="ECFDF5"/>
           </a:solidFill>
           <a:ln>
@@ -3775,14 +3800,14 @@
       </p:sp>
       <p:sp>
         <p:nvSpPr>
-          <p:cNvPr id="3" name="TextBox 2"/>
+          <p:cNvPr id="6" name="TextBox 5"/>
           <p:cNvSpPr txBox="1"/>
           <p:nvPr/>
         </p:nvSpPr>
         <p:spPr>
           <a:xfrm>
-            <a:off x="457200" y="182880"/>
-            <a:ext cx="11247120" cy="640080"/>
+            <a:off x="822960" y="6172200"/>
+            <a:ext cx="10515600" cy="457200"/>
           </a:xfrm>
           <a:prstGeom prst="rect">
             <a:avLst/>
@@ -3797,204 +3822,13 @@
           <a:p>
             <a:pPr algn="l"/>
             <a:r>
-              <a:rPr sz="2600" b="1">
+              <a:rPr sz="1800" b="1">
                 <a:solidFill>
                   <a:srgbClr val="10B981"/>
                 </a:solidFill>
                 <a:latin typeface="Hiragino Mincho ProN"/>
               </a:rPr>
-              <a:t>主な発見① 粗利単価 トップ 3 はすべて長期入院型</a:t>
-            </a:r>
-          </a:p>
-        </p:txBody>
-      </p:sp>
-      <p:sp>
-        <p:nvSpPr>
-          <p:cNvPr id="4" name="TextBox 3"/>
-          <p:cNvSpPr txBox="1"/>
-          <p:nvPr/>
-        </p:nvSpPr>
-        <p:spPr>
-          <a:xfrm>
-            <a:off x="640080" y="1188720"/>
-            <a:ext cx="10972800" cy="5303520"/>
-          </a:xfrm>
-          <a:prstGeom prst="rect">
-            <a:avLst/>
-          </a:prstGeom>
-          <a:noFill/>
-        </p:spPr>
-        <p:txBody>
-          <a:bodyPr wrap="square">
-            <a:spAutoFit/>
-          </a:bodyPr>
-          <a:lstStyle/>
-          <a:p>
-            <a:pPr algn="l"/>
-            <a:r>
-              <a:rPr sz="2200" b="1">
-                <a:solidFill>
-                  <a:srgbClr val="1F2937"/>
-                </a:solidFill>
-                <a:latin typeface="Hiragino Mincho ProN"/>
-              </a:rPr>
-              <a:t>ベッド粗利単価 上位 3 名:</a:t>
-            </a:r>
-          </a:p>
-          <a:p>
-            <a:pPr algn="l"/>
-            <a:r>
-              <a:rPr sz="1200" b="0">
-                <a:solidFill>
-                  <a:srgbClr val="1F2937"/>
-                </a:solidFill>
-                <a:latin typeface="Hiragino Mincho ProN"/>
-              </a:rPr>
-              <a:t/>
-            </a:r>
-          </a:p>
-          <a:p>
-            <a:pPr algn="l"/>
-            <a:r>
-              <a:rPr sz="1800" b="1">
-                <a:solidFill>
-                  <a:srgbClr val="1F2937"/>
-                </a:solidFill>
-                <a:latin typeface="Hiragino Mincho ProN"/>
-              </a:rPr>
-              <a:t>  1. OKUK    30,712 円/床日    平均在院 35.7 日</a:t>
-            </a:r>
-          </a:p>
-          <a:p>
-            <a:pPr algn="l"/>
-            <a:r>
-              <a:rPr sz="1400" b="0">
-                <a:solidFill>
-                  <a:srgbClr val="1F2937"/>
-                </a:solidFill>
-                <a:latin typeface="Hiragino Mincho ProN"/>
-              </a:rPr>
-              <a:t>      B 群 21% / C 群 65% / A 群 14%</a:t>
-            </a:r>
-          </a:p>
-          <a:p>
-            <a:pPr algn="l"/>
-            <a:r>
-              <a:rPr sz="600" b="0">
-                <a:solidFill>
-                  <a:srgbClr val="1F2937"/>
-                </a:solidFill>
-                <a:latin typeface="Hiragino Mincho ProN"/>
-              </a:rPr>
-              <a:t/>
-            </a:r>
-          </a:p>
-          <a:p>
-            <a:pPr algn="l"/>
-            <a:r>
-              <a:rPr sz="1800" b="1">
-                <a:solidFill>
-                  <a:srgbClr val="1F2937"/>
-                </a:solidFill>
-                <a:latin typeface="Hiragino Mincho ProN"/>
-              </a:rPr>
-              <a:t>  2. KJJ    30,695 円/床日    平均在院 33.2 日</a:t>
-            </a:r>
-          </a:p>
-          <a:p>
-            <a:pPr algn="l"/>
-            <a:r>
-              <a:rPr sz="1400" b="0">
-                <a:solidFill>
-                  <a:srgbClr val="1F2937"/>
-                </a:solidFill>
-                <a:latin typeface="Hiragino Mincho ProN"/>
-              </a:rPr>
-              <a:t>      B 群 24% / C 群 61% / A 群 15%</a:t>
-            </a:r>
-          </a:p>
-          <a:p>
-            <a:pPr algn="l"/>
-            <a:r>
-              <a:rPr sz="600" b="0">
-                <a:solidFill>
-                  <a:srgbClr val="1F2937"/>
-                </a:solidFill>
-                <a:latin typeface="Hiragino Mincho ProN"/>
-              </a:rPr>
-              <a:t/>
-            </a:r>
-          </a:p>
-          <a:p>
-            <a:pPr algn="l"/>
-            <a:r>
-              <a:rPr sz="1800" b="1">
-                <a:solidFill>
-                  <a:srgbClr val="1F2937"/>
-                </a:solidFill>
-                <a:latin typeface="Hiragino Mincho ProN"/>
-              </a:rPr>
-              <a:t>  3. KUBT    30,476 円/床日    平均在院 22.2 日</a:t>
-            </a:r>
-          </a:p>
-          <a:p>
-            <a:pPr algn="l"/>
-            <a:r>
-              <a:rPr sz="1400" b="0">
-                <a:solidFill>
-                  <a:srgbClr val="1F2937"/>
-                </a:solidFill>
-                <a:latin typeface="Hiragino Mincho ProN"/>
-              </a:rPr>
-              <a:t>      B 群 25% / C 群 54% / A 群 20%</a:t>
-            </a:r>
-          </a:p>
-          <a:p>
-            <a:pPr algn="l"/>
-            <a:r>
-              <a:rPr sz="600" b="0">
-                <a:solidFill>
-                  <a:srgbClr val="1F2937"/>
-                </a:solidFill>
-                <a:latin typeface="Hiragino Mincho ProN"/>
-              </a:rPr>
-              <a:t/>
-            </a:r>
-          </a:p>
-          <a:p>
-            <a:pPr algn="l"/>
-            <a:r>
-              <a:rPr sz="1200" b="0">
-                <a:solidFill>
-                  <a:srgbClr val="1F2937"/>
-                </a:solidFill>
-                <a:latin typeface="Hiragino Mincho ProN"/>
-              </a:rPr>
-              <a:t/>
-            </a:r>
-          </a:p>
-          <a:p>
-            <a:pPr algn="l"/>
-            <a:r>
-              <a:rPr sz="2000" b="1">
-                <a:solidFill>
-                  <a:srgbClr val="1F2937"/>
-                </a:solidFill>
-                <a:latin typeface="Hiragino Mincho ProN"/>
-              </a:rPr>
-              <a:t>💡 重要発見: 単価が高い医師は B + C 群が多い → 長期入院型</a:t>
-            </a:r>
-          </a:p>
-          <a:p>
-            <a:pPr algn="l"/>
-            <a:r>
-              <a:rPr sz="1800" b="1">
-                <a:solidFill>
-                  <a:srgbClr val="1F2937"/>
-                </a:solidFill>
-                <a:latin typeface="Hiragino Mincho ProN"/>
-              </a:rPr>
-              <a:t>       「短期回転＝高単価」という思い込みは誤り</a:t>
+              <a:t>💡 結論: 稼働率寄与率を主指標にすれば粗利の 9 割以上を説明できる</a:t>
             </a:r>
           </a:p>
         </p:txBody>
@@ -4032,7 +3866,7 @@
             <a:avLst/>
           </a:prstGeom>
           <a:solidFill>
-            <a:srgbClr val="FEF2F2"/>
+            <a:srgbClr val="ECFDF5"/>
           </a:solidFill>
           <a:ln>
             <a:noFill/>
@@ -4084,13 +3918,13 @@
           <a:p>
             <a:pPr algn="l"/>
             <a:r>
-              <a:rPr sz="2400" b="1">
-                <a:solidFill>
-                  <a:srgbClr val="DC2626"/>
-                </a:solidFill>
-                <a:latin typeface="Hiragino Mincho ProN"/>
-              </a:rPr>
-              <a:t>主な発見② 5F 病棟は OKUK 1 名に依存（構造的リスク）</a:t>
+              <a:rPr sz="2600" b="1">
+                <a:solidFill>
+                  <a:srgbClr val="10B981"/>
+                </a:solidFill>
+                <a:latin typeface="Hiragino Mincho ProN"/>
+              </a:rPr>
+              <a:t>主な発見① 粗利単価 トップ 3 はすべて長期入院型</a:t>
             </a:r>
           </a:p>
         </p:txBody>
@@ -4103,8 +3937,8 @@
         </p:nvSpPr>
         <p:spPr>
           <a:xfrm>
-            <a:off x="640080" y="1371600"/>
-            <a:ext cx="10972800" cy="5029200"/>
+            <a:off x="640080" y="1188720"/>
+            <a:ext cx="10972800" cy="5303520"/>
           </a:xfrm>
           <a:prstGeom prst="rect">
             <a:avLst/>
@@ -4119,31 +3953,19 @@
           <a:p>
             <a:pPr algn="l"/>
             <a:r>
-              <a:rPr sz="1800" b="0">
-                <a:solidFill>
-                  <a:srgbClr val="1F2937"/>
-                </a:solidFill>
-                <a:latin typeface="Hiragino Mincho ProN"/>
-              </a:rPr>
-              <a:t>● 5F 病棟の年間延べ床日数 14,557 床日 のうち</a:t>
-            </a:r>
-          </a:p>
-          <a:p>
-            <a:pPr algn="l"/>
-            <a:r>
               <a:rPr sz="2200" b="1">
                 <a:solidFill>
                   <a:srgbClr val="1F2937"/>
                 </a:solidFill>
                 <a:latin typeface="Hiragino Mincho ProN"/>
               </a:rPr>
-              <a:t>    OKUK 単独で 3,394 床日（23.3%）を占有</a:t>
-            </a:r>
-          </a:p>
-          <a:p>
-            <a:pPr algn="l"/>
-            <a:r>
-              <a:rPr sz="1000" b="0">
+              <a:t>ベッド粗利単価 上位 3 名:</a:t>
+            </a:r>
+          </a:p>
+          <a:p>
+            <a:pPr algn="l"/>
+            <a:r>
+              <a:rPr sz="1200" b="0">
                 <a:solidFill>
                   <a:srgbClr val="1F2937"/>
                 </a:solidFill>
@@ -4155,19 +3977,31 @@
           <a:p>
             <a:pPr algn="l"/>
             <a:r>
-              <a:rPr sz="1800" b="0">
-                <a:solidFill>
-                  <a:srgbClr val="1F2937"/>
-                </a:solidFill>
-                <a:latin typeface="Hiragino Mincho ProN"/>
-              </a:rPr>
-              <a:t>● 次点の 5F 主治医は 13.1% で 10pt 以上の差</a:t>
-            </a:r>
-          </a:p>
-          <a:p>
-            <a:pPr algn="l"/>
-            <a:r>
-              <a:rPr sz="1000" b="0">
+              <a:rPr sz="1800" b="1">
+                <a:solidFill>
+                  <a:srgbClr val="1F2937"/>
+                </a:solidFill>
+                <a:latin typeface="Hiragino Mincho ProN"/>
+              </a:rPr>
+              <a:t>  1. OKUK    30,712 円/床日    平均在院 35.7 日</a:t>
+            </a:r>
+          </a:p>
+          <a:p>
+            <a:pPr algn="l"/>
+            <a:r>
+              <a:rPr sz="1400" b="0">
+                <a:solidFill>
+                  <a:srgbClr val="1F2937"/>
+                </a:solidFill>
+                <a:latin typeface="Hiragino Mincho ProN"/>
+              </a:rPr>
+              <a:t>      B 群 21% / C 群 65% / A 群 14%</a:t>
+            </a:r>
+          </a:p>
+          <a:p>
+            <a:pPr algn="l"/>
+            <a:r>
+              <a:rPr sz="600" b="0">
                 <a:solidFill>
                   <a:srgbClr val="1F2937"/>
                 </a:solidFill>
@@ -4179,31 +4013,31 @@
           <a:p>
             <a:pPr algn="l"/>
             <a:r>
-              <a:rPr sz="1800" b="0">
-                <a:solidFill>
-                  <a:srgbClr val="1F2937"/>
-                </a:solidFill>
-                <a:latin typeface="Hiragino Mincho ProN"/>
-              </a:rPr>
-              <a:t>● OKUK の長期不在で 5F 年間稼働率が</a:t>
-            </a:r>
-          </a:p>
-          <a:p>
-            <a:pPr algn="l"/>
-            <a:r>
-              <a:rPr sz="2200" b="1">
-                <a:solidFill>
-                  <a:srgbClr val="1F2937"/>
-                </a:solidFill>
-                <a:latin typeface="Hiragino Mincho ProN"/>
-              </a:rPr>
-              <a:t>    84.9% → 約 78.5% まで低下するリスク</a:t>
-            </a:r>
-          </a:p>
-          <a:p>
-            <a:pPr algn="l"/>
-            <a:r>
-              <a:rPr sz="1600" b="0">
+              <a:rPr sz="1800" b="1">
+                <a:solidFill>
+                  <a:srgbClr val="1F2937"/>
+                </a:solidFill>
+                <a:latin typeface="Hiragino Mincho ProN"/>
+              </a:rPr>
+              <a:t>  2. KJJ    30,695 円/床日    平均在院 33.2 日</a:t>
+            </a:r>
+          </a:p>
+          <a:p>
+            <a:pPr algn="l"/>
+            <a:r>
+              <a:rPr sz="1400" b="0">
+                <a:solidFill>
+                  <a:srgbClr val="1F2937"/>
+                </a:solidFill>
+                <a:latin typeface="Hiragino Mincho ProN"/>
+              </a:rPr>
+              <a:t>      B 群 24% / C 群 61% / A 群 15%</a:t>
+            </a:r>
+          </a:p>
+          <a:p>
+            <a:pPr algn="l"/>
+            <a:r>
+              <a:rPr sz="600" b="0">
                 <a:solidFill>
                   <a:srgbClr val="1F2937"/>
                 </a:solidFill>
@@ -4215,13 +4049,73 @@
           <a:p>
             <a:pPr algn="l"/>
             <a:r>
+              <a:rPr sz="1800" b="1">
+                <a:solidFill>
+                  <a:srgbClr val="1F2937"/>
+                </a:solidFill>
+                <a:latin typeface="Hiragino Mincho ProN"/>
+              </a:rPr>
+              <a:t>  3. KUBT    30,476 円/床日    平均在院 22.2 日</a:t>
+            </a:r>
+          </a:p>
+          <a:p>
+            <a:pPr algn="l"/>
+            <a:r>
+              <a:rPr sz="1400" b="0">
+                <a:solidFill>
+                  <a:srgbClr val="1F2937"/>
+                </a:solidFill>
+                <a:latin typeface="Hiragino Mincho ProN"/>
+              </a:rPr>
+              <a:t>      B 群 25% / C 群 54% / A 群 20%</a:t>
+            </a:r>
+          </a:p>
+          <a:p>
+            <a:pPr algn="l"/>
+            <a:r>
+              <a:rPr sz="600" b="0">
+                <a:solidFill>
+                  <a:srgbClr val="1F2937"/>
+                </a:solidFill>
+                <a:latin typeface="Hiragino Mincho ProN"/>
+              </a:rPr>
+              <a:t/>
+            </a:r>
+          </a:p>
+          <a:p>
+            <a:pPr algn="l"/>
+            <a:r>
+              <a:rPr sz="1200" b="0">
+                <a:solidFill>
+                  <a:srgbClr val="1F2937"/>
+                </a:solidFill>
+                <a:latin typeface="Hiragino Mincho ProN"/>
+              </a:rPr>
+              <a:t/>
+            </a:r>
+          </a:p>
+          <a:p>
+            <a:pPr algn="l"/>
+            <a:r>
               <a:rPr sz="2000" b="1">
                 <a:solidFill>
                   <a:srgbClr val="1F2937"/>
                 </a:solidFill>
                 <a:latin typeface="Hiragino Mincho ProN"/>
               </a:rPr>
-              <a:t>⚠️ バックアップ体制の脆弱性 — 緊急対応が必要</a:t>
+              <a:t>💡 重要発見: 単価が高い医師は B + C 群が多い → 長期入院型</a:t>
+            </a:r>
+          </a:p>
+          <a:p>
+            <a:pPr algn="l"/>
+            <a:r>
+              <a:rPr sz="1800" b="1">
+                <a:solidFill>
+                  <a:srgbClr val="1F2937"/>
+                </a:solidFill>
+                <a:latin typeface="Hiragino Mincho ProN"/>
+              </a:rPr>
+              <a:t>       「短期回転＝高単価」という思い込みは誤り</a:t>
             </a:r>
           </a:p>
         </p:txBody>
@@ -4259,7 +4153,7 @@
             <a:avLst/>
           </a:prstGeom>
           <a:solidFill>
-            <a:srgbClr val="ECFDF5"/>
+            <a:srgbClr val="FEF2F2"/>
           </a:solidFill>
           <a:ln>
             <a:noFill/>
@@ -4313,11 +4207,11 @@
             <a:r>
               <a:rPr sz="2400" b="1">
                 <a:solidFill>
-                  <a:srgbClr val="10B981"/>
-                </a:solidFill>
-                <a:latin typeface="Hiragino Mincho ProN"/>
-              </a:rPr>
-              <a:t>主な発見③ 6F 病棟は 3 名でバランスよく支えられている</a:t>
+                  <a:srgbClr val="DC2626"/>
+                </a:solidFill>
+                <a:latin typeface="Hiragino Mincho ProN"/>
+              </a:rPr>
+              <a:t>主な発見② 5F 病棟は OKUK 1 名に依存（構造的リスク）</a:t>
             </a:r>
           </a:p>
         </p:txBody>
@@ -4346,133 +4240,109 @@
           <a:p>
             <a:pPr algn="l"/>
             <a:r>
+              <a:rPr sz="1800" b="0">
+                <a:solidFill>
+                  <a:srgbClr val="1F2937"/>
+                </a:solidFill>
+                <a:latin typeface="Hiragino Mincho ProN"/>
+              </a:rPr>
+              <a:t>● 5F 病棟の年間延べ床日数 14,557 床日 のうち</a:t>
+            </a:r>
+          </a:p>
+          <a:p>
+            <a:pPr algn="l"/>
+            <a:r>
+              <a:rPr sz="2200" b="1">
+                <a:solidFill>
+                  <a:srgbClr val="1F2937"/>
+                </a:solidFill>
+                <a:latin typeface="Hiragino Mincho ProN"/>
+              </a:rPr>
+              <a:t>    OKUK 単独で 3,394 床日（23.3%）を占有</a:t>
+            </a:r>
+          </a:p>
+          <a:p>
+            <a:pPr algn="l"/>
+            <a:r>
+              <a:rPr sz="1000" b="0">
+                <a:solidFill>
+                  <a:srgbClr val="1F2937"/>
+                </a:solidFill>
+                <a:latin typeface="Hiragino Mincho ProN"/>
+              </a:rPr>
+              <a:t/>
+            </a:r>
+          </a:p>
+          <a:p>
+            <a:pPr algn="l"/>
+            <a:r>
+              <a:rPr sz="1800" b="0">
+                <a:solidFill>
+                  <a:srgbClr val="1F2937"/>
+                </a:solidFill>
+                <a:latin typeface="Hiragino Mincho ProN"/>
+              </a:rPr>
+              <a:t>● 次点の 5F 主治医は 13.1% で 10pt 以上の差</a:t>
+            </a:r>
+          </a:p>
+          <a:p>
+            <a:pPr algn="l"/>
+            <a:r>
+              <a:rPr sz="1000" b="0">
+                <a:solidFill>
+                  <a:srgbClr val="1F2937"/>
+                </a:solidFill>
+                <a:latin typeface="Hiragino Mincho ProN"/>
+              </a:rPr>
+              <a:t/>
+            </a:r>
+          </a:p>
+          <a:p>
+            <a:pPr algn="l"/>
+            <a:r>
+              <a:rPr sz="1800" b="0">
+                <a:solidFill>
+                  <a:srgbClr val="1F2937"/>
+                </a:solidFill>
+                <a:latin typeface="Hiragino Mincho ProN"/>
+              </a:rPr>
+              <a:t>● OKUK の長期不在で 5F 年間稼働率が</a:t>
+            </a:r>
+          </a:p>
+          <a:p>
+            <a:pPr algn="l"/>
+            <a:r>
+              <a:rPr sz="2200" b="1">
+                <a:solidFill>
+                  <a:srgbClr val="1F2937"/>
+                </a:solidFill>
+                <a:latin typeface="Hiragino Mincho ProN"/>
+              </a:rPr>
+              <a:t>    84.9% → 約 78.5% まで低下するリスク</a:t>
+            </a:r>
+          </a:p>
+          <a:p>
+            <a:pPr algn="l"/>
+            <a:r>
+              <a:rPr sz="1600" b="0">
+                <a:solidFill>
+                  <a:srgbClr val="1F2937"/>
+                </a:solidFill>
+                <a:latin typeface="Hiragino Mincho ProN"/>
+              </a:rPr>
+              <a:t/>
+            </a:r>
+          </a:p>
+          <a:p>
+            <a:pPr algn="l"/>
+            <a:r>
               <a:rPr sz="2000" b="1">
                 <a:solidFill>
                   <a:srgbClr val="1F2937"/>
                 </a:solidFill>
                 <a:latin typeface="Hiragino Mincho ProN"/>
               </a:rPr>
-              <a:t>● 6F 病棟 上位 3 名:</a:t>
-            </a:r>
-          </a:p>
-          <a:p>
-            <a:pPr algn="l"/>
-            <a:r>
-              <a:rPr sz="2200" b="1">
-                <a:solidFill>
-                  <a:srgbClr val="1F2937"/>
-                </a:solidFill>
-                <a:latin typeface="Hiragino Mincho ProN"/>
-              </a:rPr>
-              <a:t>    KUBT・KJJ・TERUH</a:t>
-            </a:r>
-          </a:p>
-          <a:p>
-            <a:pPr algn="l"/>
-            <a:r>
-              <a:rPr sz="1800" b="0">
-                <a:solidFill>
-                  <a:srgbClr val="1F2937"/>
-                </a:solidFill>
-                <a:latin typeface="Hiragino Mincho ProN"/>
-              </a:rPr>
-              <a:t>    合計 6F 寄与率 54.6%</a:t>
-            </a:r>
-          </a:p>
-          <a:p>
-            <a:pPr algn="l"/>
-            <a:r>
-              <a:rPr sz="1400" b="0">
-                <a:solidFill>
-                  <a:srgbClr val="1F2937"/>
-                </a:solidFill>
-                <a:latin typeface="Hiragino Mincho ProN"/>
-              </a:rPr>
-              <a:t/>
-            </a:r>
-          </a:p>
-          <a:p>
-            <a:pPr algn="l"/>
-            <a:r>
-              <a:rPr sz="1800" b="0">
-                <a:solidFill>
-                  <a:srgbClr val="1F2937"/>
-                </a:solidFill>
-                <a:latin typeface="Hiragino Mincho ProN"/>
-              </a:rPr>
-              <a:t>● 5F の中央集中（49%）と比べ、6F は分散度が高い</a:t>
-            </a:r>
-          </a:p>
-          <a:p>
-            <a:pPr algn="l"/>
-            <a:r>
-              <a:rPr sz="1000" b="0">
-                <a:solidFill>
-                  <a:srgbClr val="1F2937"/>
-                </a:solidFill>
-                <a:latin typeface="Hiragino Mincho ProN"/>
-              </a:rPr>
-              <a:t/>
-            </a:r>
-          </a:p>
-          <a:p>
-            <a:pPr algn="l"/>
-            <a:r>
-              <a:rPr sz="2200" b="1">
-                <a:solidFill>
-                  <a:srgbClr val="1F2937"/>
-                </a:solidFill>
-                <a:latin typeface="Hiragino Mincho ProN"/>
-              </a:rPr>
-              <a:t>● 特定医師不在時のリスクが相対的に小さい</a:t>
-            </a:r>
-          </a:p>
-          <a:p>
-            <a:pPr algn="l"/>
-            <a:r>
-              <a:rPr sz="1000" b="0">
-                <a:solidFill>
-                  <a:srgbClr val="1F2937"/>
-                </a:solidFill>
-                <a:latin typeface="Hiragino Mincho ProN"/>
-              </a:rPr>
-              <a:t/>
-            </a:r>
-          </a:p>
-          <a:p>
-            <a:pPr algn="l"/>
-            <a:r>
-              <a:rPr sz="1800" b="0">
-                <a:solidFill>
-                  <a:srgbClr val="1F2937"/>
-                </a:solidFill>
-                <a:latin typeface="Hiragino Mincho ProN"/>
-              </a:rPr>
-              <a:t>● 6F 年間稼働率 88.8%（目標 90% にあと 1.2pt）</a:t>
-            </a:r>
-          </a:p>
-          <a:p>
-            <a:pPr algn="l"/>
-            <a:r>
-              <a:rPr sz="1600" b="0">
-                <a:solidFill>
-                  <a:srgbClr val="1F2937"/>
-                </a:solidFill>
-                <a:latin typeface="Hiragino Mincho ProN"/>
-              </a:rPr>
-              <a:t/>
-            </a:r>
-          </a:p>
-          <a:p>
-            <a:pPr algn="l"/>
-            <a:r>
-              <a:rPr sz="2000" b="1">
-                <a:solidFill>
-                  <a:srgbClr val="1F2937"/>
-                </a:solidFill>
-                <a:latin typeface="Hiragino Mincho ProN"/>
-              </a:rPr>
-              <a:t>✅ 健全な分散型運営</a:t>
+              <a:t>⚠️ バックアップ体制の脆弱性 — 緊急対応が必要</a:t>
             </a:r>
           </a:p>
         </p:txBody>
@@ -4510,7 +4380,7 @@
             <a:avLst/>
           </a:prstGeom>
           <a:solidFill>
-            <a:srgbClr val="EFF6FF"/>
+            <a:srgbClr val="ECFDF5"/>
           </a:solidFill>
           <a:ln>
             <a:noFill/>
@@ -4562,13 +4432,13 @@
           <a:p>
             <a:pPr algn="l"/>
             <a:r>
-              <a:rPr sz="2600" b="1">
-                <a:solidFill>
-                  <a:srgbClr val="1F2937"/>
-                </a:solidFill>
-                <a:latin typeface="Hiragino Mincho ProN"/>
-              </a:rPr>
-              <a:t>提言 1:  5F 病棟の主治医不足リスクを解消する</a:t>
+              <a:rPr sz="2400" b="1">
+                <a:solidFill>
+                  <a:srgbClr val="10B981"/>
+                </a:solidFill>
+                <a:latin typeface="Hiragino Mincho ProN"/>
+              </a:rPr>
+              <a:t>主な発見③ 6F 病棟は 3 名でバランスよく支えられている</a:t>
             </a:r>
           </a:p>
         </p:txBody>
@@ -4581,7 +4451,7 @@
         </p:nvSpPr>
         <p:spPr>
           <a:xfrm>
-            <a:off x="640080" y="1463040"/>
+            <a:off x="640080" y="1371600"/>
             <a:ext cx="10972800" cy="5029200"/>
           </a:xfrm>
           <a:prstGeom prst="rect">
@@ -4603,7 +4473,31 @@
                 </a:solidFill>
                 <a:latin typeface="Hiragino Mincho ProN"/>
               </a:rPr>
-              <a:t>課題: 5F の OKUK 依存（23.3%）は経営継続性のリスク</a:t>
+              <a:t>● 6F 病棟 上位 3 名:</a:t>
+            </a:r>
+          </a:p>
+          <a:p>
+            <a:pPr algn="l"/>
+            <a:r>
+              <a:rPr sz="2200" b="1">
+                <a:solidFill>
+                  <a:srgbClr val="1F2937"/>
+                </a:solidFill>
+                <a:latin typeface="Hiragino Mincho ProN"/>
+              </a:rPr>
+              <a:t>    KUBT・KJJ・TERUH</a:t>
+            </a:r>
+          </a:p>
+          <a:p>
+            <a:pPr algn="l"/>
+            <a:r>
+              <a:rPr sz="1800" b="0">
+                <a:solidFill>
+                  <a:srgbClr val="1F2937"/>
+                </a:solidFill>
+                <a:latin typeface="Hiragino Mincho ProN"/>
+              </a:rPr>
+              <a:t>    合計 6F 寄与率 54.6%</a:t>
             </a:r>
           </a:p>
           <a:p>
@@ -4621,97 +4515,85 @@
           <a:p>
             <a:pPr algn="l"/>
             <a:r>
+              <a:rPr sz="1800" b="0">
+                <a:solidFill>
+                  <a:srgbClr val="1F2937"/>
+                </a:solidFill>
+                <a:latin typeface="Hiragino Mincho ProN"/>
+              </a:rPr>
+              <a:t>● 5F の中央集中（49%）と比べ、6F は分散度が高い</a:t>
+            </a:r>
+          </a:p>
+          <a:p>
+            <a:pPr algn="l"/>
+            <a:r>
+              <a:rPr sz="1000" b="0">
+                <a:solidFill>
+                  <a:srgbClr val="1F2937"/>
+                </a:solidFill>
+                <a:latin typeface="Hiragino Mincho ProN"/>
+              </a:rPr>
+              <a:t/>
+            </a:r>
+          </a:p>
+          <a:p>
+            <a:pPr algn="l"/>
+            <a:r>
+              <a:rPr sz="2200" b="1">
+                <a:solidFill>
+                  <a:srgbClr val="1F2937"/>
+                </a:solidFill>
+                <a:latin typeface="Hiragino Mincho ProN"/>
+              </a:rPr>
+              <a:t>● 特定医師不在時のリスクが相対的に小さい</a:t>
+            </a:r>
+          </a:p>
+          <a:p>
+            <a:pPr algn="l"/>
+            <a:r>
+              <a:rPr sz="1000" b="0">
+                <a:solidFill>
+                  <a:srgbClr val="1F2937"/>
+                </a:solidFill>
+                <a:latin typeface="Hiragino Mincho ProN"/>
+              </a:rPr>
+              <a:t/>
+            </a:r>
+          </a:p>
+          <a:p>
+            <a:pPr algn="l"/>
+            <a:r>
+              <a:rPr sz="1800" b="0">
+                <a:solidFill>
+                  <a:srgbClr val="1F2937"/>
+                </a:solidFill>
+                <a:latin typeface="Hiragino Mincho ProN"/>
+              </a:rPr>
+              <a:t>● 6F 年間稼働率 88.8%（目標 90% にあと 1.2pt）</a:t>
+            </a:r>
+          </a:p>
+          <a:p>
+            <a:pPr algn="l"/>
+            <a:r>
+              <a:rPr sz="1600" b="0">
+                <a:solidFill>
+                  <a:srgbClr val="1F2937"/>
+                </a:solidFill>
+                <a:latin typeface="Hiragino Mincho ProN"/>
+              </a:rPr>
+              <a:t/>
+            </a:r>
+          </a:p>
+          <a:p>
+            <a:pPr algn="l"/>
+            <a:r>
               <a:rPr sz="2000" b="1">
                 <a:solidFill>
                   <a:srgbClr val="1F2937"/>
                 </a:solidFill>
                 <a:latin typeface="Hiragino Mincho ProN"/>
               </a:rPr>
-              <a:t>対応:</a:t>
-            </a:r>
-          </a:p>
-          <a:p>
-            <a:pPr algn="l"/>
-            <a:r>
-              <a:rPr sz="1800" b="0">
-                <a:solidFill>
-                  <a:srgbClr val="1F2937"/>
-                </a:solidFill>
-                <a:latin typeface="Hiragino Mincho ProN"/>
-              </a:rPr>
-              <a:t>    ● 5F に主たる病棟を持つ医師を 1〜2 名増員</a:t>
-            </a:r>
-          </a:p>
-          <a:p>
-            <a:pPr algn="l"/>
-            <a:r>
-              <a:rPr sz="1800" b="0">
-                <a:solidFill>
-                  <a:srgbClr val="1F2937"/>
-                </a:solidFill>
-                <a:latin typeface="Hiragino Mincho ProN"/>
-              </a:rPr>
-              <a:t>    ● OKUK の患者バックアップ体制を整備</a:t>
-            </a:r>
-          </a:p>
-          <a:p>
-            <a:pPr algn="l"/>
-            <a:r>
-              <a:rPr sz="1800" b="0">
-                <a:solidFill>
-                  <a:srgbClr val="1F2937"/>
-                </a:solidFill>
-                <a:latin typeface="Hiragino Mincho ProN"/>
-              </a:rPr>
-              <a:t>    ● 5F 主治医の月次寄与率を可視化し、依存度を継続モニタリング</a:t>
-            </a:r>
-          </a:p>
-          <a:p>
-            <a:pPr algn="l"/>
-            <a:r>
-              <a:rPr sz="1200" b="0">
-                <a:solidFill>
-                  <a:srgbClr val="1F2937"/>
-                </a:solidFill>
-                <a:latin typeface="Hiragino Mincho ProN"/>
-              </a:rPr>
-              <a:t/>
-            </a:r>
-          </a:p>
-          <a:p>
-            <a:pPr algn="l"/>
-            <a:r>
-              <a:rPr sz="2000" b="1">
-                <a:solidFill>
-                  <a:srgbClr val="1F2937"/>
-                </a:solidFill>
-                <a:latin typeface="Hiragino Mincho ProN"/>
-              </a:rPr>
-              <a:t>期待効果:</a:t>
-            </a:r>
-          </a:p>
-          <a:p>
-            <a:pPr algn="l"/>
-            <a:r>
-              <a:rPr sz="1800" b="0">
-                <a:solidFill>
-                  <a:srgbClr val="1F2937"/>
-                </a:solidFill>
-                <a:latin typeface="Hiragino Mincho ProN"/>
-              </a:rPr>
-              <a:t>    ● 5F 年間稼働率 84.9% → 90% へ</a:t>
-            </a:r>
-          </a:p>
-          <a:p>
-            <a:pPr algn="l"/>
-            <a:r>
-              <a:rPr sz="1800" b="0">
-                <a:solidFill>
-                  <a:srgbClr val="1F2937"/>
-                </a:solidFill>
-                <a:latin typeface="Hiragino Mincho ProN"/>
-              </a:rPr>
-              <a:t>    ● 不在リスクで稼働率 6pt 下落を防止</a:t>
+              <a:t>✅ 健全な分散型運営</a:t>
             </a:r>
           </a:p>
         </p:txBody>
@@ -4749,7 +4631,7 @@
             <a:avLst/>
           </a:prstGeom>
           <a:solidFill>
-            <a:srgbClr val="FEF3C7"/>
+            <a:srgbClr val="EFF6FF"/>
           </a:solidFill>
           <a:ln>
             <a:noFill/>
@@ -4801,13 +4683,13 @@
           <a:p>
             <a:pPr algn="l"/>
             <a:r>
-              <a:rPr sz="2400" b="1">
-                <a:solidFill>
-                  <a:srgbClr val="D97706"/>
-                </a:solidFill>
-                <a:latin typeface="Hiragino Mincho ProN"/>
-              </a:rPr>
-              <a:t>提言 2:  「短期回転推進」ではなく「適切な在院期間管理」</a:t>
+              <a:rPr sz="2600" b="1">
+                <a:solidFill>
+                  <a:srgbClr val="1F2937"/>
+                </a:solidFill>
+                <a:latin typeface="Hiragino Mincho ProN"/>
+              </a:rPr>
+              <a:t>提言 1:  5F 病棟の主治医不足リスクを解消する</a:t>
             </a:r>
           </a:p>
         </p:txBody>
@@ -4836,13 +4718,49 @@
           <a:p>
             <a:pPr algn="l"/>
             <a:r>
+              <a:rPr sz="2000" b="1">
+                <a:solidFill>
+                  <a:srgbClr val="1F2937"/>
+                </a:solidFill>
+                <a:latin typeface="Hiragino Mincho ProN"/>
+              </a:rPr>
+              <a:t>課題: 5F の OKUK 依存（23.3%）は経営継続性のリスク</a:t>
+            </a:r>
+          </a:p>
+          <a:p>
+            <a:pPr algn="l"/>
+            <a:r>
+              <a:rPr sz="1400" b="0">
+                <a:solidFill>
+                  <a:srgbClr val="1F2937"/>
+                </a:solidFill>
+                <a:latin typeface="Hiragino Mincho ProN"/>
+              </a:rPr>
+              <a:t/>
+            </a:r>
+          </a:p>
+          <a:p>
+            <a:pPr algn="l"/>
+            <a:r>
+              <a:rPr sz="2000" b="1">
+                <a:solidFill>
+                  <a:srgbClr val="1F2937"/>
+                </a:solidFill>
+                <a:latin typeface="Hiragino Mincho ProN"/>
+              </a:rPr>
+              <a:t>対応:</a:t>
+            </a:r>
+          </a:p>
+          <a:p>
+            <a:pPr algn="l"/>
+            <a:r>
               <a:rPr sz="1800" b="0">
                 <a:solidFill>
                   <a:srgbClr val="1F2937"/>
                 </a:solidFill>
                 <a:latin typeface="Hiragino Mincho ProN"/>
               </a:rPr>
-              <a:t>本解析で「B 群（回復期 6〜14 日）の中心管理が最も粗利貢献が高い」</a:t>
+              <a:t>    ● 5F に主たる病棟を持つ医師を 1〜2 名増員</a:t>
             </a:r>
           </a:p>
           <a:p>
@@ -4854,13 +4772,25 @@
                 </a:solidFill>
                 <a:latin typeface="Hiragino Mincho ProN"/>
               </a:rPr>
-              <a:t>ことが明確になりました。</a:t>
-            </a:r>
-          </a:p>
-          <a:p>
-            <a:pPr algn="l"/>
-            <a:r>
-              <a:rPr sz="1400" b="0">
+              <a:t>    ● OKUK の患者バックアップ体制を整備</a:t>
+            </a:r>
+          </a:p>
+          <a:p>
+            <a:pPr algn="l"/>
+            <a:r>
+              <a:rPr sz="1800" b="0">
+                <a:solidFill>
+                  <a:srgbClr val="1F2937"/>
+                </a:solidFill>
+                <a:latin typeface="Hiragino Mincho ProN"/>
+              </a:rPr>
+              <a:t>    ● 5F 主治医の月次寄与率を可視化し、依存度を継続モニタリング</a:t>
+            </a:r>
+          </a:p>
+          <a:p>
+            <a:pPr algn="l"/>
+            <a:r>
+              <a:rPr sz="1200" b="0">
                 <a:solidFill>
                   <a:srgbClr val="1F2937"/>
                 </a:solidFill>
@@ -4878,7 +4808,7 @@
                 </a:solidFill>
                 <a:latin typeface="Hiragino Mincho ProN"/>
               </a:rPr>
-              <a:t>運営方針:</a:t>
+              <a:t>期待効果:</a:t>
             </a:r>
           </a:p>
           <a:p>
@@ -4890,7 +4820,7 @@
                 </a:solidFill>
                 <a:latin typeface="Hiragino Mincho ProN"/>
               </a:rPr>
-              <a:t>    ● 適応のある患者を 6〜14 日の B 群中心で安定管理する文化を強化</a:t>
+              <a:t>    ● 5F 年間稼働率 84.9% → 90% へ</a:t>
             </a:r>
           </a:p>
           <a:p>
@@ -4902,67 +4832,7 @@
                 </a:solidFill>
                 <a:latin typeface="Hiragino Mincho ProN"/>
               </a:rPr>
-              <a:t>    ● C 群（15 日以降）への滞留を抑え、退院支援に注力</a:t>
-            </a:r>
-          </a:p>
-          <a:p>
-            <a:pPr algn="l"/>
-            <a:r>
-              <a:rPr sz="1800" b="0">
-                <a:solidFill>
-                  <a:srgbClr val="1F2937"/>
-                </a:solidFill>
-                <a:latin typeface="Hiragino Mincho ProN"/>
-              </a:rPr>
-              <a:t>    ● A 群（急性期）は本来必要な医療を提供（コスト理由で減らさない）</a:t>
-            </a:r>
-          </a:p>
-          <a:p>
-            <a:pPr algn="l"/>
-            <a:r>
-              <a:rPr sz="1400" b="0">
-                <a:solidFill>
-                  <a:srgbClr val="1F2937"/>
-                </a:solidFill>
-                <a:latin typeface="Hiragino Mincho ProN"/>
-              </a:rPr>
-              <a:t/>
-            </a:r>
-          </a:p>
-          <a:p>
-            <a:pPr algn="l"/>
-            <a:r>
-              <a:rPr sz="1600" b="1">
-                <a:solidFill>
-                  <a:srgbClr val="1F2937"/>
-                </a:solidFill>
-                <a:latin typeface="Hiragino Mincho ProN"/>
-              </a:rPr>
-              <a:t>⚠️ 倫理的配慮:</a:t>
-            </a:r>
-          </a:p>
-          <a:p>
-            <a:pPr algn="l"/>
-            <a:r>
-              <a:rPr sz="1400" b="0">
-                <a:solidFill>
-                  <a:srgbClr val="1F2937"/>
-                </a:solidFill>
-                <a:latin typeface="Hiragino Mincho ProN"/>
-              </a:rPr>
-              <a:t>    患者選別・適応外入院・在院延長を誘発しない設計とする</a:t>
-            </a:r>
-          </a:p>
-          <a:p>
-            <a:pPr algn="l"/>
-            <a:r>
-              <a:rPr sz="1400" b="0">
-                <a:solidFill>
-                  <a:srgbClr val="1F2937"/>
-                </a:solidFill>
-                <a:latin typeface="Hiragino Mincho ProN"/>
-              </a:rPr>
-              <a:t>    「適応のある患者を、適切な期間で治療し、自宅復帰を支援する」が大前提</a:t>
+              <a:t>    ● 不在リスクで稼働率 6pt 下落を防止</a:t>
             </a:r>
           </a:p>
         </p:txBody>
@@ -5000,7 +4870,7 @@
             <a:avLst/>
           </a:prstGeom>
           <a:solidFill>
-            <a:srgbClr val="EFF6FF"/>
+            <a:srgbClr val="FEF3C7"/>
           </a:solidFill>
           <a:ln>
             <a:noFill/>
@@ -5052,13 +4922,13 @@
           <a:p>
             <a:pPr algn="l"/>
             <a:r>
-              <a:rPr sz="2600" b="1">
-                <a:solidFill>
-                  <a:srgbClr val="1F2937"/>
-                </a:solidFill>
-                <a:latin typeface="Hiragino Mincho ProN"/>
-              </a:rPr>
-              <a:t>提言 3:  KPI 月次モニタリング体制を確立する</a:t>
+              <a:rPr sz="2400" b="1">
+                <a:solidFill>
+                  <a:srgbClr val="D97706"/>
+                </a:solidFill>
+                <a:latin typeface="Hiragino Mincho ProN"/>
+              </a:rPr>
+              <a:t>提言 2:  「短期回転推進」ではなく「適切な在院期間管理」</a:t>
             </a:r>
           </a:p>
         </p:txBody>
@@ -5087,13 +4957,49 @@
           <a:p>
             <a:pPr algn="l"/>
             <a:r>
+              <a:rPr sz="1800" b="0">
+                <a:solidFill>
+                  <a:srgbClr val="1F2937"/>
+                </a:solidFill>
+                <a:latin typeface="Hiragino Mincho ProN"/>
+              </a:rPr>
+              <a:t>本解析で「B 群（回復期 6〜14 日）の中心管理が最も粗利貢献が高い」</a:t>
+            </a:r>
+          </a:p>
+          <a:p>
+            <a:pPr algn="l"/>
+            <a:r>
+              <a:rPr sz="1800" b="0">
+                <a:solidFill>
+                  <a:srgbClr val="1F2937"/>
+                </a:solidFill>
+                <a:latin typeface="Hiragino Mincho ProN"/>
+              </a:rPr>
+              <a:t>ことが明確になりました。</a:t>
+            </a:r>
+          </a:p>
+          <a:p>
+            <a:pPr algn="l"/>
+            <a:r>
+              <a:rPr sz="1400" b="0">
+                <a:solidFill>
+                  <a:srgbClr val="1F2937"/>
+                </a:solidFill>
+                <a:latin typeface="Hiragino Mincho ProN"/>
+              </a:rPr>
+              <a:t/>
+            </a:r>
+          </a:p>
+          <a:p>
+            <a:pPr algn="l"/>
+            <a:r>
               <a:rPr sz="2000" b="1">
                 <a:solidFill>
                   <a:srgbClr val="1F2937"/>
                 </a:solidFill>
                 <a:latin typeface="Hiragino Mincho ProN"/>
               </a:rPr>
-              <a:t>KPI 設計:</a:t>
+              <a:t>運営方針:</a:t>
             </a:r>
           </a:p>
           <a:p>
@@ -5105,7 +5011,7 @@
                 </a:solidFill>
                 <a:latin typeface="Hiragino Mincho ProN"/>
               </a:rPr>
-              <a:t>    主指標: 稼働率寄与率（%） — ベッドを埋める量の貢献</a:t>
+              <a:t>    ● 適応のある患者を 6〜14 日の B 群中心で安定管理する文化を強化</a:t>
             </a:r>
           </a:p>
           <a:p>
@@ -5117,7 +5023,7 @@
                 </a:solidFill>
                 <a:latin typeface="Hiragino Mincho ProN"/>
               </a:rPr>
-              <a:t>    副指標: ベッド粗利単価（円/床日） — 1 床 1 日あたりの運営貢献額</a:t>
+              <a:t>    ● C 群（15 日以降）への滞留を抑え、退院支援に注力</a:t>
             </a:r>
           </a:p>
           <a:p>
@@ -5129,7 +5035,7 @@
                 </a:solidFill>
                 <a:latin typeface="Hiragino Mincho ProN"/>
               </a:rPr>
-              <a:t>    合成 : 年間粗利 = 主 × 副 × 期間（参考値）</a:t>
+              <a:t>    ● A 群（急性期）は本来必要な医療を提供（コスト理由で減らさない）</a:t>
             </a:r>
           </a:p>
           <a:p>
@@ -5147,49 +5053,37 @@
           <a:p>
             <a:pPr algn="l"/>
             <a:r>
-              <a:rPr sz="2000" b="1">
-                <a:solidFill>
-                  <a:srgbClr val="1F2937"/>
-                </a:solidFill>
-                <a:latin typeface="Hiragino Mincho ProN"/>
-              </a:rPr>
-              <a:t>運用方法:</a:t>
-            </a:r>
-          </a:p>
-          <a:p>
-            <a:pPr algn="l"/>
-            <a:r>
-              <a:rPr sz="1800" b="0">
-                <a:solidFill>
-                  <a:srgbClr val="1F2937"/>
-                </a:solidFill>
-                <a:latin typeface="Hiragino Mincho ProN"/>
-              </a:rPr>
-              <a:t>    ● 月次会議で全医師の寄与率・粗利単価を併記表示</a:t>
-            </a:r>
-          </a:p>
-          <a:p>
-            <a:pPr algn="l"/>
-            <a:r>
-              <a:rPr sz="1800" b="0">
-                <a:solidFill>
-                  <a:srgbClr val="1F2937"/>
-                </a:solidFill>
-                <a:latin typeface="Hiragino Mincho ProN"/>
-              </a:rPr>
-              <a:t>    ● 順位ではなく散布図で「タイプ分類」として議論</a:t>
-            </a:r>
-          </a:p>
-          <a:p>
-            <a:pPr algn="l"/>
-            <a:r>
-              <a:rPr sz="1800" b="0">
-                <a:solidFill>
-                  <a:srgbClr val="1F2937"/>
-                </a:solidFill>
-                <a:latin typeface="Hiragino Mincho ProN"/>
-              </a:rPr>
-              <a:t>    ● ベッドコントロールシミュレーターに月次自動更新機能を組込み</a:t>
+              <a:rPr sz="1600" b="1">
+                <a:solidFill>
+                  <a:srgbClr val="1F2937"/>
+                </a:solidFill>
+                <a:latin typeface="Hiragino Mincho ProN"/>
+              </a:rPr>
+              <a:t>⚠️ 倫理的配慮:</a:t>
+            </a:r>
+          </a:p>
+          <a:p>
+            <a:pPr algn="l"/>
+            <a:r>
+              <a:rPr sz="1400" b="0">
+                <a:solidFill>
+                  <a:srgbClr val="1F2937"/>
+                </a:solidFill>
+                <a:latin typeface="Hiragino Mincho ProN"/>
+              </a:rPr>
+              <a:t>    患者選別・適応外入院・在院延長を誘発しない設計とする</a:t>
+            </a:r>
+          </a:p>
+          <a:p>
+            <a:pPr algn="l"/>
+            <a:r>
+              <a:rPr sz="1400" b="0">
+                <a:solidFill>
+                  <a:srgbClr val="1F2937"/>
+                </a:solidFill>
+                <a:latin typeface="Hiragino Mincho ProN"/>
+              </a:rPr>
+              <a:t>    「適応のある患者を、適切な期間で治療し、自宅復帰を支援する」が大前提</a:t>
             </a:r>
           </a:p>
         </p:txBody>
@@ -5285,7 +5179,7 @@
                 </a:solidFill>
                 <a:latin typeface="Hiragino Mincho ProN"/>
               </a:rPr>
-              <a:t>提言 4:  Stage 2 — リハ加算・処置加算で精緻化</a:t>
+              <a:t>提言 3:  KPI 月次モニタリング体制を確立する</a:t>
             </a:r>
           </a:p>
         </p:txBody>
@@ -5320,7 +5214,7 @@
                 </a:solidFill>
                 <a:latin typeface="Hiragino Mincho ProN"/>
               </a:rPr>
-              <a:t>現状（Stage 1）の限界:</a:t>
+              <a:t>KPI 設計:</a:t>
             </a:r>
           </a:p>
           <a:p>
@@ -5332,13 +5226,37 @@
                 </a:solidFill>
                 <a:latin typeface="Hiragino Mincho ProN"/>
               </a:rPr>
-              <a:t>    フェーズ別粗利のみで概算</a:t>
-            </a:r>
-          </a:p>
-          <a:p>
-            <a:pPr algn="l"/>
-            <a:r>
-              <a:rPr sz="1200" b="0">
+              <a:t>    主指標: 稼働率寄与率（%） — ベッドを埋める量の貢献</a:t>
+            </a:r>
+          </a:p>
+          <a:p>
+            <a:pPr algn="l"/>
+            <a:r>
+              <a:rPr sz="1800" b="0">
+                <a:solidFill>
+                  <a:srgbClr val="1F2937"/>
+                </a:solidFill>
+                <a:latin typeface="Hiragino Mincho ProN"/>
+              </a:rPr>
+              <a:t>    副指標: ベッド粗利単価（円/床日） — 1 床 1 日あたりの運営貢献額</a:t>
+            </a:r>
+          </a:p>
+          <a:p>
+            <a:pPr algn="l"/>
+            <a:r>
+              <a:rPr sz="1800" b="0">
+                <a:solidFill>
+                  <a:srgbClr val="1F2937"/>
+                </a:solidFill>
+                <a:latin typeface="Hiragino Mincho ProN"/>
+              </a:rPr>
+              <a:t>    合成 : 年間粗利 = 主 × 副 × 期間（参考値）</a:t>
+            </a:r>
+          </a:p>
+          <a:p>
+            <a:pPr algn="l"/>
+            <a:r>
+              <a:rPr sz="1400" b="0">
                 <a:solidFill>
                   <a:srgbClr val="1F2937"/>
                 </a:solidFill>
@@ -5356,7 +5274,7 @@
                 </a:solidFill>
                 <a:latin typeface="Hiragino Mincho ProN"/>
               </a:rPr>
-              <a:t>Stage 2 追加データ要求（事務へ）:</a:t>
+              <a:t>運用方法:</a:t>
             </a:r>
           </a:p>
           <a:p>
@@ -5368,7 +5286,7 @@
                 </a:solidFill>
                 <a:latin typeface="Hiragino Mincho ProN"/>
               </a:rPr>
-              <a:t>    ● 患者別 月次リハビリ単位数（PT / OT / ST）</a:t>
+              <a:t>    ● 月次会議で全医師の寄与率・粗利単価を併記表示</a:t>
             </a:r>
           </a:p>
           <a:p>
@@ -5380,7 +5298,7 @@
                 </a:solidFill>
                 <a:latin typeface="Hiragino Mincho ProN"/>
               </a:rPr>
-              <a:t>    ● 処置加算（中心静脈、人工呼吸器、ドレーン等）</a:t>
+              <a:t>    ● 順位ではなく散布図で「タイプ分類」として議論</a:t>
             </a:r>
           </a:p>
           <a:p>
@@ -5392,55 +5310,7 @@
                 </a:solidFill>
                 <a:latin typeface="Hiragino Mincho ProN"/>
               </a:rPr>
-              <a:t>    ● 検査加算・手術料の患者別月次集計</a:t>
-            </a:r>
-          </a:p>
-          <a:p>
-            <a:pPr algn="l"/>
-            <a:r>
-              <a:rPr sz="1400" b="0">
-                <a:solidFill>
-                  <a:srgbClr val="1F2937"/>
-                </a:solidFill>
-                <a:latin typeface="Hiragino Mincho ProN"/>
-              </a:rPr>
-              <a:t/>
-            </a:r>
-          </a:p>
-          <a:p>
-            <a:pPr algn="l"/>
-            <a:r>
-              <a:rPr sz="2000" b="1">
-                <a:solidFill>
-                  <a:srgbClr val="1F2937"/>
-                </a:solidFill>
-                <a:latin typeface="Hiragino Mincho ProN"/>
-              </a:rPr>
-              <a:t>Stage 2 完成後の効果:</a:t>
-            </a:r>
-          </a:p>
-          <a:p>
-            <a:pPr algn="l"/>
-            <a:r>
-              <a:rPr sz="1800" b="0">
-                <a:solidFill>
-                  <a:srgbClr val="1F2937"/>
-                </a:solidFill>
-                <a:latin typeface="Hiragino Mincho ProN"/>
-              </a:rPr>
-              <a:t>    ● 「実際にどの加算で単価を上げられるか」が見える</a:t>
-            </a:r>
-          </a:p>
-          <a:p>
-            <a:pPr algn="l"/>
-            <a:r>
-              <a:rPr sz="1800" b="0">
-                <a:solidFill>
-                  <a:srgbClr val="1F2937"/>
-                </a:solidFill>
-                <a:latin typeface="Hiragino Mincho ProN"/>
-              </a:rPr>
-              <a:t>    ● 診療科横断のベストプラクティス共有が可能に</a:t>
+              <a:t>    ● ベッドコントロールシミュレーターに月次自動更新機能を組込み</a:t>
             </a:r>
           </a:p>
         </p:txBody>
@@ -5472,13 +5342,13 @@
         <p:spPr>
           <a:xfrm>
             <a:off x="0" y="0"/>
-            <a:ext cx="12191695" cy="6858000"/>
+            <a:ext cx="12191695" cy="914400"/>
           </a:xfrm>
           <a:prstGeom prst="rect">
             <a:avLst/>
           </a:prstGeom>
           <a:solidFill>
-            <a:srgbClr val="F9FAFB"/>
+            <a:srgbClr val="EFF6FF"/>
           </a:solidFill>
           <a:ln>
             <a:noFill/>
@@ -5514,8 +5384,8 @@
         </p:nvSpPr>
         <p:spPr>
           <a:xfrm>
-            <a:off x="457200" y="2743200"/>
-            <a:ext cx="11247120" cy="1371600"/>
+            <a:off x="457200" y="182880"/>
+            <a:ext cx="11247120" cy="640080"/>
           </a:xfrm>
           <a:prstGeom prst="rect">
             <a:avLst/>
@@ -5528,15 +5398,15 @@
           </a:bodyPr>
           <a:lstStyle/>
           <a:p>
-            <a:pPr algn="ctr"/>
-            <a:r>
-              <a:rPr sz="6000" b="1">
-                <a:solidFill>
-                  <a:srgbClr val="1F2937"/>
-                </a:solidFill>
-                <a:latin typeface="Hiragino Mincho ProN"/>
-              </a:rPr>
-              <a:t>ご質問・ご討議</a:t>
+            <a:pPr algn="l"/>
+            <a:r>
+              <a:rPr sz="2400" b="1">
+                <a:solidFill>
+                  <a:srgbClr val="1F2937"/>
+                </a:solidFill>
+                <a:latin typeface="Hiragino Mincho ProN"/>
+              </a:rPr>
+              <a:t>提言 4:  Stage 2 — コスト実測 + 加算追加で精緻化</a:t>
             </a:r>
           </a:p>
         </p:txBody>
@@ -5549,8 +5419,8 @@
         </p:nvSpPr>
         <p:spPr>
           <a:xfrm>
-            <a:off x="457200" y="4114800"/>
-            <a:ext cx="11247120" cy="640080"/>
+            <a:off x="640080" y="1280160"/>
+            <a:ext cx="10972800" cy="5212080"/>
           </a:xfrm>
           <a:prstGeom prst="rect">
             <a:avLst/>
@@ -5558,55 +5428,176 @@
           <a:noFill/>
         </p:spPr>
         <p:txBody>
-          <a:bodyPr wrap="square" anchor="t" lIns="25400" rIns="25400" tIns="25400" bIns="25400">
+          <a:bodyPr wrap="square">
             <a:spAutoFit/>
           </a:bodyPr>
           <a:lstStyle/>
           <a:p>
-            <a:pPr algn="ctr"/>
+            <a:pPr algn="l"/>
+            <a:r>
+              <a:rPr sz="2000" b="1">
+                <a:solidFill>
+                  <a:srgbClr val="1F2937"/>
+                </a:solidFill>
+                <a:latin typeface="Hiragino Mincho ProN"/>
+              </a:rPr>
+              <a:t>現状（Stage 1）の限界:</a:t>
+            </a:r>
+          </a:p>
+          <a:p>
+            <a:pPr algn="l"/>
             <a:r>
               <a:rPr sz="1800" b="0">
                 <a:solidFill>
-                  <a:srgbClr val="6B7280"/>
-                </a:solidFill>
-                <a:latin typeface="Hiragino Mincho ProN"/>
-              </a:rPr>
-              <a:t>おもろまちメディカルセンター</a:t>
-            </a:r>
-          </a:p>
-        </p:txBody>
-      </p:sp>
-      <p:sp>
-        <p:nvSpPr>
-          <p:cNvPr id="5" name="TextBox 4"/>
-          <p:cNvSpPr txBox="1"/>
-          <p:nvPr/>
-        </p:nvSpPr>
-        <p:spPr>
-          <a:xfrm>
-            <a:off x="457200" y="4572000"/>
-            <a:ext cx="11247120" cy="640080"/>
-          </a:xfrm>
-          <a:prstGeom prst="rect">
-            <a:avLst/>
-          </a:prstGeom>
-          <a:noFill/>
-        </p:spPr>
-        <p:txBody>
-          <a:bodyPr wrap="square" anchor="t" lIns="25400" rIns="25400" tIns="25400" bIns="25400">
-            <a:spAutoFit/>
-          </a:bodyPr>
-          <a:lstStyle/>
-          <a:p>
-            <a:pPr algn="ctr"/>
-            <a:r>
-              <a:rPr sz="1400" b="0">
-                <a:solidFill>
-                  <a:srgbClr val="6B7280"/>
-                </a:solidFill>
-                <a:latin typeface="Hiragino Mincho ProN"/>
-              </a:rPr>
-              <a:t>副院長 久保田 透</a:t>
+                  <a:srgbClr val="1F2937"/>
+                </a:solidFill>
+                <a:latin typeface="Hiragino Mincho ProN"/>
+              </a:rPr>
+              <a:t>    フェーズ別粗利は業界目安 ±20% の幅</a:t>
+            </a:r>
+          </a:p>
+          <a:p>
+            <a:pPr algn="l"/>
+            <a:r>
+              <a:rPr sz="1000" b="0">
+                <a:solidFill>
+                  <a:srgbClr val="1F2937"/>
+                </a:solidFill>
+                <a:latin typeface="Hiragino Mincho ProN"/>
+              </a:rPr>
+              <a:t/>
+            </a:r>
+          </a:p>
+          <a:p>
+            <a:pPr algn="l"/>
+            <a:r>
+              <a:rPr sz="2000" b="1">
+                <a:solidFill>
+                  <a:srgbClr val="1F2937"/>
+                </a:solidFill>
+                <a:latin typeface="Hiragino Mincho ProN"/>
+              </a:rPr>
+              <a:t>【優先度 1】コスト実測（業界目安 → 当院実データ）</a:t>
+            </a:r>
+          </a:p>
+          <a:p>
+            <a:pPr algn="l"/>
+            <a:r>
+              <a:rPr sz="1600" b="0">
+                <a:solidFill>
+                  <a:srgbClr val="1F2937"/>
+                </a:solidFill>
+                <a:latin typeface="Hiragino Mincho ProN"/>
+              </a:rPr>
+              <a:t>    ● DPC 患者別 1 日あたり変動費（薬剤・処置・検査・材料・給食）</a:t>
+            </a:r>
+          </a:p>
+          <a:p>
+            <a:pPr algn="l"/>
+            <a:r>
+              <a:rPr sz="1600" b="0">
+                <a:solidFill>
+                  <a:srgbClr val="1F2937"/>
+                </a:solidFill>
+                <a:latin typeface="Hiragino Mincho ProN"/>
+              </a:rPr>
+              <a:t>    ● 1 ヶ月サンプル（150 件）で検証可能、所要 1〜2 週間</a:t>
+            </a:r>
+          </a:p>
+          <a:p>
+            <a:pPr algn="l"/>
+            <a:r>
+              <a:rPr sz="1600" b="0">
+                <a:solidFill>
+                  <a:srgbClr val="1F2937"/>
+                </a:solidFill>
+                <a:latin typeface="Hiragino Mincho ProN"/>
+              </a:rPr>
+              <a:t>    ● → 粗利単価の精度が ±20% → ±数 % に向上</a:t>
+            </a:r>
+          </a:p>
+          <a:p>
+            <a:pPr algn="l"/>
+            <a:r>
+              <a:rPr sz="1000" b="0">
+                <a:solidFill>
+                  <a:srgbClr val="1F2937"/>
+                </a:solidFill>
+                <a:latin typeface="Hiragino Mincho ProN"/>
+              </a:rPr>
+              <a:t/>
+            </a:r>
+          </a:p>
+          <a:p>
+            <a:pPr algn="l"/>
+            <a:r>
+              <a:rPr sz="2000" b="1">
+                <a:solidFill>
+                  <a:srgbClr val="1F2937"/>
+                </a:solidFill>
+                <a:latin typeface="Hiragino Mincho ProN"/>
+              </a:rPr>
+              <a:t>【優先度 2】加算情報（粗利単価のさらなる精緻化）</a:t>
+            </a:r>
+          </a:p>
+          <a:p>
+            <a:pPr algn="l"/>
+            <a:r>
+              <a:rPr sz="1600" b="0">
+                <a:solidFill>
+                  <a:srgbClr val="1F2937"/>
+                </a:solidFill>
+                <a:latin typeface="Hiragino Mincho ProN"/>
+              </a:rPr>
+              <a:t>    ● 患者別 月次リハビリ単位数（PT / OT / ST）</a:t>
+            </a:r>
+          </a:p>
+          <a:p>
+            <a:pPr algn="l"/>
+            <a:r>
+              <a:rPr sz="1600" b="0">
+                <a:solidFill>
+                  <a:srgbClr val="1F2937"/>
+                </a:solidFill>
+                <a:latin typeface="Hiragino Mincho ProN"/>
+              </a:rPr>
+              <a:t>    ● 処置加算（中心静脈、人工呼吸器、ドレーン等）</a:t>
+            </a:r>
+          </a:p>
+          <a:p>
+            <a:pPr algn="l"/>
+            <a:r>
+              <a:rPr sz="1600" b="0">
+                <a:solidFill>
+                  <a:srgbClr val="1F2937"/>
+                </a:solidFill>
+                <a:latin typeface="Hiragino Mincho ProN"/>
+              </a:rPr>
+              <a:t>    ● 検査加算・手術料の患者別月次集計</a:t>
+            </a:r>
+          </a:p>
+          <a:p>
+            <a:pPr algn="l"/>
+            <a:r>
+              <a:rPr sz="1000" b="0">
+                <a:solidFill>
+                  <a:srgbClr val="1F2937"/>
+                </a:solidFill>
+                <a:latin typeface="Hiragino Mincho ProN"/>
+              </a:rPr>
+              <a:t/>
+            </a:r>
+          </a:p>
+          <a:p>
+            <a:pPr algn="l"/>
+            <a:r>
+              <a:rPr sz="1800" b="1">
+                <a:solidFill>
+                  <a:srgbClr val="1F2937"/>
+                </a:solidFill>
+                <a:latin typeface="Hiragino Mincho ProN"/>
+              </a:rPr>
+              <a:t>Stage 2 完成後の効果: 当院実測値で理事会・運営会議に再提示可</a:t>
             </a:r>
           </a:p>
         </p:txBody>
@@ -5906,6 +5897,172 @@
 </p:sld>
 </file>
 
+<file path=ppt/slides/slide20.xml><?xml version="1.0" encoding="utf-8"?>
+<p:sld xmlns:a="http://schemas.openxmlformats.org/drawingml/2006/main" xmlns:p="http://schemas.openxmlformats.org/presentationml/2006/main" xmlns:r="http://schemas.openxmlformats.org/officeDocument/2006/relationships">
+  <p:cSld>
+    <p:spTree>
+      <p:nvGrpSpPr>
+        <p:cNvPr id="1" name=""/>
+        <p:cNvGrpSpPr/>
+        <p:nvPr/>
+      </p:nvGrpSpPr>
+      <p:grpSpPr/>
+      <p:sp>
+        <p:nvSpPr>
+          <p:cNvPr id="2" name="Rectangle 1"/>
+          <p:cNvSpPr/>
+          <p:nvPr/>
+        </p:nvSpPr>
+        <p:spPr>
+          <a:xfrm>
+            <a:off x="0" y="0"/>
+            <a:ext cx="12191695" cy="6858000"/>
+          </a:xfrm>
+          <a:prstGeom prst="rect">
+            <a:avLst/>
+          </a:prstGeom>
+          <a:solidFill>
+            <a:srgbClr val="F9FAFB"/>
+          </a:solidFill>
+          <a:ln>
+            <a:noFill/>
+          </a:ln>
+        </p:spPr>
+        <p:style>
+          <a:lnRef idx="1">
+            <a:schemeClr val="accent1"/>
+          </a:lnRef>
+          <a:fillRef idx="3">
+            <a:schemeClr val="accent1"/>
+          </a:fillRef>
+          <a:effectRef idx="2">
+            <a:schemeClr val="accent1"/>
+          </a:effectRef>
+          <a:fontRef idx="minor">
+            <a:schemeClr val="lt1"/>
+          </a:fontRef>
+        </p:style>
+        <p:txBody>
+          <a:bodyPr rtlCol="0" anchor="ctr"/>
+          <a:lstStyle/>
+          <a:p>
+            <a:pPr algn="ctr"/>
+          </a:p>
+        </p:txBody>
+      </p:sp>
+      <p:sp>
+        <p:nvSpPr>
+          <p:cNvPr id="3" name="TextBox 2"/>
+          <p:cNvSpPr txBox="1"/>
+          <p:nvPr/>
+        </p:nvSpPr>
+        <p:spPr>
+          <a:xfrm>
+            <a:off x="457200" y="2743200"/>
+            <a:ext cx="11247120" cy="1371600"/>
+          </a:xfrm>
+          <a:prstGeom prst="rect">
+            <a:avLst/>
+          </a:prstGeom>
+          <a:noFill/>
+        </p:spPr>
+        <p:txBody>
+          <a:bodyPr wrap="square" anchor="t" lIns="25400" rIns="25400" tIns="25400" bIns="25400">
+            <a:spAutoFit/>
+          </a:bodyPr>
+          <a:lstStyle/>
+          <a:p>
+            <a:pPr algn="ctr"/>
+            <a:r>
+              <a:rPr sz="6000" b="1">
+                <a:solidFill>
+                  <a:srgbClr val="1F2937"/>
+                </a:solidFill>
+                <a:latin typeface="Hiragino Mincho ProN"/>
+              </a:rPr>
+              <a:t>ご質問・ご討議</a:t>
+            </a:r>
+          </a:p>
+        </p:txBody>
+      </p:sp>
+      <p:sp>
+        <p:nvSpPr>
+          <p:cNvPr id="4" name="TextBox 3"/>
+          <p:cNvSpPr txBox="1"/>
+          <p:nvPr/>
+        </p:nvSpPr>
+        <p:spPr>
+          <a:xfrm>
+            <a:off x="457200" y="4114800"/>
+            <a:ext cx="11247120" cy="640080"/>
+          </a:xfrm>
+          <a:prstGeom prst="rect">
+            <a:avLst/>
+          </a:prstGeom>
+          <a:noFill/>
+        </p:spPr>
+        <p:txBody>
+          <a:bodyPr wrap="square" anchor="t" lIns="25400" rIns="25400" tIns="25400" bIns="25400">
+            <a:spAutoFit/>
+          </a:bodyPr>
+          <a:lstStyle/>
+          <a:p>
+            <a:pPr algn="ctr"/>
+            <a:r>
+              <a:rPr sz="1800" b="0">
+                <a:solidFill>
+                  <a:srgbClr val="6B7280"/>
+                </a:solidFill>
+                <a:latin typeface="Hiragino Mincho ProN"/>
+              </a:rPr>
+              <a:t>おもろまちメディカルセンター</a:t>
+            </a:r>
+          </a:p>
+        </p:txBody>
+      </p:sp>
+      <p:sp>
+        <p:nvSpPr>
+          <p:cNvPr id="5" name="TextBox 4"/>
+          <p:cNvSpPr txBox="1"/>
+          <p:nvPr/>
+        </p:nvSpPr>
+        <p:spPr>
+          <a:xfrm>
+            <a:off x="457200" y="4572000"/>
+            <a:ext cx="11247120" cy="640080"/>
+          </a:xfrm>
+          <a:prstGeom prst="rect">
+            <a:avLst/>
+          </a:prstGeom>
+          <a:noFill/>
+        </p:spPr>
+        <p:txBody>
+          <a:bodyPr wrap="square" anchor="t" lIns="25400" rIns="25400" tIns="25400" bIns="25400">
+            <a:spAutoFit/>
+          </a:bodyPr>
+          <a:lstStyle/>
+          <a:p>
+            <a:pPr algn="ctr"/>
+            <a:r>
+              <a:rPr sz="1400" b="0">
+                <a:solidFill>
+                  <a:srgbClr val="6B7280"/>
+                </a:solidFill>
+                <a:latin typeface="Hiragino Mincho ProN"/>
+              </a:rPr>
+              <a:t>副院長 久保田 透</a:t>
+            </a:r>
+          </a:p>
+        </p:txBody>
+      </p:sp>
+    </p:spTree>
+  </p:cSld>
+  <p:clrMapOvr>
+    <a:masterClrMapping/>
+  </p:clrMapOvr>
+</p:sld>
+</file>
+
 <file path=ppt/slides/slide3.xml><?xml version="1.0" encoding="utf-8"?>
 <p:sld xmlns:a="http://schemas.openxmlformats.org/drawingml/2006/main" xmlns:p="http://schemas.openxmlformats.org/presentationml/2006/main" xmlns:r="http://schemas.openxmlformats.org/officeDocument/2006/relationships">
   <p:cSld>
@@ -8274,7 +8431,7 @@
             <a:avLst/>
           </a:prstGeom>
           <a:solidFill>
-            <a:srgbClr val="EFF6FF"/>
+            <a:srgbClr val="FEF3C7"/>
           </a:solidFill>
           <a:ln>
             <a:noFill/>
@@ -8328,18 +8485,18 @@
             <a:r>
               <a:rPr sz="2600" b="1">
                 <a:solidFill>
-                  <a:srgbClr val="1F2937"/>
-                </a:solidFill>
-                <a:latin typeface="Hiragino Mincho ProN"/>
-              </a:rPr>
-              <a:t>計算の考え方 — 年間粗利 ＝ 量 × 単価 × 期間</a:t>
+                  <a:srgbClr val="D97706"/>
+                </a:solidFill>
+                <a:latin typeface="Hiragino Mincho ProN"/>
+              </a:rPr>
+              <a:t>重要: コスト見積もりの位置づけ（業界目安 ±20%）</a:t>
             </a:r>
           </a:p>
         </p:txBody>
       </p:sp>
       <p:pic>
         <p:nvPicPr>
-          <p:cNvPr id="4" name="Picture 3" descr="01_concept_named.png"/>
+          <p:cNvPr id="4" name="Picture 3" descr="07_cost_uncertainty_named.png"/>
           <p:cNvPicPr>
             <a:picLocks noChangeAspect="1"/>
           </p:cNvPicPr>
@@ -8353,14 +8510,104 @@
         </p:blipFill>
         <p:spPr>
           <a:xfrm>
-            <a:off x="457200" y="1005840"/>
-            <a:ext cx="11247120" cy="6536687"/>
+            <a:off x="365760" y="1005840"/>
+            <a:ext cx="11430000" cy="5131732"/>
           </a:xfrm>
           <a:prstGeom prst="rect">
             <a:avLst/>
           </a:prstGeom>
         </p:spPr>
       </p:pic>
+      <p:sp>
+        <p:nvSpPr>
+          <p:cNvPr id="5" name="Rectangle 4"/>
+          <p:cNvSpPr/>
+          <p:nvPr/>
+        </p:nvSpPr>
+        <p:spPr>
+          <a:xfrm>
+            <a:off x="457200" y="5852160"/>
+            <a:ext cx="11247120" cy="822960"/>
+          </a:xfrm>
+          <a:prstGeom prst="rect">
+            <a:avLst/>
+          </a:prstGeom>
+          <a:solidFill>
+            <a:srgbClr val="ECFDF5"/>
+          </a:solidFill>
+          <a:ln>
+            <a:noFill/>
+          </a:ln>
+        </p:spPr>
+        <p:style>
+          <a:lnRef idx="1">
+            <a:schemeClr val="accent1"/>
+          </a:lnRef>
+          <a:fillRef idx="3">
+            <a:schemeClr val="accent1"/>
+          </a:fillRef>
+          <a:effectRef idx="2">
+            <a:schemeClr val="accent1"/>
+          </a:effectRef>
+          <a:fontRef idx="minor">
+            <a:schemeClr val="lt1"/>
+          </a:fontRef>
+        </p:style>
+        <p:txBody>
+          <a:bodyPr rtlCol="0" anchor="ctr"/>
+          <a:lstStyle/>
+          <a:p>
+            <a:pPr algn="ctr"/>
+          </a:p>
+        </p:txBody>
+      </p:sp>
+      <p:sp>
+        <p:nvSpPr>
+          <p:cNvPr id="6" name="TextBox 5"/>
+          <p:cNvSpPr txBox="1"/>
+          <p:nvPr/>
+        </p:nvSpPr>
+        <p:spPr>
+          <a:xfrm>
+            <a:off x="640080" y="5943600"/>
+            <a:ext cx="10972800" cy="731520"/>
+          </a:xfrm>
+          <a:prstGeom prst="rect">
+            <a:avLst/>
+          </a:prstGeom>
+          <a:noFill/>
+        </p:spPr>
+        <p:txBody>
+          <a:bodyPr wrap="square">
+            <a:spAutoFit/>
+          </a:bodyPr>
+          <a:lstStyle/>
+          <a:p>
+            <a:pPr algn="l"/>
+            <a:r>
+              <a:rPr sz="1400" b="1">
+                <a:solidFill>
+                  <a:srgbClr val="10B981"/>
+                </a:solidFill>
+                <a:latin typeface="Hiragino Mincho ProN"/>
+              </a:rPr>
+              <a:t>✅ コストが ±20% 動いても、B 群 ＞ C 群 ＞ A 群 の順位は揺らがず</a:t>
+            </a:r>
+          </a:p>
+          <a:p>
+            <a:pPr algn="l"/>
+            <a:r>
+              <a:rPr sz="1200" b="0">
+                <a:solidFill>
+                  <a:srgbClr val="10B981"/>
+                </a:solidFill>
+                <a:latin typeface="Hiragino Mincho ProN"/>
+              </a:rPr>
+              <a:t>→ 結論「B 群中心管理が運営貢献を最大化」の方向性は精度に依らず確固。Stage 2 で当院 DPC データ検証予定。</a:t>
+            </a:r>
+          </a:p>
+        </p:txBody>
+      </p:sp>
     </p:spTree>
   </p:cSld>
   <p:clrMapOvr>
@@ -8446,20 +8693,20 @@
           <a:p>
             <a:pPr algn="l"/>
             <a:r>
-              <a:rPr sz="2800" b="1">
-                <a:solidFill>
-                  <a:srgbClr val="1F2937"/>
-                </a:solidFill>
-                <a:latin typeface="Hiragino Mincho ProN"/>
-              </a:rPr>
-              <a:t>結果① 医師別 ポジショニング（散布図）</a:t>
+              <a:rPr sz="2600" b="1">
+                <a:solidFill>
+                  <a:srgbClr val="1F2937"/>
+                </a:solidFill>
+                <a:latin typeface="Hiragino Mincho ProN"/>
+              </a:rPr>
+              <a:t>計算の考え方 — 年間粗利 ＝ 量 × 単価 × 期間</a:t>
             </a:r>
           </a:p>
         </p:txBody>
       </p:sp>
       <p:pic>
         <p:nvPicPr>
-          <p:cNvPr id="4" name="Picture 3" descr="02_scatter_named.png"/>
+          <p:cNvPr id="4" name="Picture 3" descr="01_concept_named.png"/>
           <p:cNvPicPr>
             <a:picLocks noChangeAspect="1"/>
           </p:cNvPicPr>
@@ -8473,8 +8720,8 @@
         </p:blipFill>
         <p:spPr>
           <a:xfrm>
-            <a:off x="640080" y="1097280"/>
-            <a:ext cx="10881360" cy="7225801"/>
+            <a:off x="457200" y="1005840"/>
+            <a:ext cx="11247120" cy="6536687"/>
           </a:xfrm>
           <a:prstGeom prst="rect">
             <a:avLst/>
@@ -8572,14 +8819,14 @@
                 </a:solidFill>
                 <a:latin typeface="Hiragino Mincho ProN"/>
               </a:rPr>
-              <a:t>結果② 病棟別 稼働率寄与率ランキング</a:t>
+              <a:t>結果① 医師別 ポジショニング（散布図）</a:t>
             </a:r>
           </a:p>
         </p:txBody>
       </p:sp>
       <p:pic>
         <p:nvPicPr>
-          <p:cNvPr id="4" name="Picture 3" descr="03_ward_ranking_named.png"/>
+          <p:cNvPr id="4" name="Picture 3" descr="02_scatter_named.png"/>
           <p:cNvPicPr>
             <a:picLocks noChangeAspect="1"/>
           </p:cNvPicPr>
@@ -8593,8 +8840,8 @@
         </p:blipFill>
         <p:spPr>
           <a:xfrm>
-            <a:off x="457200" y="1097280"/>
-            <a:ext cx="11247120" cy="6114206"/>
+            <a:off x="640080" y="1097280"/>
+            <a:ext cx="10881360" cy="7225801"/>
           </a:xfrm>
           <a:prstGeom prst="rect">
             <a:avLst/>

--- a/docs/admin/医師別KPI解析_理事会プレゼン_2026-05-04.pptx
+++ b/docs/admin/医師別KPI解析_理事会プレゼン_2026-05-04.pptx
@@ -5,28 +5,28 @@
     <p:sldMasterId id="2147483648" r:id="rId1"/>
   </p:sldMasterIdLst>
   <p:sldIdLst>
-    <p:sldId id="256" r:id="rId7"/>
-    <p:sldId id="257" r:id="rId8"/>
-    <p:sldId id="258" r:id="rId9"/>
-    <p:sldId id="259" r:id="rId10"/>
-    <p:sldId id="260" r:id="rId11"/>
-    <p:sldId id="261" r:id="rId12"/>
-    <p:sldId id="262" r:id="rId13"/>
-    <p:sldId id="263" r:id="rId14"/>
-    <p:sldId id="264" r:id="rId15"/>
-    <p:sldId id="265" r:id="rId16"/>
-    <p:sldId id="266" r:id="rId17"/>
-    <p:sldId id="267" r:id="rId18"/>
-    <p:sldId id="268" r:id="rId19"/>
-    <p:sldId id="269" r:id="rId20"/>
-    <p:sldId id="270" r:id="rId21"/>
-    <p:sldId id="271" r:id="rId22"/>
-    <p:sldId id="272" r:id="rId23"/>
-    <p:sldId id="273" r:id="rId24"/>
-    <p:sldId id="274" r:id="rId25"/>
-    <p:sldId id="275" r:id="rId26"/>
+    <p:sldId id="256" r:id="rId2"/>
+    <p:sldId id="257" r:id="rId3"/>
+    <p:sldId id="258" r:id="rId4"/>
+    <p:sldId id="259" r:id="rId5"/>
+    <p:sldId id="260" r:id="rId6"/>
+    <p:sldId id="261" r:id="rId7"/>
+    <p:sldId id="262" r:id="rId8"/>
+    <p:sldId id="263" r:id="rId9"/>
+    <p:sldId id="264" r:id="rId10"/>
+    <p:sldId id="265" r:id="rId11"/>
+    <p:sldId id="266" r:id="rId12"/>
+    <p:sldId id="267" r:id="rId13"/>
+    <p:sldId id="268" r:id="rId14"/>
+    <p:sldId id="269" r:id="rId15"/>
+    <p:sldId id="270" r:id="rId16"/>
+    <p:sldId id="271" r:id="rId17"/>
+    <p:sldId id="272" r:id="rId18"/>
+    <p:sldId id="273" r:id="rId19"/>
+    <p:sldId id="274" r:id="rId20"/>
+    <p:sldId id="275" r:id="rId21"/>
   </p:sldIdLst>
-  <p:sldSz cx="12191695" cy="6858000" type="screen4x3"/>
+  <p:sldSz cx="12192000" cy="6858000"/>
   <p:notesSz cx="6858000" cy="9144000"/>
   <p:defaultTextStyle>
     <a:defPPr>
@@ -123,6 +123,22 @@
       </a:defRPr>
     </a:lvl9pPr>
   </p:defaultTextStyle>
+  <p:extLst>
+    <p:ext uri="{EFAFB233-063F-42B5-8137-9DF3F51BA10A}">
+      <p15:sldGuideLst xmlns:p15="http://schemas.microsoft.com/office/powerpoint/2012/main">
+        <p15:guide id="1" orient="horz" pos="2160">
+          <p15:clr>
+            <a:srgbClr val="A4A3A4"/>
+          </p15:clr>
+        </p15:guide>
+        <p15:guide id="2" pos="2880">
+          <p15:clr>
+            <a:srgbClr val="A4A3A4"/>
+          </p15:clr>
+        </p15:guide>
+      </p15:sldGuideLst>
+    </p:ext>
+  </p:extLst>
 </p:presentation>
 </file>
 
@@ -164,10 +180,9 @@
           <a:lstStyle/>
           <a:p>
             <a:r>
-              <a:rPr lang="en-US" smtClean="0"/>
+              <a:rPr lang="en-US"/>
               <a:t>Click to edit Master title style</a:t>
             </a:r>
-            <a:endParaRPr lang="en-US"/>
           </a:p>
         </p:txBody>
       </p:sp>
@@ -283,10 +298,9 @@
           </a:lstStyle>
           <a:p>
             <a:r>
-              <a:rPr lang="en-US" smtClean="0"/>
+              <a:rPr lang="en-US"/>
               <a:t>Click to edit Master subtitle style</a:t>
             </a:r>
-            <a:endParaRPr lang="en-US"/>
           </a:p>
         </p:txBody>
       </p:sp>
@@ -307,7 +321,7 @@
           <a:p>
             <a:fld id="{5BCAD085-E8A6-8845-BD4E-CB4CCA059FC4}" type="datetimeFigureOut">
               <a:rPr lang="en-US" smtClean="0"/>
-              <a:t>1/27/13</a:t>
+              <a:t>5/4/26</a:t>
             </a:fld>
             <a:endParaRPr lang="en-US"/>
           </a:p>
@@ -401,10 +415,9 @@
           <a:lstStyle/>
           <a:p>
             <a:r>
-              <a:rPr lang="en-US" smtClean="0"/>
+              <a:rPr lang="en-US"/>
               <a:t>Click to edit Master title style</a:t>
             </a:r>
-            <a:endParaRPr lang="en-US"/>
           </a:p>
         </p:txBody>
       </p:sp>
@@ -425,38 +438,37 @@
           <a:p>
             <a:pPr lvl="0"/>
             <a:r>
-              <a:rPr lang="en-US" smtClean="0"/>
+              <a:rPr lang="en-US"/>
               <a:t>Click to edit Master text styles</a:t>
             </a:r>
           </a:p>
           <a:p>
             <a:pPr lvl="1"/>
             <a:r>
-              <a:rPr lang="en-US" smtClean="0"/>
+              <a:rPr lang="en-US"/>
               <a:t>Second level</a:t>
             </a:r>
           </a:p>
           <a:p>
             <a:pPr lvl="2"/>
             <a:r>
-              <a:rPr lang="en-US" smtClean="0"/>
+              <a:rPr lang="en-US"/>
               <a:t>Third level</a:t>
             </a:r>
           </a:p>
           <a:p>
             <a:pPr lvl="3"/>
             <a:r>
-              <a:rPr lang="en-US" smtClean="0"/>
+              <a:rPr lang="en-US"/>
               <a:t>Fourth level</a:t>
             </a:r>
           </a:p>
           <a:p>
             <a:pPr lvl="4"/>
             <a:r>
-              <a:rPr lang="en-US" smtClean="0"/>
+              <a:rPr lang="en-US"/>
               <a:t>Fifth level</a:t>
             </a:r>
-            <a:endParaRPr lang="en-US"/>
           </a:p>
         </p:txBody>
       </p:sp>
@@ -477,7 +489,7 @@
           <a:p>
             <a:fld id="{5BCAD085-E8A6-8845-BD4E-CB4CCA059FC4}" type="datetimeFigureOut">
               <a:rPr lang="en-US" smtClean="0"/>
-              <a:t>1/27/13</a:t>
+              <a:t>5/4/26</a:t>
             </a:fld>
             <a:endParaRPr lang="en-US"/>
           </a:p>
@@ -576,10 +588,9 @@
           <a:lstStyle/>
           <a:p>
             <a:r>
-              <a:rPr lang="en-US" smtClean="0"/>
+              <a:rPr lang="en-US"/>
               <a:t>Click to edit Master title style</a:t>
             </a:r>
-            <a:endParaRPr lang="en-US"/>
           </a:p>
         </p:txBody>
       </p:sp>
@@ -605,38 +616,37 @@
           <a:p>
             <a:pPr lvl="0"/>
             <a:r>
-              <a:rPr lang="en-US" smtClean="0"/>
+              <a:rPr lang="en-US"/>
               <a:t>Click to edit Master text styles</a:t>
             </a:r>
           </a:p>
           <a:p>
             <a:pPr lvl="1"/>
             <a:r>
-              <a:rPr lang="en-US" smtClean="0"/>
+              <a:rPr lang="en-US"/>
               <a:t>Second level</a:t>
             </a:r>
           </a:p>
           <a:p>
             <a:pPr lvl="2"/>
             <a:r>
-              <a:rPr lang="en-US" smtClean="0"/>
+              <a:rPr lang="en-US"/>
               <a:t>Third level</a:t>
             </a:r>
           </a:p>
           <a:p>
             <a:pPr lvl="3"/>
             <a:r>
-              <a:rPr lang="en-US" smtClean="0"/>
+              <a:rPr lang="en-US"/>
               <a:t>Fourth level</a:t>
             </a:r>
           </a:p>
           <a:p>
             <a:pPr lvl="4"/>
             <a:r>
-              <a:rPr lang="en-US" smtClean="0"/>
+              <a:rPr lang="en-US"/>
               <a:t>Fifth level</a:t>
             </a:r>
-            <a:endParaRPr lang="en-US"/>
           </a:p>
         </p:txBody>
       </p:sp>
@@ -657,7 +667,7 @@
           <a:p>
             <a:fld id="{5BCAD085-E8A6-8845-BD4E-CB4CCA059FC4}" type="datetimeFigureOut">
               <a:rPr lang="en-US" smtClean="0"/>
-              <a:t>1/27/13</a:t>
+              <a:t>5/4/26</a:t>
             </a:fld>
             <a:endParaRPr lang="en-US"/>
           </a:p>
@@ -751,10 +761,9 @@
           <a:lstStyle/>
           <a:p>
             <a:r>
-              <a:rPr lang="en-US" smtClean="0"/>
+              <a:rPr lang="en-US"/>
               <a:t>Click to edit Master title style</a:t>
             </a:r>
-            <a:endParaRPr lang="en-US"/>
           </a:p>
         </p:txBody>
       </p:sp>
@@ -775,38 +784,37 @@
           <a:p>
             <a:pPr lvl="0"/>
             <a:r>
-              <a:rPr lang="en-US" smtClean="0"/>
+              <a:rPr lang="en-US"/>
               <a:t>Click to edit Master text styles</a:t>
             </a:r>
           </a:p>
           <a:p>
             <a:pPr lvl="1"/>
             <a:r>
-              <a:rPr lang="en-US" smtClean="0"/>
+              <a:rPr lang="en-US"/>
               <a:t>Second level</a:t>
             </a:r>
           </a:p>
           <a:p>
             <a:pPr lvl="2"/>
             <a:r>
-              <a:rPr lang="en-US" smtClean="0"/>
+              <a:rPr lang="en-US"/>
               <a:t>Third level</a:t>
             </a:r>
           </a:p>
           <a:p>
             <a:pPr lvl="3"/>
             <a:r>
-              <a:rPr lang="en-US" smtClean="0"/>
+              <a:rPr lang="en-US"/>
               <a:t>Fourth level</a:t>
             </a:r>
           </a:p>
           <a:p>
             <a:pPr lvl="4"/>
             <a:r>
-              <a:rPr lang="en-US" smtClean="0"/>
+              <a:rPr lang="en-US"/>
               <a:t>Fifth level</a:t>
             </a:r>
-            <a:endParaRPr lang="en-US"/>
           </a:p>
         </p:txBody>
       </p:sp>
@@ -827,7 +835,7 @@
           <a:p>
             <a:fld id="{5BCAD085-E8A6-8845-BD4E-CB4CCA059FC4}" type="datetimeFigureOut">
               <a:rPr lang="en-US" smtClean="0"/>
-              <a:t>1/27/13</a:t>
+              <a:t>5/4/26</a:t>
             </a:fld>
             <a:endParaRPr lang="en-US"/>
           </a:p>
@@ -930,10 +938,9 @@
           </a:lstStyle>
           <a:p>
             <a:r>
-              <a:rPr lang="en-US" smtClean="0"/>
+              <a:rPr lang="en-US"/>
               <a:t>Click to edit Master title style</a:t>
             </a:r>
-            <a:endParaRPr lang="en-US"/>
           </a:p>
         </p:txBody>
       </p:sp>
@@ -1050,7 +1057,7 @@
           <a:p>
             <a:pPr lvl="0"/>
             <a:r>
-              <a:rPr lang="en-US" smtClean="0"/>
+              <a:rPr lang="en-US"/>
               <a:t>Click to edit Master text styles</a:t>
             </a:r>
           </a:p>
@@ -1073,7 +1080,7 @@
           <a:p>
             <a:fld id="{5BCAD085-E8A6-8845-BD4E-CB4CCA059FC4}" type="datetimeFigureOut">
               <a:rPr lang="en-US" smtClean="0"/>
-              <a:t>1/27/13</a:t>
+              <a:t>5/4/26</a:t>
             </a:fld>
             <a:endParaRPr lang="en-US"/>
           </a:p>
@@ -1167,10 +1174,9 @@
           <a:lstStyle/>
           <a:p>
             <a:r>
-              <a:rPr lang="en-US" smtClean="0"/>
+              <a:rPr lang="en-US"/>
               <a:t>Click to edit Master title style</a:t>
             </a:r>
-            <a:endParaRPr lang="en-US"/>
           </a:p>
         </p:txBody>
       </p:sp>
@@ -1224,38 +1230,37 @@
           <a:p>
             <a:pPr lvl="0"/>
             <a:r>
-              <a:rPr lang="en-US" smtClean="0"/>
+              <a:rPr lang="en-US"/>
               <a:t>Click to edit Master text styles</a:t>
             </a:r>
           </a:p>
           <a:p>
             <a:pPr lvl="1"/>
             <a:r>
-              <a:rPr lang="en-US" smtClean="0"/>
+              <a:rPr lang="en-US"/>
               <a:t>Second level</a:t>
             </a:r>
           </a:p>
           <a:p>
             <a:pPr lvl="2"/>
             <a:r>
-              <a:rPr lang="en-US" smtClean="0"/>
+              <a:rPr lang="en-US"/>
               <a:t>Third level</a:t>
             </a:r>
           </a:p>
           <a:p>
             <a:pPr lvl="3"/>
             <a:r>
-              <a:rPr lang="en-US" smtClean="0"/>
+              <a:rPr lang="en-US"/>
               <a:t>Fourth level</a:t>
             </a:r>
           </a:p>
           <a:p>
             <a:pPr lvl="4"/>
             <a:r>
-              <a:rPr lang="en-US" smtClean="0"/>
+              <a:rPr lang="en-US"/>
               <a:t>Fifth level</a:t>
             </a:r>
-            <a:endParaRPr lang="en-US"/>
           </a:p>
         </p:txBody>
       </p:sp>
@@ -1309,38 +1314,37 @@
           <a:p>
             <a:pPr lvl="0"/>
             <a:r>
-              <a:rPr lang="en-US" smtClean="0"/>
+              <a:rPr lang="en-US"/>
               <a:t>Click to edit Master text styles</a:t>
             </a:r>
           </a:p>
           <a:p>
             <a:pPr lvl="1"/>
             <a:r>
-              <a:rPr lang="en-US" smtClean="0"/>
+              <a:rPr lang="en-US"/>
               <a:t>Second level</a:t>
             </a:r>
           </a:p>
           <a:p>
             <a:pPr lvl="2"/>
             <a:r>
-              <a:rPr lang="en-US" smtClean="0"/>
+              <a:rPr lang="en-US"/>
               <a:t>Third level</a:t>
             </a:r>
           </a:p>
           <a:p>
             <a:pPr lvl="3"/>
             <a:r>
-              <a:rPr lang="en-US" smtClean="0"/>
+              <a:rPr lang="en-US"/>
               <a:t>Fourth level</a:t>
             </a:r>
           </a:p>
           <a:p>
             <a:pPr lvl="4"/>
             <a:r>
-              <a:rPr lang="en-US" smtClean="0"/>
+              <a:rPr lang="en-US"/>
               <a:t>Fifth level</a:t>
             </a:r>
-            <a:endParaRPr lang="en-US"/>
           </a:p>
         </p:txBody>
       </p:sp>
@@ -1361,7 +1365,7 @@
           <a:p>
             <a:fld id="{5BCAD085-E8A6-8845-BD4E-CB4CCA059FC4}" type="datetimeFigureOut">
               <a:rPr lang="en-US" smtClean="0"/>
-              <a:t>1/27/13</a:t>
+              <a:t>5/4/26</a:t>
             </a:fld>
             <a:endParaRPr lang="en-US"/>
           </a:p>
@@ -1459,10 +1463,9 @@
           </a:lstStyle>
           <a:p>
             <a:r>
-              <a:rPr lang="en-US" smtClean="0"/>
+              <a:rPr lang="en-US"/>
               <a:t>Click to edit Master title style</a:t>
             </a:r>
-            <a:endParaRPr lang="en-US"/>
           </a:p>
         </p:txBody>
       </p:sp>
@@ -1525,7 +1528,7 @@
           <a:p>
             <a:pPr lvl="0"/>
             <a:r>
-              <a:rPr lang="en-US" smtClean="0"/>
+              <a:rPr lang="en-US"/>
               <a:t>Click to edit Master text styles</a:t>
             </a:r>
           </a:p>
@@ -1581,38 +1584,37 @@
           <a:p>
             <a:pPr lvl="0"/>
             <a:r>
-              <a:rPr lang="en-US" smtClean="0"/>
+              <a:rPr lang="en-US"/>
               <a:t>Click to edit Master text styles</a:t>
             </a:r>
           </a:p>
           <a:p>
             <a:pPr lvl="1"/>
             <a:r>
-              <a:rPr lang="en-US" smtClean="0"/>
+              <a:rPr lang="en-US"/>
               <a:t>Second level</a:t>
             </a:r>
           </a:p>
           <a:p>
             <a:pPr lvl="2"/>
             <a:r>
-              <a:rPr lang="en-US" smtClean="0"/>
+              <a:rPr lang="en-US"/>
               <a:t>Third level</a:t>
             </a:r>
           </a:p>
           <a:p>
             <a:pPr lvl="3"/>
             <a:r>
-              <a:rPr lang="en-US" smtClean="0"/>
+              <a:rPr lang="en-US"/>
               <a:t>Fourth level</a:t>
             </a:r>
           </a:p>
           <a:p>
             <a:pPr lvl="4"/>
             <a:r>
-              <a:rPr lang="en-US" smtClean="0"/>
+              <a:rPr lang="en-US"/>
               <a:t>Fifth level</a:t>
             </a:r>
-            <a:endParaRPr lang="en-US"/>
           </a:p>
         </p:txBody>
       </p:sp>
@@ -1675,7 +1677,7 @@
           <a:p>
             <a:pPr lvl="0"/>
             <a:r>
-              <a:rPr lang="en-US" smtClean="0"/>
+              <a:rPr lang="en-US"/>
               <a:t>Click to edit Master text styles</a:t>
             </a:r>
           </a:p>
@@ -1731,38 +1733,37 @@
           <a:p>
             <a:pPr lvl="0"/>
             <a:r>
-              <a:rPr lang="en-US" smtClean="0"/>
+              <a:rPr lang="en-US"/>
               <a:t>Click to edit Master text styles</a:t>
             </a:r>
           </a:p>
           <a:p>
             <a:pPr lvl="1"/>
             <a:r>
-              <a:rPr lang="en-US" smtClean="0"/>
+              <a:rPr lang="en-US"/>
               <a:t>Second level</a:t>
             </a:r>
           </a:p>
           <a:p>
             <a:pPr lvl="2"/>
             <a:r>
-              <a:rPr lang="en-US" smtClean="0"/>
+              <a:rPr lang="en-US"/>
               <a:t>Third level</a:t>
             </a:r>
           </a:p>
           <a:p>
             <a:pPr lvl="3"/>
             <a:r>
-              <a:rPr lang="en-US" smtClean="0"/>
+              <a:rPr lang="en-US"/>
               <a:t>Fourth level</a:t>
             </a:r>
           </a:p>
           <a:p>
             <a:pPr lvl="4"/>
             <a:r>
-              <a:rPr lang="en-US" smtClean="0"/>
+              <a:rPr lang="en-US"/>
               <a:t>Fifth level</a:t>
             </a:r>
-            <a:endParaRPr lang="en-US"/>
           </a:p>
         </p:txBody>
       </p:sp>
@@ -1783,7 +1784,7 @@
           <a:p>
             <a:fld id="{5BCAD085-E8A6-8845-BD4E-CB4CCA059FC4}" type="datetimeFigureOut">
               <a:rPr lang="en-US" smtClean="0"/>
-              <a:t>1/27/13</a:t>
+              <a:t>5/4/26</a:t>
             </a:fld>
             <a:endParaRPr lang="en-US"/>
           </a:p>
@@ -1877,10 +1878,9 @@
           <a:lstStyle/>
           <a:p>
             <a:r>
-              <a:rPr lang="en-US" smtClean="0"/>
+              <a:rPr lang="en-US"/>
               <a:t>Click to edit Master title style</a:t>
             </a:r>
-            <a:endParaRPr lang="en-US"/>
           </a:p>
         </p:txBody>
       </p:sp>
@@ -1901,7 +1901,7 @@
           <a:p>
             <a:fld id="{5BCAD085-E8A6-8845-BD4E-CB4CCA059FC4}" type="datetimeFigureOut">
               <a:rPr lang="en-US" smtClean="0"/>
-              <a:t>1/27/13</a:t>
+              <a:t>5/4/26</a:t>
             </a:fld>
             <a:endParaRPr lang="en-US"/>
           </a:p>
@@ -1996,7 +1996,7 @@
           <a:p>
             <a:fld id="{5BCAD085-E8A6-8845-BD4E-CB4CCA059FC4}" type="datetimeFigureOut">
               <a:rPr lang="en-US" smtClean="0"/>
-              <a:t>1/27/13</a:t>
+              <a:t>5/4/26</a:t>
             </a:fld>
             <a:endParaRPr lang="en-US"/>
           </a:p>
@@ -2099,10 +2099,9 @@
           </a:lstStyle>
           <a:p>
             <a:r>
-              <a:rPr lang="en-US" smtClean="0"/>
+              <a:rPr lang="en-US"/>
               <a:t>Click to edit Master title style</a:t>
             </a:r>
-            <a:endParaRPr lang="en-US"/>
           </a:p>
         </p:txBody>
       </p:sp>
@@ -2156,38 +2155,37 @@
           <a:p>
             <a:pPr lvl="0"/>
             <a:r>
-              <a:rPr lang="en-US" smtClean="0"/>
+              <a:rPr lang="en-US"/>
               <a:t>Click to edit Master text styles</a:t>
             </a:r>
           </a:p>
           <a:p>
             <a:pPr lvl="1"/>
             <a:r>
-              <a:rPr lang="en-US" smtClean="0"/>
+              <a:rPr lang="en-US"/>
               <a:t>Second level</a:t>
             </a:r>
           </a:p>
           <a:p>
             <a:pPr lvl="2"/>
             <a:r>
-              <a:rPr lang="en-US" smtClean="0"/>
+              <a:rPr lang="en-US"/>
               <a:t>Third level</a:t>
             </a:r>
           </a:p>
           <a:p>
             <a:pPr lvl="3"/>
             <a:r>
-              <a:rPr lang="en-US" smtClean="0"/>
+              <a:rPr lang="en-US"/>
               <a:t>Fourth level</a:t>
             </a:r>
           </a:p>
           <a:p>
             <a:pPr lvl="4"/>
             <a:r>
-              <a:rPr lang="en-US" smtClean="0"/>
+              <a:rPr lang="en-US"/>
               <a:t>Fifth level</a:t>
             </a:r>
-            <a:endParaRPr lang="en-US"/>
           </a:p>
         </p:txBody>
       </p:sp>
@@ -2250,7 +2248,7 @@
           <a:p>
             <a:pPr lvl="0"/>
             <a:r>
-              <a:rPr lang="en-US" smtClean="0"/>
+              <a:rPr lang="en-US"/>
               <a:t>Click to edit Master text styles</a:t>
             </a:r>
           </a:p>
@@ -2273,7 +2271,7 @@
           <a:p>
             <a:fld id="{5BCAD085-E8A6-8845-BD4E-CB4CCA059FC4}" type="datetimeFigureOut">
               <a:rPr lang="en-US" smtClean="0"/>
-              <a:t>1/27/13</a:t>
+              <a:t>5/4/26</a:t>
             </a:fld>
             <a:endParaRPr lang="en-US"/>
           </a:p>
@@ -2376,10 +2374,9 @@
           </a:lstStyle>
           <a:p>
             <a:r>
-              <a:rPr lang="en-US" smtClean="0"/>
+              <a:rPr lang="en-US"/>
               <a:t>Click to edit Master title style</a:t>
             </a:r>
-            <a:endParaRPr lang="en-US"/>
           </a:p>
         </p:txBody>
       </p:sp>
@@ -2503,7 +2500,7 @@
           <a:p>
             <a:pPr lvl="0"/>
             <a:r>
-              <a:rPr lang="en-US" smtClean="0"/>
+              <a:rPr lang="en-US"/>
               <a:t>Click to edit Master text styles</a:t>
             </a:r>
           </a:p>
@@ -2526,7 +2523,7 @@
           <a:p>
             <a:fld id="{5BCAD085-E8A6-8845-BD4E-CB4CCA059FC4}" type="datetimeFigureOut">
               <a:rPr lang="en-US" smtClean="0"/>
-              <a:t>1/27/13</a:t>
+              <a:t>5/4/26</a:t>
             </a:fld>
             <a:endParaRPr lang="en-US"/>
           </a:p>
@@ -2635,10 +2632,9 @@
           <a:lstStyle/>
           <a:p>
             <a:r>
-              <a:rPr lang="en-US" smtClean="0"/>
+              <a:rPr lang="en-US"/>
               <a:t>Click to edit Master title style</a:t>
             </a:r>
-            <a:endParaRPr lang="en-US"/>
           </a:p>
         </p:txBody>
       </p:sp>
@@ -2669,38 +2665,37 @@
           <a:p>
             <a:pPr lvl="0"/>
             <a:r>
-              <a:rPr lang="en-US" smtClean="0"/>
+              <a:rPr lang="en-US"/>
               <a:t>Click to edit Master text styles</a:t>
             </a:r>
           </a:p>
           <a:p>
             <a:pPr lvl="1"/>
             <a:r>
-              <a:rPr lang="en-US" smtClean="0"/>
+              <a:rPr lang="en-US"/>
               <a:t>Second level</a:t>
             </a:r>
           </a:p>
           <a:p>
             <a:pPr lvl="2"/>
             <a:r>
-              <a:rPr lang="en-US" smtClean="0"/>
+              <a:rPr lang="en-US"/>
               <a:t>Third level</a:t>
             </a:r>
           </a:p>
           <a:p>
             <a:pPr lvl="3"/>
             <a:r>
-              <a:rPr lang="en-US" smtClean="0"/>
+              <a:rPr lang="en-US"/>
               <a:t>Fourth level</a:t>
             </a:r>
           </a:p>
           <a:p>
             <a:pPr lvl="4"/>
             <a:r>
-              <a:rPr lang="en-US" smtClean="0"/>
+              <a:rPr lang="en-US"/>
               <a:t>Fifth level</a:t>
             </a:r>
-            <a:endParaRPr lang="en-US"/>
           </a:p>
         </p:txBody>
       </p:sp>
@@ -2739,7 +2734,7 @@
           <a:p>
             <a:fld id="{5BCAD085-E8A6-8845-BD4E-CB4CCA059FC4}" type="datetimeFigureOut">
               <a:rPr lang="en-US" smtClean="0"/>
-              <a:t>1/27/13</a:t>
+              <a:t>5/4/26</a:t>
             </a:fld>
             <a:endParaRPr lang="en-US"/>
           </a:p>
@@ -3098,7 +3093,7 @@
 </file>
 
 <file path=ppt/slides/slide1.xml><?xml version="1.0" encoding="utf-8"?>
-<p:sld xmlns:a="http://schemas.openxmlformats.org/drawingml/2006/main" xmlns:p="http://schemas.openxmlformats.org/presentationml/2006/main" xmlns:r="http://schemas.openxmlformats.org/officeDocument/2006/relationships">
+<p:sld xmlns:a="http://schemas.openxmlformats.org/drawingml/2006/main" xmlns:r="http://schemas.openxmlformats.org/officeDocument/2006/relationships" xmlns:p="http://schemas.openxmlformats.org/presentationml/2006/main">
   <p:cSld>
     <p:spTree>
       <p:nvGrpSpPr>
@@ -3106,7 +3101,14 @@
         <p:cNvGrpSpPr/>
         <p:nvPr/>
       </p:nvGrpSpPr>
-      <p:grpSpPr/>
+      <p:grpSpPr>
+        <a:xfrm>
+          <a:off x="0" y="0"/>
+          <a:ext cx="0" cy="0"/>
+          <a:chOff x="0" y="0"/>
+          <a:chExt cx="0" cy="0"/>
+        </a:xfrm>
+      </p:grpSpPr>
       <p:sp>
         <p:nvSpPr>
           <p:cNvPr id="2" name="Rectangle 1"/>
@@ -3147,6 +3149,7 @@
           <a:lstStyle/>
           <a:p>
             <a:pPr algn="ctr"/>
+            <a:endParaRPr/>
           </a:p>
         </p:txBody>
       </p:sp>
@@ -3167,7 +3170,7 @@
           <a:noFill/>
         </p:spPr>
         <p:txBody>
-          <a:bodyPr wrap="square" anchor="t" lIns="25400" rIns="25400" tIns="25400" bIns="25400">
+          <a:bodyPr wrap="square" lIns="25400" tIns="25400" rIns="25400" bIns="25400" anchor="t">
             <a:spAutoFit/>
           </a:bodyPr>
           <a:lstStyle/>
@@ -3202,7 +3205,7 @@
           <a:noFill/>
         </p:spPr>
         <p:txBody>
-          <a:bodyPr wrap="square" anchor="t" lIns="25400" rIns="25400" tIns="25400" bIns="25400">
+          <a:bodyPr wrap="square" lIns="25400" tIns="25400" rIns="25400" bIns="25400" anchor="t">
             <a:spAutoFit/>
           </a:bodyPr>
           <a:lstStyle/>
@@ -3237,7 +3240,7 @@
           <a:noFill/>
         </p:spPr>
         <p:txBody>
-          <a:bodyPr wrap="square" anchor="t" lIns="25400" rIns="25400" tIns="25400" bIns="25400">
+          <a:bodyPr wrap="square" lIns="25400" tIns="25400" rIns="25400" bIns="25400" anchor="t">
             <a:spAutoFit/>
           </a:bodyPr>
           <a:lstStyle/>
@@ -3272,7 +3275,7 @@
           <a:noFill/>
         </p:spPr>
         <p:txBody>
-          <a:bodyPr wrap="square" anchor="t" lIns="25400" rIns="25400" tIns="25400" bIns="25400">
+          <a:bodyPr wrap="square" lIns="25400" tIns="25400" rIns="25400" bIns="25400" anchor="t">
             <a:spAutoFit/>
           </a:bodyPr>
           <a:lstStyle/>
@@ -3307,7 +3310,7 @@
           <a:noFill/>
         </p:spPr>
         <p:txBody>
-          <a:bodyPr wrap="square" anchor="t" lIns="25400" rIns="25400" tIns="25400" bIns="25400">
+          <a:bodyPr wrap="square" lIns="25400" tIns="25400" rIns="25400" bIns="25400" anchor="t">
             <a:spAutoFit/>
           </a:bodyPr>
           <a:lstStyle/>
@@ -3342,7 +3345,7 @@
           <a:noFill/>
         </p:spPr>
         <p:txBody>
-          <a:bodyPr wrap="square" anchor="t" lIns="25400" rIns="25400" tIns="25400" bIns="25400">
+          <a:bodyPr wrap="square" lIns="25400" tIns="25400" rIns="25400" bIns="25400" anchor="t">
             <a:spAutoFit/>
           </a:bodyPr>
           <a:lstStyle/>
@@ -3377,7 +3380,7 @@
           <a:noFill/>
         </p:spPr>
         <p:txBody>
-          <a:bodyPr wrap="square" anchor="t" lIns="25400" rIns="25400" tIns="25400" bIns="25400">
+          <a:bodyPr wrap="square" lIns="25400" tIns="25400" rIns="25400" bIns="25400" anchor="t">
             <a:spAutoFit/>
           </a:bodyPr>
           <a:lstStyle/>
@@ -3404,7 +3407,7 @@
 </file>
 
 <file path=ppt/slides/slide10.xml><?xml version="1.0" encoding="utf-8"?>
-<p:sld xmlns:a="http://schemas.openxmlformats.org/drawingml/2006/main" xmlns:p="http://schemas.openxmlformats.org/presentationml/2006/main" xmlns:r="http://schemas.openxmlformats.org/officeDocument/2006/relationships">
+<p:sld xmlns:a="http://schemas.openxmlformats.org/drawingml/2006/main" xmlns:r="http://schemas.openxmlformats.org/officeDocument/2006/relationships" xmlns:p="http://schemas.openxmlformats.org/presentationml/2006/main">
   <p:cSld>
     <p:spTree>
       <p:nvGrpSpPr>
@@ -3412,7 +3415,14 @@
         <p:cNvGrpSpPr/>
         <p:nvPr/>
       </p:nvGrpSpPr>
-      <p:grpSpPr/>
+      <p:grpSpPr>
+        <a:xfrm>
+          <a:off x="0" y="0"/>
+          <a:ext cx="0" cy="0"/>
+          <a:chOff x="0" y="0"/>
+          <a:chExt cx="0" cy="0"/>
+        </a:xfrm>
+      </p:grpSpPr>
       <p:sp>
         <p:nvSpPr>
           <p:cNvPr id="2" name="Rectangle 1"/>
@@ -3453,6 +3463,7 @@
           <a:lstStyle/>
           <a:p>
             <a:pPr algn="ctr"/>
+            <a:endParaRPr/>
           </a:p>
         </p:txBody>
       </p:sp>
@@ -3473,7 +3484,7 @@
           <a:noFill/>
         </p:spPr>
         <p:txBody>
-          <a:bodyPr wrap="square" anchor="t" lIns="25400" rIns="25400" tIns="25400" bIns="25400">
+          <a:bodyPr wrap="square" lIns="25400" tIns="25400" rIns="25400" bIns="25400" anchor="t">
             <a:spAutoFit/>
           </a:bodyPr>
           <a:lstStyle/>
@@ -3524,7 +3535,7 @@
 </file>
 
 <file path=ppt/slides/slide11.xml><?xml version="1.0" encoding="utf-8"?>
-<p:sld xmlns:a="http://schemas.openxmlformats.org/drawingml/2006/main" xmlns:p="http://schemas.openxmlformats.org/presentationml/2006/main" xmlns:r="http://schemas.openxmlformats.org/officeDocument/2006/relationships">
+<p:sld xmlns:a="http://schemas.openxmlformats.org/drawingml/2006/main" xmlns:r="http://schemas.openxmlformats.org/officeDocument/2006/relationships" xmlns:p="http://schemas.openxmlformats.org/presentationml/2006/main">
   <p:cSld>
     <p:spTree>
       <p:nvGrpSpPr>
@@ -3532,7 +3543,14 @@
         <p:cNvGrpSpPr/>
         <p:nvPr/>
       </p:nvGrpSpPr>
-      <p:grpSpPr/>
+      <p:grpSpPr>
+        <a:xfrm>
+          <a:off x="0" y="0"/>
+          <a:ext cx="0" cy="0"/>
+          <a:chOff x="0" y="0"/>
+          <a:chExt cx="0" cy="0"/>
+        </a:xfrm>
+      </p:grpSpPr>
       <p:sp>
         <p:nvSpPr>
           <p:cNvPr id="2" name="Rectangle 1"/>
@@ -3573,6 +3591,7 @@
           <a:lstStyle/>
           <a:p>
             <a:pPr algn="ctr"/>
+            <a:endParaRPr/>
           </a:p>
         </p:txBody>
       </p:sp>
@@ -3593,7 +3612,7 @@
           <a:noFill/>
         </p:spPr>
         <p:txBody>
-          <a:bodyPr wrap="square" anchor="t" lIns="25400" rIns="25400" tIns="25400" bIns="25400">
+          <a:bodyPr wrap="square" lIns="25400" tIns="25400" rIns="25400" bIns="25400" anchor="t">
             <a:spAutoFit/>
           </a:bodyPr>
           <a:lstStyle/>
@@ -3644,7 +3663,7 @@
 </file>
 
 <file path=ppt/slides/slide12.xml><?xml version="1.0" encoding="utf-8"?>
-<p:sld xmlns:a="http://schemas.openxmlformats.org/drawingml/2006/main" xmlns:p="http://schemas.openxmlformats.org/presentationml/2006/main" xmlns:r="http://schemas.openxmlformats.org/officeDocument/2006/relationships">
+<p:sld xmlns:a="http://schemas.openxmlformats.org/drawingml/2006/main" xmlns:r="http://schemas.openxmlformats.org/officeDocument/2006/relationships" xmlns:p="http://schemas.openxmlformats.org/presentationml/2006/main">
   <p:cSld>
     <p:spTree>
       <p:nvGrpSpPr>
@@ -3652,7 +3671,14 @@
         <p:cNvGrpSpPr/>
         <p:nvPr/>
       </p:nvGrpSpPr>
-      <p:grpSpPr/>
+      <p:grpSpPr>
+        <a:xfrm>
+          <a:off x="0" y="0"/>
+          <a:ext cx="0" cy="0"/>
+          <a:chOff x="0" y="0"/>
+          <a:chExt cx="0" cy="0"/>
+        </a:xfrm>
+      </p:grpSpPr>
       <p:sp>
         <p:nvSpPr>
           <p:cNvPr id="2" name="Rectangle 1"/>
@@ -3693,6 +3719,7 @@
           <a:lstStyle/>
           <a:p>
             <a:pPr algn="ctr"/>
+            <a:endParaRPr/>
           </a:p>
         </p:txBody>
       </p:sp>
@@ -3713,7 +3740,7 @@
           <a:noFill/>
         </p:spPr>
         <p:txBody>
-          <a:bodyPr wrap="square" anchor="t" lIns="25400" rIns="25400" tIns="25400" bIns="25400">
+          <a:bodyPr wrap="square" lIns="25400" tIns="25400" rIns="25400" bIns="25400" anchor="t">
             <a:spAutoFit/>
           </a:bodyPr>
           <a:lstStyle/>
@@ -3795,6 +3822,7 @@
           <a:lstStyle/>
           <a:p>
             <a:pPr algn="ctr"/>
+            <a:endParaRPr/>
           </a:p>
         </p:txBody>
       </p:sp>
@@ -3815,7 +3843,7 @@
           <a:noFill/>
         </p:spPr>
         <p:txBody>
-          <a:bodyPr wrap="square" anchor="t" lIns="25400" rIns="25400" tIns="25400" bIns="25400">
+          <a:bodyPr wrap="square" lIns="25400" tIns="25400" rIns="25400" bIns="25400" anchor="t">
             <a:spAutoFit/>
           </a:bodyPr>
           <a:lstStyle/>
@@ -3842,7 +3870,7 @@
 </file>
 
 <file path=ppt/slides/slide13.xml><?xml version="1.0" encoding="utf-8"?>
-<p:sld xmlns:a="http://schemas.openxmlformats.org/drawingml/2006/main" xmlns:p="http://schemas.openxmlformats.org/presentationml/2006/main" xmlns:r="http://schemas.openxmlformats.org/officeDocument/2006/relationships">
+<p:sld xmlns:a="http://schemas.openxmlformats.org/drawingml/2006/main" xmlns:r="http://schemas.openxmlformats.org/officeDocument/2006/relationships" xmlns:p="http://schemas.openxmlformats.org/presentationml/2006/main">
   <p:cSld>
     <p:spTree>
       <p:nvGrpSpPr>
@@ -3850,7 +3878,14 @@
         <p:cNvGrpSpPr/>
         <p:nvPr/>
       </p:nvGrpSpPr>
-      <p:grpSpPr/>
+      <p:grpSpPr>
+        <a:xfrm>
+          <a:off x="0" y="0"/>
+          <a:ext cx="0" cy="0"/>
+          <a:chOff x="0" y="0"/>
+          <a:chExt cx="0" cy="0"/>
+        </a:xfrm>
+      </p:grpSpPr>
       <p:sp>
         <p:nvSpPr>
           <p:cNvPr id="2" name="Rectangle 1"/>
@@ -3891,6 +3926,7 @@
           <a:lstStyle/>
           <a:p>
             <a:pPr algn="ctr"/>
+            <a:endParaRPr/>
           </a:p>
         </p:txBody>
       </p:sp>
@@ -3911,7 +3947,7 @@
           <a:noFill/>
         </p:spPr>
         <p:txBody>
-          <a:bodyPr wrap="square" anchor="t" lIns="25400" rIns="25400" tIns="25400" bIns="25400">
+          <a:bodyPr wrap="square" lIns="25400" tIns="25400" rIns="25400" bIns="25400" anchor="t">
             <a:spAutoFit/>
           </a:bodyPr>
           <a:lstStyle/>
@@ -3964,15 +4000,12 @@
           </a:p>
           <a:p>
             <a:pPr algn="l"/>
-            <a:r>
-              <a:rPr sz="1200" b="0">
-                <a:solidFill>
-                  <a:srgbClr val="1F2937"/>
-                </a:solidFill>
-                <a:latin typeface="Hiragino Mincho ProN"/>
-              </a:rPr>
-              <a:t/>
-            </a:r>
+            <a:endParaRPr sz="2200" b="1">
+              <a:solidFill>
+                <a:srgbClr val="1F2937"/>
+              </a:solidFill>
+              <a:latin typeface="Hiragino Mincho ProN"/>
+            </a:endParaRPr>
           </a:p>
           <a:p>
             <a:pPr algn="l"/>
@@ -4000,15 +4033,12 @@
           </a:p>
           <a:p>
             <a:pPr algn="l"/>
-            <a:r>
-              <a:rPr sz="600" b="0">
-                <a:solidFill>
-                  <a:srgbClr val="1F2937"/>
-                </a:solidFill>
-                <a:latin typeface="Hiragino Mincho ProN"/>
-              </a:rPr>
-              <a:t/>
-            </a:r>
+            <a:endParaRPr sz="1400" b="0">
+              <a:solidFill>
+                <a:srgbClr val="1F2937"/>
+              </a:solidFill>
+              <a:latin typeface="Hiragino Mincho ProN"/>
+            </a:endParaRPr>
           </a:p>
           <a:p>
             <a:pPr algn="l"/>
@@ -4036,15 +4066,12 @@
           </a:p>
           <a:p>
             <a:pPr algn="l"/>
-            <a:r>
-              <a:rPr sz="600" b="0">
-                <a:solidFill>
-                  <a:srgbClr val="1F2937"/>
-                </a:solidFill>
-                <a:latin typeface="Hiragino Mincho ProN"/>
-              </a:rPr>
-              <a:t/>
-            </a:r>
+            <a:endParaRPr sz="1400" b="0">
+              <a:solidFill>
+                <a:srgbClr val="1F2937"/>
+              </a:solidFill>
+              <a:latin typeface="Hiragino Mincho ProN"/>
+            </a:endParaRPr>
           </a:p>
           <a:p>
             <a:pPr algn="l"/>
@@ -4072,27 +4099,21 @@
           </a:p>
           <a:p>
             <a:pPr algn="l"/>
-            <a:r>
-              <a:rPr sz="600" b="0">
-                <a:solidFill>
-                  <a:srgbClr val="1F2937"/>
-                </a:solidFill>
-                <a:latin typeface="Hiragino Mincho ProN"/>
-              </a:rPr>
-              <a:t/>
-            </a:r>
-          </a:p>
-          <a:p>
-            <a:pPr algn="l"/>
-            <a:r>
-              <a:rPr sz="1200" b="0">
-                <a:solidFill>
-                  <a:srgbClr val="1F2937"/>
-                </a:solidFill>
-                <a:latin typeface="Hiragino Mincho ProN"/>
-              </a:rPr>
-              <a:t/>
-            </a:r>
+            <a:endParaRPr sz="1400" b="0">
+              <a:solidFill>
+                <a:srgbClr val="1F2937"/>
+              </a:solidFill>
+              <a:latin typeface="Hiragino Mincho ProN"/>
+            </a:endParaRPr>
+          </a:p>
+          <a:p>
+            <a:pPr algn="l"/>
+            <a:endParaRPr sz="1400" b="0">
+              <a:solidFill>
+                <a:srgbClr val="1F2937"/>
+              </a:solidFill>
+              <a:latin typeface="Hiragino Mincho ProN"/>
+            </a:endParaRPr>
           </a:p>
           <a:p>
             <a:pPr algn="l"/>
@@ -4129,7 +4150,7 @@
 </file>
 
 <file path=ppt/slides/slide14.xml><?xml version="1.0" encoding="utf-8"?>
-<p:sld xmlns:a="http://schemas.openxmlformats.org/drawingml/2006/main" xmlns:p="http://schemas.openxmlformats.org/presentationml/2006/main" xmlns:r="http://schemas.openxmlformats.org/officeDocument/2006/relationships">
+<p:sld xmlns:a="http://schemas.openxmlformats.org/drawingml/2006/main" xmlns:r="http://schemas.openxmlformats.org/officeDocument/2006/relationships" xmlns:p="http://schemas.openxmlformats.org/presentationml/2006/main">
   <p:cSld>
     <p:spTree>
       <p:nvGrpSpPr>
@@ -4137,7 +4158,14 @@
         <p:cNvGrpSpPr/>
         <p:nvPr/>
       </p:nvGrpSpPr>
-      <p:grpSpPr/>
+      <p:grpSpPr>
+        <a:xfrm>
+          <a:off x="0" y="0"/>
+          <a:ext cx="0" cy="0"/>
+          <a:chOff x="0" y="0"/>
+          <a:chExt cx="0" cy="0"/>
+        </a:xfrm>
+      </p:grpSpPr>
       <p:sp>
         <p:nvSpPr>
           <p:cNvPr id="2" name="Rectangle 1"/>
@@ -4178,6 +4206,7 @@
           <a:lstStyle/>
           <a:p>
             <a:pPr algn="ctr"/>
+            <a:endParaRPr/>
           </a:p>
         </p:txBody>
       </p:sp>
@@ -4198,7 +4227,7 @@
           <a:noFill/>
         </p:spPr>
         <p:txBody>
-          <a:bodyPr wrap="square" anchor="t" lIns="25400" rIns="25400" tIns="25400" bIns="25400">
+          <a:bodyPr wrap="square" lIns="25400" tIns="25400" rIns="25400" bIns="25400" anchor="t">
             <a:spAutoFit/>
           </a:bodyPr>
           <a:lstStyle/>
@@ -4263,15 +4292,12 @@
           </a:p>
           <a:p>
             <a:pPr algn="l"/>
-            <a:r>
-              <a:rPr sz="1000" b="0">
-                <a:solidFill>
-                  <a:srgbClr val="1F2937"/>
-                </a:solidFill>
-                <a:latin typeface="Hiragino Mincho ProN"/>
-              </a:rPr>
-              <a:t/>
-            </a:r>
+            <a:endParaRPr sz="2200" b="1">
+              <a:solidFill>
+                <a:srgbClr val="1F2937"/>
+              </a:solidFill>
+              <a:latin typeface="Hiragino Mincho ProN"/>
+            </a:endParaRPr>
           </a:p>
           <a:p>
             <a:pPr algn="l"/>
@@ -4287,15 +4313,12 @@
           </a:p>
           <a:p>
             <a:pPr algn="l"/>
-            <a:r>
-              <a:rPr sz="1000" b="0">
-                <a:solidFill>
-                  <a:srgbClr val="1F2937"/>
-                </a:solidFill>
-                <a:latin typeface="Hiragino Mincho ProN"/>
-              </a:rPr>
-              <a:t/>
-            </a:r>
+            <a:endParaRPr sz="1800" b="0">
+              <a:solidFill>
+                <a:srgbClr val="1F2937"/>
+              </a:solidFill>
+              <a:latin typeface="Hiragino Mincho ProN"/>
+            </a:endParaRPr>
           </a:p>
           <a:p>
             <a:pPr algn="l"/>
@@ -4323,15 +4346,12 @@
           </a:p>
           <a:p>
             <a:pPr algn="l"/>
-            <a:r>
-              <a:rPr sz="1600" b="0">
-                <a:solidFill>
-                  <a:srgbClr val="1F2937"/>
-                </a:solidFill>
-                <a:latin typeface="Hiragino Mincho ProN"/>
-              </a:rPr>
-              <a:t/>
-            </a:r>
+            <a:endParaRPr sz="2200" b="1">
+              <a:solidFill>
+                <a:srgbClr val="1F2937"/>
+              </a:solidFill>
+              <a:latin typeface="Hiragino Mincho ProN"/>
+            </a:endParaRPr>
           </a:p>
           <a:p>
             <a:pPr algn="l"/>
@@ -4356,7 +4376,7 @@
 </file>
 
 <file path=ppt/slides/slide15.xml><?xml version="1.0" encoding="utf-8"?>
-<p:sld xmlns:a="http://schemas.openxmlformats.org/drawingml/2006/main" xmlns:p="http://schemas.openxmlformats.org/presentationml/2006/main" xmlns:r="http://schemas.openxmlformats.org/officeDocument/2006/relationships">
+<p:sld xmlns:a="http://schemas.openxmlformats.org/drawingml/2006/main" xmlns:r="http://schemas.openxmlformats.org/officeDocument/2006/relationships" xmlns:p="http://schemas.openxmlformats.org/presentationml/2006/main">
   <p:cSld>
     <p:spTree>
       <p:nvGrpSpPr>
@@ -4364,7 +4384,14 @@
         <p:cNvGrpSpPr/>
         <p:nvPr/>
       </p:nvGrpSpPr>
-      <p:grpSpPr/>
+      <p:grpSpPr>
+        <a:xfrm>
+          <a:off x="0" y="0"/>
+          <a:ext cx="0" cy="0"/>
+          <a:chOff x="0" y="0"/>
+          <a:chExt cx="0" cy="0"/>
+        </a:xfrm>
+      </p:grpSpPr>
       <p:sp>
         <p:nvSpPr>
           <p:cNvPr id="2" name="Rectangle 1"/>
@@ -4405,6 +4432,7 @@
           <a:lstStyle/>
           <a:p>
             <a:pPr algn="ctr"/>
+            <a:endParaRPr/>
           </a:p>
         </p:txBody>
       </p:sp>
@@ -4425,7 +4453,7 @@
           <a:noFill/>
         </p:spPr>
         <p:txBody>
-          <a:bodyPr wrap="square" anchor="t" lIns="25400" rIns="25400" tIns="25400" bIns="25400">
+          <a:bodyPr wrap="square" lIns="25400" tIns="25400" rIns="25400" bIns="25400" anchor="t">
             <a:spAutoFit/>
           </a:bodyPr>
           <a:lstStyle/>
@@ -4502,15 +4530,12 @@
           </a:p>
           <a:p>
             <a:pPr algn="l"/>
-            <a:r>
-              <a:rPr sz="1400" b="0">
-                <a:solidFill>
-                  <a:srgbClr val="1F2937"/>
-                </a:solidFill>
-                <a:latin typeface="Hiragino Mincho ProN"/>
-              </a:rPr>
-              <a:t/>
-            </a:r>
+            <a:endParaRPr sz="1800" b="0">
+              <a:solidFill>
+                <a:srgbClr val="1F2937"/>
+              </a:solidFill>
+              <a:latin typeface="Hiragino Mincho ProN"/>
+            </a:endParaRPr>
           </a:p>
           <a:p>
             <a:pPr algn="l"/>
@@ -4526,15 +4551,12 @@
           </a:p>
           <a:p>
             <a:pPr algn="l"/>
-            <a:r>
-              <a:rPr sz="1000" b="0">
-                <a:solidFill>
-                  <a:srgbClr val="1F2937"/>
-                </a:solidFill>
-                <a:latin typeface="Hiragino Mincho ProN"/>
-              </a:rPr>
-              <a:t/>
-            </a:r>
+            <a:endParaRPr sz="1800" b="0">
+              <a:solidFill>
+                <a:srgbClr val="1F2937"/>
+              </a:solidFill>
+              <a:latin typeface="Hiragino Mincho ProN"/>
+            </a:endParaRPr>
           </a:p>
           <a:p>
             <a:pPr algn="l"/>
@@ -4550,15 +4572,12 @@
           </a:p>
           <a:p>
             <a:pPr algn="l"/>
-            <a:r>
-              <a:rPr sz="1000" b="0">
-                <a:solidFill>
-                  <a:srgbClr val="1F2937"/>
-                </a:solidFill>
-                <a:latin typeface="Hiragino Mincho ProN"/>
-              </a:rPr>
-              <a:t/>
-            </a:r>
+            <a:endParaRPr sz="2200" b="1">
+              <a:solidFill>
+                <a:srgbClr val="1F2937"/>
+              </a:solidFill>
+              <a:latin typeface="Hiragino Mincho ProN"/>
+            </a:endParaRPr>
           </a:p>
           <a:p>
             <a:pPr algn="l"/>
@@ -4574,15 +4593,12 @@
           </a:p>
           <a:p>
             <a:pPr algn="l"/>
-            <a:r>
-              <a:rPr sz="1600" b="0">
-                <a:solidFill>
-                  <a:srgbClr val="1F2937"/>
-                </a:solidFill>
-                <a:latin typeface="Hiragino Mincho ProN"/>
-              </a:rPr>
-              <a:t/>
-            </a:r>
+            <a:endParaRPr sz="1800" b="0">
+              <a:solidFill>
+                <a:srgbClr val="1F2937"/>
+              </a:solidFill>
+              <a:latin typeface="Hiragino Mincho ProN"/>
+            </a:endParaRPr>
           </a:p>
           <a:p>
             <a:pPr algn="l"/>
@@ -4607,7 +4623,7 @@
 </file>
 
 <file path=ppt/slides/slide16.xml><?xml version="1.0" encoding="utf-8"?>
-<p:sld xmlns:a="http://schemas.openxmlformats.org/drawingml/2006/main" xmlns:p="http://schemas.openxmlformats.org/presentationml/2006/main" xmlns:r="http://schemas.openxmlformats.org/officeDocument/2006/relationships">
+<p:sld xmlns:a="http://schemas.openxmlformats.org/drawingml/2006/main" xmlns:r="http://schemas.openxmlformats.org/officeDocument/2006/relationships" xmlns:p="http://schemas.openxmlformats.org/presentationml/2006/main">
   <p:cSld>
     <p:spTree>
       <p:nvGrpSpPr>
@@ -4615,7 +4631,14 @@
         <p:cNvGrpSpPr/>
         <p:nvPr/>
       </p:nvGrpSpPr>
-      <p:grpSpPr/>
+      <p:grpSpPr>
+        <a:xfrm>
+          <a:off x="0" y="0"/>
+          <a:ext cx="0" cy="0"/>
+          <a:chOff x="0" y="0"/>
+          <a:chExt cx="0" cy="0"/>
+        </a:xfrm>
+      </p:grpSpPr>
       <p:sp>
         <p:nvSpPr>
           <p:cNvPr id="2" name="Rectangle 1"/>
@@ -4656,6 +4679,7 @@
           <a:lstStyle/>
           <a:p>
             <a:pPr algn="ctr"/>
+            <a:endParaRPr/>
           </a:p>
         </p:txBody>
       </p:sp>
@@ -4676,7 +4700,7 @@
           <a:noFill/>
         </p:spPr>
         <p:txBody>
-          <a:bodyPr wrap="square" anchor="t" lIns="25400" rIns="25400" tIns="25400" bIns="25400">
+          <a:bodyPr wrap="square" lIns="25400" tIns="25400" rIns="25400" bIns="25400" anchor="t">
             <a:spAutoFit/>
           </a:bodyPr>
           <a:lstStyle/>
@@ -4729,15 +4753,12 @@
           </a:p>
           <a:p>
             <a:pPr algn="l"/>
-            <a:r>
-              <a:rPr sz="1400" b="0">
-                <a:solidFill>
-                  <a:srgbClr val="1F2937"/>
-                </a:solidFill>
-                <a:latin typeface="Hiragino Mincho ProN"/>
-              </a:rPr>
-              <a:t/>
-            </a:r>
+            <a:endParaRPr sz="2000" b="1">
+              <a:solidFill>
+                <a:srgbClr val="1F2937"/>
+              </a:solidFill>
+              <a:latin typeface="Hiragino Mincho ProN"/>
+            </a:endParaRPr>
           </a:p>
           <a:p>
             <a:pPr algn="l"/>
@@ -4789,15 +4810,12 @@
           </a:p>
           <a:p>
             <a:pPr algn="l"/>
-            <a:r>
-              <a:rPr sz="1200" b="0">
-                <a:solidFill>
-                  <a:srgbClr val="1F2937"/>
-                </a:solidFill>
-                <a:latin typeface="Hiragino Mincho ProN"/>
-              </a:rPr>
-              <a:t/>
-            </a:r>
+            <a:endParaRPr sz="1800" b="0">
+              <a:solidFill>
+                <a:srgbClr val="1F2937"/>
+              </a:solidFill>
+              <a:latin typeface="Hiragino Mincho ProN"/>
+            </a:endParaRPr>
           </a:p>
           <a:p>
             <a:pPr algn="l"/>
@@ -4846,7 +4864,7 @@
 </file>
 
 <file path=ppt/slides/slide17.xml><?xml version="1.0" encoding="utf-8"?>
-<p:sld xmlns:a="http://schemas.openxmlformats.org/drawingml/2006/main" xmlns:p="http://schemas.openxmlformats.org/presentationml/2006/main" xmlns:r="http://schemas.openxmlformats.org/officeDocument/2006/relationships">
+<p:sld xmlns:a="http://schemas.openxmlformats.org/drawingml/2006/main" xmlns:r="http://schemas.openxmlformats.org/officeDocument/2006/relationships" xmlns:p="http://schemas.openxmlformats.org/presentationml/2006/main">
   <p:cSld>
     <p:spTree>
       <p:nvGrpSpPr>
@@ -4854,7 +4872,14 @@
         <p:cNvGrpSpPr/>
         <p:nvPr/>
       </p:nvGrpSpPr>
-      <p:grpSpPr/>
+      <p:grpSpPr>
+        <a:xfrm>
+          <a:off x="0" y="0"/>
+          <a:ext cx="0" cy="0"/>
+          <a:chOff x="0" y="0"/>
+          <a:chExt cx="0" cy="0"/>
+        </a:xfrm>
+      </p:grpSpPr>
       <p:sp>
         <p:nvSpPr>
           <p:cNvPr id="2" name="Rectangle 1"/>
@@ -4895,6 +4920,7 @@
           <a:lstStyle/>
           <a:p>
             <a:pPr algn="ctr"/>
+            <a:endParaRPr/>
           </a:p>
         </p:txBody>
       </p:sp>
@@ -4915,7 +4941,7 @@
           <a:noFill/>
         </p:spPr>
         <p:txBody>
-          <a:bodyPr wrap="square" anchor="t" lIns="25400" rIns="25400" tIns="25400" bIns="25400">
+          <a:bodyPr wrap="square" lIns="25400" tIns="25400" rIns="25400" bIns="25400" anchor="t">
             <a:spAutoFit/>
           </a:bodyPr>
           <a:lstStyle/>
@@ -4980,15 +5006,12 @@
           </a:p>
           <a:p>
             <a:pPr algn="l"/>
-            <a:r>
-              <a:rPr sz="1400" b="0">
-                <a:solidFill>
-                  <a:srgbClr val="1F2937"/>
-                </a:solidFill>
-                <a:latin typeface="Hiragino Mincho ProN"/>
-              </a:rPr>
-              <a:t/>
-            </a:r>
+            <a:endParaRPr sz="1800" b="0">
+              <a:solidFill>
+                <a:srgbClr val="1F2937"/>
+              </a:solidFill>
+              <a:latin typeface="Hiragino Mincho ProN"/>
+            </a:endParaRPr>
           </a:p>
           <a:p>
             <a:pPr algn="l"/>
@@ -5040,15 +5063,12 @@
           </a:p>
           <a:p>
             <a:pPr algn="l"/>
-            <a:r>
-              <a:rPr sz="1400" b="0">
-                <a:solidFill>
-                  <a:srgbClr val="1F2937"/>
-                </a:solidFill>
-                <a:latin typeface="Hiragino Mincho ProN"/>
-              </a:rPr>
-              <a:t/>
-            </a:r>
+            <a:endParaRPr sz="1800" b="0">
+              <a:solidFill>
+                <a:srgbClr val="1F2937"/>
+              </a:solidFill>
+              <a:latin typeface="Hiragino Mincho ProN"/>
+            </a:endParaRPr>
           </a:p>
           <a:p>
             <a:pPr algn="l"/>
@@ -5097,7 +5117,7 @@
 </file>
 
 <file path=ppt/slides/slide18.xml><?xml version="1.0" encoding="utf-8"?>
-<p:sld xmlns:a="http://schemas.openxmlformats.org/drawingml/2006/main" xmlns:p="http://schemas.openxmlformats.org/presentationml/2006/main" xmlns:r="http://schemas.openxmlformats.org/officeDocument/2006/relationships">
+<p:sld xmlns:a="http://schemas.openxmlformats.org/drawingml/2006/main" xmlns:r="http://schemas.openxmlformats.org/officeDocument/2006/relationships" xmlns:p="http://schemas.openxmlformats.org/presentationml/2006/main">
   <p:cSld>
     <p:spTree>
       <p:nvGrpSpPr>
@@ -5105,7 +5125,14 @@
         <p:cNvGrpSpPr/>
         <p:nvPr/>
       </p:nvGrpSpPr>
-      <p:grpSpPr/>
+      <p:grpSpPr>
+        <a:xfrm>
+          <a:off x="0" y="0"/>
+          <a:ext cx="0" cy="0"/>
+          <a:chOff x="0" y="0"/>
+          <a:chExt cx="0" cy="0"/>
+        </a:xfrm>
+      </p:grpSpPr>
       <p:sp>
         <p:nvSpPr>
           <p:cNvPr id="2" name="Rectangle 1"/>
@@ -5146,6 +5173,7 @@
           <a:lstStyle/>
           <a:p>
             <a:pPr algn="ctr"/>
+            <a:endParaRPr/>
           </a:p>
         </p:txBody>
       </p:sp>
@@ -5166,7 +5194,7 @@
           <a:noFill/>
         </p:spPr>
         <p:txBody>
-          <a:bodyPr wrap="square" anchor="t" lIns="25400" rIns="25400" tIns="25400" bIns="25400">
+          <a:bodyPr wrap="square" lIns="25400" tIns="25400" rIns="25400" bIns="25400" anchor="t">
             <a:spAutoFit/>
           </a:bodyPr>
           <a:lstStyle/>
@@ -5255,15 +5283,12 @@
           </a:p>
           <a:p>
             <a:pPr algn="l"/>
-            <a:r>
-              <a:rPr sz="1400" b="0">
-                <a:solidFill>
-                  <a:srgbClr val="1F2937"/>
-                </a:solidFill>
-                <a:latin typeface="Hiragino Mincho ProN"/>
-              </a:rPr>
-              <a:t/>
-            </a:r>
+            <a:endParaRPr sz="1800" b="0">
+              <a:solidFill>
+                <a:srgbClr val="1F2937"/>
+              </a:solidFill>
+              <a:latin typeface="Hiragino Mincho ProN"/>
+            </a:endParaRPr>
           </a:p>
           <a:p>
             <a:pPr algn="l"/>
@@ -5324,7 +5349,7 @@
 </file>
 
 <file path=ppt/slides/slide19.xml><?xml version="1.0" encoding="utf-8"?>
-<p:sld xmlns:a="http://schemas.openxmlformats.org/drawingml/2006/main" xmlns:p="http://schemas.openxmlformats.org/presentationml/2006/main" xmlns:r="http://schemas.openxmlformats.org/officeDocument/2006/relationships">
+<p:sld xmlns:a="http://schemas.openxmlformats.org/drawingml/2006/main" xmlns:r="http://schemas.openxmlformats.org/officeDocument/2006/relationships" xmlns:p="http://schemas.openxmlformats.org/presentationml/2006/main">
   <p:cSld>
     <p:spTree>
       <p:nvGrpSpPr>
@@ -5332,7 +5357,14 @@
         <p:cNvGrpSpPr/>
         <p:nvPr/>
       </p:nvGrpSpPr>
-      <p:grpSpPr/>
+      <p:grpSpPr>
+        <a:xfrm>
+          <a:off x="0" y="0"/>
+          <a:ext cx="0" cy="0"/>
+          <a:chOff x="0" y="0"/>
+          <a:chExt cx="0" cy="0"/>
+        </a:xfrm>
+      </p:grpSpPr>
       <p:sp>
         <p:nvSpPr>
           <p:cNvPr id="2" name="Rectangle 1"/>
@@ -5373,6 +5405,7 @@
           <a:lstStyle/>
           <a:p>
             <a:pPr algn="ctr"/>
+            <a:endParaRPr/>
           </a:p>
         </p:txBody>
       </p:sp>
@@ -5393,7 +5426,7 @@
           <a:noFill/>
         </p:spPr>
         <p:txBody>
-          <a:bodyPr wrap="square" anchor="t" lIns="25400" rIns="25400" tIns="25400" bIns="25400">
+          <a:bodyPr wrap="square" lIns="25400" tIns="25400" rIns="25400" bIns="25400" anchor="t">
             <a:spAutoFit/>
           </a:bodyPr>
           <a:lstStyle/>
@@ -5458,15 +5491,12 @@
           </a:p>
           <a:p>
             <a:pPr algn="l"/>
-            <a:r>
-              <a:rPr sz="1000" b="0">
-                <a:solidFill>
-                  <a:srgbClr val="1F2937"/>
-                </a:solidFill>
-                <a:latin typeface="Hiragino Mincho ProN"/>
-              </a:rPr>
-              <a:t/>
-            </a:r>
+            <a:endParaRPr sz="1800" b="0">
+              <a:solidFill>
+                <a:srgbClr val="1F2937"/>
+              </a:solidFill>
+              <a:latin typeface="Hiragino Mincho ProN"/>
+            </a:endParaRPr>
           </a:p>
           <a:p>
             <a:pPr algn="l"/>
@@ -5518,15 +5548,12 @@
           </a:p>
           <a:p>
             <a:pPr algn="l"/>
-            <a:r>
-              <a:rPr sz="1000" b="0">
-                <a:solidFill>
-                  <a:srgbClr val="1F2937"/>
-                </a:solidFill>
-                <a:latin typeface="Hiragino Mincho ProN"/>
-              </a:rPr>
-              <a:t/>
-            </a:r>
+            <a:endParaRPr sz="1600" b="0">
+              <a:solidFill>
+                <a:srgbClr val="1F2937"/>
+              </a:solidFill>
+              <a:latin typeface="Hiragino Mincho ProN"/>
+            </a:endParaRPr>
           </a:p>
           <a:p>
             <a:pPr algn="l"/>
@@ -5578,15 +5605,12 @@
           </a:p>
           <a:p>
             <a:pPr algn="l"/>
-            <a:r>
-              <a:rPr sz="1000" b="0">
-                <a:solidFill>
-                  <a:srgbClr val="1F2937"/>
-                </a:solidFill>
-                <a:latin typeface="Hiragino Mincho ProN"/>
-              </a:rPr>
-              <a:t/>
-            </a:r>
+            <a:endParaRPr sz="1600" b="0">
+              <a:solidFill>
+                <a:srgbClr val="1F2937"/>
+              </a:solidFill>
+              <a:latin typeface="Hiragino Mincho ProN"/>
+            </a:endParaRPr>
           </a:p>
           <a:p>
             <a:pPr algn="l"/>
@@ -5611,7 +5635,7 @@
 </file>
 
 <file path=ppt/slides/slide2.xml><?xml version="1.0" encoding="utf-8"?>
-<p:sld xmlns:a="http://schemas.openxmlformats.org/drawingml/2006/main" xmlns:p="http://schemas.openxmlformats.org/presentationml/2006/main" xmlns:r="http://schemas.openxmlformats.org/officeDocument/2006/relationships">
+<p:sld xmlns:a="http://schemas.openxmlformats.org/drawingml/2006/main" xmlns:r="http://schemas.openxmlformats.org/officeDocument/2006/relationships" xmlns:p="http://schemas.openxmlformats.org/presentationml/2006/main">
   <p:cSld>
     <p:spTree>
       <p:nvGrpSpPr>
@@ -5619,7 +5643,14 @@
         <p:cNvGrpSpPr/>
         <p:nvPr/>
       </p:nvGrpSpPr>
-      <p:grpSpPr/>
+      <p:grpSpPr>
+        <a:xfrm>
+          <a:off x="0" y="0"/>
+          <a:ext cx="0" cy="0"/>
+          <a:chOff x="0" y="0"/>
+          <a:chExt cx="0" cy="0"/>
+        </a:xfrm>
+      </p:grpSpPr>
       <p:sp>
         <p:nvSpPr>
           <p:cNvPr id="2" name="Rectangle 1"/>
@@ -5660,6 +5691,7 @@
           <a:lstStyle/>
           <a:p>
             <a:pPr algn="ctr"/>
+            <a:endParaRPr/>
           </a:p>
         </p:txBody>
       </p:sp>
@@ -5680,7 +5712,7 @@
           <a:noFill/>
         </p:spPr>
         <p:txBody>
-          <a:bodyPr wrap="square" anchor="t" lIns="25400" rIns="25400" tIns="25400" bIns="25400">
+          <a:bodyPr wrap="square" lIns="25400" tIns="25400" rIns="25400" bIns="25400" anchor="t">
             <a:spAutoFit/>
           </a:bodyPr>
           <a:lstStyle/>
@@ -5745,15 +5777,12 @@
           </a:p>
           <a:p>
             <a:pPr algn="l"/>
-            <a:r>
-              <a:rPr sz="800" b="0">
-                <a:solidFill>
-                  <a:srgbClr val="1F2937"/>
-                </a:solidFill>
-                <a:latin typeface="Hiragino Mincho ProN"/>
-              </a:rPr>
-              <a:t/>
-            </a:r>
+            <a:endParaRPr sz="1500" b="0">
+              <a:solidFill>
+                <a:srgbClr val="1F2937"/>
+              </a:solidFill>
+              <a:latin typeface="Hiragino Mincho ProN"/>
+            </a:endParaRPr>
           </a:p>
           <a:p>
             <a:pPr algn="l"/>
@@ -5781,15 +5810,12 @@
           </a:p>
           <a:p>
             <a:pPr algn="l"/>
-            <a:r>
-              <a:rPr sz="800" b="0">
-                <a:solidFill>
-                  <a:srgbClr val="1F2937"/>
-                </a:solidFill>
-                <a:latin typeface="Hiragino Mincho ProN"/>
-              </a:rPr>
-              <a:t/>
-            </a:r>
+            <a:endParaRPr sz="1500" b="0">
+              <a:solidFill>
+                <a:srgbClr val="1F2937"/>
+              </a:solidFill>
+              <a:latin typeface="Hiragino Mincho ProN"/>
+            </a:endParaRPr>
           </a:p>
           <a:p>
             <a:pPr algn="l"/>
@@ -5817,15 +5843,12 @@
           </a:p>
           <a:p>
             <a:pPr algn="l"/>
-            <a:r>
-              <a:rPr sz="800" b="0">
-                <a:solidFill>
-                  <a:srgbClr val="1F2937"/>
-                </a:solidFill>
-                <a:latin typeface="Hiragino Mincho ProN"/>
-              </a:rPr>
-              <a:t/>
-            </a:r>
+            <a:endParaRPr sz="1500" b="0">
+              <a:solidFill>
+                <a:srgbClr val="1F2937"/>
+              </a:solidFill>
+              <a:latin typeface="Hiragino Mincho ProN"/>
+            </a:endParaRPr>
           </a:p>
           <a:p>
             <a:pPr algn="l"/>
@@ -5853,15 +5876,12 @@
           </a:p>
           <a:p>
             <a:pPr algn="l"/>
-            <a:r>
-              <a:rPr sz="800" b="0">
-                <a:solidFill>
-                  <a:srgbClr val="1F2937"/>
-                </a:solidFill>
-                <a:latin typeface="Hiragino Mincho ProN"/>
-              </a:rPr>
-              <a:t/>
-            </a:r>
+            <a:endParaRPr sz="1500" b="0">
+              <a:solidFill>
+                <a:srgbClr val="1F2937"/>
+              </a:solidFill>
+              <a:latin typeface="Hiragino Mincho ProN"/>
+            </a:endParaRPr>
           </a:p>
           <a:p>
             <a:pPr algn="l"/>
@@ -5898,7 +5918,7 @@
 </file>
 
 <file path=ppt/slides/slide20.xml><?xml version="1.0" encoding="utf-8"?>
-<p:sld xmlns:a="http://schemas.openxmlformats.org/drawingml/2006/main" xmlns:p="http://schemas.openxmlformats.org/presentationml/2006/main" xmlns:r="http://schemas.openxmlformats.org/officeDocument/2006/relationships">
+<p:sld xmlns:a="http://schemas.openxmlformats.org/drawingml/2006/main" xmlns:r="http://schemas.openxmlformats.org/officeDocument/2006/relationships" xmlns:p="http://schemas.openxmlformats.org/presentationml/2006/main">
   <p:cSld>
     <p:spTree>
       <p:nvGrpSpPr>
@@ -5906,7 +5926,14 @@
         <p:cNvGrpSpPr/>
         <p:nvPr/>
       </p:nvGrpSpPr>
-      <p:grpSpPr/>
+      <p:grpSpPr>
+        <a:xfrm>
+          <a:off x="0" y="0"/>
+          <a:ext cx="0" cy="0"/>
+          <a:chOff x="0" y="0"/>
+          <a:chExt cx="0" cy="0"/>
+        </a:xfrm>
+      </p:grpSpPr>
       <p:sp>
         <p:nvSpPr>
           <p:cNvPr id="2" name="Rectangle 1"/>
@@ -5947,6 +5974,7 @@
           <a:lstStyle/>
           <a:p>
             <a:pPr algn="ctr"/>
+            <a:endParaRPr/>
           </a:p>
         </p:txBody>
       </p:sp>
@@ -5967,7 +5995,7 @@
           <a:noFill/>
         </p:spPr>
         <p:txBody>
-          <a:bodyPr wrap="square" anchor="t" lIns="25400" rIns="25400" tIns="25400" bIns="25400">
+          <a:bodyPr wrap="square" lIns="25400" tIns="25400" rIns="25400" bIns="25400" anchor="t">
             <a:spAutoFit/>
           </a:bodyPr>
           <a:lstStyle/>
@@ -6002,7 +6030,7 @@
           <a:noFill/>
         </p:spPr>
         <p:txBody>
-          <a:bodyPr wrap="square" anchor="t" lIns="25400" rIns="25400" tIns="25400" bIns="25400">
+          <a:bodyPr wrap="square" lIns="25400" tIns="25400" rIns="25400" bIns="25400" anchor="t">
             <a:spAutoFit/>
           </a:bodyPr>
           <a:lstStyle/>
@@ -6037,7 +6065,7 @@
           <a:noFill/>
         </p:spPr>
         <p:txBody>
-          <a:bodyPr wrap="square" anchor="t" lIns="25400" rIns="25400" tIns="25400" bIns="25400">
+          <a:bodyPr wrap="square" lIns="25400" tIns="25400" rIns="25400" bIns="25400" anchor="t">
             <a:spAutoFit/>
           </a:bodyPr>
           <a:lstStyle/>
@@ -6064,7 +6092,7 @@
 </file>
 
 <file path=ppt/slides/slide3.xml><?xml version="1.0" encoding="utf-8"?>
-<p:sld xmlns:a="http://schemas.openxmlformats.org/drawingml/2006/main" xmlns:p="http://schemas.openxmlformats.org/presentationml/2006/main" xmlns:r="http://schemas.openxmlformats.org/officeDocument/2006/relationships">
+<p:sld xmlns:a="http://schemas.openxmlformats.org/drawingml/2006/main" xmlns:r="http://schemas.openxmlformats.org/officeDocument/2006/relationships" xmlns:p="http://schemas.openxmlformats.org/presentationml/2006/main">
   <p:cSld>
     <p:spTree>
       <p:nvGrpSpPr>
@@ -6072,7 +6100,14 @@
         <p:cNvGrpSpPr/>
         <p:nvPr/>
       </p:nvGrpSpPr>
-      <p:grpSpPr/>
+      <p:grpSpPr>
+        <a:xfrm>
+          <a:off x="0" y="0"/>
+          <a:ext cx="0" cy="0"/>
+          <a:chOff x="0" y="0"/>
+          <a:chExt cx="0" cy="0"/>
+        </a:xfrm>
+      </p:grpSpPr>
       <p:sp>
         <p:nvSpPr>
           <p:cNvPr id="2" name="Rectangle 1"/>
@@ -6113,6 +6148,7 @@
           <a:lstStyle/>
           <a:p>
             <a:pPr algn="ctr"/>
+            <a:endParaRPr/>
           </a:p>
         </p:txBody>
       </p:sp>
@@ -6133,7 +6169,7 @@
           <a:noFill/>
         </p:spPr>
         <p:txBody>
-          <a:bodyPr wrap="square" anchor="t" lIns="25400" rIns="25400" tIns="25400" bIns="25400">
+          <a:bodyPr wrap="square" lIns="25400" tIns="25400" rIns="25400" bIns="25400" anchor="t">
             <a:spAutoFit/>
           </a:bodyPr>
           <a:lstStyle/>
@@ -6183,8 +6219,8 @@
         </p:nvSpPr>
         <p:spPr>
           <a:xfrm>
-            <a:off x="640080" y="5943600"/>
-            <a:ext cx="10972800" cy="731520"/>
+            <a:off x="609600" y="6479772"/>
+            <a:ext cx="10972800" cy="411480"/>
           </a:xfrm>
           <a:prstGeom prst="rect">
             <a:avLst/>
@@ -6215,6 +6251,7 @@
           <a:lstStyle/>
           <a:p>
             <a:pPr algn="ctr"/>
+            <a:endParaRPr/>
           </a:p>
         </p:txBody>
       </p:sp>
@@ -6226,7 +6263,7 @@
         </p:nvSpPr>
         <p:spPr>
           <a:xfrm>
-            <a:off x="822960" y="6080760"/>
+            <a:off x="2064325" y="6546276"/>
             <a:ext cx="10607040" cy="457200"/>
           </a:xfrm>
           <a:prstGeom prst="rect">
@@ -6235,21 +6272,90 @@
           <a:noFill/>
         </p:spPr>
         <p:txBody>
-          <a:bodyPr wrap="square" anchor="t" lIns="25400" rIns="25400" tIns="25400" bIns="25400">
+          <a:bodyPr wrap="square" lIns="25400" tIns="25400" rIns="25400" bIns="25400" anchor="t">
             <a:spAutoFit/>
           </a:bodyPr>
           <a:lstStyle/>
           <a:p>
             <a:pPr algn="l"/>
             <a:r>
-              <a:rPr sz="1600" b="1">
+              <a:rPr sz="1600" b="1" dirty="0">
                 <a:solidFill>
                   <a:srgbClr val="10B981"/>
                 </a:solidFill>
                 <a:latin typeface="Hiragino Mincho ProN"/>
               </a:rPr>
-              <a:t>✅ 正しい認識: コストを差し引くと B 群（回復期）が最高、A 群（急性期）が最低</a:t>
-            </a:r>
+              <a:t>✅ </a:t>
+            </a:r>
+            <a:r>
+              <a:rPr sz="1600" b="1" dirty="0" err="1">
+                <a:solidFill>
+                  <a:srgbClr val="10B981"/>
+                </a:solidFill>
+                <a:latin typeface="Hiragino Mincho ProN"/>
+              </a:rPr>
+              <a:t>正しい認識</a:t>
+            </a:r>
+            <a:r>
+              <a:rPr sz="1600" b="1" dirty="0">
+                <a:solidFill>
+                  <a:srgbClr val="10B981"/>
+                </a:solidFill>
+                <a:latin typeface="Hiragino Mincho ProN"/>
+              </a:rPr>
+              <a:t>: </a:t>
+            </a:r>
+            <a:r>
+              <a:rPr sz="1600" b="1" dirty="0" err="1">
+                <a:solidFill>
+                  <a:srgbClr val="10B981"/>
+                </a:solidFill>
+                <a:latin typeface="Hiragino Mincho ProN"/>
+              </a:rPr>
+              <a:t>コストを差し引くと</a:t>
+            </a:r>
+            <a:r>
+              <a:rPr sz="1600" b="1" dirty="0">
+                <a:solidFill>
+                  <a:srgbClr val="10B981"/>
+                </a:solidFill>
+                <a:latin typeface="Hiragino Mincho ProN"/>
+              </a:rPr>
+              <a:t> B </a:t>
+            </a:r>
+            <a:r>
+              <a:rPr sz="1600" b="1" dirty="0" err="1">
+                <a:solidFill>
+                  <a:srgbClr val="10B981"/>
+                </a:solidFill>
+                <a:latin typeface="Hiragino Mincho ProN"/>
+              </a:rPr>
+              <a:t>群（回復期）が最高、A</a:t>
+            </a:r>
+            <a:r>
+              <a:rPr sz="1600" b="1" dirty="0">
+                <a:solidFill>
+                  <a:srgbClr val="10B981"/>
+                </a:solidFill>
+                <a:latin typeface="Hiragino Mincho ProN"/>
+              </a:rPr>
+              <a:t> </a:t>
+            </a:r>
+            <a:r>
+              <a:rPr sz="1600" b="1" dirty="0" err="1">
+                <a:solidFill>
+                  <a:srgbClr val="10B981"/>
+                </a:solidFill>
+                <a:latin typeface="Hiragino Mincho ProN"/>
+              </a:rPr>
+              <a:t>群（急性期）が最低</a:t>
+            </a:r>
+            <a:endParaRPr sz="1600" b="1" dirty="0">
+              <a:solidFill>
+                <a:srgbClr val="10B981"/>
+              </a:solidFill>
+              <a:latin typeface="Hiragino Mincho ProN"/>
+            </a:endParaRPr>
           </a:p>
         </p:txBody>
       </p:sp>
@@ -6262,7 +6368,7 @@
 </file>
 
 <file path=ppt/slides/slide4.xml><?xml version="1.0" encoding="utf-8"?>
-<p:sld xmlns:a="http://schemas.openxmlformats.org/drawingml/2006/main" xmlns:p="http://schemas.openxmlformats.org/presentationml/2006/main" xmlns:r="http://schemas.openxmlformats.org/officeDocument/2006/relationships">
+<p:sld xmlns:a="http://schemas.openxmlformats.org/drawingml/2006/main" xmlns:r="http://schemas.openxmlformats.org/officeDocument/2006/relationships" xmlns:p="http://schemas.openxmlformats.org/presentationml/2006/main">
   <p:cSld>
     <p:spTree>
       <p:nvGrpSpPr>
@@ -6270,7 +6376,14 @@
         <p:cNvGrpSpPr/>
         <p:nvPr/>
       </p:nvGrpSpPr>
-      <p:grpSpPr/>
+      <p:grpSpPr>
+        <a:xfrm>
+          <a:off x="0" y="0"/>
+          <a:ext cx="0" cy="0"/>
+          <a:chOff x="0" y="0"/>
+          <a:chExt cx="0" cy="0"/>
+        </a:xfrm>
+      </p:grpSpPr>
       <p:sp>
         <p:nvSpPr>
           <p:cNvPr id="2" name="Rectangle 1"/>
@@ -6311,6 +6424,7 @@
           <a:lstStyle/>
           <a:p>
             <a:pPr algn="ctr"/>
+            <a:endParaRPr/>
           </a:p>
         </p:txBody>
       </p:sp>
@@ -6331,7 +6445,7 @@
           <a:noFill/>
         </p:spPr>
         <p:txBody>
-          <a:bodyPr wrap="square" anchor="t" lIns="25400" rIns="25400" tIns="25400" bIns="25400">
+          <a:bodyPr wrap="square" lIns="25400" tIns="25400" rIns="25400" bIns="25400" anchor="t">
             <a:spAutoFit/>
           </a:bodyPr>
           <a:lstStyle/>
@@ -6384,15 +6498,12 @@
           </a:p>
           <a:p>
             <a:pPr algn="l"/>
-            <a:r>
-              <a:rPr sz="800" b="0">
-                <a:solidFill>
-                  <a:srgbClr val="1F2937"/>
-                </a:solidFill>
-                <a:latin typeface="Hiragino Mincho ProN"/>
-              </a:rPr>
-              <a:t/>
-            </a:r>
+            <a:endParaRPr sz="1800" b="1">
+              <a:solidFill>
+                <a:srgbClr val="1F2937"/>
+              </a:solidFill>
+              <a:latin typeface="Hiragino Mincho ProN"/>
+            </a:endParaRPr>
           </a:p>
           <a:p>
             <a:pPr algn="l"/>
@@ -6408,15 +6519,12 @@
           </a:p>
           <a:p>
             <a:pPr algn="l"/>
-            <a:r>
-              <a:rPr sz="1600" b="0">
-                <a:solidFill>
-                  <a:srgbClr val="1F2937"/>
-                </a:solidFill>
-                <a:latin typeface="Hiragino Mincho ProN"/>
-              </a:rPr>
-              <a:t/>
-            </a:r>
+            <a:endParaRPr sz="1800" b="0">
+              <a:solidFill>
+                <a:srgbClr val="1F2937"/>
+              </a:solidFill>
+              <a:latin typeface="Hiragino Mincho ProN"/>
+            </a:endParaRPr>
           </a:p>
           <a:p>
             <a:pPr algn="l"/>
@@ -6508,6 +6616,7 @@
           <a:lstStyle/>
           <a:p>
             <a:pPr algn="ctr"/>
+            <a:endParaRPr/>
           </a:p>
         </p:txBody>
       </p:sp>
@@ -6528,7 +6637,7 @@
           <a:noFill/>
         </p:spPr>
         <p:txBody>
-          <a:bodyPr wrap="square" anchor="t" lIns="25400" rIns="25400" tIns="25400" bIns="25400">
+          <a:bodyPr wrap="square" lIns="25400" tIns="25400" rIns="25400" bIns="25400" anchor="t">
             <a:spAutoFit/>
           </a:bodyPr>
           <a:lstStyle/>
@@ -6555,7 +6664,7 @@
 </file>
 
 <file path=ppt/slides/slide5.xml><?xml version="1.0" encoding="utf-8"?>
-<p:sld xmlns:a="http://schemas.openxmlformats.org/drawingml/2006/main" xmlns:p="http://schemas.openxmlformats.org/presentationml/2006/main" xmlns:r="http://schemas.openxmlformats.org/officeDocument/2006/relationships">
+<p:sld xmlns:a="http://schemas.openxmlformats.org/drawingml/2006/main" xmlns:r="http://schemas.openxmlformats.org/officeDocument/2006/relationships" xmlns:p="http://schemas.openxmlformats.org/presentationml/2006/main">
   <p:cSld>
     <p:spTree>
       <p:nvGrpSpPr>
@@ -6563,7 +6672,14 @@
         <p:cNvGrpSpPr/>
         <p:nvPr/>
       </p:nvGrpSpPr>
-      <p:grpSpPr/>
+      <p:grpSpPr>
+        <a:xfrm>
+          <a:off x="0" y="0"/>
+          <a:ext cx="0" cy="0"/>
+          <a:chOff x="0" y="0"/>
+          <a:chExt cx="0" cy="0"/>
+        </a:xfrm>
+      </p:grpSpPr>
       <p:sp>
         <p:nvSpPr>
           <p:cNvPr id="2" name="Rectangle 1"/>
@@ -6604,6 +6720,7 @@
           <a:lstStyle/>
           <a:p>
             <a:pPr algn="ctr"/>
+            <a:endParaRPr/>
           </a:p>
         </p:txBody>
       </p:sp>
@@ -6624,7 +6741,7 @@
           <a:noFill/>
         </p:spPr>
         <p:txBody>
-          <a:bodyPr wrap="square" anchor="t" lIns="25400" rIns="25400" tIns="25400" bIns="25400">
+          <a:bodyPr wrap="square" lIns="25400" tIns="25400" rIns="25400" bIns="25400" anchor="t">
             <a:spAutoFit/>
           </a:bodyPr>
           <a:lstStyle/>
@@ -6682,6 +6799,7 @@
           <a:lstStyle/>
           <a:p>
             <a:pPr algn="ctr"/>
+            <a:endParaRPr/>
           </a:p>
         </p:txBody>
       </p:sp>
@@ -6702,7 +6820,7 @@
           <a:noFill/>
         </p:spPr>
         <p:txBody>
-          <a:bodyPr wrap="square" anchor="t" lIns="25400" rIns="25400" tIns="25400" bIns="25400">
+          <a:bodyPr wrap="square" lIns="25400" tIns="25400" rIns="25400" bIns="25400" anchor="t">
             <a:spAutoFit/>
           </a:bodyPr>
           <a:lstStyle/>
@@ -6737,7 +6855,7 @@
           <a:noFill/>
         </p:spPr>
         <p:txBody>
-          <a:bodyPr wrap="square" anchor="t" lIns="25400" rIns="25400" tIns="25400" bIns="25400">
+          <a:bodyPr wrap="square" lIns="25400" tIns="25400" rIns="25400" bIns="25400" anchor="t">
             <a:spAutoFit/>
           </a:bodyPr>
           <a:lstStyle/>
@@ -6772,7 +6890,7 @@
           <a:noFill/>
         </p:spPr>
         <p:txBody>
-          <a:bodyPr wrap="square" anchor="t" lIns="25400" rIns="25400" tIns="25400" bIns="25400">
+          <a:bodyPr wrap="square" lIns="25400" tIns="25400" rIns="25400" bIns="25400" anchor="t">
             <a:spAutoFit/>
           </a:bodyPr>
           <a:lstStyle/>
@@ -6830,6 +6948,7 @@
           <a:lstStyle/>
           <a:p>
             <a:pPr algn="ctr"/>
+            <a:endParaRPr/>
           </a:p>
         </p:txBody>
       </p:sp>
@@ -6850,7 +6969,7 @@
           <a:noFill/>
         </p:spPr>
         <p:txBody>
-          <a:bodyPr wrap="square" anchor="t" lIns="25400" rIns="25400" tIns="25400" bIns="25400">
+          <a:bodyPr wrap="square" lIns="25400" tIns="25400" rIns="25400" bIns="25400" anchor="t">
             <a:spAutoFit/>
           </a:bodyPr>
           <a:lstStyle/>
@@ -6885,7 +7004,7 @@
           <a:noFill/>
         </p:spPr>
         <p:txBody>
-          <a:bodyPr wrap="square" anchor="t" lIns="25400" rIns="25400" tIns="25400" bIns="25400">
+          <a:bodyPr wrap="square" lIns="25400" tIns="25400" rIns="25400" bIns="25400" anchor="t">
             <a:spAutoFit/>
           </a:bodyPr>
           <a:lstStyle/>
@@ -6920,7 +7039,7 @@
           <a:noFill/>
         </p:spPr>
         <p:txBody>
-          <a:bodyPr wrap="square" anchor="t" lIns="25400" rIns="25400" tIns="25400" bIns="25400">
+          <a:bodyPr wrap="square" lIns="25400" tIns="25400" rIns="25400" bIns="25400" anchor="t">
             <a:spAutoFit/>
           </a:bodyPr>
           <a:lstStyle/>
@@ -6978,6 +7097,7 @@
           <a:lstStyle/>
           <a:p>
             <a:pPr algn="ctr"/>
+            <a:endParaRPr/>
           </a:p>
         </p:txBody>
       </p:sp>
@@ -6998,7 +7118,7 @@
           <a:noFill/>
         </p:spPr>
         <p:txBody>
-          <a:bodyPr wrap="square" anchor="t" lIns="25400" rIns="25400" tIns="25400" bIns="25400">
+          <a:bodyPr wrap="square" lIns="25400" tIns="25400" rIns="25400" bIns="25400" anchor="t">
             <a:spAutoFit/>
           </a:bodyPr>
           <a:lstStyle/>
@@ -7033,7 +7153,7 @@
           <a:noFill/>
         </p:spPr>
         <p:txBody>
-          <a:bodyPr wrap="square" anchor="t" lIns="25400" rIns="25400" tIns="25400" bIns="25400">
+          <a:bodyPr wrap="square" lIns="25400" tIns="25400" rIns="25400" bIns="25400" anchor="t">
             <a:spAutoFit/>
           </a:bodyPr>
           <a:lstStyle/>
@@ -7068,7 +7188,7 @@
           <a:noFill/>
         </p:spPr>
         <p:txBody>
-          <a:bodyPr wrap="square" anchor="t" lIns="25400" rIns="25400" tIns="25400" bIns="25400">
+          <a:bodyPr wrap="square" lIns="25400" tIns="25400" rIns="25400" bIns="25400" anchor="t">
             <a:spAutoFit/>
           </a:bodyPr>
           <a:lstStyle/>
@@ -7126,6 +7246,7 @@
           <a:lstStyle/>
           <a:p>
             <a:pPr algn="ctr"/>
+            <a:endParaRPr/>
           </a:p>
         </p:txBody>
       </p:sp>
@@ -7146,7 +7267,7 @@
           <a:noFill/>
         </p:spPr>
         <p:txBody>
-          <a:bodyPr wrap="square" anchor="t" lIns="25400" rIns="25400" tIns="25400" bIns="25400">
+          <a:bodyPr wrap="square" lIns="25400" tIns="25400" rIns="25400" bIns="25400" anchor="t">
             <a:spAutoFit/>
           </a:bodyPr>
           <a:lstStyle/>
@@ -7181,7 +7302,7 @@
           <a:noFill/>
         </p:spPr>
         <p:txBody>
-          <a:bodyPr wrap="square" anchor="t" lIns="25400" rIns="25400" tIns="25400" bIns="25400">
+          <a:bodyPr wrap="square" lIns="25400" tIns="25400" rIns="25400" bIns="25400" anchor="t">
             <a:spAutoFit/>
           </a:bodyPr>
           <a:lstStyle/>
@@ -7216,7 +7337,7 @@
           <a:noFill/>
         </p:spPr>
         <p:txBody>
-          <a:bodyPr wrap="square" anchor="t" lIns="25400" rIns="25400" tIns="25400" bIns="25400">
+          <a:bodyPr wrap="square" lIns="25400" tIns="25400" rIns="25400" bIns="25400" anchor="t">
             <a:spAutoFit/>
           </a:bodyPr>
           <a:lstStyle/>
@@ -7251,7 +7372,7 @@
           <a:noFill/>
         </p:spPr>
         <p:txBody>
-          <a:bodyPr wrap="square" anchor="t" lIns="25400" rIns="25400" tIns="25400" bIns="25400">
+          <a:bodyPr wrap="square" lIns="25400" tIns="25400" rIns="25400" bIns="25400" anchor="t">
             <a:spAutoFit/>
           </a:bodyPr>
           <a:lstStyle/>
@@ -7286,7 +7407,7 @@
           <a:noFill/>
         </p:spPr>
         <p:txBody>
-          <a:bodyPr wrap="square" anchor="t" lIns="25400" rIns="25400" tIns="25400" bIns="25400">
+          <a:bodyPr wrap="square" lIns="25400" tIns="25400" rIns="25400" bIns="25400" anchor="t">
             <a:spAutoFit/>
           </a:bodyPr>
           <a:lstStyle/>
@@ -7344,6 +7465,7 @@
           <a:lstStyle/>
           <a:p>
             <a:pPr algn="ctr"/>
+            <a:endParaRPr/>
           </a:p>
         </p:txBody>
       </p:sp>
@@ -7415,7 +7537,7 @@
 </file>
 
 <file path=ppt/slides/slide6.xml><?xml version="1.0" encoding="utf-8"?>
-<p:sld xmlns:a="http://schemas.openxmlformats.org/drawingml/2006/main" xmlns:p="http://schemas.openxmlformats.org/presentationml/2006/main" xmlns:r="http://schemas.openxmlformats.org/officeDocument/2006/relationships">
+<p:sld xmlns:a="http://schemas.openxmlformats.org/drawingml/2006/main" xmlns:r="http://schemas.openxmlformats.org/officeDocument/2006/relationships" xmlns:p="http://schemas.openxmlformats.org/presentationml/2006/main">
   <p:cSld>
     <p:spTree>
       <p:nvGrpSpPr>
@@ -7423,7 +7545,14 @@
         <p:cNvGrpSpPr/>
         <p:nvPr/>
       </p:nvGrpSpPr>
-      <p:grpSpPr/>
+      <p:grpSpPr>
+        <a:xfrm>
+          <a:off x="0" y="0"/>
+          <a:ext cx="0" cy="0"/>
+          <a:chOff x="0" y="0"/>
+          <a:chExt cx="0" cy="0"/>
+        </a:xfrm>
+      </p:grpSpPr>
       <p:sp>
         <p:nvSpPr>
           <p:cNvPr id="2" name="Rectangle 1"/>
@@ -7464,6 +7593,7 @@
           <a:lstStyle/>
           <a:p>
             <a:pPr algn="ctr"/>
+            <a:endParaRPr/>
           </a:p>
         </p:txBody>
       </p:sp>
@@ -7484,7 +7614,7 @@
           <a:noFill/>
         </p:spPr>
         <p:txBody>
-          <a:bodyPr wrap="square" anchor="t" lIns="25400" rIns="25400" tIns="25400" bIns="25400">
+          <a:bodyPr wrap="square" lIns="25400" tIns="25400" rIns="25400" bIns="25400" anchor="t">
             <a:spAutoFit/>
           </a:bodyPr>
           <a:lstStyle/>
@@ -7519,7 +7649,7 @@
           <a:noFill/>
         </p:spPr>
         <p:txBody>
-          <a:bodyPr wrap="square" anchor="t" lIns="25400" rIns="25400" tIns="25400" bIns="25400">
+          <a:bodyPr wrap="square" lIns="25400" tIns="25400" rIns="25400" bIns="25400" anchor="t">
             <a:spAutoFit/>
           </a:bodyPr>
           <a:lstStyle/>
@@ -7577,6 +7707,7 @@
           <a:lstStyle/>
           <a:p>
             <a:pPr algn="ctr"/>
+            <a:endParaRPr/>
           </a:p>
         </p:txBody>
       </p:sp>
@@ -7597,7 +7728,7 @@
           <a:noFill/>
         </p:spPr>
         <p:txBody>
-          <a:bodyPr wrap="square" anchor="t" lIns="25400" rIns="25400" tIns="25400" bIns="25400">
+          <a:bodyPr wrap="square" lIns="25400" tIns="25400" rIns="25400" bIns="25400" anchor="t">
             <a:spAutoFit/>
           </a:bodyPr>
           <a:lstStyle/>
@@ -7632,7 +7763,7 @@
           <a:noFill/>
         </p:spPr>
         <p:txBody>
-          <a:bodyPr wrap="square" anchor="t" lIns="25400" rIns="25400" tIns="25400" bIns="25400">
+          <a:bodyPr wrap="square" lIns="25400" tIns="25400" rIns="25400" bIns="25400" anchor="t">
             <a:spAutoFit/>
           </a:bodyPr>
           <a:lstStyle/>
@@ -7667,7 +7798,7 @@
           <a:noFill/>
         </p:spPr>
         <p:txBody>
-          <a:bodyPr wrap="square" anchor="t" lIns="25400" rIns="25400" tIns="25400" bIns="25400">
+          <a:bodyPr wrap="square" lIns="25400" tIns="25400" rIns="25400" bIns="25400" anchor="t">
             <a:spAutoFit/>
           </a:bodyPr>
           <a:lstStyle/>
@@ -7702,7 +7833,7 @@
           <a:noFill/>
         </p:spPr>
         <p:txBody>
-          <a:bodyPr wrap="square" anchor="t" lIns="25400" rIns="25400" tIns="25400" bIns="25400">
+          <a:bodyPr wrap="square" lIns="25400" tIns="25400" rIns="25400" bIns="25400" anchor="t">
             <a:spAutoFit/>
           </a:bodyPr>
           <a:lstStyle/>
@@ -7737,7 +7868,7 @@
           <a:noFill/>
         </p:spPr>
         <p:txBody>
-          <a:bodyPr wrap="square" anchor="t" lIns="25400" rIns="25400" tIns="25400" bIns="25400">
+          <a:bodyPr wrap="square" lIns="25400" tIns="25400" rIns="25400" bIns="25400" anchor="t">
             <a:spAutoFit/>
           </a:bodyPr>
           <a:lstStyle/>
@@ -7772,7 +7903,7 @@
           <a:noFill/>
         </p:spPr>
         <p:txBody>
-          <a:bodyPr wrap="square" anchor="t" lIns="25400" rIns="25400" tIns="25400" bIns="25400">
+          <a:bodyPr wrap="square" lIns="25400" tIns="25400" rIns="25400" bIns="25400" anchor="t">
             <a:spAutoFit/>
           </a:bodyPr>
           <a:lstStyle/>
@@ -7830,6 +7961,7 @@
           <a:lstStyle/>
           <a:p>
             <a:pPr algn="ctr"/>
+            <a:endParaRPr/>
           </a:p>
         </p:txBody>
       </p:sp>
@@ -7850,7 +7982,7 @@
           <a:noFill/>
         </p:spPr>
         <p:txBody>
-          <a:bodyPr wrap="square" anchor="t" lIns="25400" rIns="25400" tIns="25400" bIns="25400">
+          <a:bodyPr wrap="square" lIns="25400" tIns="25400" rIns="25400" bIns="25400" anchor="t">
             <a:spAutoFit/>
           </a:bodyPr>
           <a:lstStyle/>
@@ -7885,7 +8017,7 @@
           <a:noFill/>
         </p:spPr>
         <p:txBody>
-          <a:bodyPr wrap="square" anchor="t" lIns="25400" rIns="25400" tIns="25400" bIns="25400">
+          <a:bodyPr wrap="square" lIns="25400" tIns="25400" rIns="25400" bIns="25400" anchor="t">
             <a:spAutoFit/>
           </a:bodyPr>
           <a:lstStyle/>
@@ -7920,7 +8052,7 @@
           <a:noFill/>
         </p:spPr>
         <p:txBody>
-          <a:bodyPr wrap="square" anchor="t" lIns="25400" rIns="25400" tIns="25400" bIns="25400">
+          <a:bodyPr wrap="square" lIns="25400" tIns="25400" rIns="25400" bIns="25400" anchor="t">
             <a:spAutoFit/>
           </a:bodyPr>
           <a:lstStyle/>
@@ -7955,7 +8087,7 @@
           <a:noFill/>
         </p:spPr>
         <p:txBody>
-          <a:bodyPr wrap="square" anchor="t" lIns="25400" rIns="25400" tIns="25400" bIns="25400">
+          <a:bodyPr wrap="square" lIns="25400" tIns="25400" rIns="25400" bIns="25400" anchor="t">
             <a:spAutoFit/>
           </a:bodyPr>
           <a:lstStyle/>
@@ -7990,7 +8122,7 @@
           <a:noFill/>
         </p:spPr>
         <p:txBody>
-          <a:bodyPr wrap="square" anchor="t" lIns="25400" rIns="25400" tIns="25400" bIns="25400">
+          <a:bodyPr wrap="square" lIns="25400" tIns="25400" rIns="25400" bIns="25400" anchor="t">
             <a:spAutoFit/>
           </a:bodyPr>
           <a:lstStyle/>
@@ -8025,7 +8157,7 @@
           <a:noFill/>
         </p:spPr>
         <p:txBody>
-          <a:bodyPr wrap="square" anchor="t" lIns="25400" rIns="25400" tIns="25400" bIns="25400">
+          <a:bodyPr wrap="square" lIns="25400" tIns="25400" rIns="25400" bIns="25400" anchor="t">
             <a:spAutoFit/>
           </a:bodyPr>
           <a:lstStyle/>
@@ -8083,6 +8215,7 @@
           <a:lstStyle/>
           <a:p>
             <a:pPr algn="ctr"/>
+            <a:endParaRPr/>
           </a:p>
         </p:txBody>
       </p:sp>
@@ -8103,7 +8236,7 @@
           <a:noFill/>
         </p:spPr>
         <p:txBody>
-          <a:bodyPr wrap="square" anchor="t" lIns="25400" rIns="25400" tIns="25400" bIns="25400">
+          <a:bodyPr wrap="square" lIns="25400" tIns="25400" rIns="25400" bIns="25400" anchor="t">
             <a:spAutoFit/>
           </a:bodyPr>
           <a:lstStyle/>
@@ -8138,7 +8271,7 @@
           <a:noFill/>
         </p:spPr>
         <p:txBody>
-          <a:bodyPr wrap="square" anchor="t" lIns="25400" rIns="25400" tIns="25400" bIns="25400">
+          <a:bodyPr wrap="square" lIns="25400" tIns="25400" rIns="25400" bIns="25400" anchor="t">
             <a:spAutoFit/>
           </a:bodyPr>
           <a:lstStyle/>
@@ -8173,7 +8306,7 @@
           <a:noFill/>
         </p:spPr>
         <p:txBody>
-          <a:bodyPr wrap="square" anchor="t" lIns="25400" rIns="25400" tIns="25400" bIns="25400">
+          <a:bodyPr wrap="square" lIns="25400" tIns="25400" rIns="25400" bIns="25400" anchor="t">
             <a:spAutoFit/>
           </a:bodyPr>
           <a:lstStyle/>
@@ -8208,7 +8341,7 @@
           <a:noFill/>
         </p:spPr>
         <p:txBody>
-          <a:bodyPr wrap="square" anchor="t" lIns="25400" rIns="25400" tIns="25400" bIns="25400">
+          <a:bodyPr wrap="square" lIns="25400" tIns="25400" rIns="25400" bIns="25400" anchor="t">
             <a:spAutoFit/>
           </a:bodyPr>
           <a:lstStyle/>
@@ -8243,7 +8376,7 @@
           <a:noFill/>
         </p:spPr>
         <p:txBody>
-          <a:bodyPr wrap="square" anchor="t" lIns="25400" rIns="25400" tIns="25400" bIns="25400">
+          <a:bodyPr wrap="square" lIns="25400" tIns="25400" rIns="25400" bIns="25400" anchor="t">
             <a:spAutoFit/>
           </a:bodyPr>
           <a:lstStyle/>
@@ -8278,7 +8411,7 @@
           <a:noFill/>
         </p:spPr>
         <p:txBody>
-          <a:bodyPr wrap="square" anchor="t" lIns="25400" rIns="25400" tIns="25400" bIns="25400">
+          <a:bodyPr wrap="square" lIns="25400" tIns="25400" rIns="25400" bIns="25400" anchor="t">
             <a:spAutoFit/>
           </a:bodyPr>
           <a:lstStyle/>
@@ -8336,6 +8469,7 @@
           <a:lstStyle/>
           <a:p>
             <a:pPr algn="ctr"/>
+            <a:endParaRPr/>
           </a:p>
         </p:txBody>
       </p:sp>
@@ -8407,7 +8541,7 @@
 </file>
 
 <file path=ppt/slides/slide7.xml><?xml version="1.0" encoding="utf-8"?>
-<p:sld xmlns:a="http://schemas.openxmlformats.org/drawingml/2006/main" xmlns:p="http://schemas.openxmlformats.org/presentationml/2006/main" xmlns:r="http://schemas.openxmlformats.org/officeDocument/2006/relationships">
+<p:sld xmlns:a="http://schemas.openxmlformats.org/drawingml/2006/main" xmlns:r="http://schemas.openxmlformats.org/officeDocument/2006/relationships" xmlns:p="http://schemas.openxmlformats.org/presentationml/2006/main">
   <p:cSld>
     <p:spTree>
       <p:nvGrpSpPr>
@@ -8415,7 +8549,14 @@
         <p:cNvGrpSpPr/>
         <p:nvPr/>
       </p:nvGrpSpPr>
-      <p:grpSpPr/>
+      <p:grpSpPr>
+        <a:xfrm>
+          <a:off x="0" y="0"/>
+          <a:ext cx="0" cy="0"/>
+          <a:chOff x="0" y="0"/>
+          <a:chExt cx="0" cy="0"/>
+        </a:xfrm>
+      </p:grpSpPr>
       <p:sp>
         <p:nvSpPr>
           <p:cNvPr id="2" name="Rectangle 1"/>
@@ -8456,6 +8597,7 @@
           <a:lstStyle/>
           <a:p>
             <a:pPr algn="ctr"/>
+            <a:endParaRPr/>
           </a:p>
         </p:txBody>
       </p:sp>
@@ -8476,7 +8618,7 @@
           <a:noFill/>
         </p:spPr>
         <p:txBody>
-          <a:bodyPr wrap="square" anchor="t" lIns="25400" rIns="25400" tIns="25400" bIns="25400">
+          <a:bodyPr wrap="square" lIns="25400" tIns="25400" rIns="25400" bIns="25400" anchor="t">
             <a:spAutoFit/>
           </a:bodyPr>
           <a:lstStyle/>
@@ -8526,8 +8668,8 @@
         </p:nvSpPr>
         <p:spPr>
           <a:xfrm>
-            <a:off x="457200" y="5852160"/>
-            <a:ext cx="11247120" cy="822960"/>
+            <a:off x="457200" y="6137572"/>
+            <a:ext cx="11247120" cy="634534"/>
           </a:xfrm>
           <a:prstGeom prst="rect">
             <a:avLst/>
@@ -8558,6 +8700,7 @@
           <a:lstStyle/>
           <a:p>
             <a:pPr algn="ctr"/>
+            <a:endParaRPr/>
           </a:p>
         </p:txBody>
       </p:sp>
@@ -8569,8 +8712,8 @@
         </p:nvSpPr>
         <p:spPr>
           <a:xfrm>
-            <a:off x="640080" y="5943600"/>
-            <a:ext cx="10972800" cy="731520"/>
+            <a:off x="1246909" y="6137570"/>
+            <a:ext cx="10335338" cy="492443"/>
           </a:xfrm>
           <a:prstGeom prst="rect">
             <a:avLst/>
@@ -8585,25 +8728,202 @@
           <a:p>
             <a:pPr algn="l"/>
             <a:r>
-              <a:rPr sz="1400" b="1">
+              <a:rPr sz="1400" b="1" dirty="0">
                 <a:solidFill>
                   <a:srgbClr val="10B981"/>
                 </a:solidFill>
                 <a:latin typeface="Hiragino Mincho ProN"/>
               </a:rPr>
-              <a:t>✅ コストが ±20% 動いても、B 群 ＞ C 群 ＞ A 群 の順位は揺らがず</a:t>
-            </a:r>
-          </a:p>
-          <a:p>
-            <a:pPr algn="l"/>
-            <a:r>
-              <a:rPr sz="1200" b="0">
+              <a:t>✅ </a:t>
+            </a:r>
+            <a:r>
+              <a:rPr sz="1400" b="1" dirty="0" err="1">
                 <a:solidFill>
                   <a:srgbClr val="10B981"/>
                 </a:solidFill>
                 <a:latin typeface="Hiragino Mincho ProN"/>
               </a:rPr>
-              <a:t>→ 結論「B 群中心管理が運営貢献を最大化」の方向性は精度に依らず確固。Stage 2 で当院 DPC データ検証予定。</a:t>
+              <a:t>コストが</a:t>
+            </a:r>
+            <a:r>
+              <a:rPr sz="1400" b="1" dirty="0">
+                <a:solidFill>
+                  <a:srgbClr val="10B981"/>
+                </a:solidFill>
+                <a:latin typeface="Hiragino Mincho ProN"/>
+              </a:rPr>
+              <a:t> ±20% </a:t>
+            </a:r>
+            <a:r>
+              <a:rPr sz="1400" b="1" dirty="0" err="1">
+                <a:solidFill>
+                  <a:srgbClr val="10B981"/>
+                </a:solidFill>
+                <a:latin typeface="Hiragino Mincho ProN"/>
+              </a:rPr>
+              <a:t>動いても、B</a:t>
+            </a:r>
+            <a:r>
+              <a:rPr sz="1400" b="1" dirty="0">
+                <a:solidFill>
+                  <a:srgbClr val="10B981"/>
+                </a:solidFill>
+                <a:latin typeface="Hiragino Mincho ProN"/>
+              </a:rPr>
+              <a:t> </a:t>
+            </a:r>
+            <a:r>
+              <a:rPr sz="1400" b="1" dirty="0" err="1">
+                <a:solidFill>
+                  <a:srgbClr val="10B981"/>
+                </a:solidFill>
+                <a:latin typeface="Hiragino Mincho ProN"/>
+              </a:rPr>
+              <a:t>群</a:t>
+            </a:r>
+            <a:r>
+              <a:rPr sz="1400" b="1" dirty="0">
+                <a:solidFill>
+                  <a:srgbClr val="10B981"/>
+                </a:solidFill>
+                <a:latin typeface="Hiragino Mincho ProN"/>
+              </a:rPr>
+              <a:t> ＞ C </a:t>
+            </a:r>
+            <a:r>
+              <a:rPr sz="1400" b="1" dirty="0" err="1">
+                <a:solidFill>
+                  <a:srgbClr val="10B981"/>
+                </a:solidFill>
+                <a:latin typeface="Hiragino Mincho ProN"/>
+              </a:rPr>
+              <a:t>群</a:t>
+            </a:r>
+            <a:r>
+              <a:rPr sz="1400" b="1" dirty="0">
+                <a:solidFill>
+                  <a:srgbClr val="10B981"/>
+                </a:solidFill>
+                <a:latin typeface="Hiragino Mincho ProN"/>
+              </a:rPr>
+              <a:t> ＞ A </a:t>
+            </a:r>
+            <a:r>
+              <a:rPr sz="1400" b="1" dirty="0" err="1">
+                <a:solidFill>
+                  <a:srgbClr val="10B981"/>
+                </a:solidFill>
+                <a:latin typeface="Hiragino Mincho ProN"/>
+              </a:rPr>
+              <a:t>群</a:t>
+            </a:r>
+            <a:r>
+              <a:rPr sz="1400" b="1" dirty="0">
+                <a:solidFill>
+                  <a:srgbClr val="10B981"/>
+                </a:solidFill>
+                <a:latin typeface="Hiragino Mincho ProN"/>
+              </a:rPr>
+              <a:t> </a:t>
+            </a:r>
+            <a:r>
+              <a:rPr sz="1400" b="1" dirty="0" err="1">
+                <a:solidFill>
+                  <a:srgbClr val="10B981"/>
+                </a:solidFill>
+                <a:latin typeface="Hiragino Mincho ProN"/>
+              </a:rPr>
+              <a:t>の順位は揺らがず</a:t>
+            </a:r>
+            <a:endParaRPr sz="1400" b="1" dirty="0">
+              <a:solidFill>
+                <a:srgbClr val="10B981"/>
+              </a:solidFill>
+              <a:latin typeface="Hiragino Mincho ProN"/>
+            </a:endParaRPr>
+          </a:p>
+          <a:p>
+            <a:pPr algn="l"/>
+            <a:r>
+              <a:rPr sz="1200" b="0" dirty="0">
+                <a:solidFill>
+                  <a:srgbClr val="10B981"/>
+                </a:solidFill>
+                <a:latin typeface="Hiragino Mincho ProN"/>
+              </a:rPr>
+              <a:t>→ </a:t>
+            </a:r>
+            <a:r>
+              <a:rPr sz="1200" b="0" dirty="0" err="1">
+                <a:solidFill>
+                  <a:srgbClr val="10B981"/>
+                </a:solidFill>
+                <a:latin typeface="Hiragino Mincho ProN"/>
+              </a:rPr>
+              <a:t>結論「B</a:t>
+            </a:r>
+            <a:r>
+              <a:rPr sz="1200" b="0" dirty="0">
+                <a:solidFill>
+                  <a:srgbClr val="10B981"/>
+                </a:solidFill>
+                <a:latin typeface="Hiragino Mincho ProN"/>
+              </a:rPr>
+              <a:t> </a:t>
+            </a:r>
+            <a:r>
+              <a:rPr sz="1200" b="0" dirty="0" err="1">
+                <a:solidFill>
+                  <a:srgbClr val="10B981"/>
+                </a:solidFill>
+                <a:latin typeface="Hiragino Mincho ProN"/>
+              </a:rPr>
+              <a:t>群中心管理が運営貢献を最大化」の方向性は精度に依らず確固。Stage</a:t>
+            </a:r>
+            <a:r>
+              <a:rPr sz="1200" b="0" dirty="0">
+                <a:solidFill>
+                  <a:srgbClr val="10B981"/>
+                </a:solidFill>
+                <a:latin typeface="Hiragino Mincho ProN"/>
+              </a:rPr>
+              <a:t> 2 </a:t>
+            </a:r>
+            <a:r>
+              <a:rPr sz="1200" b="0" dirty="0" err="1">
+                <a:solidFill>
+                  <a:srgbClr val="10B981"/>
+                </a:solidFill>
+                <a:latin typeface="Hiragino Mincho ProN"/>
+              </a:rPr>
+              <a:t>で当院</a:t>
+            </a:r>
+            <a:r>
+              <a:rPr sz="1200" b="0" dirty="0">
+                <a:solidFill>
+                  <a:srgbClr val="10B981"/>
+                </a:solidFill>
+                <a:latin typeface="Hiragino Mincho ProN"/>
+              </a:rPr>
+              <a:t> DPC </a:t>
+            </a:r>
+            <a:r>
+              <a:rPr sz="1200" b="0" dirty="0" err="1">
+                <a:solidFill>
+                  <a:srgbClr val="10B981"/>
+                </a:solidFill>
+                <a:latin typeface="Hiragino Mincho ProN"/>
+              </a:rPr>
+              <a:t>データ検証予定</a:t>
+            </a:r>
+            <a:r>
+              <a:rPr sz="1200" b="0" dirty="0">
+                <a:solidFill>
+                  <a:srgbClr val="10B981"/>
+                </a:solidFill>
+                <a:latin typeface="Hiragino Mincho ProN"/>
+              </a:rPr>
+              <a:t>。</a:t>
             </a:r>
           </a:p>
         </p:txBody>
@@ -8617,7 +8937,7 @@
 </file>
 
 <file path=ppt/slides/slide8.xml><?xml version="1.0" encoding="utf-8"?>
-<p:sld xmlns:a="http://schemas.openxmlformats.org/drawingml/2006/main" xmlns:p="http://schemas.openxmlformats.org/presentationml/2006/main" xmlns:r="http://schemas.openxmlformats.org/officeDocument/2006/relationships">
+<p:sld xmlns:a="http://schemas.openxmlformats.org/drawingml/2006/main" xmlns:r="http://schemas.openxmlformats.org/officeDocument/2006/relationships" xmlns:p="http://schemas.openxmlformats.org/presentationml/2006/main">
   <p:cSld>
     <p:spTree>
       <p:nvGrpSpPr>
@@ -8625,7 +8945,14 @@
         <p:cNvGrpSpPr/>
         <p:nvPr/>
       </p:nvGrpSpPr>
-      <p:grpSpPr/>
+      <p:grpSpPr>
+        <a:xfrm>
+          <a:off x="0" y="0"/>
+          <a:ext cx="0" cy="0"/>
+          <a:chOff x="0" y="0"/>
+          <a:chExt cx="0" cy="0"/>
+        </a:xfrm>
+      </p:grpSpPr>
       <p:sp>
         <p:nvSpPr>
           <p:cNvPr id="2" name="Rectangle 1"/>
@@ -8666,6 +8993,7 @@
           <a:lstStyle/>
           <a:p>
             <a:pPr algn="ctr"/>
+            <a:endParaRPr/>
           </a:p>
         </p:txBody>
       </p:sp>
@@ -8686,7 +9014,7 @@
           <a:noFill/>
         </p:spPr>
         <p:txBody>
-          <a:bodyPr wrap="square" anchor="t" lIns="25400" rIns="25400" tIns="25400" bIns="25400">
+          <a:bodyPr wrap="square" lIns="25400" tIns="25400" rIns="25400" bIns="25400" anchor="t">
             <a:spAutoFit/>
           </a:bodyPr>
           <a:lstStyle/>
@@ -8737,7 +9065,7 @@
 </file>
 
 <file path=ppt/slides/slide9.xml><?xml version="1.0" encoding="utf-8"?>
-<p:sld xmlns:a="http://schemas.openxmlformats.org/drawingml/2006/main" xmlns:p="http://schemas.openxmlformats.org/presentationml/2006/main" xmlns:r="http://schemas.openxmlformats.org/officeDocument/2006/relationships">
+<p:sld xmlns:a="http://schemas.openxmlformats.org/drawingml/2006/main" xmlns:r="http://schemas.openxmlformats.org/officeDocument/2006/relationships" xmlns:p="http://schemas.openxmlformats.org/presentationml/2006/main">
   <p:cSld>
     <p:spTree>
       <p:nvGrpSpPr>
@@ -8745,7 +9073,14 @@
         <p:cNvGrpSpPr/>
         <p:nvPr/>
       </p:nvGrpSpPr>
-      <p:grpSpPr/>
+      <p:grpSpPr>
+        <a:xfrm>
+          <a:off x="0" y="0"/>
+          <a:ext cx="0" cy="0"/>
+          <a:chOff x="0" y="0"/>
+          <a:chExt cx="0" cy="0"/>
+        </a:xfrm>
+      </p:grpSpPr>
       <p:sp>
         <p:nvSpPr>
           <p:cNvPr id="2" name="Rectangle 1"/>
@@ -8786,6 +9121,7 @@
           <a:lstStyle/>
           <a:p>
             <a:pPr algn="ctr"/>
+            <a:endParaRPr/>
           </a:p>
         </p:txBody>
       </p:sp>
@@ -8806,7 +9142,7 @@
           <a:noFill/>
         </p:spPr>
         <p:txBody>
-          <a:bodyPr wrap="square" anchor="t" lIns="25400" rIns="25400" tIns="25400" bIns="25400">
+          <a:bodyPr wrap="square" lIns="25400" tIns="25400" rIns="25400" bIns="25400" anchor="t">
             <a:spAutoFit/>
           </a:bodyPr>
           <a:lstStyle/>
@@ -8840,7 +9176,7 @@
         </p:blipFill>
         <p:spPr>
           <a:xfrm>
-            <a:off x="640080" y="1097280"/>
+            <a:off x="655167" y="914400"/>
             <a:ext cx="10881360" cy="7225801"/>
           </a:xfrm>
           <a:prstGeom prst="rect">
